--- a/docs/plots/carbo/jx_carbo_linsubhr_dosedisc_akikdigo.pptx
+++ b/docs/plots/carbo/jx_carbo_linsubhr_dosedisc_akikdigo.pptx
@@ -3132,533 +3132,530 @@
           <p:spPr>
             <a:xfrm>
               <a:off x="1172049" y="1896563"/>
-              <a:ext cx="7090630" cy="3548147"/>
+              <a:ext cx="7090630" cy="3558663"/>
             </a:xfrm>
             <a:custGeom>
               <a:avLst/>
               <a:pathLst>
-                <a:path w="7090630" h="3548147">
+                <a:path w="7090630" h="3558663">
                   <a:moveTo>
-                    <a:pt x="0" y="2850710"/>
+                    <a:pt x="0" y="2382367"/>
                   </a:moveTo>
                   <a:lnTo>
-                    <a:pt x="71622" y="2849181"/>
-                  </a:lnTo>
-                  <a:lnTo>
-                    <a:pt x="143245" y="2847650"/>
-                  </a:lnTo>
-                  <a:lnTo>
-                    <a:pt x="214867" y="2846115"/>
-                  </a:lnTo>
-                  <a:lnTo>
-                    <a:pt x="286490" y="2844578"/>
-                  </a:lnTo>
-                  <a:lnTo>
-                    <a:pt x="358112" y="2843038"/>
-                  </a:lnTo>
-                  <a:lnTo>
-                    <a:pt x="429735" y="2841494"/>
-                  </a:lnTo>
-                  <a:lnTo>
-                    <a:pt x="501357" y="2839948"/>
-                  </a:lnTo>
-                  <a:lnTo>
-                    <a:pt x="572980" y="2838399"/>
-                  </a:lnTo>
-                  <a:lnTo>
-                    <a:pt x="644602" y="2836847"/>
-                  </a:lnTo>
-                  <a:lnTo>
-                    <a:pt x="716225" y="2835292"/>
-                  </a:lnTo>
-                  <a:lnTo>
-                    <a:pt x="787847" y="2833734"/>
-                  </a:lnTo>
-                  <a:lnTo>
-                    <a:pt x="859470" y="2832173"/>
-                  </a:lnTo>
-                  <a:lnTo>
-                    <a:pt x="931092" y="2830609"/>
-                  </a:lnTo>
-                  <a:lnTo>
-                    <a:pt x="1002715" y="2829043"/>
-                  </a:lnTo>
-                  <a:lnTo>
-                    <a:pt x="1074337" y="2827473"/>
-                  </a:lnTo>
-                  <a:lnTo>
-                    <a:pt x="1145960" y="2825900"/>
-                  </a:lnTo>
-                  <a:lnTo>
-                    <a:pt x="1217582" y="2824324"/>
-                  </a:lnTo>
-                  <a:lnTo>
-                    <a:pt x="1289205" y="2822745"/>
-                  </a:lnTo>
-                  <a:lnTo>
-                    <a:pt x="1360827" y="2821163"/>
-                  </a:lnTo>
-                  <a:lnTo>
-                    <a:pt x="1432450" y="2819578"/>
-                  </a:lnTo>
-                  <a:lnTo>
-                    <a:pt x="1504073" y="2817990"/>
-                  </a:lnTo>
-                  <a:lnTo>
-                    <a:pt x="1575695" y="2816399"/>
-                  </a:lnTo>
-                  <a:lnTo>
-                    <a:pt x="1647318" y="2814805"/>
-                  </a:lnTo>
-                  <a:lnTo>
-                    <a:pt x="1718940" y="2813208"/>
-                  </a:lnTo>
-                  <a:lnTo>
-                    <a:pt x="1790563" y="2811608"/>
-                  </a:lnTo>
-                  <a:lnTo>
-                    <a:pt x="1862185" y="2810005"/>
-                  </a:lnTo>
-                  <a:lnTo>
-                    <a:pt x="1933808" y="2808399"/>
-                  </a:lnTo>
-                  <a:lnTo>
-                    <a:pt x="2005430" y="2806790"/>
-                  </a:lnTo>
-                  <a:lnTo>
-                    <a:pt x="2077053" y="2805178"/>
-                  </a:lnTo>
-                  <a:lnTo>
-                    <a:pt x="2148675" y="2803562"/>
-                  </a:lnTo>
-                  <a:lnTo>
-                    <a:pt x="2220298" y="2801944"/>
-                  </a:lnTo>
-                  <a:lnTo>
-                    <a:pt x="2291920" y="2800322"/>
-                  </a:lnTo>
-                  <a:lnTo>
-                    <a:pt x="2363543" y="2798698"/>
-                  </a:lnTo>
-                  <a:lnTo>
-                    <a:pt x="2435165" y="2797070"/>
-                  </a:lnTo>
-                  <a:lnTo>
-                    <a:pt x="2506788" y="2795439"/>
-                  </a:lnTo>
-                  <a:lnTo>
-                    <a:pt x="2578410" y="2793805"/>
-                  </a:lnTo>
-                  <a:lnTo>
-                    <a:pt x="2650033" y="2792168"/>
-                  </a:lnTo>
-                  <a:lnTo>
-                    <a:pt x="2721655" y="2790528"/>
-                  </a:lnTo>
-                  <a:lnTo>
-                    <a:pt x="2793278" y="2788885"/>
-                  </a:lnTo>
-                  <a:lnTo>
-                    <a:pt x="2864901" y="2787238"/>
-                  </a:lnTo>
-                  <a:lnTo>
-                    <a:pt x="2936523" y="2785589"/>
-                  </a:lnTo>
-                  <a:lnTo>
-                    <a:pt x="3008146" y="2783936"/>
-                  </a:lnTo>
-                  <a:lnTo>
-                    <a:pt x="3079768" y="2764864"/>
-                  </a:lnTo>
-                  <a:lnTo>
-                    <a:pt x="3151391" y="2719573"/>
-                  </a:lnTo>
-                  <a:lnTo>
-                    <a:pt x="3223013" y="2671971"/>
-                  </a:lnTo>
-                  <a:lnTo>
-                    <a:pt x="3294636" y="2621941"/>
-                  </a:lnTo>
-                  <a:lnTo>
-                    <a:pt x="3366258" y="2569358"/>
-                  </a:lnTo>
-                  <a:lnTo>
-                    <a:pt x="3437881" y="2514093"/>
-                  </a:lnTo>
-                  <a:lnTo>
-                    <a:pt x="3509503" y="2456008"/>
-                  </a:lnTo>
-                  <a:lnTo>
-                    <a:pt x="3581126" y="2394960"/>
-                  </a:lnTo>
-                  <a:lnTo>
-                    <a:pt x="3652748" y="2330798"/>
-                  </a:lnTo>
-                  <a:lnTo>
-                    <a:pt x="3724371" y="2263362"/>
-                  </a:lnTo>
-                  <a:lnTo>
-                    <a:pt x="3795993" y="2192486"/>
-                  </a:lnTo>
-                  <a:lnTo>
-                    <a:pt x="3867616" y="2117995"/>
-                  </a:lnTo>
-                  <a:lnTo>
-                    <a:pt x="3939238" y="2039703"/>
-                  </a:lnTo>
-                  <a:lnTo>
-                    <a:pt x="4010861" y="1957416"/>
-                  </a:lnTo>
-                  <a:lnTo>
-                    <a:pt x="4082483" y="1870932"/>
-                  </a:lnTo>
-                  <a:lnTo>
-                    <a:pt x="4154106" y="1780036"/>
-                  </a:lnTo>
-                  <a:lnTo>
-                    <a:pt x="4225729" y="1684502"/>
-                  </a:lnTo>
-                  <a:lnTo>
-                    <a:pt x="4297351" y="1584095"/>
-                  </a:lnTo>
-                  <a:lnTo>
-                    <a:pt x="4368974" y="1478566"/>
-                  </a:lnTo>
-                  <a:lnTo>
-                    <a:pt x="4440596" y="1367652"/>
-                  </a:lnTo>
-                  <a:lnTo>
-                    <a:pt x="4512219" y="1251081"/>
-                  </a:lnTo>
-                  <a:lnTo>
-                    <a:pt x="4583841" y="1128562"/>
-                  </a:lnTo>
-                  <a:lnTo>
-                    <a:pt x="4655464" y="999793"/>
-                  </a:lnTo>
-                  <a:lnTo>
-                    <a:pt x="4727086" y="864454"/>
-                  </a:lnTo>
-                  <a:lnTo>
-                    <a:pt x="4798709" y="722211"/>
-                  </a:lnTo>
-                  <a:lnTo>
-                    <a:pt x="4870331" y="572711"/>
-                  </a:lnTo>
-                  <a:lnTo>
-                    <a:pt x="4941954" y="415584"/>
-                  </a:lnTo>
-                  <a:lnTo>
-                    <a:pt x="5013576" y="250442"/>
-                  </a:lnTo>
-                  <a:lnTo>
-                    <a:pt x="5085199" y="76874"/>
-                  </a:lnTo>
-                  <a:lnTo>
-                    <a:pt x="5115381" y="0"/>
+                    <a:pt x="71622" y="2393618"/>
+                  </a:lnTo>
+                  <a:lnTo>
+                    <a:pt x="143245" y="2404769"/>
+                  </a:lnTo>
+                  <a:lnTo>
+                    <a:pt x="214867" y="2415822"/>
+                  </a:lnTo>
+                  <a:lnTo>
+                    <a:pt x="286490" y="2426776"/>
+                  </a:lnTo>
+                  <a:lnTo>
+                    <a:pt x="358112" y="2437634"/>
+                  </a:lnTo>
+                  <a:lnTo>
+                    <a:pt x="429735" y="2448396"/>
+                  </a:lnTo>
+                  <a:lnTo>
+                    <a:pt x="501357" y="2459062"/>
+                  </a:lnTo>
+                  <a:lnTo>
+                    <a:pt x="572980" y="2469633"/>
+                  </a:lnTo>
+                  <a:lnTo>
+                    <a:pt x="644602" y="2480111"/>
+                  </a:lnTo>
+                  <a:lnTo>
+                    <a:pt x="716225" y="2490497"/>
+                  </a:lnTo>
+                  <a:lnTo>
+                    <a:pt x="787847" y="2500790"/>
+                  </a:lnTo>
+                  <a:lnTo>
+                    <a:pt x="859470" y="2510992"/>
+                  </a:lnTo>
+                  <a:lnTo>
+                    <a:pt x="931092" y="2521104"/>
+                  </a:lnTo>
+                  <a:lnTo>
+                    <a:pt x="1002715" y="2531126"/>
+                  </a:lnTo>
+                  <a:lnTo>
+                    <a:pt x="1074337" y="2541059"/>
+                  </a:lnTo>
+                  <a:lnTo>
+                    <a:pt x="1145960" y="2550904"/>
+                  </a:lnTo>
+                  <a:lnTo>
+                    <a:pt x="1217582" y="2560663"/>
+                  </a:lnTo>
+                  <a:lnTo>
+                    <a:pt x="1289205" y="2570334"/>
+                  </a:lnTo>
+                  <a:lnTo>
+                    <a:pt x="1360827" y="2579920"/>
+                  </a:lnTo>
+                  <a:lnTo>
+                    <a:pt x="1432450" y="2589422"/>
+                  </a:lnTo>
+                  <a:lnTo>
+                    <a:pt x="1504073" y="2598839"/>
+                  </a:lnTo>
+                  <a:lnTo>
+                    <a:pt x="1575695" y="2608172"/>
+                  </a:lnTo>
+                  <a:lnTo>
+                    <a:pt x="1647318" y="2617423"/>
+                  </a:lnTo>
+                  <a:lnTo>
+                    <a:pt x="1718940" y="2626592"/>
+                  </a:lnTo>
+                  <a:lnTo>
+                    <a:pt x="1790563" y="2635680"/>
+                  </a:lnTo>
+                  <a:lnTo>
+                    <a:pt x="1862185" y="2644687"/>
+                  </a:lnTo>
+                  <a:lnTo>
+                    <a:pt x="1933808" y="2653615"/>
+                  </a:lnTo>
+                  <a:lnTo>
+                    <a:pt x="2005430" y="2662463"/>
+                  </a:lnTo>
+                  <a:lnTo>
+                    <a:pt x="2077053" y="2671234"/>
+                  </a:lnTo>
+                  <a:lnTo>
+                    <a:pt x="2148675" y="2679926"/>
+                  </a:lnTo>
+                  <a:lnTo>
+                    <a:pt x="2220298" y="2688541"/>
+                  </a:lnTo>
+                  <a:lnTo>
+                    <a:pt x="2291920" y="2697081"/>
+                  </a:lnTo>
+                  <a:lnTo>
+                    <a:pt x="2363543" y="2705544"/>
+                  </a:lnTo>
+                  <a:lnTo>
+                    <a:pt x="2435165" y="2713933"/>
+                  </a:lnTo>
+                  <a:lnTo>
+                    <a:pt x="2506788" y="2722247"/>
+                  </a:lnTo>
+                  <a:lnTo>
+                    <a:pt x="2578410" y="2730487"/>
+                  </a:lnTo>
+                  <a:lnTo>
+                    <a:pt x="2650033" y="2738655"/>
+                  </a:lnTo>
+                  <a:lnTo>
+                    <a:pt x="2721655" y="2746750"/>
+                  </a:lnTo>
+                  <a:lnTo>
+                    <a:pt x="2793278" y="2754774"/>
+                  </a:lnTo>
+                  <a:lnTo>
+                    <a:pt x="2864901" y="2762726"/>
+                  </a:lnTo>
+                  <a:lnTo>
+                    <a:pt x="2936523" y="2770608"/>
+                  </a:lnTo>
+                  <a:lnTo>
+                    <a:pt x="3008146" y="2778421"/>
+                  </a:lnTo>
+                  <a:lnTo>
+                    <a:pt x="3079768" y="2763948"/>
+                  </a:lnTo>
+                  <a:lnTo>
+                    <a:pt x="3151391" y="2716281"/>
+                  </a:lnTo>
+                  <a:lnTo>
+                    <a:pt x="3223013" y="2666057"/>
+                  </a:lnTo>
+                  <a:lnTo>
+                    <a:pt x="3294636" y="2613140"/>
+                  </a:lnTo>
+                  <a:lnTo>
+                    <a:pt x="3366258" y="2557384"/>
+                  </a:lnTo>
+                  <a:lnTo>
+                    <a:pt x="3437881" y="2498637"/>
+                  </a:lnTo>
+                  <a:lnTo>
+                    <a:pt x="3509503" y="2436740"/>
+                  </a:lnTo>
+                  <a:lnTo>
+                    <a:pt x="3581126" y="2371522"/>
+                  </a:lnTo>
+                  <a:lnTo>
+                    <a:pt x="3652748" y="2302807"/>
+                  </a:lnTo>
+                  <a:lnTo>
+                    <a:pt x="3724371" y="2230406"/>
+                  </a:lnTo>
+                  <a:lnTo>
+                    <a:pt x="3795993" y="2154121"/>
+                  </a:lnTo>
+                  <a:lnTo>
+                    <a:pt x="3867616" y="2073745"/>
+                  </a:lnTo>
+                  <a:lnTo>
+                    <a:pt x="3939238" y="1989057"/>
+                  </a:lnTo>
+                  <a:lnTo>
+                    <a:pt x="4010861" y="1899828"/>
+                  </a:lnTo>
+                  <a:lnTo>
+                    <a:pt x="4082483" y="1805812"/>
+                  </a:lnTo>
+                  <a:lnTo>
+                    <a:pt x="4154106" y="1706753"/>
+                  </a:lnTo>
+                  <a:lnTo>
+                    <a:pt x="4225729" y="1602381"/>
+                  </a:lnTo>
+                  <a:lnTo>
+                    <a:pt x="4297351" y="1492411"/>
+                  </a:lnTo>
+                  <a:lnTo>
+                    <a:pt x="4368974" y="1376543"/>
+                  </a:lnTo>
+                  <a:lnTo>
+                    <a:pt x="4440596" y="1254460"/>
+                  </a:lnTo>
+                  <a:lnTo>
+                    <a:pt x="4512219" y="1125828"/>
+                  </a:lnTo>
+                  <a:lnTo>
+                    <a:pt x="4583841" y="990297"/>
+                  </a:lnTo>
+                  <a:lnTo>
+                    <a:pt x="4655464" y="847497"/>
+                  </a:lnTo>
+                  <a:lnTo>
+                    <a:pt x="4727086" y="697037"/>
+                  </a:lnTo>
+                  <a:lnTo>
+                    <a:pt x="4798709" y="538507"/>
+                  </a:lnTo>
+                  <a:lnTo>
+                    <a:pt x="4870331" y="371474"/>
+                  </a:lnTo>
+                  <a:lnTo>
+                    <a:pt x="4941954" y="195482"/>
+                  </a:lnTo>
+                  <a:lnTo>
+                    <a:pt x="5013576" y="10050"/>
+                  </a:lnTo>
+                  <a:lnTo>
+                    <a:pt x="5017261" y="0"/>
                   </a:lnTo>
                   <a:lnTo>
                     <a:pt x="7090630" y="0"/>
                   </a:lnTo>
                   <a:lnTo>
-                    <a:pt x="7090630" y="2684335"/>
-                  </a:lnTo>
-                  <a:lnTo>
-                    <a:pt x="7019007" y="2686177"/>
-                  </a:lnTo>
-                  <a:lnTo>
-                    <a:pt x="6947385" y="2688015"/>
-                  </a:lnTo>
-                  <a:lnTo>
-                    <a:pt x="6875762" y="2689851"/>
-                  </a:lnTo>
-                  <a:lnTo>
-                    <a:pt x="6804139" y="2691682"/>
-                  </a:lnTo>
-                  <a:lnTo>
-                    <a:pt x="6732517" y="2693511"/>
-                  </a:lnTo>
-                  <a:lnTo>
-                    <a:pt x="6660894" y="2695335"/>
-                  </a:lnTo>
-                  <a:lnTo>
-                    <a:pt x="6589272" y="2697157"/>
-                  </a:lnTo>
-                  <a:lnTo>
-                    <a:pt x="6517649" y="2698974"/>
-                  </a:lnTo>
-                  <a:lnTo>
-                    <a:pt x="6446027" y="2700789"/>
-                  </a:lnTo>
-                  <a:lnTo>
-                    <a:pt x="6374404" y="2702600"/>
-                  </a:lnTo>
-                  <a:lnTo>
-                    <a:pt x="6302782" y="2704407"/>
-                  </a:lnTo>
-                  <a:lnTo>
-                    <a:pt x="6231159" y="2706211"/>
-                  </a:lnTo>
-                  <a:lnTo>
-                    <a:pt x="6159537" y="2708012"/>
-                  </a:lnTo>
-                  <a:lnTo>
-                    <a:pt x="6087914" y="2709809"/>
-                  </a:lnTo>
-                  <a:lnTo>
-                    <a:pt x="6016292" y="2711602"/>
-                  </a:lnTo>
-                  <a:lnTo>
-                    <a:pt x="5944669" y="2713393"/>
-                  </a:lnTo>
-                  <a:lnTo>
-                    <a:pt x="5873047" y="2715180"/>
-                  </a:lnTo>
-                  <a:lnTo>
-                    <a:pt x="5801424" y="2716963"/>
-                  </a:lnTo>
-                  <a:lnTo>
-                    <a:pt x="5729802" y="2718743"/>
-                  </a:lnTo>
-                  <a:lnTo>
-                    <a:pt x="5658179" y="2720520"/>
-                  </a:lnTo>
-                  <a:lnTo>
-                    <a:pt x="5586557" y="2722293"/>
-                  </a:lnTo>
-                  <a:lnTo>
-                    <a:pt x="5514934" y="2724063"/>
-                  </a:lnTo>
-                  <a:lnTo>
-                    <a:pt x="5443311" y="2725830"/>
-                  </a:lnTo>
-                  <a:lnTo>
-                    <a:pt x="5371689" y="2727593"/>
-                  </a:lnTo>
-                  <a:lnTo>
-                    <a:pt x="5300066" y="2729353"/>
-                  </a:lnTo>
-                  <a:lnTo>
-                    <a:pt x="5228444" y="2731110"/>
-                  </a:lnTo>
-                  <a:lnTo>
-                    <a:pt x="5156821" y="2732863"/>
-                  </a:lnTo>
-                  <a:lnTo>
-                    <a:pt x="5085199" y="2734613"/>
-                  </a:lnTo>
-                  <a:lnTo>
-                    <a:pt x="5013576" y="2736359"/>
-                  </a:lnTo>
-                  <a:lnTo>
-                    <a:pt x="4941954" y="2738102"/>
-                  </a:lnTo>
-                  <a:lnTo>
-                    <a:pt x="4870331" y="2739842"/>
-                  </a:lnTo>
-                  <a:lnTo>
-                    <a:pt x="4798709" y="2741579"/>
-                  </a:lnTo>
-                  <a:lnTo>
-                    <a:pt x="4727086" y="2743312"/>
-                  </a:lnTo>
-                  <a:lnTo>
-                    <a:pt x="4655464" y="2745042"/>
-                  </a:lnTo>
-                  <a:lnTo>
-                    <a:pt x="4583841" y="2746769"/>
-                  </a:lnTo>
-                  <a:lnTo>
-                    <a:pt x="4512219" y="2748492"/>
-                  </a:lnTo>
-                  <a:lnTo>
-                    <a:pt x="4440596" y="2750212"/>
-                  </a:lnTo>
-                  <a:lnTo>
-                    <a:pt x="4368974" y="2751929"/>
-                  </a:lnTo>
-                  <a:lnTo>
-                    <a:pt x="4297351" y="2753643"/>
-                  </a:lnTo>
-                  <a:lnTo>
-                    <a:pt x="4225729" y="2755353"/>
-                  </a:lnTo>
-                  <a:lnTo>
-                    <a:pt x="4154106" y="2757060"/>
-                  </a:lnTo>
-                  <a:lnTo>
-                    <a:pt x="4082483" y="2758764"/>
-                  </a:lnTo>
-                  <a:lnTo>
-                    <a:pt x="4010861" y="2760465"/>
-                  </a:lnTo>
-                  <a:lnTo>
-                    <a:pt x="3939238" y="2762162"/>
-                  </a:lnTo>
-                  <a:lnTo>
-                    <a:pt x="3867616" y="2763856"/>
-                  </a:lnTo>
-                  <a:lnTo>
-                    <a:pt x="3795993" y="2765547"/>
-                  </a:lnTo>
-                  <a:lnTo>
-                    <a:pt x="3724371" y="2767235"/>
-                  </a:lnTo>
-                  <a:lnTo>
-                    <a:pt x="3652748" y="2768919"/>
-                  </a:lnTo>
-                  <a:lnTo>
-                    <a:pt x="3581126" y="2770601"/>
-                  </a:lnTo>
-                  <a:lnTo>
-                    <a:pt x="3509503" y="2772279"/>
-                  </a:lnTo>
-                  <a:lnTo>
-                    <a:pt x="3437881" y="2773954"/>
-                  </a:lnTo>
-                  <a:lnTo>
-                    <a:pt x="3366258" y="2775625"/>
-                  </a:lnTo>
-                  <a:lnTo>
-                    <a:pt x="3294636" y="2777294"/>
-                  </a:lnTo>
-                  <a:lnTo>
-                    <a:pt x="3223013" y="2778959"/>
-                  </a:lnTo>
-                  <a:lnTo>
-                    <a:pt x="3151391" y="2780621"/>
-                  </a:lnTo>
-                  <a:lnTo>
-                    <a:pt x="3079768" y="2782280"/>
-                  </a:lnTo>
-                  <a:lnTo>
-                    <a:pt x="3008146" y="2807957"/>
-                  </a:lnTo>
-                  <a:lnTo>
-                    <a:pt x="2936523" y="2848958"/>
-                  </a:lnTo>
-                  <a:lnTo>
-                    <a:pt x="2864901" y="2887969"/>
-                  </a:lnTo>
-                  <a:lnTo>
-                    <a:pt x="2793278" y="2925086"/>
-                  </a:lnTo>
-                  <a:lnTo>
-                    <a:pt x="2721655" y="2960401"/>
-                  </a:lnTo>
-                  <a:lnTo>
-                    <a:pt x="2650033" y="2994003"/>
-                  </a:lnTo>
-                  <a:lnTo>
-                    <a:pt x="2578410" y="3025973"/>
-                  </a:lnTo>
-                  <a:lnTo>
-                    <a:pt x="2506788" y="3056392"/>
-                  </a:lnTo>
-                  <a:lnTo>
-                    <a:pt x="2435165" y="3085334"/>
-                  </a:lnTo>
-                  <a:lnTo>
-                    <a:pt x="2363543" y="3112871"/>
-                  </a:lnTo>
-                  <a:lnTo>
-                    <a:pt x="2291920" y="3139071"/>
-                  </a:lnTo>
-                  <a:lnTo>
-                    <a:pt x="2220298" y="3164000"/>
-                  </a:lnTo>
-                  <a:lnTo>
-                    <a:pt x="2148675" y="3187719"/>
-                  </a:lnTo>
-                  <a:lnTo>
-                    <a:pt x="2077053" y="3210286"/>
-                  </a:lnTo>
-                  <a:lnTo>
-                    <a:pt x="2005430" y="3231758"/>
-                  </a:lnTo>
-                  <a:lnTo>
-                    <a:pt x="1933808" y="3252188"/>
-                  </a:lnTo>
-                  <a:lnTo>
-                    <a:pt x="1862185" y="3271626"/>
-                  </a:lnTo>
-                  <a:lnTo>
-                    <a:pt x="1790563" y="3290121"/>
-                  </a:lnTo>
-                  <a:lnTo>
-                    <a:pt x="1718940" y="3307717"/>
-                  </a:lnTo>
-                  <a:lnTo>
-                    <a:pt x="1647318" y="3324460"/>
-                  </a:lnTo>
-                  <a:lnTo>
-                    <a:pt x="1575695" y="3340390"/>
-                  </a:lnTo>
-                  <a:lnTo>
-                    <a:pt x="1504073" y="3355547"/>
-                  </a:lnTo>
-                  <a:lnTo>
-                    <a:pt x="1432450" y="3369968"/>
-                  </a:lnTo>
-                  <a:lnTo>
-                    <a:pt x="1360827" y="3383689"/>
-                  </a:lnTo>
-                  <a:lnTo>
-                    <a:pt x="1289205" y="3396744"/>
-                  </a:lnTo>
-                  <a:lnTo>
-                    <a:pt x="1217582" y="3409165"/>
-                  </a:lnTo>
-                  <a:lnTo>
-                    <a:pt x="1145960" y="3420984"/>
-                  </a:lnTo>
-                  <a:lnTo>
-                    <a:pt x="1074337" y="3432229"/>
-                  </a:lnTo>
-                  <a:lnTo>
-                    <a:pt x="1002715" y="3442927"/>
-                  </a:lnTo>
-                  <a:lnTo>
-                    <a:pt x="931092" y="3453107"/>
-                  </a:lnTo>
-                  <a:lnTo>
-                    <a:pt x="859470" y="3462793"/>
-                  </a:lnTo>
-                  <a:lnTo>
-                    <a:pt x="787847" y="3472008"/>
-                  </a:lnTo>
-                  <a:lnTo>
-                    <a:pt x="716225" y="3480776"/>
-                  </a:lnTo>
-                  <a:lnTo>
-                    <a:pt x="644602" y="3489118"/>
-                  </a:lnTo>
-                  <a:lnTo>
-                    <a:pt x="572980" y="3497056"/>
-                  </a:lnTo>
-                  <a:lnTo>
-                    <a:pt x="501357" y="3504608"/>
-                  </a:lnTo>
-                  <a:lnTo>
-                    <a:pt x="429735" y="3511794"/>
-                  </a:lnTo>
-                  <a:lnTo>
-                    <a:pt x="358112" y="3518630"/>
-                  </a:lnTo>
-                  <a:lnTo>
-                    <a:pt x="286490" y="3525135"/>
-                  </a:lnTo>
-                  <a:lnTo>
-                    <a:pt x="214867" y="3531325"/>
-                  </a:lnTo>
-                  <a:lnTo>
-                    <a:pt x="143245" y="3537213"/>
-                  </a:lnTo>
-                  <a:lnTo>
-                    <a:pt x="71622" y="3542816"/>
-                  </a:lnTo>
-                  <a:lnTo>
-                    <a:pt x="0" y="3548147"/>
+                    <a:pt x="7090630" y="3126153"/>
+                  </a:lnTo>
+                  <a:lnTo>
+                    <a:pt x="7019007" y="3121448"/>
+                  </a:lnTo>
+                  <a:lnTo>
+                    <a:pt x="6947385" y="3116702"/>
+                  </a:lnTo>
+                  <a:lnTo>
+                    <a:pt x="6875762" y="3111912"/>
+                  </a:lnTo>
+                  <a:lnTo>
+                    <a:pt x="6804139" y="3107080"/>
+                  </a:lnTo>
+                  <a:lnTo>
+                    <a:pt x="6732517" y="3102205"/>
+                  </a:lnTo>
+                  <a:lnTo>
+                    <a:pt x="6660894" y="3097286"/>
+                  </a:lnTo>
+                  <a:lnTo>
+                    <a:pt x="6589272" y="3092323"/>
+                  </a:lnTo>
+                  <a:lnTo>
+                    <a:pt x="6517649" y="3087316"/>
+                  </a:lnTo>
+                  <a:lnTo>
+                    <a:pt x="6446027" y="3082264"/>
+                  </a:lnTo>
+                  <a:lnTo>
+                    <a:pt x="6374404" y="3077167"/>
+                  </a:lnTo>
+                  <a:lnTo>
+                    <a:pt x="6302782" y="3072025"/>
+                  </a:lnTo>
+                  <a:lnTo>
+                    <a:pt x="6231159" y="3066836"/>
+                  </a:lnTo>
+                  <a:lnTo>
+                    <a:pt x="6159537" y="3061601"/>
+                  </a:lnTo>
+                  <a:lnTo>
+                    <a:pt x="6087914" y="3056319"/>
+                  </a:lnTo>
+                  <a:lnTo>
+                    <a:pt x="6016292" y="3050991"/>
+                  </a:lnTo>
+                  <a:lnTo>
+                    <a:pt x="5944669" y="3045614"/>
+                  </a:lnTo>
+                  <a:lnTo>
+                    <a:pt x="5873047" y="3040189"/>
+                  </a:lnTo>
+                  <a:lnTo>
+                    <a:pt x="5801424" y="3034716"/>
+                  </a:lnTo>
+                  <a:lnTo>
+                    <a:pt x="5729802" y="3029195"/>
+                  </a:lnTo>
+                  <a:lnTo>
+                    <a:pt x="5658179" y="3023623"/>
+                  </a:lnTo>
+                  <a:lnTo>
+                    <a:pt x="5586557" y="3018002"/>
+                  </a:lnTo>
+                  <a:lnTo>
+                    <a:pt x="5514934" y="3012331"/>
+                  </a:lnTo>
+                  <a:lnTo>
+                    <a:pt x="5443311" y="3006609"/>
+                  </a:lnTo>
+                  <a:lnTo>
+                    <a:pt x="5371689" y="3000836"/>
+                  </a:lnTo>
+                  <a:lnTo>
+                    <a:pt x="5300066" y="2995011"/>
+                  </a:lnTo>
+                  <a:lnTo>
+                    <a:pt x="5228444" y="2989134"/>
+                  </a:lnTo>
+                  <a:lnTo>
+                    <a:pt x="5156821" y="2983205"/>
+                  </a:lnTo>
+                  <a:lnTo>
+                    <a:pt x="5085199" y="2977223"/>
+                  </a:lnTo>
+                  <a:lnTo>
+                    <a:pt x="5013576" y="2971187"/>
+                  </a:lnTo>
+                  <a:lnTo>
+                    <a:pt x="4941954" y="2965097"/>
+                  </a:lnTo>
+                  <a:lnTo>
+                    <a:pt x="4870331" y="2958953"/>
+                  </a:lnTo>
+                  <a:lnTo>
+                    <a:pt x="4798709" y="2952754"/>
+                  </a:lnTo>
+                  <a:lnTo>
+                    <a:pt x="4727086" y="2946500"/>
+                  </a:lnTo>
+                  <a:lnTo>
+                    <a:pt x="4655464" y="2940190"/>
+                  </a:lnTo>
+                  <a:lnTo>
+                    <a:pt x="4583841" y="2933823"/>
+                  </a:lnTo>
+                  <a:lnTo>
+                    <a:pt x="4512219" y="2927400"/>
+                  </a:lnTo>
+                  <a:lnTo>
+                    <a:pt x="4440596" y="2920919"/>
+                  </a:lnTo>
+                  <a:lnTo>
+                    <a:pt x="4368974" y="2914380"/>
+                  </a:lnTo>
+                  <a:lnTo>
+                    <a:pt x="4297351" y="2907782"/>
+                  </a:lnTo>
+                  <a:lnTo>
+                    <a:pt x="4225729" y="2901126"/>
+                  </a:lnTo>
+                  <a:lnTo>
+                    <a:pt x="4154106" y="2894411"/>
+                  </a:lnTo>
+                  <a:lnTo>
+                    <a:pt x="4082483" y="2887635"/>
+                  </a:lnTo>
+                  <a:lnTo>
+                    <a:pt x="4010861" y="2880798"/>
+                  </a:lnTo>
+                  <a:lnTo>
+                    <a:pt x="3939238" y="2873901"/>
+                  </a:lnTo>
+                  <a:lnTo>
+                    <a:pt x="3867616" y="2866942"/>
+                  </a:lnTo>
+                  <a:lnTo>
+                    <a:pt x="3795993" y="2859921"/>
+                  </a:lnTo>
+                  <a:lnTo>
+                    <a:pt x="3724371" y="2852837"/>
+                  </a:lnTo>
+                  <a:lnTo>
+                    <a:pt x="3652748" y="2845690"/>
+                  </a:lnTo>
+                  <a:lnTo>
+                    <a:pt x="3581126" y="2838479"/>
+                  </a:lnTo>
+                  <a:lnTo>
+                    <a:pt x="3509503" y="2831203"/>
+                  </a:lnTo>
+                  <a:lnTo>
+                    <a:pt x="3437881" y="2823862"/>
+                  </a:lnTo>
+                  <a:lnTo>
+                    <a:pt x="3366258" y="2816456"/>
+                  </a:lnTo>
+                  <a:lnTo>
+                    <a:pt x="3294636" y="2808984"/>
+                  </a:lnTo>
+                  <a:lnTo>
+                    <a:pt x="3223013" y="2801445"/>
+                  </a:lnTo>
+                  <a:lnTo>
+                    <a:pt x="3151391" y="2793838"/>
+                  </a:lnTo>
+                  <a:lnTo>
+                    <a:pt x="3079768" y="2786164"/>
+                  </a:lnTo>
+                  <a:lnTo>
+                    <a:pt x="3008146" y="2809188"/>
+                  </a:lnTo>
+                  <a:lnTo>
+                    <a:pt x="2936523" y="2852126"/>
+                  </a:lnTo>
+                  <a:lnTo>
+                    <a:pt x="2864901" y="2892877"/>
+                  </a:lnTo>
+                  <a:lnTo>
+                    <a:pt x="2793278" y="2931554"/>
+                  </a:lnTo>
+                  <a:lnTo>
+                    <a:pt x="2721655" y="2968263"/>
+                  </a:lnTo>
+                  <a:lnTo>
+                    <a:pt x="2650033" y="3003102"/>
+                  </a:lnTo>
+                  <a:lnTo>
+                    <a:pt x="2578410" y="3036168"/>
+                  </a:lnTo>
+                  <a:lnTo>
+                    <a:pt x="2506788" y="3067551"/>
+                  </a:lnTo>
+                  <a:lnTo>
+                    <a:pt x="2435165" y="3097336"/>
+                  </a:lnTo>
+                  <a:lnTo>
+                    <a:pt x="2363543" y="3125604"/>
+                  </a:lnTo>
+                  <a:lnTo>
+                    <a:pt x="2291920" y="3152434"/>
+                  </a:lnTo>
+                  <a:lnTo>
+                    <a:pt x="2220298" y="3177898"/>
+                  </a:lnTo>
+                  <a:lnTo>
+                    <a:pt x="2148675" y="3202066"/>
+                  </a:lnTo>
+                  <a:lnTo>
+                    <a:pt x="2077053" y="3225003"/>
+                  </a:lnTo>
+                  <a:lnTo>
+                    <a:pt x="2005430" y="3246773"/>
+                  </a:lnTo>
+                  <a:lnTo>
+                    <a:pt x="1933808" y="3267434"/>
+                  </a:lnTo>
+                  <a:lnTo>
+                    <a:pt x="1862185" y="3287044"/>
+                  </a:lnTo>
+                  <a:lnTo>
+                    <a:pt x="1790563" y="3305655"/>
+                  </a:lnTo>
+                  <a:lnTo>
+                    <a:pt x="1718940" y="3323319"/>
+                  </a:lnTo>
+                  <a:lnTo>
+                    <a:pt x="1647318" y="3340084"/>
+                  </a:lnTo>
+                  <a:lnTo>
+                    <a:pt x="1575695" y="3355995"/>
+                  </a:lnTo>
+                  <a:lnTo>
+                    <a:pt x="1504073" y="3371097"/>
+                  </a:lnTo>
+                  <a:lnTo>
+                    <a:pt x="1432450" y="3385429"/>
+                  </a:lnTo>
+                  <a:lnTo>
+                    <a:pt x="1360827" y="3399032"/>
+                  </a:lnTo>
+                  <a:lnTo>
+                    <a:pt x="1289205" y="3411943"/>
+                  </a:lnTo>
+                  <a:lnTo>
+                    <a:pt x="1217582" y="3424196"/>
+                  </a:lnTo>
+                  <a:lnTo>
+                    <a:pt x="1145960" y="3435825"/>
+                  </a:lnTo>
+                  <a:lnTo>
+                    <a:pt x="1074337" y="3446863"/>
+                  </a:lnTo>
+                  <a:lnTo>
+                    <a:pt x="1002715" y="3457338"/>
+                  </a:lnTo>
+                  <a:lnTo>
+                    <a:pt x="931092" y="3467281"/>
+                  </a:lnTo>
+                  <a:lnTo>
+                    <a:pt x="859470" y="3476717"/>
+                  </a:lnTo>
+                  <a:lnTo>
+                    <a:pt x="787847" y="3485673"/>
+                  </a:lnTo>
+                  <a:lnTo>
+                    <a:pt x="716225" y="3494173"/>
+                  </a:lnTo>
+                  <a:lnTo>
+                    <a:pt x="644602" y="3502240"/>
+                  </a:lnTo>
+                  <a:lnTo>
+                    <a:pt x="572980" y="3509896"/>
+                  </a:lnTo>
+                  <a:lnTo>
+                    <a:pt x="501357" y="3517163"/>
+                  </a:lnTo>
+                  <a:lnTo>
+                    <a:pt x="429735" y="3524060"/>
+                  </a:lnTo>
+                  <a:lnTo>
+                    <a:pt x="358112" y="3530606"/>
+                  </a:lnTo>
+                  <a:lnTo>
+                    <a:pt x="286490" y="3536818"/>
+                  </a:lnTo>
+                  <a:lnTo>
+                    <a:pt x="214867" y="3542714"/>
+                  </a:lnTo>
+                  <a:lnTo>
+                    <a:pt x="143245" y="3548311"/>
+                  </a:lnTo>
+                  <a:lnTo>
+                    <a:pt x="71622" y="3553622"/>
+                  </a:lnTo>
+                  <a:lnTo>
+                    <a:pt x="0" y="3558663"/>
                   </a:lnTo>
                   <a:close/>
                 </a:path>
@@ -3685,230 +3682,227 @@
           <p:spPr>
             <a:xfrm>
               <a:off x="1172049" y="1896563"/>
-              <a:ext cx="5115381" cy="2850710"/>
+              <a:ext cx="5017261" cy="2778421"/>
             </a:xfrm>
             <a:custGeom>
               <a:avLst/>
               <a:pathLst>
-                <a:path w="5115381" h="2850710">
+                <a:path w="5017261" h="2778421">
                   <a:moveTo>
-                    <a:pt x="0" y="2850710"/>
+                    <a:pt x="0" y="2382367"/>
                   </a:moveTo>
                   <a:lnTo>
-                    <a:pt x="71622" y="2849181"/>
-                  </a:lnTo>
-                  <a:lnTo>
-                    <a:pt x="143245" y="2847650"/>
-                  </a:lnTo>
-                  <a:lnTo>
-                    <a:pt x="214867" y="2846115"/>
-                  </a:lnTo>
-                  <a:lnTo>
-                    <a:pt x="286490" y="2844578"/>
-                  </a:lnTo>
-                  <a:lnTo>
-                    <a:pt x="358112" y="2843038"/>
-                  </a:lnTo>
-                  <a:lnTo>
-                    <a:pt x="429735" y="2841494"/>
-                  </a:lnTo>
-                  <a:lnTo>
-                    <a:pt x="501357" y="2839948"/>
-                  </a:lnTo>
-                  <a:lnTo>
-                    <a:pt x="572980" y="2838399"/>
-                  </a:lnTo>
-                  <a:lnTo>
-                    <a:pt x="644602" y="2836847"/>
-                  </a:lnTo>
-                  <a:lnTo>
-                    <a:pt x="716225" y="2835292"/>
-                  </a:lnTo>
-                  <a:lnTo>
-                    <a:pt x="787847" y="2833734"/>
-                  </a:lnTo>
-                  <a:lnTo>
-                    <a:pt x="859470" y="2832173"/>
-                  </a:lnTo>
-                  <a:lnTo>
-                    <a:pt x="931092" y="2830609"/>
-                  </a:lnTo>
-                  <a:lnTo>
-                    <a:pt x="1002715" y="2829043"/>
-                  </a:lnTo>
-                  <a:lnTo>
-                    <a:pt x="1074337" y="2827473"/>
-                  </a:lnTo>
-                  <a:lnTo>
-                    <a:pt x="1145960" y="2825900"/>
-                  </a:lnTo>
-                  <a:lnTo>
-                    <a:pt x="1217582" y="2824324"/>
-                  </a:lnTo>
-                  <a:lnTo>
-                    <a:pt x="1289205" y="2822745"/>
-                  </a:lnTo>
-                  <a:lnTo>
-                    <a:pt x="1360827" y="2821163"/>
-                  </a:lnTo>
-                  <a:lnTo>
-                    <a:pt x="1432450" y="2819578"/>
-                  </a:lnTo>
-                  <a:lnTo>
-                    <a:pt x="1504073" y="2817990"/>
-                  </a:lnTo>
-                  <a:lnTo>
-                    <a:pt x="1575695" y="2816399"/>
-                  </a:lnTo>
-                  <a:lnTo>
-                    <a:pt x="1647318" y="2814805"/>
-                  </a:lnTo>
-                  <a:lnTo>
-                    <a:pt x="1718940" y="2813208"/>
-                  </a:lnTo>
-                  <a:lnTo>
-                    <a:pt x="1790563" y="2811608"/>
-                  </a:lnTo>
-                  <a:lnTo>
-                    <a:pt x="1862185" y="2810005"/>
-                  </a:lnTo>
-                  <a:lnTo>
-                    <a:pt x="1933808" y="2808399"/>
-                  </a:lnTo>
-                  <a:lnTo>
-                    <a:pt x="2005430" y="2806790"/>
-                  </a:lnTo>
-                  <a:lnTo>
-                    <a:pt x="2077053" y="2805178"/>
-                  </a:lnTo>
-                  <a:lnTo>
-                    <a:pt x="2148675" y="2803562"/>
-                  </a:lnTo>
-                  <a:lnTo>
-                    <a:pt x="2220298" y="2801944"/>
-                  </a:lnTo>
-                  <a:lnTo>
-                    <a:pt x="2291920" y="2800322"/>
-                  </a:lnTo>
-                  <a:lnTo>
-                    <a:pt x="2363543" y="2798698"/>
-                  </a:lnTo>
-                  <a:lnTo>
-                    <a:pt x="2435165" y="2797070"/>
-                  </a:lnTo>
-                  <a:lnTo>
-                    <a:pt x="2506788" y="2795439"/>
-                  </a:lnTo>
-                  <a:lnTo>
-                    <a:pt x="2578410" y="2793805"/>
-                  </a:lnTo>
-                  <a:lnTo>
-                    <a:pt x="2650033" y="2792168"/>
-                  </a:lnTo>
-                  <a:lnTo>
-                    <a:pt x="2721655" y="2790528"/>
-                  </a:lnTo>
-                  <a:lnTo>
-                    <a:pt x="2793278" y="2788885"/>
-                  </a:lnTo>
-                  <a:lnTo>
-                    <a:pt x="2864901" y="2787238"/>
-                  </a:lnTo>
-                  <a:lnTo>
-                    <a:pt x="2936523" y="2785589"/>
-                  </a:lnTo>
-                  <a:lnTo>
-                    <a:pt x="3008146" y="2783936"/>
-                  </a:lnTo>
-                  <a:lnTo>
-                    <a:pt x="3079768" y="2764864"/>
-                  </a:lnTo>
-                  <a:lnTo>
-                    <a:pt x="3151391" y="2719573"/>
-                  </a:lnTo>
-                  <a:lnTo>
-                    <a:pt x="3223013" y="2671971"/>
-                  </a:lnTo>
-                  <a:lnTo>
-                    <a:pt x="3294636" y="2621941"/>
-                  </a:lnTo>
-                  <a:lnTo>
-                    <a:pt x="3366258" y="2569358"/>
-                  </a:lnTo>
-                  <a:lnTo>
-                    <a:pt x="3437881" y="2514093"/>
-                  </a:lnTo>
-                  <a:lnTo>
-                    <a:pt x="3509503" y="2456008"/>
-                  </a:lnTo>
-                  <a:lnTo>
-                    <a:pt x="3581126" y="2394960"/>
-                  </a:lnTo>
-                  <a:lnTo>
-                    <a:pt x="3652748" y="2330798"/>
-                  </a:lnTo>
-                  <a:lnTo>
-                    <a:pt x="3724371" y="2263362"/>
-                  </a:lnTo>
-                  <a:lnTo>
-                    <a:pt x="3795993" y="2192486"/>
-                  </a:lnTo>
-                  <a:lnTo>
-                    <a:pt x="3867616" y="2117995"/>
-                  </a:lnTo>
-                  <a:lnTo>
-                    <a:pt x="3939238" y="2039703"/>
-                  </a:lnTo>
-                  <a:lnTo>
-                    <a:pt x="4010861" y="1957416"/>
-                  </a:lnTo>
-                  <a:lnTo>
-                    <a:pt x="4082483" y="1870932"/>
-                  </a:lnTo>
-                  <a:lnTo>
-                    <a:pt x="4154106" y="1780036"/>
-                  </a:lnTo>
-                  <a:lnTo>
-                    <a:pt x="4225729" y="1684502"/>
-                  </a:lnTo>
-                  <a:lnTo>
-                    <a:pt x="4297351" y="1584095"/>
-                  </a:lnTo>
-                  <a:lnTo>
-                    <a:pt x="4368974" y="1478566"/>
-                  </a:lnTo>
-                  <a:lnTo>
-                    <a:pt x="4440596" y="1367652"/>
-                  </a:lnTo>
-                  <a:lnTo>
-                    <a:pt x="4512219" y="1251081"/>
-                  </a:lnTo>
-                  <a:lnTo>
-                    <a:pt x="4583841" y="1128562"/>
-                  </a:lnTo>
-                  <a:lnTo>
-                    <a:pt x="4655464" y="999793"/>
-                  </a:lnTo>
-                  <a:lnTo>
-                    <a:pt x="4727086" y="864454"/>
-                  </a:lnTo>
-                  <a:lnTo>
-                    <a:pt x="4798709" y="722211"/>
-                  </a:lnTo>
-                  <a:lnTo>
-                    <a:pt x="4870331" y="572711"/>
-                  </a:lnTo>
-                  <a:lnTo>
-                    <a:pt x="4941954" y="415584"/>
-                  </a:lnTo>
-                  <a:lnTo>
-                    <a:pt x="5013576" y="250442"/>
-                  </a:lnTo>
-                  <a:lnTo>
-                    <a:pt x="5085199" y="76874"/>
-                  </a:lnTo>
-                  <a:lnTo>
-                    <a:pt x="5115381" y="0"/>
+                    <a:pt x="71622" y="2393618"/>
+                  </a:lnTo>
+                  <a:lnTo>
+                    <a:pt x="143245" y="2404769"/>
+                  </a:lnTo>
+                  <a:lnTo>
+                    <a:pt x="214867" y="2415822"/>
+                  </a:lnTo>
+                  <a:lnTo>
+                    <a:pt x="286490" y="2426776"/>
+                  </a:lnTo>
+                  <a:lnTo>
+                    <a:pt x="358112" y="2437634"/>
+                  </a:lnTo>
+                  <a:lnTo>
+                    <a:pt x="429735" y="2448396"/>
+                  </a:lnTo>
+                  <a:lnTo>
+                    <a:pt x="501357" y="2459062"/>
+                  </a:lnTo>
+                  <a:lnTo>
+                    <a:pt x="572980" y="2469633"/>
+                  </a:lnTo>
+                  <a:lnTo>
+                    <a:pt x="644602" y="2480111"/>
+                  </a:lnTo>
+                  <a:lnTo>
+                    <a:pt x="716225" y="2490497"/>
+                  </a:lnTo>
+                  <a:lnTo>
+                    <a:pt x="787847" y="2500790"/>
+                  </a:lnTo>
+                  <a:lnTo>
+                    <a:pt x="859470" y="2510992"/>
+                  </a:lnTo>
+                  <a:lnTo>
+                    <a:pt x="931092" y="2521104"/>
+                  </a:lnTo>
+                  <a:lnTo>
+                    <a:pt x="1002715" y="2531126"/>
+                  </a:lnTo>
+                  <a:lnTo>
+                    <a:pt x="1074337" y="2541059"/>
+                  </a:lnTo>
+                  <a:lnTo>
+                    <a:pt x="1145960" y="2550904"/>
+                  </a:lnTo>
+                  <a:lnTo>
+                    <a:pt x="1217582" y="2560663"/>
+                  </a:lnTo>
+                  <a:lnTo>
+                    <a:pt x="1289205" y="2570334"/>
+                  </a:lnTo>
+                  <a:lnTo>
+                    <a:pt x="1360827" y="2579920"/>
+                  </a:lnTo>
+                  <a:lnTo>
+                    <a:pt x="1432450" y="2589422"/>
+                  </a:lnTo>
+                  <a:lnTo>
+                    <a:pt x="1504073" y="2598839"/>
+                  </a:lnTo>
+                  <a:lnTo>
+                    <a:pt x="1575695" y="2608172"/>
+                  </a:lnTo>
+                  <a:lnTo>
+                    <a:pt x="1647318" y="2617423"/>
+                  </a:lnTo>
+                  <a:lnTo>
+                    <a:pt x="1718940" y="2626592"/>
+                  </a:lnTo>
+                  <a:lnTo>
+                    <a:pt x="1790563" y="2635680"/>
+                  </a:lnTo>
+                  <a:lnTo>
+                    <a:pt x="1862185" y="2644687"/>
+                  </a:lnTo>
+                  <a:lnTo>
+                    <a:pt x="1933808" y="2653615"/>
+                  </a:lnTo>
+                  <a:lnTo>
+                    <a:pt x="2005430" y="2662463"/>
+                  </a:lnTo>
+                  <a:lnTo>
+                    <a:pt x="2077053" y="2671234"/>
+                  </a:lnTo>
+                  <a:lnTo>
+                    <a:pt x="2148675" y="2679926"/>
+                  </a:lnTo>
+                  <a:lnTo>
+                    <a:pt x="2220298" y="2688541"/>
+                  </a:lnTo>
+                  <a:lnTo>
+                    <a:pt x="2291920" y="2697081"/>
+                  </a:lnTo>
+                  <a:lnTo>
+                    <a:pt x="2363543" y="2705544"/>
+                  </a:lnTo>
+                  <a:lnTo>
+                    <a:pt x="2435165" y="2713933"/>
+                  </a:lnTo>
+                  <a:lnTo>
+                    <a:pt x="2506788" y="2722247"/>
+                  </a:lnTo>
+                  <a:lnTo>
+                    <a:pt x="2578410" y="2730487"/>
+                  </a:lnTo>
+                  <a:lnTo>
+                    <a:pt x="2650033" y="2738655"/>
+                  </a:lnTo>
+                  <a:lnTo>
+                    <a:pt x="2721655" y="2746750"/>
+                  </a:lnTo>
+                  <a:lnTo>
+                    <a:pt x="2793278" y="2754774"/>
+                  </a:lnTo>
+                  <a:lnTo>
+                    <a:pt x="2864901" y="2762726"/>
+                  </a:lnTo>
+                  <a:lnTo>
+                    <a:pt x="2936523" y="2770608"/>
+                  </a:lnTo>
+                  <a:lnTo>
+                    <a:pt x="3008146" y="2778421"/>
+                  </a:lnTo>
+                  <a:lnTo>
+                    <a:pt x="3079768" y="2763948"/>
+                  </a:lnTo>
+                  <a:lnTo>
+                    <a:pt x="3151391" y="2716281"/>
+                  </a:lnTo>
+                  <a:lnTo>
+                    <a:pt x="3223013" y="2666057"/>
+                  </a:lnTo>
+                  <a:lnTo>
+                    <a:pt x="3294636" y="2613140"/>
+                  </a:lnTo>
+                  <a:lnTo>
+                    <a:pt x="3366258" y="2557384"/>
+                  </a:lnTo>
+                  <a:lnTo>
+                    <a:pt x="3437881" y="2498637"/>
+                  </a:lnTo>
+                  <a:lnTo>
+                    <a:pt x="3509503" y="2436740"/>
+                  </a:lnTo>
+                  <a:lnTo>
+                    <a:pt x="3581126" y="2371522"/>
+                  </a:lnTo>
+                  <a:lnTo>
+                    <a:pt x="3652748" y="2302807"/>
+                  </a:lnTo>
+                  <a:lnTo>
+                    <a:pt x="3724371" y="2230406"/>
+                  </a:lnTo>
+                  <a:lnTo>
+                    <a:pt x="3795993" y="2154121"/>
+                  </a:lnTo>
+                  <a:lnTo>
+                    <a:pt x="3867616" y="2073745"/>
+                  </a:lnTo>
+                  <a:lnTo>
+                    <a:pt x="3939238" y="1989057"/>
+                  </a:lnTo>
+                  <a:lnTo>
+                    <a:pt x="4010861" y="1899828"/>
+                  </a:lnTo>
+                  <a:lnTo>
+                    <a:pt x="4082483" y="1805812"/>
+                  </a:lnTo>
+                  <a:lnTo>
+                    <a:pt x="4154106" y="1706753"/>
+                  </a:lnTo>
+                  <a:lnTo>
+                    <a:pt x="4225729" y="1602381"/>
+                  </a:lnTo>
+                  <a:lnTo>
+                    <a:pt x="4297351" y="1492411"/>
+                  </a:lnTo>
+                  <a:lnTo>
+                    <a:pt x="4368974" y="1376543"/>
+                  </a:lnTo>
+                  <a:lnTo>
+                    <a:pt x="4440596" y="1254460"/>
+                  </a:lnTo>
+                  <a:lnTo>
+                    <a:pt x="4512219" y="1125828"/>
+                  </a:lnTo>
+                  <a:lnTo>
+                    <a:pt x="4583841" y="990297"/>
+                  </a:lnTo>
+                  <a:lnTo>
+                    <a:pt x="4655464" y="847497"/>
+                  </a:lnTo>
+                  <a:lnTo>
+                    <a:pt x="4727086" y="697037"/>
+                  </a:lnTo>
+                  <a:lnTo>
+                    <a:pt x="4798709" y="538507"/>
+                  </a:lnTo>
+                  <a:lnTo>
+                    <a:pt x="4870331" y="371474"/>
+                  </a:lnTo>
+                  <a:lnTo>
+                    <a:pt x="4941954" y="195482"/>
+                  </a:lnTo>
+                  <a:lnTo>
+                    <a:pt x="5013576" y="10050"/>
+                  </a:lnTo>
+                  <a:lnTo>
+                    <a:pt x="5017261" y="0"/>
                   </a:lnTo>
                 </a:path>
               </a:pathLst>
@@ -3928,312 +3922,312 @@
           </p:nvSpPr>
           <p:spPr>
             <a:xfrm>
-              <a:off x="1172049" y="4580898"/>
-              <a:ext cx="7090630" cy="863812"/>
+              <a:off x="1172049" y="4682727"/>
+              <a:ext cx="7090630" cy="772498"/>
             </a:xfrm>
             <a:custGeom>
               <a:avLst/>
               <a:pathLst>
-                <a:path w="7090630" h="863812">
+                <a:path w="7090630" h="772498">
                   <a:moveTo>
-                    <a:pt x="7090630" y="0"/>
+                    <a:pt x="7090630" y="339989"/>
                   </a:moveTo>
                   <a:lnTo>
-                    <a:pt x="7019007" y="1842"/>
-                  </a:lnTo>
-                  <a:lnTo>
-                    <a:pt x="6947385" y="3680"/>
-                  </a:lnTo>
-                  <a:lnTo>
-                    <a:pt x="6875762" y="5516"/>
-                  </a:lnTo>
-                  <a:lnTo>
-                    <a:pt x="6804139" y="7347"/>
-                  </a:lnTo>
-                  <a:lnTo>
-                    <a:pt x="6732517" y="9175"/>
-                  </a:lnTo>
-                  <a:lnTo>
-                    <a:pt x="6660894" y="11000"/>
-                  </a:lnTo>
-                  <a:lnTo>
-                    <a:pt x="6589272" y="12821"/>
-                  </a:lnTo>
-                  <a:lnTo>
-                    <a:pt x="6517649" y="14639"/>
-                  </a:lnTo>
-                  <a:lnTo>
-                    <a:pt x="6446027" y="16454"/>
-                  </a:lnTo>
-                  <a:lnTo>
-                    <a:pt x="6374404" y="18264"/>
-                  </a:lnTo>
-                  <a:lnTo>
-                    <a:pt x="6302782" y="20072"/>
-                  </a:lnTo>
-                  <a:lnTo>
-                    <a:pt x="6231159" y="21876"/>
-                  </a:lnTo>
-                  <a:lnTo>
-                    <a:pt x="6159537" y="23677"/>
-                  </a:lnTo>
-                  <a:lnTo>
-                    <a:pt x="6087914" y="25474"/>
-                  </a:lnTo>
-                  <a:lnTo>
-                    <a:pt x="6016292" y="27267"/>
-                  </a:lnTo>
-                  <a:lnTo>
-                    <a:pt x="5944669" y="29058"/>
-                  </a:lnTo>
-                  <a:lnTo>
-                    <a:pt x="5873047" y="30845"/>
-                  </a:lnTo>
-                  <a:lnTo>
-                    <a:pt x="5801424" y="32628"/>
-                  </a:lnTo>
-                  <a:lnTo>
-                    <a:pt x="5729802" y="34408"/>
-                  </a:lnTo>
-                  <a:lnTo>
-                    <a:pt x="5658179" y="36185"/>
-                  </a:lnTo>
-                  <a:lnTo>
-                    <a:pt x="5586557" y="37958"/>
-                  </a:lnTo>
-                  <a:lnTo>
-                    <a:pt x="5514934" y="39728"/>
-                  </a:lnTo>
-                  <a:lnTo>
-                    <a:pt x="5443311" y="41495"/>
-                  </a:lnTo>
-                  <a:lnTo>
-                    <a:pt x="5371689" y="43258"/>
-                  </a:lnTo>
-                  <a:lnTo>
-                    <a:pt x="5300066" y="45018"/>
-                  </a:lnTo>
-                  <a:lnTo>
-                    <a:pt x="5228444" y="46775"/>
-                  </a:lnTo>
-                  <a:lnTo>
-                    <a:pt x="5156821" y="48528"/>
-                  </a:lnTo>
-                  <a:lnTo>
-                    <a:pt x="5085199" y="50278"/>
-                  </a:lnTo>
-                  <a:lnTo>
-                    <a:pt x="5013576" y="52024"/>
-                  </a:lnTo>
-                  <a:lnTo>
-                    <a:pt x="4941954" y="53767"/>
-                  </a:lnTo>
-                  <a:lnTo>
-                    <a:pt x="4870331" y="55507"/>
-                  </a:lnTo>
-                  <a:lnTo>
-                    <a:pt x="4798709" y="57244"/>
-                  </a:lnTo>
-                  <a:lnTo>
-                    <a:pt x="4727086" y="58977"/>
-                  </a:lnTo>
-                  <a:lnTo>
-                    <a:pt x="4655464" y="60707"/>
-                  </a:lnTo>
-                  <a:lnTo>
-                    <a:pt x="4583841" y="62434"/>
-                  </a:lnTo>
-                  <a:lnTo>
-                    <a:pt x="4512219" y="64157"/>
-                  </a:lnTo>
-                  <a:lnTo>
-                    <a:pt x="4440596" y="65877"/>
-                  </a:lnTo>
-                  <a:lnTo>
-                    <a:pt x="4368974" y="67594"/>
-                  </a:lnTo>
-                  <a:lnTo>
-                    <a:pt x="4297351" y="69308"/>
-                  </a:lnTo>
-                  <a:lnTo>
-                    <a:pt x="4225729" y="71018"/>
-                  </a:lnTo>
-                  <a:lnTo>
-                    <a:pt x="4154106" y="72725"/>
-                  </a:lnTo>
-                  <a:lnTo>
-                    <a:pt x="4082483" y="74429"/>
-                  </a:lnTo>
-                  <a:lnTo>
-                    <a:pt x="4010861" y="76130"/>
-                  </a:lnTo>
-                  <a:lnTo>
-                    <a:pt x="3939238" y="77827"/>
-                  </a:lnTo>
-                  <a:lnTo>
-                    <a:pt x="3867616" y="79521"/>
-                  </a:lnTo>
-                  <a:lnTo>
-                    <a:pt x="3795993" y="81212"/>
-                  </a:lnTo>
-                  <a:lnTo>
-                    <a:pt x="3724371" y="82900"/>
-                  </a:lnTo>
-                  <a:lnTo>
-                    <a:pt x="3652748" y="84584"/>
-                  </a:lnTo>
-                  <a:lnTo>
-                    <a:pt x="3581126" y="86265"/>
-                  </a:lnTo>
-                  <a:lnTo>
-                    <a:pt x="3509503" y="87944"/>
-                  </a:lnTo>
-                  <a:lnTo>
-                    <a:pt x="3437881" y="89618"/>
-                  </a:lnTo>
-                  <a:lnTo>
-                    <a:pt x="3366258" y="91290"/>
-                  </a:lnTo>
-                  <a:lnTo>
-                    <a:pt x="3294636" y="92959"/>
-                  </a:lnTo>
-                  <a:lnTo>
-                    <a:pt x="3223013" y="94624"/>
-                  </a:lnTo>
-                  <a:lnTo>
-                    <a:pt x="3151391" y="96286"/>
-                  </a:lnTo>
-                  <a:lnTo>
-                    <a:pt x="3079768" y="97945"/>
-                  </a:lnTo>
-                  <a:lnTo>
-                    <a:pt x="3008146" y="123622"/>
-                  </a:lnTo>
-                  <a:lnTo>
-                    <a:pt x="2936523" y="164623"/>
-                  </a:lnTo>
-                  <a:lnTo>
-                    <a:pt x="2864901" y="203633"/>
-                  </a:lnTo>
-                  <a:lnTo>
-                    <a:pt x="2793278" y="240751"/>
-                  </a:lnTo>
-                  <a:lnTo>
-                    <a:pt x="2721655" y="276066"/>
-                  </a:lnTo>
-                  <a:lnTo>
-                    <a:pt x="2650033" y="309668"/>
-                  </a:lnTo>
-                  <a:lnTo>
-                    <a:pt x="2578410" y="341638"/>
-                  </a:lnTo>
-                  <a:lnTo>
-                    <a:pt x="2506788" y="372057"/>
-                  </a:lnTo>
-                  <a:lnTo>
-                    <a:pt x="2435165" y="400999"/>
-                  </a:lnTo>
-                  <a:lnTo>
-                    <a:pt x="2363543" y="428536"/>
-                  </a:lnTo>
-                  <a:lnTo>
-                    <a:pt x="2291920" y="454736"/>
-                  </a:lnTo>
-                  <a:lnTo>
-                    <a:pt x="2220298" y="479665"/>
-                  </a:lnTo>
-                  <a:lnTo>
-                    <a:pt x="2148675" y="503384"/>
-                  </a:lnTo>
-                  <a:lnTo>
-                    <a:pt x="2077053" y="525951"/>
-                  </a:lnTo>
-                  <a:lnTo>
-                    <a:pt x="2005430" y="547423"/>
-                  </a:lnTo>
-                  <a:lnTo>
-                    <a:pt x="1933808" y="567853"/>
-                  </a:lnTo>
-                  <a:lnTo>
-                    <a:pt x="1862185" y="587291"/>
-                  </a:lnTo>
-                  <a:lnTo>
-                    <a:pt x="1790563" y="605786"/>
-                  </a:lnTo>
-                  <a:lnTo>
-                    <a:pt x="1718940" y="623382"/>
-                  </a:lnTo>
-                  <a:lnTo>
-                    <a:pt x="1647318" y="640125"/>
-                  </a:lnTo>
-                  <a:lnTo>
-                    <a:pt x="1575695" y="656055"/>
-                  </a:lnTo>
-                  <a:lnTo>
-                    <a:pt x="1504073" y="671212"/>
-                  </a:lnTo>
-                  <a:lnTo>
-                    <a:pt x="1432450" y="685633"/>
-                  </a:lnTo>
-                  <a:lnTo>
-                    <a:pt x="1360827" y="699354"/>
-                  </a:lnTo>
-                  <a:lnTo>
-                    <a:pt x="1289205" y="712409"/>
-                  </a:lnTo>
-                  <a:lnTo>
-                    <a:pt x="1217582" y="724830"/>
-                  </a:lnTo>
-                  <a:lnTo>
-                    <a:pt x="1145960" y="736649"/>
-                  </a:lnTo>
-                  <a:lnTo>
-                    <a:pt x="1074337" y="747893"/>
-                  </a:lnTo>
-                  <a:lnTo>
-                    <a:pt x="1002715" y="758592"/>
-                  </a:lnTo>
-                  <a:lnTo>
-                    <a:pt x="931092" y="768772"/>
-                  </a:lnTo>
-                  <a:lnTo>
-                    <a:pt x="859470" y="778457"/>
-                  </a:lnTo>
-                  <a:lnTo>
-                    <a:pt x="787847" y="787673"/>
-                  </a:lnTo>
-                  <a:lnTo>
-                    <a:pt x="716225" y="796441"/>
-                  </a:lnTo>
-                  <a:lnTo>
-                    <a:pt x="644602" y="804783"/>
-                  </a:lnTo>
-                  <a:lnTo>
-                    <a:pt x="572980" y="812721"/>
-                  </a:lnTo>
-                  <a:lnTo>
-                    <a:pt x="501357" y="820273"/>
-                  </a:lnTo>
-                  <a:lnTo>
-                    <a:pt x="429735" y="827459"/>
-                  </a:lnTo>
-                  <a:lnTo>
-                    <a:pt x="358112" y="834295"/>
-                  </a:lnTo>
-                  <a:lnTo>
-                    <a:pt x="286490" y="840800"/>
-                  </a:lnTo>
-                  <a:lnTo>
-                    <a:pt x="214867" y="846990"/>
-                  </a:lnTo>
-                  <a:lnTo>
-                    <a:pt x="143245" y="852878"/>
-                  </a:lnTo>
-                  <a:lnTo>
-                    <a:pt x="71622" y="858481"/>
-                  </a:lnTo>
-                  <a:lnTo>
-                    <a:pt x="0" y="863812"/>
+                    <a:pt x="7019007" y="335284"/>
+                  </a:lnTo>
+                  <a:lnTo>
+                    <a:pt x="6947385" y="330537"/>
+                  </a:lnTo>
+                  <a:lnTo>
+                    <a:pt x="6875762" y="325748"/>
+                  </a:lnTo>
+                  <a:lnTo>
+                    <a:pt x="6804139" y="320916"/>
+                  </a:lnTo>
+                  <a:lnTo>
+                    <a:pt x="6732517" y="316041"/>
+                  </a:lnTo>
+                  <a:lnTo>
+                    <a:pt x="6660894" y="311122"/>
+                  </a:lnTo>
+                  <a:lnTo>
+                    <a:pt x="6589272" y="306159"/>
+                  </a:lnTo>
+                  <a:lnTo>
+                    <a:pt x="6517649" y="301152"/>
+                  </a:lnTo>
+                  <a:lnTo>
+                    <a:pt x="6446027" y="296100"/>
+                  </a:lnTo>
+                  <a:lnTo>
+                    <a:pt x="6374404" y="291003"/>
+                  </a:lnTo>
+                  <a:lnTo>
+                    <a:pt x="6302782" y="285860"/>
+                  </a:lnTo>
+                  <a:lnTo>
+                    <a:pt x="6231159" y="280672"/>
+                  </a:lnTo>
+                  <a:lnTo>
+                    <a:pt x="6159537" y="275437"/>
+                  </a:lnTo>
+                  <a:lnTo>
+                    <a:pt x="6087914" y="270155"/>
+                  </a:lnTo>
+                  <a:lnTo>
+                    <a:pt x="6016292" y="264826"/>
+                  </a:lnTo>
+                  <a:lnTo>
+                    <a:pt x="5944669" y="259450"/>
+                  </a:lnTo>
+                  <a:lnTo>
+                    <a:pt x="5873047" y="254025"/>
+                  </a:lnTo>
+                  <a:lnTo>
+                    <a:pt x="5801424" y="248552"/>
+                  </a:lnTo>
+                  <a:lnTo>
+                    <a:pt x="5729802" y="243030"/>
+                  </a:lnTo>
+                  <a:lnTo>
+                    <a:pt x="5658179" y="237459"/>
+                  </a:lnTo>
+                  <a:lnTo>
+                    <a:pt x="5586557" y="231838"/>
+                  </a:lnTo>
+                  <a:lnTo>
+                    <a:pt x="5514934" y="226167"/>
+                  </a:lnTo>
+                  <a:lnTo>
+                    <a:pt x="5443311" y="220445"/>
+                  </a:lnTo>
+                  <a:lnTo>
+                    <a:pt x="5371689" y="214672"/>
+                  </a:lnTo>
+                  <a:lnTo>
+                    <a:pt x="5300066" y="208847"/>
+                  </a:lnTo>
+                  <a:lnTo>
+                    <a:pt x="5228444" y="202970"/>
+                  </a:lnTo>
+                  <a:lnTo>
+                    <a:pt x="5156821" y="197041"/>
+                  </a:lnTo>
+                  <a:lnTo>
+                    <a:pt x="5085199" y="191059"/>
+                  </a:lnTo>
+                  <a:lnTo>
+                    <a:pt x="5013576" y="185023"/>
+                  </a:lnTo>
+                  <a:lnTo>
+                    <a:pt x="4941954" y="178933"/>
+                  </a:lnTo>
+                  <a:lnTo>
+                    <a:pt x="4870331" y="172789"/>
+                  </a:lnTo>
+                  <a:lnTo>
+                    <a:pt x="4798709" y="166590"/>
+                  </a:lnTo>
+                  <a:lnTo>
+                    <a:pt x="4727086" y="160336"/>
+                  </a:lnTo>
+                  <a:lnTo>
+                    <a:pt x="4655464" y="154026"/>
+                  </a:lnTo>
+                  <a:lnTo>
+                    <a:pt x="4583841" y="147659"/>
+                  </a:lnTo>
+                  <a:lnTo>
+                    <a:pt x="4512219" y="141235"/>
+                  </a:lnTo>
+                  <a:lnTo>
+                    <a:pt x="4440596" y="134754"/>
+                  </a:lnTo>
+                  <a:lnTo>
+                    <a:pt x="4368974" y="128216"/>
+                  </a:lnTo>
+                  <a:lnTo>
+                    <a:pt x="4297351" y="121618"/>
+                  </a:lnTo>
+                  <a:lnTo>
+                    <a:pt x="4225729" y="114962"/>
+                  </a:lnTo>
+                  <a:lnTo>
+                    <a:pt x="4154106" y="108246"/>
+                  </a:lnTo>
+                  <a:lnTo>
+                    <a:pt x="4082483" y="101471"/>
+                  </a:lnTo>
+                  <a:lnTo>
+                    <a:pt x="4010861" y="94634"/>
+                  </a:lnTo>
+                  <a:lnTo>
+                    <a:pt x="3939238" y="87737"/>
+                  </a:lnTo>
+                  <a:lnTo>
+                    <a:pt x="3867616" y="80778"/>
+                  </a:lnTo>
+                  <a:lnTo>
+                    <a:pt x="3795993" y="73757"/>
+                  </a:lnTo>
+                  <a:lnTo>
+                    <a:pt x="3724371" y="66673"/>
+                  </a:lnTo>
+                  <a:lnTo>
+                    <a:pt x="3652748" y="59525"/>
+                  </a:lnTo>
+                  <a:lnTo>
+                    <a:pt x="3581126" y="52314"/>
+                  </a:lnTo>
+                  <a:lnTo>
+                    <a:pt x="3509503" y="45039"/>
+                  </a:lnTo>
+                  <a:lnTo>
+                    <a:pt x="3437881" y="37698"/>
+                  </a:lnTo>
+                  <a:lnTo>
+                    <a:pt x="3366258" y="30292"/>
+                  </a:lnTo>
+                  <a:lnTo>
+                    <a:pt x="3294636" y="22820"/>
+                  </a:lnTo>
+                  <a:lnTo>
+                    <a:pt x="3223013" y="15280"/>
+                  </a:lnTo>
+                  <a:lnTo>
+                    <a:pt x="3151391" y="7674"/>
+                  </a:lnTo>
+                  <a:lnTo>
+                    <a:pt x="3079768" y="0"/>
+                  </a:lnTo>
+                  <a:lnTo>
+                    <a:pt x="3008146" y="23024"/>
+                  </a:lnTo>
+                  <a:lnTo>
+                    <a:pt x="2936523" y="65962"/>
+                  </a:lnTo>
+                  <a:lnTo>
+                    <a:pt x="2864901" y="106713"/>
+                  </a:lnTo>
+                  <a:lnTo>
+                    <a:pt x="2793278" y="145390"/>
+                  </a:lnTo>
+                  <a:lnTo>
+                    <a:pt x="2721655" y="182098"/>
+                  </a:lnTo>
+                  <a:lnTo>
+                    <a:pt x="2650033" y="216938"/>
+                  </a:lnTo>
+                  <a:lnTo>
+                    <a:pt x="2578410" y="250004"/>
+                  </a:lnTo>
+                  <a:lnTo>
+                    <a:pt x="2506788" y="281386"/>
+                  </a:lnTo>
+                  <a:lnTo>
+                    <a:pt x="2435165" y="311171"/>
+                  </a:lnTo>
+                  <a:lnTo>
+                    <a:pt x="2363543" y="339440"/>
+                  </a:lnTo>
+                  <a:lnTo>
+                    <a:pt x="2291920" y="366270"/>
+                  </a:lnTo>
+                  <a:lnTo>
+                    <a:pt x="2220298" y="391734"/>
+                  </a:lnTo>
+                  <a:lnTo>
+                    <a:pt x="2148675" y="415901"/>
+                  </a:lnTo>
+                  <a:lnTo>
+                    <a:pt x="2077053" y="438839"/>
+                  </a:lnTo>
+                  <a:lnTo>
+                    <a:pt x="2005430" y="460609"/>
+                  </a:lnTo>
+                  <a:lnTo>
+                    <a:pt x="1933808" y="481270"/>
+                  </a:lnTo>
+                  <a:lnTo>
+                    <a:pt x="1862185" y="500880"/>
+                  </a:lnTo>
+                  <a:lnTo>
+                    <a:pt x="1790563" y="519491"/>
+                  </a:lnTo>
+                  <a:lnTo>
+                    <a:pt x="1718940" y="537155"/>
+                  </a:lnTo>
+                  <a:lnTo>
+                    <a:pt x="1647318" y="553920"/>
+                  </a:lnTo>
+                  <a:lnTo>
+                    <a:pt x="1575695" y="569831"/>
+                  </a:lnTo>
+                  <a:lnTo>
+                    <a:pt x="1504073" y="584932"/>
+                  </a:lnTo>
+                  <a:lnTo>
+                    <a:pt x="1432450" y="599265"/>
+                  </a:lnTo>
+                  <a:lnTo>
+                    <a:pt x="1360827" y="612868"/>
+                  </a:lnTo>
+                  <a:lnTo>
+                    <a:pt x="1289205" y="625778"/>
+                  </a:lnTo>
+                  <a:lnTo>
+                    <a:pt x="1217582" y="638032"/>
+                  </a:lnTo>
+                  <a:lnTo>
+                    <a:pt x="1145960" y="649661"/>
+                  </a:lnTo>
+                  <a:lnTo>
+                    <a:pt x="1074337" y="660699"/>
+                  </a:lnTo>
+                  <a:lnTo>
+                    <a:pt x="1002715" y="671174"/>
+                  </a:lnTo>
+                  <a:lnTo>
+                    <a:pt x="931092" y="681116"/>
+                  </a:lnTo>
+                  <a:lnTo>
+                    <a:pt x="859470" y="690553"/>
+                  </a:lnTo>
+                  <a:lnTo>
+                    <a:pt x="787847" y="699508"/>
+                  </a:lnTo>
+                  <a:lnTo>
+                    <a:pt x="716225" y="708008"/>
+                  </a:lnTo>
+                  <a:lnTo>
+                    <a:pt x="644602" y="716076"/>
+                  </a:lnTo>
+                  <a:lnTo>
+                    <a:pt x="572980" y="723732"/>
+                  </a:lnTo>
+                  <a:lnTo>
+                    <a:pt x="501357" y="730999"/>
+                  </a:lnTo>
+                  <a:lnTo>
+                    <a:pt x="429735" y="737896"/>
+                  </a:lnTo>
+                  <a:lnTo>
+                    <a:pt x="358112" y="744441"/>
+                  </a:lnTo>
+                  <a:lnTo>
+                    <a:pt x="286490" y="750654"/>
+                  </a:lnTo>
+                  <a:lnTo>
+                    <a:pt x="214867" y="756550"/>
+                  </a:lnTo>
+                  <a:lnTo>
+                    <a:pt x="143245" y="762146"/>
+                  </a:lnTo>
+                  <a:lnTo>
+                    <a:pt x="71622" y="767457"/>
+                  </a:lnTo>
+                  <a:lnTo>
+                    <a:pt x="0" y="772498"/>
                   </a:lnTo>
                 </a:path>
               </a:pathLst>
@@ -4253,312 +4247,312 @@
           </p:nvSpPr>
           <p:spPr>
             <a:xfrm>
-              <a:off x="1172049" y="1896563"/>
-              <a:ext cx="7029120" cy="3363163"/>
+              <a:off x="1172049" y="2595140"/>
+              <a:ext cx="7090630" cy="2608550"/>
             </a:xfrm>
             <a:custGeom>
               <a:avLst/>
               <a:pathLst>
-                <a:path w="7029120" h="3363163">
+                <a:path w="7090630" h="2608550">
                   <a:moveTo>
-                    <a:pt x="0" y="3363163"/>
+                    <a:pt x="0" y="2608550"/>
                   </a:moveTo>
                   <a:lnTo>
-                    <a:pt x="71622" y="3355588"/>
-                  </a:lnTo>
-                  <a:lnTo>
-                    <a:pt x="143245" y="3347815"/>
-                  </a:lnTo>
-                  <a:lnTo>
-                    <a:pt x="214867" y="3339838"/>
-                  </a:lnTo>
-                  <a:lnTo>
-                    <a:pt x="286490" y="3331653"/>
-                  </a:lnTo>
-                  <a:lnTo>
-                    <a:pt x="358112" y="3323254"/>
-                  </a:lnTo>
-                  <a:lnTo>
-                    <a:pt x="429735" y="3314634"/>
-                  </a:lnTo>
-                  <a:lnTo>
-                    <a:pt x="501357" y="3305790"/>
-                  </a:lnTo>
-                  <a:lnTo>
-                    <a:pt x="572980" y="3296713"/>
-                  </a:lnTo>
-                  <a:lnTo>
-                    <a:pt x="644602" y="3287400"/>
-                  </a:lnTo>
-                  <a:lnTo>
-                    <a:pt x="716225" y="3277842"/>
-                  </a:lnTo>
-                  <a:lnTo>
-                    <a:pt x="787847" y="3268034"/>
-                  </a:lnTo>
-                  <a:lnTo>
-                    <a:pt x="859470" y="3257970"/>
-                  </a:lnTo>
-                  <a:lnTo>
-                    <a:pt x="931092" y="3247643"/>
-                  </a:lnTo>
-                  <a:lnTo>
-                    <a:pt x="1002715" y="3237045"/>
-                  </a:lnTo>
-                  <a:lnTo>
-                    <a:pt x="1074337" y="3226170"/>
-                  </a:lnTo>
-                  <a:lnTo>
-                    <a:pt x="1145960" y="3215010"/>
-                  </a:lnTo>
-                  <a:lnTo>
-                    <a:pt x="1217582" y="3203558"/>
-                  </a:lnTo>
-                  <a:lnTo>
-                    <a:pt x="1289205" y="3191807"/>
-                  </a:lnTo>
-                  <a:lnTo>
-                    <a:pt x="1360827" y="3179748"/>
-                  </a:lnTo>
-                  <a:lnTo>
-                    <a:pt x="1432450" y="3167373"/>
-                  </a:lnTo>
-                  <a:lnTo>
-                    <a:pt x="1504073" y="3154675"/>
-                  </a:lnTo>
-                  <a:lnTo>
-                    <a:pt x="1575695" y="3141645"/>
-                  </a:lnTo>
-                  <a:lnTo>
-                    <a:pt x="1647318" y="3128273"/>
-                  </a:lnTo>
-                  <a:lnTo>
-                    <a:pt x="1718940" y="3114552"/>
-                  </a:lnTo>
-                  <a:lnTo>
-                    <a:pt x="1790563" y="3100471"/>
-                  </a:lnTo>
-                  <a:lnTo>
-                    <a:pt x="1862185" y="3086022"/>
-                  </a:lnTo>
-                  <a:lnTo>
-                    <a:pt x="1933808" y="3071195"/>
-                  </a:lnTo>
-                  <a:lnTo>
-                    <a:pt x="2005430" y="3055980"/>
-                  </a:lnTo>
-                  <a:lnTo>
-                    <a:pt x="2077053" y="3040367"/>
-                  </a:lnTo>
-                  <a:lnTo>
-                    <a:pt x="2148675" y="3024345"/>
-                  </a:lnTo>
-                  <a:lnTo>
-                    <a:pt x="2220298" y="3007904"/>
-                  </a:lnTo>
-                  <a:lnTo>
-                    <a:pt x="2291920" y="2991033"/>
-                  </a:lnTo>
-                  <a:lnTo>
-                    <a:pt x="2363543" y="2973720"/>
-                  </a:lnTo>
-                  <a:lnTo>
-                    <a:pt x="2435165" y="2955955"/>
-                  </a:lnTo>
-                  <a:lnTo>
-                    <a:pt x="2506788" y="2937724"/>
-                  </a:lnTo>
-                  <a:lnTo>
-                    <a:pt x="2578410" y="2919017"/>
-                  </a:lnTo>
-                  <a:lnTo>
-                    <a:pt x="2650033" y="2899819"/>
-                  </a:lnTo>
-                  <a:lnTo>
-                    <a:pt x="2721655" y="2880120"/>
-                  </a:lnTo>
-                  <a:lnTo>
-                    <a:pt x="2793278" y="2859905"/>
-                  </a:lnTo>
-                  <a:lnTo>
-                    <a:pt x="2864901" y="2839161"/>
-                  </a:lnTo>
-                  <a:lnTo>
-                    <a:pt x="2936523" y="2817874"/>
-                  </a:lnTo>
-                  <a:lnTo>
-                    <a:pt x="3008146" y="2796031"/>
-                  </a:lnTo>
-                  <a:lnTo>
-                    <a:pt x="3079768" y="2773615"/>
-                  </a:lnTo>
-                  <a:lnTo>
-                    <a:pt x="3151391" y="2750613"/>
-                  </a:lnTo>
-                  <a:lnTo>
-                    <a:pt x="3223013" y="2727009"/>
-                  </a:lnTo>
-                  <a:lnTo>
-                    <a:pt x="3294636" y="2702788"/>
-                  </a:lnTo>
-                  <a:lnTo>
-                    <a:pt x="3366258" y="2677933"/>
-                  </a:lnTo>
-                  <a:lnTo>
-                    <a:pt x="3437881" y="2652427"/>
-                  </a:lnTo>
-                  <a:lnTo>
-                    <a:pt x="3509503" y="2626254"/>
-                  </a:lnTo>
-                  <a:lnTo>
-                    <a:pt x="3581126" y="2599396"/>
-                  </a:lnTo>
-                  <a:lnTo>
-                    <a:pt x="3652748" y="2571835"/>
-                  </a:lnTo>
-                  <a:lnTo>
-                    <a:pt x="3724371" y="2543553"/>
-                  </a:lnTo>
-                  <a:lnTo>
-                    <a:pt x="3795993" y="2514531"/>
-                  </a:lnTo>
-                  <a:lnTo>
-                    <a:pt x="3867616" y="2484750"/>
-                  </a:lnTo>
-                  <a:lnTo>
-                    <a:pt x="3939238" y="2454189"/>
-                  </a:lnTo>
-                  <a:lnTo>
-                    <a:pt x="4010861" y="2422828"/>
-                  </a:lnTo>
-                  <a:lnTo>
-                    <a:pt x="4082483" y="2390647"/>
-                  </a:lnTo>
-                  <a:lnTo>
-                    <a:pt x="4154106" y="2357624"/>
-                  </a:lnTo>
-                  <a:lnTo>
-                    <a:pt x="4225729" y="2323737"/>
-                  </a:lnTo>
-                  <a:lnTo>
-                    <a:pt x="4297351" y="2288962"/>
-                  </a:lnTo>
-                  <a:lnTo>
-                    <a:pt x="4368974" y="2253278"/>
-                  </a:lnTo>
-                  <a:lnTo>
-                    <a:pt x="4440596" y="2216661"/>
-                  </a:lnTo>
-                  <a:lnTo>
-                    <a:pt x="4512219" y="2179085"/>
-                  </a:lnTo>
-                  <a:lnTo>
-                    <a:pt x="4583841" y="2140525"/>
-                  </a:lnTo>
-                  <a:lnTo>
-                    <a:pt x="4655464" y="2100957"/>
-                  </a:lnTo>
-                  <a:lnTo>
-                    <a:pt x="4727086" y="2060353"/>
-                  </a:lnTo>
-                  <a:lnTo>
-                    <a:pt x="4798709" y="2018687"/>
-                  </a:lnTo>
-                  <a:lnTo>
-                    <a:pt x="4870331" y="1975931"/>
-                  </a:lnTo>
-                  <a:lnTo>
-                    <a:pt x="4941954" y="1932055"/>
-                  </a:lnTo>
-                  <a:lnTo>
-                    <a:pt x="5013576" y="1887032"/>
-                  </a:lnTo>
-                  <a:lnTo>
-                    <a:pt x="5085199" y="1840831"/>
-                  </a:lnTo>
-                  <a:lnTo>
-                    <a:pt x="5156821" y="1793420"/>
-                  </a:lnTo>
-                  <a:lnTo>
-                    <a:pt x="5228444" y="1744769"/>
-                  </a:lnTo>
-                  <a:lnTo>
-                    <a:pt x="5300066" y="1694845"/>
-                  </a:lnTo>
-                  <a:lnTo>
-                    <a:pt x="5371689" y="1643614"/>
-                  </a:lnTo>
-                  <a:lnTo>
-                    <a:pt x="5443311" y="1591043"/>
-                  </a:lnTo>
-                  <a:lnTo>
-                    <a:pt x="5514934" y="1537096"/>
-                  </a:lnTo>
-                  <a:lnTo>
-                    <a:pt x="5586557" y="1481738"/>
-                  </a:lnTo>
-                  <a:lnTo>
-                    <a:pt x="5658179" y="1424931"/>
-                  </a:lnTo>
-                  <a:lnTo>
-                    <a:pt x="5729802" y="1366637"/>
-                  </a:lnTo>
-                  <a:lnTo>
-                    <a:pt x="5801424" y="1306818"/>
-                  </a:lnTo>
-                  <a:lnTo>
-                    <a:pt x="5873047" y="1245434"/>
-                  </a:lnTo>
-                  <a:lnTo>
-                    <a:pt x="5944669" y="1182443"/>
-                  </a:lnTo>
-                  <a:lnTo>
-                    <a:pt x="6016292" y="1117805"/>
-                  </a:lnTo>
-                  <a:lnTo>
-                    <a:pt x="6087914" y="1051474"/>
-                  </a:lnTo>
-                  <a:lnTo>
-                    <a:pt x="6159537" y="983408"/>
-                  </a:lnTo>
-                  <a:lnTo>
-                    <a:pt x="6231159" y="913561"/>
-                  </a:lnTo>
-                  <a:lnTo>
-                    <a:pt x="6302782" y="841886"/>
-                  </a:lnTo>
-                  <a:lnTo>
-                    <a:pt x="6374404" y="768336"/>
-                  </a:lnTo>
-                  <a:lnTo>
-                    <a:pt x="6446027" y="692861"/>
-                  </a:lnTo>
-                  <a:lnTo>
-                    <a:pt x="6517649" y="615411"/>
-                  </a:lnTo>
-                  <a:lnTo>
-                    <a:pt x="6589272" y="535935"/>
-                  </a:lnTo>
-                  <a:lnTo>
-                    <a:pt x="6660894" y="454378"/>
-                  </a:lnTo>
-                  <a:lnTo>
-                    <a:pt x="6732517" y="370688"/>
-                  </a:lnTo>
-                  <a:lnTo>
-                    <a:pt x="6804139" y="284807"/>
-                  </a:lnTo>
-                  <a:lnTo>
-                    <a:pt x="6875762" y="196680"/>
-                  </a:lnTo>
-                  <a:lnTo>
-                    <a:pt x="6947385" y="106246"/>
-                  </a:lnTo>
-                  <a:lnTo>
-                    <a:pt x="7019007" y="13446"/>
-                  </a:lnTo>
-                  <a:lnTo>
-                    <a:pt x="7029120" y="0"/>
+                    <a:pt x="71622" y="2600979"/>
+                  </a:lnTo>
+                  <a:lnTo>
+                    <a:pt x="143245" y="2593242"/>
+                  </a:lnTo>
+                  <a:lnTo>
+                    <a:pt x="214867" y="2585335"/>
+                  </a:lnTo>
+                  <a:lnTo>
+                    <a:pt x="286490" y="2577256"/>
+                  </a:lnTo>
+                  <a:lnTo>
+                    <a:pt x="358112" y="2568999"/>
+                  </a:lnTo>
+                  <a:lnTo>
+                    <a:pt x="429735" y="2560561"/>
+                  </a:lnTo>
+                  <a:lnTo>
+                    <a:pt x="501357" y="2551938"/>
+                  </a:lnTo>
+                  <a:lnTo>
+                    <a:pt x="572980" y="2543127"/>
+                  </a:lnTo>
+                  <a:lnTo>
+                    <a:pt x="644602" y="2534122"/>
+                  </a:lnTo>
+                  <a:lnTo>
+                    <a:pt x="716225" y="2524920"/>
+                  </a:lnTo>
+                  <a:lnTo>
+                    <a:pt x="787847" y="2515517"/>
+                  </a:lnTo>
+                  <a:lnTo>
+                    <a:pt x="859470" y="2505907"/>
+                  </a:lnTo>
+                  <a:lnTo>
+                    <a:pt x="931092" y="2496087"/>
+                  </a:lnTo>
+                  <a:lnTo>
+                    <a:pt x="1002715" y="2486051"/>
+                  </a:lnTo>
+                  <a:lnTo>
+                    <a:pt x="1074337" y="2475796"/>
+                  </a:lnTo>
+                  <a:lnTo>
+                    <a:pt x="1145960" y="2465316"/>
+                  </a:lnTo>
+                  <a:lnTo>
+                    <a:pt x="1217582" y="2454606"/>
+                  </a:lnTo>
+                  <a:lnTo>
+                    <a:pt x="1289205" y="2443662"/>
+                  </a:lnTo>
+                  <a:lnTo>
+                    <a:pt x="1360827" y="2432478"/>
+                  </a:lnTo>
+                  <a:lnTo>
+                    <a:pt x="1432450" y="2421049"/>
+                  </a:lnTo>
+                  <a:lnTo>
+                    <a:pt x="1504073" y="2409369"/>
+                  </a:lnTo>
+                  <a:lnTo>
+                    <a:pt x="1575695" y="2397433"/>
+                  </a:lnTo>
+                  <a:lnTo>
+                    <a:pt x="1647318" y="2385236"/>
+                  </a:lnTo>
+                  <a:lnTo>
+                    <a:pt x="1718940" y="2372772"/>
+                  </a:lnTo>
+                  <a:lnTo>
+                    <a:pt x="1790563" y="2360034"/>
+                  </a:lnTo>
+                  <a:lnTo>
+                    <a:pt x="1862185" y="2347018"/>
+                  </a:lnTo>
+                  <a:lnTo>
+                    <a:pt x="1933808" y="2333716"/>
+                  </a:lnTo>
+                  <a:lnTo>
+                    <a:pt x="2005430" y="2320122"/>
+                  </a:lnTo>
+                  <a:lnTo>
+                    <a:pt x="2077053" y="2306231"/>
+                  </a:lnTo>
+                  <a:lnTo>
+                    <a:pt x="2148675" y="2292036"/>
+                  </a:lnTo>
+                  <a:lnTo>
+                    <a:pt x="2220298" y="2277529"/>
+                  </a:lnTo>
+                  <a:lnTo>
+                    <a:pt x="2291920" y="2262704"/>
+                  </a:lnTo>
+                  <a:lnTo>
+                    <a:pt x="2363543" y="2247555"/>
+                  </a:lnTo>
+                  <a:lnTo>
+                    <a:pt x="2435165" y="2232074"/>
+                  </a:lnTo>
+                  <a:lnTo>
+                    <a:pt x="2506788" y="2216253"/>
+                  </a:lnTo>
+                  <a:lnTo>
+                    <a:pt x="2578410" y="2200086"/>
+                  </a:lnTo>
+                  <a:lnTo>
+                    <a:pt x="2650033" y="2183564"/>
+                  </a:lnTo>
+                  <a:lnTo>
+                    <a:pt x="2721655" y="2166681"/>
+                  </a:lnTo>
+                  <a:lnTo>
+                    <a:pt x="2793278" y="2149427"/>
+                  </a:lnTo>
+                  <a:lnTo>
+                    <a:pt x="2864901" y="2131796"/>
+                  </a:lnTo>
+                  <a:lnTo>
+                    <a:pt x="2936523" y="2113778"/>
+                  </a:lnTo>
+                  <a:lnTo>
+                    <a:pt x="3008146" y="2095365"/>
+                  </a:lnTo>
+                  <a:lnTo>
+                    <a:pt x="3079768" y="2076549"/>
+                  </a:lnTo>
+                  <a:lnTo>
+                    <a:pt x="3151391" y="2057321"/>
+                  </a:lnTo>
+                  <a:lnTo>
+                    <a:pt x="3223013" y="2037671"/>
+                  </a:lnTo>
+                  <a:lnTo>
+                    <a:pt x="3294636" y="2017590"/>
+                  </a:lnTo>
+                  <a:lnTo>
+                    <a:pt x="3366258" y="1997070"/>
+                  </a:lnTo>
+                  <a:lnTo>
+                    <a:pt x="3437881" y="1976100"/>
+                  </a:lnTo>
+                  <a:lnTo>
+                    <a:pt x="3509503" y="1954670"/>
+                  </a:lnTo>
+                  <a:lnTo>
+                    <a:pt x="3581126" y="1932771"/>
+                  </a:lnTo>
+                  <a:lnTo>
+                    <a:pt x="3652748" y="1910392"/>
+                  </a:lnTo>
+                  <a:lnTo>
+                    <a:pt x="3724371" y="1887523"/>
+                  </a:lnTo>
+                  <a:lnTo>
+                    <a:pt x="3795993" y="1864152"/>
+                  </a:lnTo>
+                  <a:lnTo>
+                    <a:pt x="3867616" y="1840270"/>
+                  </a:lnTo>
+                  <a:lnTo>
+                    <a:pt x="3939238" y="1815864"/>
+                  </a:lnTo>
+                  <a:lnTo>
+                    <a:pt x="4010861" y="1790923"/>
+                  </a:lnTo>
+                  <a:lnTo>
+                    <a:pt x="4082483" y="1765436"/>
+                  </a:lnTo>
+                  <a:lnTo>
+                    <a:pt x="4154106" y="1739390"/>
+                  </a:lnTo>
+                  <a:lnTo>
+                    <a:pt x="4225729" y="1712774"/>
+                  </a:lnTo>
+                  <a:lnTo>
+                    <a:pt x="4297351" y="1685574"/>
+                  </a:lnTo>
+                  <a:lnTo>
+                    <a:pt x="4368974" y="1657778"/>
+                  </a:lnTo>
+                  <a:lnTo>
+                    <a:pt x="4440596" y="1629374"/>
+                  </a:lnTo>
+                  <a:lnTo>
+                    <a:pt x="4512219" y="1600347"/>
+                  </a:lnTo>
+                  <a:lnTo>
+                    <a:pt x="4583841" y="1570683"/>
+                  </a:lnTo>
+                  <a:lnTo>
+                    <a:pt x="4655464" y="1540370"/>
+                  </a:lnTo>
+                  <a:lnTo>
+                    <a:pt x="4727086" y="1509393"/>
+                  </a:lnTo>
+                  <a:lnTo>
+                    <a:pt x="4798709" y="1477737"/>
+                  </a:lnTo>
+                  <a:lnTo>
+                    <a:pt x="4870331" y="1445387"/>
+                  </a:lnTo>
+                  <a:lnTo>
+                    <a:pt x="4941954" y="1412328"/>
+                  </a:lnTo>
+                  <a:lnTo>
+                    <a:pt x="5013576" y="1378545"/>
+                  </a:lnTo>
+                  <a:lnTo>
+                    <a:pt x="5085199" y="1344021"/>
+                  </a:lnTo>
+                  <a:lnTo>
+                    <a:pt x="5156821" y="1308742"/>
+                  </a:lnTo>
+                  <a:lnTo>
+                    <a:pt x="5228444" y="1272689"/>
+                  </a:lnTo>
+                  <a:lnTo>
+                    <a:pt x="5300066" y="1235846"/>
+                  </a:lnTo>
+                  <a:lnTo>
+                    <a:pt x="5371689" y="1198195"/>
+                  </a:lnTo>
+                  <a:lnTo>
+                    <a:pt x="5443311" y="1159720"/>
+                  </a:lnTo>
+                  <a:lnTo>
+                    <a:pt x="5514934" y="1120402"/>
+                  </a:lnTo>
+                  <a:lnTo>
+                    <a:pt x="5586557" y="1080222"/>
+                  </a:lnTo>
+                  <a:lnTo>
+                    <a:pt x="5658179" y="1039161"/>
+                  </a:lnTo>
+                  <a:lnTo>
+                    <a:pt x="5729802" y="997201"/>
+                  </a:lnTo>
+                  <a:lnTo>
+                    <a:pt x="5801424" y="954322"/>
+                  </a:lnTo>
+                  <a:lnTo>
+                    <a:pt x="5873047" y="910503"/>
+                  </a:lnTo>
+                  <a:lnTo>
+                    <a:pt x="5944669" y="865723"/>
+                  </a:lnTo>
+                  <a:lnTo>
+                    <a:pt x="6016292" y="819963"/>
+                  </a:lnTo>
+                  <a:lnTo>
+                    <a:pt x="6087914" y="773199"/>
+                  </a:lnTo>
+                  <a:lnTo>
+                    <a:pt x="6159537" y="725412"/>
+                  </a:lnTo>
+                  <a:lnTo>
+                    <a:pt x="6231159" y="676576"/>
+                  </a:lnTo>
+                  <a:lnTo>
+                    <a:pt x="6302782" y="626671"/>
+                  </a:lnTo>
+                  <a:lnTo>
+                    <a:pt x="6374404" y="575672"/>
+                  </a:lnTo>
+                  <a:lnTo>
+                    <a:pt x="6446027" y="523556"/>
+                  </a:lnTo>
+                  <a:lnTo>
+                    <a:pt x="6517649" y="470298"/>
+                  </a:lnTo>
+                  <a:lnTo>
+                    <a:pt x="6589272" y="415873"/>
+                  </a:lnTo>
+                  <a:lnTo>
+                    <a:pt x="6660894" y="360255"/>
+                  </a:lnTo>
+                  <a:lnTo>
+                    <a:pt x="6732517" y="303418"/>
+                  </a:lnTo>
+                  <a:lnTo>
+                    <a:pt x="6804139" y="245336"/>
+                  </a:lnTo>
+                  <a:lnTo>
+                    <a:pt x="6875762" y="185982"/>
+                  </a:lnTo>
+                  <a:lnTo>
+                    <a:pt x="6947385" y="125326"/>
+                  </a:lnTo>
+                  <a:lnTo>
+                    <a:pt x="7019007" y="63342"/>
+                  </a:lnTo>
+                  <a:lnTo>
+                    <a:pt x="7090630" y="0"/>
                   </a:lnTo>
                 </a:path>
               </a:pathLst>

--- a/docs/plots/carbo/jx_carbo_linsubhr_dosedisc_akikdigo.pptx
+++ b/docs/plots/carbo/jx_carbo_linsubhr_dosedisc_akikdigo.pptx
@@ -3132,530 +3132,536 @@
           <p:spPr>
             <a:xfrm>
               <a:off x="1172049" y="1896563"/>
-              <a:ext cx="7090630" cy="3558663"/>
+              <a:ext cx="7090630" cy="3537115"/>
             </a:xfrm>
             <a:custGeom>
               <a:avLst/>
               <a:pathLst>
-                <a:path w="7090630" h="3558663">
+                <a:path w="7090630" h="3537115">
                   <a:moveTo>
-                    <a:pt x="0" y="2382367"/>
+                    <a:pt x="0" y="2741512"/>
                   </a:moveTo>
                   <a:lnTo>
-                    <a:pt x="71622" y="2393618"/>
-                  </a:lnTo>
-                  <a:lnTo>
-                    <a:pt x="143245" y="2404769"/>
-                  </a:lnTo>
-                  <a:lnTo>
-                    <a:pt x="214867" y="2415822"/>
-                  </a:lnTo>
-                  <a:lnTo>
-                    <a:pt x="286490" y="2426776"/>
-                  </a:lnTo>
-                  <a:lnTo>
-                    <a:pt x="358112" y="2437634"/>
-                  </a:lnTo>
-                  <a:lnTo>
-                    <a:pt x="429735" y="2448396"/>
-                  </a:lnTo>
-                  <a:lnTo>
-                    <a:pt x="501357" y="2459062"/>
-                  </a:lnTo>
-                  <a:lnTo>
-                    <a:pt x="572980" y="2469633"/>
-                  </a:lnTo>
-                  <a:lnTo>
-                    <a:pt x="644602" y="2480111"/>
-                  </a:lnTo>
-                  <a:lnTo>
-                    <a:pt x="716225" y="2490497"/>
-                  </a:lnTo>
-                  <a:lnTo>
-                    <a:pt x="787847" y="2500790"/>
-                  </a:lnTo>
-                  <a:lnTo>
-                    <a:pt x="859470" y="2510992"/>
-                  </a:lnTo>
-                  <a:lnTo>
-                    <a:pt x="931092" y="2521104"/>
-                  </a:lnTo>
-                  <a:lnTo>
-                    <a:pt x="1002715" y="2531126"/>
-                  </a:lnTo>
-                  <a:lnTo>
-                    <a:pt x="1074337" y="2541059"/>
-                  </a:lnTo>
-                  <a:lnTo>
-                    <a:pt x="1145960" y="2550904"/>
-                  </a:lnTo>
-                  <a:lnTo>
-                    <a:pt x="1217582" y="2560663"/>
-                  </a:lnTo>
-                  <a:lnTo>
-                    <a:pt x="1289205" y="2570334"/>
-                  </a:lnTo>
-                  <a:lnTo>
-                    <a:pt x="1360827" y="2579920"/>
-                  </a:lnTo>
-                  <a:lnTo>
-                    <a:pt x="1432450" y="2589422"/>
-                  </a:lnTo>
-                  <a:lnTo>
-                    <a:pt x="1504073" y="2598839"/>
-                  </a:lnTo>
-                  <a:lnTo>
-                    <a:pt x="1575695" y="2608172"/>
-                  </a:lnTo>
-                  <a:lnTo>
-                    <a:pt x="1647318" y="2617423"/>
-                  </a:lnTo>
-                  <a:lnTo>
-                    <a:pt x="1718940" y="2626592"/>
-                  </a:lnTo>
-                  <a:lnTo>
-                    <a:pt x="1790563" y="2635680"/>
-                  </a:lnTo>
-                  <a:lnTo>
-                    <a:pt x="1862185" y="2644687"/>
-                  </a:lnTo>
-                  <a:lnTo>
-                    <a:pt x="1933808" y="2653615"/>
-                  </a:lnTo>
-                  <a:lnTo>
-                    <a:pt x="2005430" y="2662463"/>
-                  </a:lnTo>
-                  <a:lnTo>
-                    <a:pt x="2077053" y="2671234"/>
-                  </a:lnTo>
-                  <a:lnTo>
-                    <a:pt x="2148675" y="2679926"/>
-                  </a:lnTo>
-                  <a:lnTo>
-                    <a:pt x="2220298" y="2688541"/>
-                  </a:lnTo>
-                  <a:lnTo>
-                    <a:pt x="2291920" y="2697081"/>
-                  </a:lnTo>
-                  <a:lnTo>
-                    <a:pt x="2363543" y="2705544"/>
-                  </a:lnTo>
-                  <a:lnTo>
-                    <a:pt x="2435165" y="2713933"/>
-                  </a:lnTo>
-                  <a:lnTo>
-                    <a:pt x="2506788" y="2722247"/>
-                  </a:lnTo>
-                  <a:lnTo>
-                    <a:pt x="2578410" y="2730487"/>
-                  </a:lnTo>
-                  <a:lnTo>
-                    <a:pt x="2650033" y="2738655"/>
-                  </a:lnTo>
-                  <a:lnTo>
-                    <a:pt x="2721655" y="2746750"/>
-                  </a:lnTo>
-                  <a:lnTo>
-                    <a:pt x="2793278" y="2754774"/>
-                  </a:lnTo>
-                  <a:lnTo>
-                    <a:pt x="2864901" y="2762726"/>
-                  </a:lnTo>
-                  <a:lnTo>
-                    <a:pt x="2936523" y="2770608"/>
-                  </a:lnTo>
-                  <a:lnTo>
-                    <a:pt x="3008146" y="2778421"/>
-                  </a:lnTo>
-                  <a:lnTo>
-                    <a:pt x="3079768" y="2763948"/>
-                  </a:lnTo>
-                  <a:lnTo>
-                    <a:pt x="3151391" y="2716281"/>
-                  </a:lnTo>
-                  <a:lnTo>
-                    <a:pt x="3223013" y="2666057"/>
-                  </a:lnTo>
-                  <a:lnTo>
-                    <a:pt x="3294636" y="2613140"/>
-                  </a:lnTo>
-                  <a:lnTo>
-                    <a:pt x="3366258" y="2557384"/>
-                  </a:lnTo>
-                  <a:lnTo>
-                    <a:pt x="3437881" y="2498637"/>
-                  </a:lnTo>
-                  <a:lnTo>
-                    <a:pt x="3509503" y="2436740"/>
-                  </a:lnTo>
-                  <a:lnTo>
-                    <a:pt x="3581126" y="2371522"/>
-                  </a:lnTo>
-                  <a:lnTo>
-                    <a:pt x="3652748" y="2302807"/>
-                  </a:lnTo>
-                  <a:lnTo>
-                    <a:pt x="3724371" y="2230406"/>
-                  </a:lnTo>
-                  <a:lnTo>
-                    <a:pt x="3795993" y="2154121"/>
-                  </a:lnTo>
-                  <a:lnTo>
-                    <a:pt x="3867616" y="2073745"/>
-                  </a:lnTo>
-                  <a:lnTo>
-                    <a:pt x="3939238" y="1989057"/>
-                  </a:lnTo>
-                  <a:lnTo>
-                    <a:pt x="4010861" y="1899828"/>
-                  </a:lnTo>
-                  <a:lnTo>
-                    <a:pt x="4082483" y="1805812"/>
-                  </a:lnTo>
-                  <a:lnTo>
-                    <a:pt x="4154106" y="1706753"/>
-                  </a:lnTo>
-                  <a:lnTo>
-                    <a:pt x="4225729" y="1602381"/>
-                  </a:lnTo>
-                  <a:lnTo>
-                    <a:pt x="4297351" y="1492411"/>
-                  </a:lnTo>
-                  <a:lnTo>
-                    <a:pt x="4368974" y="1376543"/>
-                  </a:lnTo>
-                  <a:lnTo>
-                    <a:pt x="4440596" y="1254460"/>
-                  </a:lnTo>
-                  <a:lnTo>
-                    <a:pt x="4512219" y="1125828"/>
-                  </a:lnTo>
-                  <a:lnTo>
-                    <a:pt x="4583841" y="990297"/>
-                  </a:lnTo>
-                  <a:lnTo>
-                    <a:pt x="4655464" y="847497"/>
-                  </a:lnTo>
-                  <a:lnTo>
-                    <a:pt x="4727086" y="697037"/>
-                  </a:lnTo>
-                  <a:lnTo>
-                    <a:pt x="4798709" y="538507"/>
-                  </a:lnTo>
-                  <a:lnTo>
-                    <a:pt x="4870331" y="371474"/>
-                  </a:lnTo>
-                  <a:lnTo>
-                    <a:pt x="4941954" y="195482"/>
-                  </a:lnTo>
-                  <a:lnTo>
-                    <a:pt x="5013576" y="10050"/>
-                  </a:lnTo>
-                  <a:lnTo>
-                    <a:pt x="5017261" y="0"/>
+                    <a:pt x="71622" y="2742508"/>
+                  </a:lnTo>
+                  <a:lnTo>
+                    <a:pt x="143245" y="2743503"/>
+                  </a:lnTo>
+                  <a:lnTo>
+                    <a:pt x="214867" y="2744496"/>
+                  </a:lnTo>
+                  <a:lnTo>
+                    <a:pt x="286490" y="2745489"/>
+                  </a:lnTo>
+                  <a:lnTo>
+                    <a:pt x="358112" y="2746480"/>
+                  </a:lnTo>
+                  <a:lnTo>
+                    <a:pt x="429735" y="2747470"/>
+                  </a:lnTo>
+                  <a:lnTo>
+                    <a:pt x="501357" y="2748460"/>
+                  </a:lnTo>
+                  <a:lnTo>
+                    <a:pt x="572980" y="2749448"/>
+                  </a:lnTo>
+                  <a:lnTo>
+                    <a:pt x="644602" y="2750435"/>
+                  </a:lnTo>
+                  <a:lnTo>
+                    <a:pt x="716225" y="2751421"/>
+                  </a:lnTo>
+                  <a:lnTo>
+                    <a:pt x="787847" y="2752406"/>
+                  </a:lnTo>
+                  <a:lnTo>
+                    <a:pt x="859470" y="2753389"/>
+                  </a:lnTo>
+                  <a:lnTo>
+                    <a:pt x="931092" y="2754372"/>
+                  </a:lnTo>
+                  <a:lnTo>
+                    <a:pt x="1002715" y="2755354"/>
+                  </a:lnTo>
+                  <a:lnTo>
+                    <a:pt x="1074337" y="2756334"/>
+                  </a:lnTo>
+                  <a:lnTo>
+                    <a:pt x="1145960" y="2757314"/>
+                  </a:lnTo>
+                  <a:lnTo>
+                    <a:pt x="1217582" y="2758292"/>
+                  </a:lnTo>
+                  <a:lnTo>
+                    <a:pt x="1289205" y="2759270"/>
+                  </a:lnTo>
+                  <a:lnTo>
+                    <a:pt x="1360827" y="2760246"/>
+                  </a:lnTo>
+                  <a:lnTo>
+                    <a:pt x="1432450" y="2761221"/>
+                  </a:lnTo>
+                  <a:lnTo>
+                    <a:pt x="1504073" y="2762195"/>
+                  </a:lnTo>
+                  <a:lnTo>
+                    <a:pt x="1575695" y="2763168"/>
+                  </a:lnTo>
+                  <a:lnTo>
+                    <a:pt x="1647318" y="2764141"/>
+                  </a:lnTo>
+                  <a:lnTo>
+                    <a:pt x="1718940" y="2765111"/>
+                  </a:lnTo>
+                  <a:lnTo>
+                    <a:pt x="1790563" y="2766081"/>
+                  </a:lnTo>
+                  <a:lnTo>
+                    <a:pt x="1862185" y="2767050"/>
+                  </a:lnTo>
+                  <a:lnTo>
+                    <a:pt x="1933808" y="2768018"/>
+                  </a:lnTo>
+                  <a:lnTo>
+                    <a:pt x="2005430" y="2768985"/>
+                  </a:lnTo>
+                  <a:lnTo>
+                    <a:pt x="2077053" y="2769951"/>
+                  </a:lnTo>
+                  <a:lnTo>
+                    <a:pt x="2148675" y="2770915"/>
+                  </a:lnTo>
+                  <a:lnTo>
+                    <a:pt x="2220298" y="2771879"/>
+                  </a:lnTo>
+                  <a:lnTo>
+                    <a:pt x="2291920" y="2772841"/>
+                  </a:lnTo>
+                  <a:lnTo>
+                    <a:pt x="2363543" y="2773803"/>
+                  </a:lnTo>
+                  <a:lnTo>
+                    <a:pt x="2435165" y="2774763"/>
+                  </a:lnTo>
+                  <a:lnTo>
+                    <a:pt x="2506788" y="2775723"/>
+                  </a:lnTo>
+                  <a:lnTo>
+                    <a:pt x="2578410" y="2776681"/>
+                  </a:lnTo>
+                  <a:lnTo>
+                    <a:pt x="2650033" y="2777638"/>
+                  </a:lnTo>
+                  <a:lnTo>
+                    <a:pt x="2721655" y="2778594"/>
+                  </a:lnTo>
+                  <a:lnTo>
+                    <a:pt x="2793278" y="2779550"/>
+                  </a:lnTo>
+                  <a:lnTo>
+                    <a:pt x="2864901" y="2780504"/>
+                  </a:lnTo>
+                  <a:lnTo>
+                    <a:pt x="2936523" y="2781457"/>
+                  </a:lnTo>
+                  <a:lnTo>
+                    <a:pt x="3008146" y="2782409"/>
+                  </a:lnTo>
+                  <a:lnTo>
+                    <a:pt x="3079768" y="2765730"/>
+                  </a:lnTo>
+                  <a:lnTo>
+                    <a:pt x="3151391" y="2722677"/>
+                  </a:lnTo>
+                  <a:lnTo>
+                    <a:pt x="3223013" y="2677534"/>
+                  </a:lnTo>
+                  <a:lnTo>
+                    <a:pt x="3294636" y="2630200"/>
+                  </a:lnTo>
+                  <a:lnTo>
+                    <a:pt x="3366258" y="2580569"/>
+                  </a:lnTo>
+                  <a:lnTo>
+                    <a:pt x="3437881" y="2528528"/>
+                  </a:lnTo>
+                  <a:lnTo>
+                    <a:pt x="3509503" y="2473961"/>
+                  </a:lnTo>
+                  <a:lnTo>
+                    <a:pt x="3581126" y="2416745"/>
+                  </a:lnTo>
+                  <a:lnTo>
+                    <a:pt x="3652748" y="2356752"/>
+                  </a:lnTo>
+                  <a:lnTo>
+                    <a:pt x="3724371" y="2293846"/>
+                  </a:lnTo>
+                  <a:lnTo>
+                    <a:pt x="3795993" y="2227887"/>
+                  </a:lnTo>
+                  <a:lnTo>
+                    <a:pt x="3867616" y="2158726"/>
+                  </a:lnTo>
+                  <a:lnTo>
+                    <a:pt x="3939238" y="2086208"/>
+                  </a:lnTo>
+                  <a:lnTo>
+                    <a:pt x="4010861" y="2010170"/>
+                  </a:lnTo>
+                  <a:lnTo>
+                    <a:pt x="4082483" y="1930441"/>
+                  </a:lnTo>
+                  <a:lnTo>
+                    <a:pt x="4154106" y="1846841"/>
+                  </a:lnTo>
+                  <a:lnTo>
+                    <a:pt x="4225729" y="1759183"/>
+                  </a:lnTo>
+                  <a:lnTo>
+                    <a:pt x="4297351" y="1667271"/>
+                  </a:lnTo>
+                  <a:lnTo>
+                    <a:pt x="4368974" y="1570896"/>
+                  </a:lnTo>
+                  <a:lnTo>
+                    <a:pt x="4440596" y="1469844"/>
+                  </a:lnTo>
+                  <a:lnTo>
+                    <a:pt x="4512219" y="1363886"/>
+                  </a:lnTo>
+                  <a:lnTo>
+                    <a:pt x="4583841" y="1252784"/>
+                  </a:lnTo>
+                  <a:lnTo>
+                    <a:pt x="4655464" y="1136290"/>
+                  </a:lnTo>
+                  <a:lnTo>
+                    <a:pt x="4727086" y="1014140"/>
+                  </a:lnTo>
+                  <a:lnTo>
+                    <a:pt x="4798709" y="886062"/>
+                  </a:lnTo>
+                  <a:lnTo>
+                    <a:pt x="4870331" y="751766"/>
+                  </a:lnTo>
+                  <a:lnTo>
+                    <a:pt x="4941954" y="610950"/>
+                  </a:lnTo>
+                  <a:lnTo>
+                    <a:pt x="5013576" y="463300"/>
+                  </a:lnTo>
+                  <a:lnTo>
+                    <a:pt x="5085199" y="308482"/>
+                  </a:lnTo>
+                  <a:lnTo>
+                    <a:pt x="5156821" y="146149"/>
+                  </a:lnTo>
+                  <a:lnTo>
+                    <a:pt x="5218318" y="0"/>
                   </a:lnTo>
                   <a:lnTo>
                     <a:pt x="7090630" y="0"/>
                   </a:lnTo>
                   <a:lnTo>
-                    <a:pt x="7090630" y="3126153"/>
-                  </a:lnTo>
-                  <a:lnTo>
-                    <a:pt x="7019007" y="3121448"/>
-                  </a:lnTo>
-                  <a:lnTo>
-                    <a:pt x="6947385" y="3116702"/>
-                  </a:lnTo>
-                  <a:lnTo>
-                    <a:pt x="6875762" y="3111912"/>
-                  </a:lnTo>
-                  <a:lnTo>
-                    <a:pt x="6804139" y="3107080"/>
-                  </a:lnTo>
-                  <a:lnTo>
-                    <a:pt x="6732517" y="3102205"/>
-                  </a:lnTo>
-                  <a:lnTo>
-                    <a:pt x="6660894" y="3097286"/>
-                  </a:lnTo>
-                  <a:lnTo>
-                    <a:pt x="6589272" y="3092323"/>
-                  </a:lnTo>
-                  <a:lnTo>
-                    <a:pt x="6517649" y="3087316"/>
-                  </a:lnTo>
-                  <a:lnTo>
-                    <a:pt x="6446027" y="3082264"/>
-                  </a:lnTo>
-                  <a:lnTo>
-                    <a:pt x="6374404" y="3077167"/>
-                  </a:lnTo>
-                  <a:lnTo>
-                    <a:pt x="6302782" y="3072025"/>
-                  </a:lnTo>
-                  <a:lnTo>
-                    <a:pt x="6231159" y="3066836"/>
-                  </a:lnTo>
-                  <a:lnTo>
-                    <a:pt x="6159537" y="3061601"/>
-                  </a:lnTo>
-                  <a:lnTo>
-                    <a:pt x="6087914" y="3056319"/>
-                  </a:lnTo>
-                  <a:lnTo>
-                    <a:pt x="6016292" y="3050991"/>
-                  </a:lnTo>
-                  <a:lnTo>
-                    <a:pt x="5944669" y="3045614"/>
-                  </a:lnTo>
-                  <a:lnTo>
-                    <a:pt x="5873047" y="3040189"/>
-                  </a:lnTo>
-                  <a:lnTo>
-                    <a:pt x="5801424" y="3034716"/>
-                  </a:lnTo>
-                  <a:lnTo>
-                    <a:pt x="5729802" y="3029195"/>
-                  </a:lnTo>
-                  <a:lnTo>
-                    <a:pt x="5658179" y="3023623"/>
-                  </a:lnTo>
-                  <a:lnTo>
-                    <a:pt x="5586557" y="3018002"/>
-                  </a:lnTo>
-                  <a:lnTo>
-                    <a:pt x="5514934" y="3012331"/>
-                  </a:lnTo>
-                  <a:lnTo>
-                    <a:pt x="5443311" y="3006609"/>
-                  </a:lnTo>
-                  <a:lnTo>
-                    <a:pt x="5371689" y="3000836"/>
-                  </a:lnTo>
-                  <a:lnTo>
-                    <a:pt x="5300066" y="2995011"/>
-                  </a:lnTo>
-                  <a:lnTo>
-                    <a:pt x="5228444" y="2989134"/>
-                  </a:lnTo>
-                  <a:lnTo>
-                    <a:pt x="5156821" y="2983205"/>
-                  </a:lnTo>
-                  <a:lnTo>
-                    <a:pt x="5085199" y="2977223"/>
-                  </a:lnTo>
-                  <a:lnTo>
-                    <a:pt x="5013576" y="2971187"/>
-                  </a:lnTo>
-                  <a:lnTo>
-                    <a:pt x="4941954" y="2965097"/>
-                  </a:lnTo>
-                  <a:lnTo>
-                    <a:pt x="4870331" y="2958953"/>
-                  </a:lnTo>
-                  <a:lnTo>
-                    <a:pt x="4798709" y="2952754"/>
-                  </a:lnTo>
-                  <a:lnTo>
-                    <a:pt x="4727086" y="2946500"/>
-                  </a:lnTo>
-                  <a:lnTo>
-                    <a:pt x="4655464" y="2940190"/>
-                  </a:lnTo>
-                  <a:lnTo>
-                    <a:pt x="4583841" y="2933823"/>
-                  </a:lnTo>
-                  <a:lnTo>
-                    <a:pt x="4512219" y="2927400"/>
-                  </a:lnTo>
-                  <a:lnTo>
-                    <a:pt x="4440596" y="2920919"/>
-                  </a:lnTo>
-                  <a:lnTo>
-                    <a:pt x="4368974" y="2914380"/>
-                  </a:lnTo>
-                  <a:lnTo>
-                    <a:pt x="4297351" y="2907782"/>
-                  </a:lnTo>
-                  <a:lnTo>
-                    <a:pt x="4225729" y="2901126"/>
-                  </a:lnTo>
-                  <a:lnTo>
-                    <a:pt x="4154106" y="2894411"/>
-                  </a:lnTo>
-                  <a:lnTo>
-                    <a:pt x="4082483" y="2887635"/>
-                  </a:lnTo>
-                  <a:lnTo>
-                    <a:pt x="4010861" y="2880798"/>
-                  </a:lnTo>
-                  <a:lnTo>
-                    <a:pt x="3939238" y="2873901"/>
-                  </a:lnTo>
-                  <a:lnTo>
-                    <a:pt x="3867616" y="2866942"/>
-                  </a:lnTo>
-                  <a:lnTo>
-                    <a:pt x="3795993" y="2859921"/>
-                  </a:lnTo>
-                  <a:lnTo>
-                    <a:pt x="3724371" y="2852837"/>
-                  </a:lnTo>
-                  <a:lnTo>
-                    <a:pt x="3652748" y="2845690"/>
-                  </a:lnTo>
-                  <a:lnTo>
-                    <a:pt x="3581126" y="2838479"/>
-                  </a:lnTo>
-                  <a:lnTo>
-                    <a:pt x="3509503" y="2831203"/>
-                  </a:lnTo>
-                  <a:lnTo>
-                    <a:pt x="3437881" y="2823862"/>
-                  </a:lnTo>
-                  <a:lnTo>
-                    <a:pt x="3366258" y="2816456"/>
-                  </a:lnTo>
-                  <a:lnTo>
-                    <a:pt x="3294636" y="2808984"/>
-                  </a:lnTo>
-                  <a:lnTo>
-                    <a:pt x="3223013" y="2801445"/>
-                  </a:lnTo>
-                  <a:lnTo>
-                    <a:pt x="3151391" y="2793838"/>
-                  </a:lnTo>
-                  <a:lnTo>
-                    <a:pt x="3079768" y="2786164"/>
-                  </a:lnTo>
-                  <a:lnTo>
-                    <a:pt x="3008146" y="2809188"/>
-                  </a:lnTo>
-                  <a:lnTo>
-                    <a:pt x="2936523" y="2852126"/>
-                  </a:lnTo>
-                  <a:lnTo>
-                    <a:pt x="2864901" y="2892877"/>
-                  </a:lnTo>
-                  <a:lnTo>
-                    <a:pt x="2793278" y="2931554"/>
-                  </a:lnTo>
-                  <a:lnTo>
-                    <a:pt x="2721655" y="2968263"/>
-                  </a:lnTo>
-                  <a:lnTo>
-                    <a:pt x="2650033" y="3003102"/>
-                  </a:lnTo>
-                  <a:lnTo>
-                    <a:pt x="2578410" y="3036168"/>
-                  </a:lnTo>
-                  <a:lnTo>
-                    <a:pt x="2506788" y="3067551"/>
-                  </a:lnTo>
-                  <a:lnTo>
-                    <a:pt x="2435165" y="3097336"/>
-                  </a:lnTo>
-                  <a:lnTo>
-                    <a:pt x="2363543" y="3125604"/>
-                  </a:lnTo>
-                  <a:lnTo>
-                    <a:pt x="2291920" y="3152434"/>
-                  </a:lnTo>
-                  <a:lnTo>
-                    <a:pt x="2220298" y="3177898"/>
-                  </a:lnTo>
-                  <a:lnTo>
-                    <a:pt x="2148675" y="3202066"/>
-                  </a:lnTo>
-                  <a:lnTo>
-                    <a:pt x="2077053" y="3225003"/>
-                  </a:lnTo>
-                  <a:lnTo>
-                    <a:pt x="2005430" y="3246773"/>
-                  </a:lnTo>
-                  <a:lnTo>
-                    <a:pt x="1933808" y="3267434"/>
-                  </a:lnTo>
-                  <a:lnTo>
-                    <a:pt x="1862185" y="3287044"/>
-                  </a:lnTo>
-                  <a:lnTo>
-                    <a:pt x="1790563" y="3305655"/>
-                  </a:lnTo>
-                  <a:lnTo>
-                    <a:pt x="1718940" y="3323319"/>
-                  </a:lnTo>
-                  <a:lnTo>
-                    <a:pt x="1647318" y="3340084"/>
-                  </a:lnTo>
-                  <a:lnTo>
-                    <a:pt x="1575695" y="3355995"/>
-                  </a:lnTo>
-                  <a:lnTo>
-                    <a:pt x="1504073" y="3371097"/>
-                  </a:lnTo>
-                  <a:lnTo>
-                    <a:pt x="1432450" y="3385429"/>
-                  </a:lnTo>
-                  <a:lnTo>
-                    <a:pt x="1360827" y="3399032"/>
-                  </a:lnTo>
-                  <a:lnTo>
-                    <a:pt x="1289205" y="3411943"/>
-                  </a:lnTo>
-                  <a:lnTo>
-                    <a:pt x="1217582" y="3424196"/>
-                  </a:lnTo>
-                  <a:lnTo>
-                    <a:pt x="1145960" y="3435825"/>
-                  </a:lnTo>
-                  <a:lnTo>
-                    <a:pt x="1074337" y="3446863"/>
-                  </a:lnTo>
-                  <a:lnTo>
-                    <a:pt x="1002715" y="3457338"/>
-                  </a:lnTo>
-                  <a:lnTo>
-                    <a:pt x="931092" y="3467281"/>
-                  </a:lnTo>
-                  <a:lnTo>
-                    <a:pt x="859470" y="3476717"/>
-                  </a:lnTo>
-                  <a:lnTo>
-                    <a:pt x="787847" y="3485673"/>
-                  </a:lnTo>
-                  <a:lnTo>
-                    <a:pt x="716225" y="3494173"/>
-                  </a:lnTo>
-                  <a:lnTo>
-                    <a:pt x="644602" y="3502240"/>
-                  </a:lnTo>
-                  <a:lnTo>
-                    <a:pt x="572980" y="3509896"/>
-                  </a:lnTo>
-                  <a:lnTo>
-                    <a:pt x="501357" y="3517163"/>
-                  </a:lnTo>
-                  <a:lnTo>
-                    <a:pt x="429735" y="3524060"/>
-                  </a:lnTo>
-                  <a:lnTo>
-                    <a:pt x="358112" y="3530606"/>
-                  </a:lnTo>
-                  <a:lnTo>
-                    <a:pt x="286490" y="3536818"/>
-                  </a:lnTo>
-                  <a:lnTo>
-                    <a:pt x="214867" y="3542714"/>
-                  </a:lnTo>
-                  <a:lnTo>
-                    <a:pt x="143245" y="3548311"/>
-                  </a:lnTo>
-                  <a:lnTo>
-                    <a:pt x="71622" y="3553622"/>
-                  </a:lnTo>
-                  <a:lnTo>
-                    <a:pt x="0" y="3558663"/>
+                    <a:pt x="7090630" y="2834991"/>
+                  </a:lnTo>
+                  <a:lnTo>
+                    <a:pt x="7019007" y="2834096"/>
+                  </a:lnTo>
+                  <a:lnTo>
+                    <a:pt x="6947385" y="2833201"/>
+                  </a:lnTo>
+                  <a:lnTo>
+                    <a:pt x="6875762" y="2832304"/>
+                  </a:lnTo>
+                  <a:lnTo>
+                    <a:pt x="6804139" y="2831407"/>
+                  </a:lnTo>
+                  <a:lnTo>
+                    <a:pt x="6732517" y="2830508"/>
+                  </a:lnTo>
+                  <a:lnTo>
+                    <a:pt x="6660894" y="2829609"/>
+                  </a:lnTo>
+                  <a:lnTo>
+                    <a:pt x="6589272" y="2828708"/>
+                  </a:lnTo>
+                  <a:lnTo>
+                    <a:pt x="6517649" y="2827807"/>
+                  </a:lnTo>
+                  <a:lnTo>
+                    <a:pt x="6446027" y="2826905"/>
+                  </a:lnTo>
+                  <a:lnTo>
+                    <a:pt x="6374404" y="2826001"/>
+                  </a:lnTo>
+                  <a:lnTo>
+                    <a:pt x="6302782" y="2825097"/>
+                  </a:lnTo>
+                  <a:lnTo>
+                    <a:pt x="6231159" y="2824192"/>
+                  </a:lnTo>
+                  <a:lnTo>
+                    <a:pt x="6159537" y="2823285"/>
+                  </a:lnTo>
+                  <a:lnTo>
+                    <a:pt x="6087914" y="2822378"/>
+                  </a:lnTo>
+                  <a:lnTo>
+                    <a:pt x="6016292" y="2821470"/>
+                  </a:lnTo>
+                  <a:lnTo>
+                    <a:pt x="5944669" y="2820560"/>
+                  </a:lnTo>
+                  <a:lnTo>
+                    <a:pt x="5873047" y="2819650"/>
+                  </a:lnTo>
+                  <a:lnTo>
+                    <a:pt x="5801424" y="2818739"/>
+                  </a:lnTo>
+                  <a:lnTo>
+                    <a:pt x="5729802" y="2817826"/>
+                  </a:lnTo>
+                  <a:lnTo>
+                    <a:pt x="5658179" y="2816913"/>
+                  </a:lnTo>
+                  <a:lnTo>
+                    <a:pt x="5586557" y="2815999"/>
+                  </a:lnTo>
+                  <a:lnTo>
+                    <a:pt x="5514934" y="2815083"/>
+                  </a:lnTo>
+                  <a:lnTo>
+                    <a:pt x="5443311" y="2814167"/>
+                  </a:lnTo>
+                  <a:lnTo>
+                    <a:pt x="5371689" y="2813250"/>
+                  </a:lnTo>
+                  <a:lnTo>
+                    <a:pt x="5300066" y="2812331"/>
+                  </a:lnTo>
+                  <a:lnTo>
+                    <a:pt x="5228444" y="2811412"/>
+                  </a:lnTo>
+                  <a:lnTo>
+                    <a:pt x="5156821" y="2810492"/>
+                  </a:lnTo>
+                  <a:lnTo>
+                    <a:pt x="5085199" y="2809570"/>
+                  </a:lnTo>
+                  <a:lnTo>
+                    <a:pt x="5013576" y="2808648"/>
+                  </a:lnTo>
+                  <a:lnTo>
+                    <a:pt x="4941954" y="2807725"/>
+                  </a:lnTo>
+                  <a:lnTo>
+                    <a:pt x="4870331" y="2806800"/>
+                  </a:lnTo>
+                  <a:lnTo>
+                    <a:pt x="4798709" y="2805875"/>
+                  </a:lnTo>
+                  <a:lnTo>
+                    <a:pt x="4727086" y="2804949"/>
+                  </a:lnTo>
+                  <a:lnTo>
+                    <a:pt x="4655464" y="2804021"/>
+                  </a:lnTo>
+                  <a:lnTo>
+                    <a:pt x="4583841" y="2803093"/>
+                  </a:lnTo>
+                  <a:lnTo>
+                    <a:pt x="4512219" y="2802163"/>
+                  </a:lnTo>
+                  <a:lnTo>
+                    <a:pt x="4440596" y="2801233"/>
+                  </a:lnTo>
+                  <a:lnTo>
+                    <a:pt x="4368974" y="2800302"/>
+                  </a:lnTo>
+                  <a:lnTo>
+                    <a:pt x="4297351" y="2799369"/>
+                  </a:lnTo>
+                  <a:lnTo>
+                    <a:pt x="4225729" y="2798436"/>
+                  </a:lnTo>
+                  <a:lnTo>
+                    <a:pt x="4154106" y="2797501"/>
+                  </a:lnTo>
+                  <a:lnTo>
+                    <a:pt x="4082483" y="2796565"/>
+                  </a:lnTo>
+                  <a:lnTo>
+                    <a:pt x="4010861" y="2795629"/>
+                  </a:lnTo>
+                  <a:lnTo>
+                    <a:pt x="3939238" y="2794691"/>
+                  </a:lnTo>
+                  <a:lnTo>
+                    <a:pt x="3867616" y="2793753"/>
+                  </a:lnTo>
+                  <a:lnTo>
+                    <a:pt x="3795993" y="2792813"/>
+                  </a:lnTo>
+                  <a:lnTo>
+                    <a:pt x="3724371" y="2791872"/>
+                  </a:lnTo>
+                  <a:lnTo>
+                    <a:pt x="3652748" y="2790931"/>
+                  </a:lnTo>
+                  <a:lnTo>
+                    <a:pt x="3581126" y="2789988"/>
+                  </a:lnTo>
+                  <a:lnTo>
+                    <a:pt x="3509503" y="2789044"/>
+                  </a:lnTo>
+                  <a:lnTo>
+                    <a:pt x="3437881" y="2788099"/>
+                  </a:lnTo>
+                  <a:lnTo>
+                    <a:pt x="3366258" y="2787154"/>
+                  </a:lnTo>
+                  <a:lnTo>
+                    <a:pt x="3294636" y="2786207"/>
+                  </a:lnTo>
+                  <a:lnTo>
+                    <a:pt x="3223013" y="2785259"/>
+                  </a:lnTo>
+                  <a:lnTo>
+                    <a:pt x="3151391" y="2784310"/>
+                  </a:lnTo>
+                  <a:lnTo>
+                    <a:pt x="3079768" y="2783360"/>
+                  </a:lnTo>
+                  <a:lnTo>
+                    <a:pt x="3008146" y="2806789"/>
+                  </a:lnTo>
+                  <a:lnTo>
+                    <a:pt x="2936523" y="2845948"/>
+                  </a:lnTo>
+                  <a:lnTo>
+                    <a:pt x="2864901" y="2883294"/>
+                  </a:lnTo>
+                  <a:lnTo>
+                    <a:pt x="2793278" y="2918911"/>
+                  </a:lnTo>
+                  <a:lnTo>
+                    <a:pt x="2721655" y="2952879"/>
+                  </a:lnTo>
+                  <a:lnTo>
+                    <a:pt x="2650033" y="2985275"/>
+                  </a:lnTo>
+                  <a:lnTo>
+                    <a:pt x="2578410" y="3016170"/>
+                  </a:lnTo>
+                  <a:lnTo>
+                    <a:pt x="2506788" y="3045636"/>
+                  </a:lnTo>
+                  <a:lnTo>
+                    <a:pt x="2435165" y="3073737"/>
+                  </a:lnTo>
+                  <a:lnTo>
+                    <a:pt x="2363543" y="3100538"/>
+                  </a:lnTo>
+                  <a:lnTo>
+                    <a:pt x="2291920" y="3126097"/>
+                  </a:lnTo>
+                  <a:lnTo>
+                    <a:pt x="2220298" y="3150474"/>
+                  </a:lnTo>
+                  <a:lnTo>
+                    <a:pt x="2148675" y="3173722"/>
+                  </a:lnTo>
+                  <a:lnTo>
+                    <a:pt x="2077053" y="3195893"/>
+                  </a:lnTo>
+                  <a:lnTo>
+                    <a:pt x="2005430" y="3217039"/>
+                  </a:lnTo>
+                  <a:lnTo>
+                    <a:pt x="1933808" y="3237205"/>
+                  </a:lnTo>
+                  <a:lnTo>
+                    <a:pt x="1862185" y="3256438"/>
+                  </a:lnTo>
+                  <a:lnTo>
+                    <a:pt x="1790563" y="3274780"/>
+                  </a:lnTo>
+                  <a:lnTo>
+                    <a:pt x="1718940" y="3292273"/>
+                  </a:lnTo>
+                  <a:lnTo>
+                    <a:pt x="1647318" y="3308957"/>
+                  </a:lnTo>
+                  <a:lnTo>
+                    <a:pt x="1575695" y="3324867"/>
+                  </a:lnTo>
+                  <a:lnTo>
+                    <a:pt x="1504073" y="3340042"/>
+                  </a:lnTo>
+                  <a:lnTo>
+                    <a:pt x="1432450" y="3354514"/>
+                  </a:lnTo>
+                  <a:lnTo>
+                    <a:pt x="1360827" y="3368316"/>
+                  </a:lnTo>
+                  <a:lnTo>
+                    <a:pt x="1289205" y="3381479"/>
+                  </a:lnTo>
+                  <a:lnTo>
+                    <a:pt x="1217582" y="3394032"/>
+                  </a:lnTo>
+                  <a:lnTo>
+                    <a:pt x="1145960" y="3406005"/>
+                  </a:lnTo>
+                  <a:lnTo>
+                    <a:pt x="1074337" y="3417423"/>
+                  </a:lnTo>
+                  <a:lnTo>
+                    <a:pt x="1002715" y="3428312"/>
+                  </a:lnTo>
+                  <a:lnTo>
+                    <a:pt x="931092" y="3438698"/>
+                  </a:lnTo>
+                  <a:lnTo>
+                    <a:pt x="859470" y="3448602"/>
+                  </a:lnTo>
+                  <a:lnTo>
+                    <a:pt x="787847" y="3458048"/>
+                  </a:lnTo>
+                  <a:lnTo>
+                    <a:pt x="716225" y="3467057"/>
+                  </a:lnTo>
+                  <a:lnTo>
+                    <a:pt x="644602" y="3475649"/>
+                  </a:lnTo>
+                  <a:lnTo>
+                    <a:pt x="572980" y="3483843"/>
+                  </a:lnTo>
+                  <a:lnTo>
+                    <a:pt x="501357" y="3491657"/>
+                  </a:lnTo>
+                  <a:lnTo>
+                    <a:pt x="429735" y="3499110"/>
+                  </a:lnTo>
+                  <a:lnTo>
+                    <a:pt x="358112" y="3506218"/>
+                  </a:lnTo>
+                  <a:lnTo>
+                    <a:pt x="286490" y="3512997"/>
+                  </a:lnTo>
+                  <a:lnTo>
+                    <a:pt x="214867" y="3519462"/>
+                  </a:lnTo>
+                  <a:lnTo>
+                    <a:pt x="143245" y="3525627"/>
+                  </a:lnTo>
+                  <a:lnTo>
+                    <a:pt x="71622" y="3531508"/>
+                  </a:lnTo>
+                  <a:lnTo>
+                    <a:pt x="0" y="3537115"/>
                   </a:lnTo>
                   <a:close/>
                 </a:path>
@@ -3682,227 +3688,233 @@
           <p:spPr>
             <a:xfrm>
               <a:off x="1172049" y="1896563"/>
-              <a:ext cx="5017261" cy="2778421"/>
+              <a:ext cx="5218318" cy="2782409"/>
             </a:xfrm>
             <a:custGeom>
               <a:avLst/>
               <a:pathLst>
-                <a:path w="5017261" h="2778421">
+                <a:path w="5218318" h="2782409">
                   <a:moveTo>
-                    <a:pt x="0" y="2382367"/>
+                    <a:pt x="0" y="2741512"/>
                   </a:moveTo>
                   <a:lnTo>
-                    <a:pt x="71622" y="2393618"/>
-                  </a:lnTo>
-                  <a:lnTo>
-                    <a:pt x="143245" y="2404769"/>
-                  </a:lnTo>
-                  <a:lnTo>
-                    <a:pt x="214867" y="2415822"/>
-                  </a:lnTo>
-                  <a:lnTo>
-                    <a:pt x="286490" y="2426776"/>
-                  </a:lnTo>
-                  <a:lnTo>
-                    <a:pt x="358112" y="2437634"/>
-                  </a:lnTo>
-                  <a:lnTo>
-                    <a:pt x="429735" y="2448396"/>
-                  </a:lnTo>
-                  <a:lnTo>
-                    <a:pt x="501357" y="2459062"/>
-                  </a:lnTo>
-                  <a:lnTo>
-                    <a:pt x="572980" y="2469633"/>
-                  </a:lnTo>
-                  <a:lnTo>
-                    <a:pt x="644602" y="2480111"/>
-                  </a:lnTo>
-                  <a:lnTo>
-                    <a:pt x="716225" y="2490497"/>
-                  </a:lnTo>
-                  <a:lnTo>
-                    <a:pt x="787847" y="2500790"/>
-                  </a:lnTo>
-                  <a:lnTo>
-                    <a:pt x="859470" y="2510992"/>
-                  </a:lnTo>
-                  <a:lnTo>
-                    <a:pt x="931092" y="2521104"/>
-                  </a:lnTo>
-                  <a:lnTo>
-                    <a:pt x="1002715" y="2531126"/>
-                  </a:lnTo>
-                  <a:lnTo>
-                    <a:pt x="1074337" y="2541059"/>
-                  </a:lnTo>
-                  <a:lnTo>
-                    <a:pt x="1145960" y="2550904"/>
-                  </a:lnTo>
-                  <a:lnTo>
-                    <a:pt x="1217582" y="2560663"/>
-                  </a:lnTo>
-                  <a:lnTo>
-                    <a:pt x="1289205" y="2570334"/>
-                  </a:lnTo>
-                  <a:lnTo>
-                    <a:pt x="1360827" y="2579920"/>
-                  </a:lnTo>
-                  <a:lnTo>
-                    <a:pt x="1432450" y="2589422"/>
-                  </a:lnTo>
-                  <a:lnTo>
-                    <a:pt x="1504073" y="2598839"/>
-                  </a:lnTo>
-                  <a:lnTo>
-                    <a:pt x="1575695" y="2608172"/>
-                  </a:lnTo>
-                  <a:lnTo>
-                    <a:pt x="1647318" y="2617423"/>
-                  </a:lnTo>
-                  <a:lnTo>
-                    <a:pt x="1718940" y="2626592"/>
-                  </a:lnTo>
-                  <a:lnTo>
-                    <a:pt x="1790563" y="2635680"/>
-                  </a:lnTo>
-                  <a:lnTo>
-                    <a:pt x="1862185" y="2644687"/>
-                  </a:lnTo>
-                  <a:lnTo>
-                    <a:pt x="1933808" y="2653615"/>
-                  </a:lnTo>
-                  <a:lnTo>
-                    <a:pt x="2005430" y="2662463"/>
-                  </a:lnTo>
-                  <a:lnTo>
-                    <a:pt x="2077053" y="2671234"/>
-                  </a:lnTo>
-                  <a:lnTo>
-                    <a:pt x="2148675" y="2679926"/>
-                  </a:lnTo>
-                  <a:lnTo>
-                    <a:pt x="2220298" y="2688541"/>
-                  </a:lnTo>
-                  <a:lnTo>
-                    <a:pt x="2291920" y="2697081"/>
-                  </a:lnTo>
-                  <a:lnTo>
-                    <a:pt x="2363543" y="2705544"/>
-                  </a:lnTo>
-                  <a:lnTo>
-                    <a:pt x="2435165" y="2713933"/>
-                  </a:lnTo>
-                  <a:lnTo>
-                    <a:pt x="2506788" y="2722247"/>
-                  </a:lnTo>
-                  <a:lnTo>
-                    <a:pt x="2578410" y="2730487"/>
-                  </a:lnTo>
-                  <a:lnTo>
-                    <a:pt x="2650033" y="2738655"/>
-                  </a:lnTo>
-                  <a:lnTo>
-                    <a:pt x="2721655" y="2746750"/>
-                  </a:lnTo>
-                  <a:lnTo>
-                    <a:pt x="2793278" y="2754774"/>
-                  </a:lnTo>
-                  <a:lnTo>
-                    <a:pt x="2864901" y="2762726"/>
-                  </a:lnTo>
-                  <a:lnTo>
-                    <a:pt x="2936523" y="2770608"/>
-                  </a:lnTo>
-                  <a:lnTo>
-                    <a:pt x="3008146" y="2778421"/>
-                  </a:lnTo>
-                  <a:lnTo>
-                    <a:pt x="3079768" y="2763948"/>
-                  </a:lnTo>
-                  <a:lnTo>
-                    <a:pt x="3151391" y="2716281"/>
-                  </a:lnTo>
-                  <a:lnTo>
-                    <a:pt x="3223013" y="2666057"/>
-                  </a:lnTo>
-                  <a:lnTo>
-                    <a:pt x="3294636" y="2613140"/>
-                  </a:lnTo>
-                  <a:lnTo>
-                    <a:pt x="3366258" y="2557384"/>
-                  </a:lnTo>
-                  <a:lnTo>
-                    <a:pt x="3437881" y="2498637"/>
-                  </a:lnTo>
-                  <a:lnTo>
-                    <a:pt x="3509503" y="2436740"/>
-                  </a:lnTo>
-                  <a:lnTo>
-                    <a:pt x="3581126" y="2371522"/>
-                  </a:lnTo>
-                  <a:lnTo>
-                    <a:pt x="3652748" y="2302807"/>
-                  </a:lnTo>
-                  <a:lnTo>
-                    <a:pt x="3724371" y="2230406"/>
-                  </a:lnTo>
-                  <a:lnTo>
-                    <a:pt x="3795993" y="2154121"/>
-                  </a:lnTo>
-                  <a:lnTo>
-                    <a:pt x="3867616" y="2073745"/>
-                  </a:lnTo>
-                  <a:lnTo>
-                    <a:pt x="3939238" y="1989057"/>
-                  </a:lnTo>
-                  <a:lnTo>
-                    <a:pt x="4010861" y="1899828"/>
-                  </a:lnTo>
-                  <a:lnTo>
-                    <a:pt x="4082483" y="1805812"/>
-                  </a:lnTo>
-                  <a:lnTo>
-                    <a:pt x="4154106" y="1706753"/>
-                  </a:lnTo>
-                  <a:lnTo>
-                    <a:pt x="4225729" y="1602381"/>
-                  </a:lnTo>
-                  <a:lnTo>
-                    <a:pt x="4297351" y="1492411"/>
-                  </a:lnTo>
-                  <a:lnTo>
-                    <a:pt x="4368974" y="1376543"/>
-                  </a:lnTo>
-                  <a:lnTo>
-                    <a:pt x="4440596" y="1254460"/>
-                  </a:lnTo>
-                  <a:lnTo>
-                    <a:pt x="4512219" y="1125828"/>
-                  </a:lnTo>
-                  <a:lnTo>
-                    <a:pt x="4583841" y="990297"/>
-                  </a:lnTo>
-                  <a:lnTo>
-                    <a:pt x="4655464" y="847497"/>
-                  </a:lnTo>
-                  <a:lnTo>
-                    <a:pt x="4727086" y="697037"/>
-                  </a:lnTo>
-                  <a:lnTo>
-                    <a:pt x="4798709" y="538507"/>
-                  </a:lnTo>
-                  <a:lnTo>
-                    <a:pt x="4870331" y="371474"/>
-                  </a:lnTo>
-                  <a:lnTo>
-                    <a:pt x="4941954" y="195482"/>
-                  </a:lnTo>
-                  <a:lnTo>
-                    <a:pt x="5013576" y="10050"/>
-                  </a:lnTo>
-                  <a:lnTo>
-                    <a:pt x="5017261" y="0"/>
+                    <a:pt x="71622" y="2742508"/>
+                  </a:lnTo>
+                  <a:lnTo>
+                    <a:pt x="143245" y="2743503"/>
+                  </a:lnTo>
+                  <a:lnTo>
+                    <a:pt x="214867" y="2744496"/>
+                  </a:lnTo>
+                  <a:lnTo>
+                    <a:pt x="286490" y="2745489"/>
+                  </a:lnTo>
+                  <a:lnTo>
+                    <a:pt x="358112" y="2746480"/>
+                  </a:lnTo>
+                  <a:lnTo>
+                    <a:pt x="429735" y="2747470"/>
+                  </a:lnTo>
+                  <a:lnTo>
+                    <a:pt x="501357" y="2748460"/>
+                  </a:lnTo>
+                  <a:lnTo>
+                    <a:pt x="572980" y="2749448"/>
+                  </a:lnTo>
+                  <a:lnTo>
+                    <a:pt x="644602" y="2750435"/>
+                  </a:lnTo>
+                  <a:lnTo>
+                    <a:pt x="716225" y="2751421"/>
+                  </a:lnTo>
+                  <a:lnTo>
+                    <a:pt x="787847" y="2752406"/>
+                  </a:lnTo>
+                  <a:lnTo>
+                    <a:pt x="859470" y="2753389"/>
+                  </a:lnTo>
+                  <a:lnTo>
+                    <a:pt x="931092" y="2754372"/>
+                  </a:lnTo>
+                  <a:lnTo>
+                    <a:pt x="1002715" y="2755354"/>
+                  </a:lnTo>
+                  <a:lnTo>
+                    <a:pt x="1074337" y="2756334"/>
+                  </a:lnTo>
+                  <a:lnTo>
+                    <a:pt x="1145960" y="2757314"/>
+                  </a:lnTo>
+                  <a:lnTo>
+                    <a:pt x="1217582" y="2758292"/>
+                  </a:lnTo>
+                  <a:lnTo>
+                    <a:pt x="1289205" y="2759270"/>
+                  </a:lnTo>
+                  <a:lnTo>
+                    <a:pt x="1360827" y="2760246"/>
+                  </a:lnTo>
+                  <a:lnTo>
+                    <a:pt x="1432450" y="2761221"/>
+                  </a:lnTo>
+                  <a:lnTo>
+                    <a:pt x="1504073" y="2762195"/>
+                  </a:lnTo>
+                  <a:lnTo>
+                    <a:pt x="1575695" y="2763168"/>
+                  </a:lnTo>
+                  <a:lnTo>
+                    <a:pt x="1647318" y="2764141"/>
+                  </a:lnTo>
+                  <a:lnTo>
+                    <a:pt x="1718940" y="2765111"/>
+                  </a:lnTo>
+                  <a:lnTo>
+                    <a:pt x="1790563" y="2766081"/>
+                  </a:lnTo>
+                  <a:lnTo>
+                    <a:pt x="1862185" y="2767050"/>
+                  </a:lnTo>
+                  <a:lnTo>
+                    <a:pt x="1933808" y="2768018"/>
+                  </a:lnTo>
+                  <a:lnTo>
+                    <a:pt x="2005430" y="2768985"/>
+                  </a:lnTo>
+                  <a:lnTo>
+                    <a:pt x="2077053" y="2769951"/>
+                  </a:lnTo>
+                  <a:lnTo>
+                    <a:pt x="2148675" y="2770915"/>
+                  </a:lnTo>
+                  <a:lnTo>
+                    <a:pt x="2220298" y="2771879"/>
+                  </a:lnTo>
+                  <a:lnTo>
+                    <a:pt x="2291920" y="2772841"/>
+                  </a:lnTo>
+                  <a:lnTo>
+                    <a:pt x="2363543" y="2773803"/>
+                  </a:lnTo>
+                  <a:lnTo>
+                    <a:pt x="2435165" y="2774763"/>
+                  </a:lnTo>
+                  <a:lnTo>
+                    <a:pt x="2506788" y="2775723"/>
+                  </a:lnTo>
+                  <a:lnTo>
+                    <a:pt x="2578410" y="2776681"/>
+                  </a:lnTo>
+                  <a:lnTo>
+                    <a:pt x="2650033" y="2777638"/>
+                  </a:lnTo>
+                  <a:lnTo>
+                    <a:pt x="2721655" y="2778594"/>
+                  </a:lnTo>
+                  <a:lnTo>
+                    <a:pt x="2793278" y="2779550"/>
+                  </a:lnTo>
+                  <a:lnTo>
+                    <a:pt x="2864901" y="2780504"/>
+                  </a:lnTo>
+                  <a:lnTo>
+                    <a:pt x="2936523" y="2781457"/>
+                  </a:lnTo>
+                  <a:lnTo>
+                    <a:pt x="3008146" y="2782409"/>
+                  </a:lnTo>
+                  <a:lnTo>
+                    <a:pt x="3079768" y="2765730"/>
+                  </a:lnTo>
+                  <a:lnTo>
+                    <a:pt x="3151391" y="2722677"/>
+                  </a:lnTo>
+                  <a:lnTo>
+                    <a:pt x="3223013" y="2677534"/>
+                  </a:lnTo>
+                  <a:lnTo>
+                    <a:pt x="3294636" y="2630200"/>
+                  </a:lnTo>
+                  <a:lnTo>
+                    <a:pt x="3366258" y="2580569"/>
+                  </a:lnTo>
+                  <a:lnTo>
+                    <a:pt x="3437881" y="2528528"/>
+                  </a:lnTo>
+                  <a:lnTo>
+                    <a:pt x="3509503" y="2473961"/>
+                  </a:lnTo>
+                  <a:lnTo>
+                    <a:pt x="3581126" y="2416745"/>
+                  </a:lnTo>
+                  <a:lnTo>
+                    <a:pt x="3652748" y="2356752"/>
+                  </a:lnTo>
+                  <a:lnTo>
+                    <a:pt x="3724371" y="2293846"/>
+                  </a:lnTo>
+                  <a:lnTo>
+                    <a:pt x="3795993" y="2227887"/>
+                  </a:lnTo>
+                  <a:lnTo>
+                    <a:pt x="3867616" y="2158726"/>
+                  </a:lnTo>
+                  <a:lnTo>
+                    <a:pt x="3939238" y="2086208"/>
+                  </a:lnTo>
+                  <a:lnTo>
+                    <a:pt x="4010861" y="2010170"/>
+                  </a:lnTo>
+                  <a:lnTo>
+                    <a:pt x="4082483" y="1930441"/>
+                  </a:lnTo>
+                  <a:lnTo>
+                    <a:pt x="4154106" y="1846841"/>
+                  </a:lnTo>
+                  <a:lnTo>
+                    <a:pt x="4225729" y="1759183"/>
+                  </a:lnTo>
+                  <a:lnTo>
+                    <a:pt x="4297351" y="1667271"/>
+                  </a:lnTo>
+                  <a:lnTo>
+                    <a:pt x="4368974" y="1570896"/>
+                  </a:lnTo>
+                  <a:lnTo>
+                    <a:pt x="4440596" y="1469844"/>
+                  </a:lnTo>
+                  <a:lnTo>
+                    <a:pt x="4512219" y="1363886"/>
+                  </a:lnTo>
+                  <a:lnTo>
+                    <a:pt x="4583841" y="1252784"/>
+                  </a:lnTo>
+                  <a:lnTo>
+                    <a:pt x="4655464" y="1136290"/>
+                  </a:lnTo>
+                  <a:lnTo>
+                    <a:pt x="4727086" y="1014140"/>
+                  </a:lnTo>
+                  <a:lnTo>
+                    <a:pt x="4798709" y="886062"/>
+                  </a:lnTo>
+                  <a:lnTo>
+                    <a:pt x="4870331" y="751766"/>
+                  </a:lnTo>
+                  <a:lnTo>
+                    <a:pt x="4941954" y="610950"/>
+                  </a:lnTo>
+                  <a:lnTo>
+                    <a:pt x="5013576" y="463300"/>
+                  </a:lnTo>
+                  <a:lnTo>
+                    <a:pt x="5085199" y="308482"/>
+                  </a:lnTo>
+                  <a:lnTo>
+                    <a:pt x="5156821" y="146149"/>
+                  </a:lnTo>
+                  <a:lnTo>
+                    <a:pt x="5218318" y="0"/>
                   </a:lnTo>
                 </a:path>
               </a:pathLst>
@@ -3922,312 +3934,312 @@
           </p:nvSpPr>
           <p:spPr>
             <a:xfrm>
-              <a:off x="1172049" y="4682727"/>
-              <a:ext cx="7090630" cy="772498"/>
+              <a:off x="1172049" y="4679923"/>
+              <a:ext cx="7090630" cy="753755"/>
             </a:xfrm>
             <a:custGeom>
               <a:avLst/>
               <a:pathLst>
-                <a:path w="7090630" h="772498">
+                <a:path w="7090630" h="753755">
                   <a:moveTo>
-                    <a:pt x="7090630" y="339989"/>
+                    <a:pt x="7090630" y="51630"/>
                   </a:moveTo>
                   <a:lnTo>
-                    <a:pt x="7019007" y="335284"/>
-                  </a:lnTo>
-                  <a:lnTo>
-                    <a:pt x="6947385" y="330537"/>
-                  </a:lnTo>
-                  <a:lnTo>
-                    <a:pt x="6875762" y="325748"/>
-                  </a:lnTo>
-                  <a:lnTo>
-                    <a:pt x="6804139" y="320916"/>
-                  </a:lnTo>
-                  <a:lnTo>
-                    <a:pt x="6732517" y="316041"/>
-                  </a:lnTo>
-                  <a:lnTo>
-                    <a:pt x="6660894" y="311122"/>
-                  </a:lnTo>
-                  <a:lnTo>
-                    <a:pt x="6589272" y="306159"/>
-                  </a:lnTo>
-                  <a:lnTo>
-                    <a:pt x="6517649" y="301152"/>
-                  </a:lnTo>
-                  <a:lnTo>
-                    <a:pt x="6446027" y="296100"/>
-                  </a:lnTo>
-                  <a:lnTo>
-                    <a:pt x="6374404" y="291003"/>
-                  </a:lnTo>
-                  <a:lnTo>
-                    <a:pt x="6302782" y="285860"/>
-                  </a:lnTo>
-                  <a:lnTo>
-                    <a:pt x="6231159" y="280672"/>
-                  </a:lnTo>
-                  <a:lnTo>
-                    <a:pt x="6159537" y="275437"/>
-                  </a:lnTo>
-                  <a:lnTo>
-                    <a:pt x="6087914" y="270155"/>
-                  </a:lnTo>
-                  <a:lnTo>
-                    <a:pt x="6016292" y="264826"/>
-                  </a:lnTo>
-                  <a:lnTo>
-                    <a:pt x="5944669" y="259450"/>
-                  </a:lnTo>
-                  <a:lnTo>
-                    <a:pt x="5873047" y="254025"/>
-                  </a:lnTo>
-                  <a:lnTo>
-                    <a:pt x="5801424" y="248552"/>
-                  </a:lnTo>
-                  <a:lnTo>
-                    <a:pt x="5729802" y="243030"/>
-                  </a:lnTo>
-                  <a:lnTo>
-                    <a:pt x="5658179" y="237459"/>
-                  </a:lnTo>
-                  <a:lnTo>
-                    <a:pt x="5586557" y="231838"/>
-                  </a:lnTo>
-                  <a:lnTo>
-                    <a:pt x="5514934" y="226167"/>
-                  </a:lnTo>
-                  <a:lnTo>
-                    <a:pt x="5443311" y="220445"/>
-                  </a:lnTo>
-                  <a:lnTo>
-                    <a:pt x="5371689" y="214672"/>
-                  </a:lnTo>
-                  <a:lnTo>
-                    <a:pt x="5300066" y="208847"/>
-                  </a:lnTo>
-                  <a:lnTo>
-                    <a:pt x="5228444" y="202970"/>
-                  </a:lnTo>
-                  <a:lnTo>
-                    <a:pt x="5156821" y="197041"/>
-                  </a:lnTo>
-                  <a:lnTo>
-                    <a:pt x="5085199" y="191059"/>
-                  </a:lnTo>
-                  <a:lnTo>
-                    <a:pt x="5013576" y="185023"/>
-                  </a:lnTo>
-                  <a:lnTo>
-                    <a:pt x="4941954" y="178933"/>
-                  </a:lnTo>
-                  <a:lnTo>
-                    <a:pt x="4870331" y="172789"/>
-                  </a:lnTo>
-                  <a:lnTo>
-                    <a:pt x="4798709" y="166590"/>
-                  </a:lnTo>
-                  <a:lnTo>
-                    <a:pt x="4727086" y="160336"/>
-                  </a:lnTo>
-                  <a:lnTo>
-                    <a:pt x="4655464" y="154026"/>
-                  </a:lnTo>
-                  <a:lnTo>
-                    <a:pt x="4583841" y="147659"/>
-                  </a:lnTo>
-                  <a:lnTo>
-                    <a:pt x="4512219" y="141235"/>
-                  </a:lnTo>
-                  <a:lnTo>
-                    <a:pt x="4440596" y="134754"/>
-                  </a:lnTo>
-                  <a:lnTo>
-                    <a:pt x="4368974" y="128216"/>
-                  </a:lnTo>
-                  <a:lnTo>
-                    <a:pt x="4297351" y="121618"/>
-                  </a:lnTo>
-                  <a:lnTo>
-                    <a:pt x="4225729" y="114962"/>
-                  </a:lnTo>
-                  <a:lnTo>
-                    <a:pt x="4154106" y="108246"/>
-                  </a:lnTo>
-                  <a:lnTo>
-                    <a:pt x="4082483" y="101471"/>
-                  </a:lnTo>
-                  <a:lnTo>
-                    <a:pt x="4010861" y="94634"/>
-                  </a:lnTo>
-                  <a:lnTo>
-                    <a:pt x="3939238" y="87737"/>
-                  </a:lnTo>
-                  <a:lnTo>
-                    <a:pt x="3867616" y="80778"/>
-                  </a:lnTo>
-                  <a:lnTo>
-                    <a:pt x="3795993" y="73757"/>
-                  </a:lnTo>
-                  <a:lnTo>
-                    <a:pt x="3724371" y="66673"/>
-                  </a:lnTo>
-                  <a:lnTo>
-                    <a:pt x="3652748" y="59525"/>
-                  </a:lnTo>
-                  <a:lnTo>
-                    <a:pt x="3581126" y="52314"/>
-                  </a:lnTo>
-                  <a:lnTo>
-                    <a:pt x="3509503" y="45039"/>
-                  </a:lnTo>
-                  <a:lnTo>
-                    <a:pt x="3437881" y="37698"/>
-                  </a:lnTo>
-                  <a:lnTo>
-                    <a:pt x="3366258" y="30292"/>
-                  </a:lnTo>
-                  <a:lnTo>
-                    <a:pt x="3294636" y="22820"/>
-                  </a:lnTo>
-                  <a:lnTo>
-                    <a:pt x="3223013" y="15280"/>
-                  </a:lnTo>
-                  <a:lnTo>
-                    <a:pt x="3151391" y="7674"/>
+                    <a:pt x="7019007" y="50736"/>
+                  </a:lnTo>
+                  <a:lnTo>
+                    <a:pt x="6947385" y="49840"/>
+                  </a:lnTo>
+                  <a:lnTo>
+                    <a:pt x="6875762" y="48944"/>
+                  </a:lnTo>
+                  <a:lnTo>
+                    <a:pt x="6804139" y="48046"/>
+                  </a:lnTo>
+                  <a:lnTo>
+                    <a:pt x="6732517" y="47148"/>
+                  </a:lnTo>
+                  <a:lnTo>
+                    <a:pt x="6660894" y="46249"/>
+                  </a:lnTo>
+                  <a:lnTo>
+                    <a:pt x="6589272" y="45348"/>
+                  </a:lnTo>
+                  <a:lnTo>
+                    <a:pt x="6517649" y="44447"/>
+                  </a:lnTo>
+                  <a:lnTo>
+                    <a:pt x="6446027" y="43544"/>
+                  </a:lnTo>
+                  <a:lnTo>
+                    <a:pt x="6374404" y="42641"/>
+                  </a:lnTo>
+                  <a:lnTo>
+                    <a:pt x="6302782" y="41737"/>
+                  </a:lnTo>
+                  <a:lnTo>
+                    <a:pt x="6231159" y="40831"/>
+                  </a:lnTo>
+                  <a:lnTo>
+                    <a:pt x="6159537" y="39925"/>
+                  </a:lnTo>
+                  <a:lnTo>
+                    <a:pt x="6087914" y="39018"/>
+                  </a:lnTo>
+                  <a:lnTo>
+                    <a:pt x="6016292" y="38109"/>
+                  </a:lnTo>
+                  <a:lnTo>
+                    <a:pt x="5944669" y="37200"/>
+                  </a:lnTo>
+                  <a:lnTo>
+                    <a:pt x="5873047" y="36290"/>
+                  </a:lnTo>
+                  <a:lnTo>
+                    <a:pt x="5801424" y="35378"/>
+                  </a:lnTo>
+                  <a:lnTo>
+                    <a:pt x="5729802" y="34466"/>
+                  </a:lnTo>
+                  <a:lnTo>
+                    <a:pt x="5658179" y="33553"/>
+                  </a:lnTo>
+                  <a:lnTo>
+                    <a:pt x="5586557" y="32638"/>
+                  </a:lnTo>
+                  <a:lnTo>
+                    <a:pt x="5514934" y="31723"/>
+                  </a:lnTo>
+                  <a:lnTo>
+                    <a:pt x="5443311" y="30807"/>
+                  </a:lnTo>
+                  <a:lnTo>
+                    <a:pt x="5371689" y="29889"/>
+                  </a:lnTo>
+                  <a:lnTo>
+                    <a:pt x="5300066" y="28971"/>
+                  </a:lnTo>
+                  <a:lnTo>
+                    <a:pt x="5228444" y="28052"/>
+                  </a:lnTo>
+                  <a:lnTo>
+                    <a:pt x="5156821" y="27131"/>
+                  </a:lnTo>
+                  <a:lnTo>
+                    <a:pt x="5085199" y="26210"/>
+                  </a:lnTo>
+                  <a:lnTo>
+                    <a:pt x="5013576" y="25288"/>
+                  </a:lnTo>
+                  <a:lnTo>
+                    <a:pt x="4941954" y="24364"/>
+                  </a:lnTo>
+                  <a:lnTo>
+                    <a:pt x="4870331" y="23440"/>
+                  </a:lnTo>
+                  <a:lnTo>
+                    <a:pt x="4798709" y="22515"/>
+                  </a:lnTo>
+                  <a:lnTo>
+                    <a:pt x="4727086" y="21588"/>
+                  </a:lnTo>
+                  <a:lnTo>
+                    <a:pt x="4655464" y="20661"/>
+                  </a:lnTo>
+                  <a:lnTo>
+                    <a:pt x="4583841" y="19733"/>
+                  </a:lnTo>
+                  <a:lnTo>
+                    <a:pt x="4512219" y="18803"/>
+                  </a:lnTo>
+                  <a:lnTo>
+                    <a:pt x="4440596" y="17873"/>
+                  </a:lnTo>
+                  <a:lnTo>
+                    <a:pt x="4368974" y="16941"/>
+                  </a:lnTo>
+                  <a:lnTo>
+                    <a:pt x="4297351" y="16009"/>
+                  </a:lnTo>
+                  <a:lnTo>
+                    <a:pt x="4225729" y="15075"/>
+                  </a:lnTo>
+                  <a:lnTo>
+                    <a:pt x="4154106" y="14141"/>
+                  </a:lnTo>
+                  <a:lnTo>
+                    <a:pt x="4082483" y="13205"/>
+                  </a:lnTo>
+                  <a:lnTo>
+                    <a:pt x="4010861" y="12269"/>
+                  </a:lnTo>
+                  <a:lnTo>
+                    <a:pt x="3939238" y="11331"/>
+                  </a:lnTo>
+                  <a:lnTo>
+                    <a:pt x="3867616" y="10392"/>
+                  </a:lnTo>
+                  <a:lnTo>
+                    <a:pt x="3795993" y="9453"/>
+                  </a:lnTo>
+                  <a:lnTo>
+                    <a:pt x="3724371" y="8512"/>
+                  </a:lnTo>
+                  <a:lnTo>
+                    <a:pt x="3652748" y="7570"/>
+                  </a:lnTo>
+                  <a:lnTo>
+                    <a:pt x="3581126" y="6628"/>
+                  </a:lnTo>
+                  <a:lnTo>
+                    <a:pt x="3509503" y="5684"/>
+                  </a:lnTo>
+                  <a:lnTo>
+                    <a:pt x="3437881" y="4739"/>
+                  </a:lnTo>
+                  <a:lnTo>
+                    <a:pt x="3366258" y="3793"/>
+                  </a:lnTo>
+                  <a:lnTo>
+                    <a:pt x="3294636" y="2846"/>
+                  </a:lnTo>
+                  <a:lnTo>
+                    <a:pt x="3223013" y="1898"/>
+                  </a:lnTo>
+                  <a:lnTo>
+                    <a:pt x="3151391" y="949"/>
                   </a:lnTo>
                   <a:lnTo>
                     <a:pt x="3079768" y="0"/>
                   </a:lnTo>
                   <a:lnTo>
-                    <a:pt x="3008146" y="23024"/>
-                  </a:lnTo>
-                  <a:lnTo>
-                    <a:pt x="2936523" y="65962"/>
-                  </a:lnTo>
-                  <a:lnTo>
-                    <a:pt x="2864901" y="106713"/>
-                  </a:lnTo>
-                  <a:lnTo>
-                    <a:pt x="2793278" y="145390"/>
-                  </a:lnTo>
-                  <a:lnTo>
-                    <a:pt x="2721655" y="182098"/>
-                  </a:lnTo>
-                  <a:lnTo>
-                    <a:pt x="2650033" y="216938"/>
-                  </a:lnTo>
-                  <a:lnTo>
-                    <a:pt x="2578410" y="250004"/>
-                  </a:lnTo>
-                  <a:lnTo>
-                    <a:pt x="2506788" y="281386"/>
-                  </a:lnTo>
-                  <a:lnTo>
-                    <a:pt x="2435165" y="311171"/>
-                  </a:lnTo>
-                  <a:lnTo>
-                    <a:pt x="2363543" y="339440"/>
-                  </a:lnTo>
-                  <a:lnTo>
-                    <a:pt x="2291920" y="366270"/>
-                  </a:lnTo>
-                  <a:lnTo>
-                    <a:pt x="2220298" y="391734"/>
-                  </a:lnTo>
-                  <a:lnTo>
-                    <a:pt x="2148675" y="415901"/>
-                  </a:lnTo>
-                  <a:lnTo>
-                    <a:pt x="2077053" y="438839"/>
-                  </a:lnTo>
-                  <a:lnTo>
-                    <a:pt x="2005430" y="460609"/>
-                  </a:lnTo>
-                  <a:lnTo>
-                    <a:pt x="1933808" y="481270"/>
-                  </a:lnTo>
-                  <a:lnTo>
-                    <a:pt x="1862185" y="500880"/>
-                  </a:lnTo>
-                  <a:lnTo>
-                    <a:pt x="1790563" y="519491"/>
-                  </a:lnTo>
-                  <a:lnTo>
-                    <a:pt x="1718940" y="537155"/>
-                  </a:lnTo>
-                  <a:lnTo>
-                    <a:pt x="1647318" y="553920"/>
-                  </a:lnTo>
-                  <a:lnTo>
-                    <a:pt x="1575695" y="569831"/>
-                  </a:lnTo>
-                  <a:lnTo>
-                    <a:pt x="1504073" y="584932"/>
-                  </a:lnTo>
-                  <a:lnTo>
-                    <a:pt x="1432450" y="599265"/>
-                  </a:lnTo>
-                  <a:lnTo>
-                    <a:pt x="1360827" y="612868"/>
-                  </a:lnTo>
-                  <a:lnTo>
-                    <a:pt x="1289205" y="625778"/>
-                  </a:lnTo>
-                  <a:lnTo>
-                    <a:pt x="1217582" y="638032"/>
-                  </a:lnTo>
-                  <a:lnTo>
-                    <a:pt x="1145960" y="649661"/>
-                  </a:lnTo>
-                  <a:lnTo>
-                    <a:pt x="1074337" y="660699"/>
-                  </a:lnTo>
-                  <a:lnTo>
-                    <a:pt x="1002715" y="671174"/>
-                  </a:lnTo>
-                  <a:lnTo>
-                    <a:pt x="931092" y="681116"/>
-                  </a:lnTo>
-                  <a:lnTo>
-                    <a:pt x="859470" y="690553"/>
-                  </a:lnTo>
-                  <a:lnTo>
-                    <a:pt x="787847" y="699508"/>
-                  </a:lnTo>
-                  <a:lnTo>
-                    <a:pt x="716225" y="708008"/>
-                  </a:lnTo>
-                  <a:lnTo>
-                    <a:pt x="644602" y="716076"/>
-                  </a:lnTo>
-                  <a:lnTo>
-                    <a:pt x="572980" y="723732"/>
-                  </a:lnTo>
-                  <a:lnTo>
-                    <a:pt x="501357" y="730999"/>
-                  </a:lnTo>
-                  <a:lnTo>
-                    <a:pt x="429735" y="737896"/>
-                  </a:lnTo>
-                  <a:lnTo>
-                    <a:pt x="358112" y="744441"/>
-                  </a:lnTo>
-                  <a:lnTo>
-                    <a:pt x="286490" y="750654"/>
-                  </a:lnTo>
-                  <a:lnTo>
-                    <a:pt x="214867" y="756550"/>
-                  </a:lnTo>
-                  <a:lnTo>
-                    <a:pt x="143245" y="762146"/>
-                  </a:lnTo>
-                  <a:lnTo>
-                    <a:pt x="71622" y="767457"/>
-                  </a:lnTo>
-                  <a:lnTo>
-                    <a:pt x="0" y="772498"/>
+                    <a:pt x="3008146" y="23429"/>
+                  </a:lnTo>
+                  <a:lnTo>
+                    <a:pt x="2936523" y="62588"/>
+                  </a:lnTo>
+                  <a:lnTo>
+                    <a:pt x="2864901" y="99934"/>
+                  </a:lnTo>
+                  <a:lnTo>
+                    <a:pt x="2793278" y="135551"/>
+                  </a:lnTo>
+                  <a:lnTo>
+                    <a:pt x="2721655" y="169519"/>
+                  </a:lnTo>
+                  <a:lnTo>
+                    <a:pt x="2650033" y="201914"/>
+                  </a:lnTo>
+                  <a:lnTo>
+                    <a:pt x="2578410" y="232810"/>
+                  </a:lnTo>
+                  <a:lnTo>
+                    <a:pt x="2506788" y="262276"/>
+                  </a:lnTo>
+                  <a:lnTo>
+                    <a:pt x="2435165" y="290377"/>
+                  </a:lnTo>
+                  <a:lnTo>
+                    <a:pt x="2363543" y="317177"/>
+                  </a:lnTo>
+                  <a:lnTo>
+                    <a:pt x="2291920" y="342737"/>
+                  </a:lnTo>
+                  <a:lnTo>
+                    <a:pt x="2220298" y="367114"/>
+                  </a:lnTo>
+                  <a:lnTo>
+                    <a:pt x="2148675" y="390361"/>
+                  </a:lnTo>
+                  <a:lnTo>
+                    <a:pt x="2077053" y="412533"/>
+                  </a:lnTo>
+                  <a:lnTo>
+                    <a:pt x="2005430" y="433678"/>
+                  </a:lnTo>
+                  <a:lnTo>
+                    <a:pt x="1933808" y="453845"/>
+                  </a:lnTo>
+                  <a:lnTo>
+                    <a:pt x="1862185" y="473077"/>
+                  </a:lnTo>
+                  <a:lnTo>
+                    <a:pt x="1790563" y="491420"/>
+                  </a:lnTo>
+                  <a:lnTo>
+                    <a:pt x="1718940" y="508913"/>
+                  </a:lnTo>
+                  <a:lnTo>
+                    <a:pt x="1647318" y="525596"/>
+                  </a:lnTo>
+                  <a:lnTo>
+                    <a:pt x="1575695" y="541507"/>
+                  </a:lnTo>
+                  <a:lnTo>
+                    <a:pt x="1504073" y="556682"/>
+                  </a:lnTo>
+                  <a:lnTo>
+                    <a:pt x="1432450" y="571153"/>
+                  </a:lnTo>
+                  <a:lnTo>
+                    <a:pt x="1360827" y="584955"/>
+                  </a:lnTo>
+                  <a:lnTo>
+                    <a:pt x="1289205" y="598118"/>
+                  </a:lnTo>
+                  <a:lnTo>
+                    <a:pt x="1217582" y="610672"/>
+                  </a:lnTo>
+                  <a:lnTo>
+                    <a:pt x="1145960" y="622644"/>
+                  </a:lnTo>
+                  <a:lnTo>
+                    <a:pt x="1074337" y="634062"/>
+                  </a:lnTo>
+                  <a:lnTo>
+                    <a:pt x="1002715" y="644952"/>
+                  </a:lnTo>
+                  <a:lnTo>
+                    <a:pt x="931092" y="655337"/>
+                  </a:lnTo>
+                  <a:lnTo>
+                    <a:pt x="859470" y="665242"/>
+                  </a:lnTo>
+                  <a:lnTo>
+                    <a:pt x="787847" y="674688"/>
+                  </a:lnTo>
+                  <a:lnTo>
+                    <a:pt x="716225" y="683697"/>
+                  </a:lnTo>
+                  <a:lnTo>
+                    <a:pt x="644602" y="692288"/>
+                  </a:lnTo>
+                  <a:lnTo>
+                    <a:pt x="572980" y="700482"/>
+                  </a:lnTo>
+                  <a:lnTo>
+                    <a:pt x="501357" y="708297"/>
+                  </a:lnTo>
+                  <a:lnTo>
+                    <a:pt x="429735" y="715750"/>
+                  </a:lnTo>
+                  <a:lnTo>
+                    <a:pt x="358112" y="722858"/>
+                  </a:lnTo>
+                  <a:lnTo>
+                    <a:pt x="286490" y="729636"/>
+                  </a:lnTo>
+                  <a:lnTo>
+                    <a:pt x="214867" y="736101"/>
+                  </a:lnTo>
+                  <a:lnTo>
+                    <a:pt x="143245" y="742267"/>
+                  </a:lnTo>
+                  <a:lnTo>
+                    <a:pt x="71622" y="748147"/>
+                  </a:lnTo>
+                  <a:lnTo>
+                    <a:pt x="0" y="753755"/>
                   </a:lnTo>
                 </a:path>
               </a:pathLst>
@@ -4247,309 +4259,309 @@
           </p:nvSpPr>
           <p:spPr>
             <a:xfrm>
-              <a:off x="1172049" y="2595140"/>
-              <a:ext cx="7090630" cy="2608550"/>
+              <a:off x="1172049" y="2338276"/>
+              <a:ext cx="7090630" cy="2886491"/>
             </a:xfrm>
             <a:custGeom>
               <a:avLst/>
               <a:pathLst>
-                <a:path w="7090630" h="2608550">
+                <a:path w="7090630" h="2886491">
                   <a:moveTo>
-                    <a:pt x="0" y="2608550"/>
+                    <a:pt x="0" y="2886491"/>
                   </a:moveTo>
                   <a:lnTo>
-                    <a:pt x="71622" y="2600979"/>
-                  </a:lnTo>
-                  <a:lnTo>
-                    <a:pt x="143245" y="2593242"/>
-                  </a:lnTo>
-                  <a:lnTo>
-                    <a:pt x="214867" y="2585335"/>
-                  </a:lnTo>
-                  <a:lnTo>
-                    <a:pt x="286490" y="2577256"/>
-                  </a:lnTo>
-                  <a:lnTo>
-                    <a:pt x="358112" y="2568999"/>
-                  </a:lnTo>
-                  <a:lnTo>
-                    <a:pt x="429735" y="2560561"/>
-                  </a:lnTo>
-                  <a:lnTo>
-                    <a:pt x="501357" y="2551938"/>
-                  </a:lnTo>
-                  <a:lnTo>
-                    <a:pt x="572980" y="2543127"/>
-                  </a:lnTo>
-                  <a:lnTo>
-                    <a:pt x="644602" y="2534122"/>
-                  </a:lnTo>
-                  <a:lnTo>
-                    <a:pt x="716225" y="2524920"/>
-                  </a:lnTo>
-                  <a:lnTo>
-                    <a:pt x="787847" y="2515517"/>
-                  </a:lnTo>
-                  <a:lnTo>
-                    <a:pt x="859470" y="2505907"/>
-                  </a:lnTo>
-                  <a:lnTo>
-                    <a:pt x="931092" y="2496087"/>
-                  </a:lnTo>
-                  <a:lnTo>
-                    <a:pt x="1002715" y="2486051"/>
-                  </a:lnTo>
-                  <a:lnTo>
-                    <a:pt x="1074337" y="2475796"/>
-                  </a:lnTo>
-                  <a:lnTo>
-                    <a:pt x="1145960" y="2465316"/>
-                  </a:lnTo>
-                  <a:lnTo>
-                    <a:pt x="1217582" y="2454606"/>
-                  </a:lnTo>
-                  <a:lnTo>
-                    <a:pt x="1289205" y="2443662"/>
-                  </a:lnTo>
-                  <a:lnTo>
-                    <a:pt x="1360827" y="2432478"/>
-                  </a:lnTo>
-                  <a:lnTo>
-                    <a:pt x="1432450" y="2421049"/>
-                  </a:lnTo>
-                  <a:lnTo>
-                    <a:pt x="1504073" y="2409369"/>
-                  </a:lnTo>
-                  <a:lnTo>
-                    <a:pt x="1575695" y="2397433"/>
-                  </a:lnTo>
-                  <a:lnTo>
-                    <a:pt x="1647318" y="2385236"/>
-                  </a:lnTo>
-                  <a:lnTo>
-                    <a:pt x="1718940" y="2372772"/>
-                  </a:lnTo>
-                  <a:lnTo>
-                    <a:pt x="1790563" y="2360034"/>
-                  </a:lnTo>
-                  <a:lnTo>
-                    <a:pt x="1862185" y="2347018"/>
-                  </a:lnTo>
-                  <a:lnTo>
-                    <a:pt x="1933808" y="2333716"/>
-                  </a:lnTo>
-                  <a:lnTo>
-                    <a:pt x="2005430" y="2320122"/>
-                  </a:lnTo>
-                  <a:lnTo>
-                    <a:pt x="2077053" y="2306231"/>
-                  </a:lnTo>
-                  <a:lnTo>
-                    <a:pt x="2148675" y="2292036"/>
-                  </a:lnTo>
-                  <a:lnTo>
-                    <a:pt x="2220298" y="2277529"/>
-                  </a:lnTo>
-                  <a:lnTo>
-                    <a:pt x="2291920" y="2262704"/>
-                  </a:lnTo>
-                  <a:lnTo>
-                    <a:pt x="2363543" y="2247555"/>
-                  </a:lnTo>
-                  <a:lnTo>
-                    <a:pt x="2435165" y="2232074"/>
-                  </a:lnTo>
-                  <a:lnTo>
-                    <a:pt x="2506788" y="2216253"/>
-                  </a:lnTo>
-                  <a:lnTo>
-                    <a:pt x="2578410" y="2200086"/>
-                  </a:lnTo>
-                  <a:lnTo>
-                    <a:pt x="2650033" y="2183564"/>
-                  </a:lnTo>
-                  <a:lnTo>
-                    <a:pt x="2721655" y="2166681"/>
-                  </a:lnTo>
-                  <a:lnTo>
-                    <a:pt x="2793278" y="2149427"/>
-                  </a:lnTo>
-                  <a:lnTo>
-                    <a:pt x="2864901" y="2131796"/>
-                  </a:lnTo>
-                  <a:lnTo>
-                    <a:pt x="2936523" y="2113778"/>
-                  </a:lnTo>
-                  <a:lnTo>
-                    <a:pt x="3008146" y="2095365"/>
-                  </a:lnTo>
-                  <a:lnTo>
-                    <a:pt x="3079768" y="2076549"/>
-                  </a:lnTo>
-                  <a:lnTo>
-                    <a:pt x="3151391" y="2057321"/>
-                  </a:lnTo>
-                  <a:lnTo>
-                    <a:pt x="3223013" y="2037671"/>
-                  </a:lnTo>
-                  <a:lnTo>
-                    <a:pt x="3294636" y="2017590"/>
-                  </a:lnTo>
-                  <a:lnTo>
-                    <a:pt x="3366258" y="1997070"/>
-                  </a:lnTo>
-                  <a:lnTo>
-                    <a:pt x="3437881" y="1976100"/>
-                  </a:lnTo>
-                  <a:lnTo>
-                    <a:pt x="3509503" y="1954670"/>
-                  </a:lnTo>
-                  <a:lnTo>
-                    <a:pt x="3581126" y="1932771"/>
-                  </a:lnTo>
-                  <a:lnTo>
-                    <a:pt x="3652748" y="1910392"/>
-                  </a:lnTo>
-                  <a:lnTo>
-                    <a:pt x="3724371" y="1887523"/>
-                  </a:lnTo>
-                  <a:lnTo>
-                    <a:pt x="3795993" y="1864152"/>
-                  </a:lnTo>
-                  <a:lnTo>
-                    <a:pt x="3867616" y="1840270"/>
-                  </a:lnTo>
-                  <a:lnTo>
-                    <a:pt x="3939238" y="1815864"/>
-                  </a:lnTo>
-                  <a:lnTo>
-                    <a:pt x="4010861" y="1790923"/>
-                  </a:lnTo>
-                  <a:lnTo>
-                    <a:pt x="4082483" y="1765436"/>
-                  </a:lnTo>
-                  <a:lnTo>
-                    <a:pt x="4154106" y="1739390"/>
-                  </a:lnTo>
-                  <a:lnTo>
-                    <a:pt x="4225729" y="1712774"/>
-                  </a:lnTo>
-                  <a:lnTo>
-                    <a:pt x="4297351" y="1685574"/>
-                  </a:lnTo>
-                  <a:lnTo>
-                    <a:pt x="4368974" y="1657778"/>
-                  </a:lnTo>
-                  <a:lnTo>
-                    <a:pt x="4440596" y="1629374"/>
-                  </a:lnTo>
-                  <a:lnTo>
-                    <a:pt x="4512219" y="1600347"/>
-                  </a:lnTo>
-                  <a:lnTo>
-                    <a:pt x="4583841" y="1570683"/>
-                  </a:lnTo>
-                  <a:lnTo>
-                    <a:pt x="4655464" y="1540370"/>
-                  </a:lnTo>
-                  <a:lnTo>
-                    <a:pt x="4727086" y="1509393"/>
-                  </a:lnTo>
-                  <a:lnTo>
-                    <a:pt x="4798709" y="1477737"/>
-                  </a:lnTo>
-                  <a:lnTo>
-                    <a:pt x="4870331" y="1445387"/>
-                  </a:lnTo>
-                  <a:lnTo>
-                    <a:pt x="4941954" y="1412328"/>
-                  </a:lnTo>
-                  <a:lnTo>
-                    <a:pt x="5013576" y="1378545"/>
-                  </a:lnTo>
-                  <a:lnTo>
-                    <a:pt x="5085199" y="1344021"/>
-                  </a:lnTo>
-                  <a:lnTo>
-                    <a:pt x="5156821" y="1308742"/>
-                  </a:lnTo>
-                  <a:lnTo>
-                    <a:pt x="5228444" y="1272689"/>
-                  </a:lnTo>
-                  <a:lnTo>
-                    <a:pt x="5300066" y="1235846"/>
-                  </a:lnTo>
-                  <a:lnTo>
-                    <a:pt x="5371689" y="1198195"/>
-                  </a:lnTo>
-                  <a:lnTo>
-                    <a:pt x="5443311" y="1159720"/>
-                  </a:lnTo>
-                  <a:lnTo>
-                    <a:pt x="5514934" y="1120402"/>
-                  </a:lnTo>
-                  <a:lnTo>
-                    <a:pt x="5586557" y="1080222"/>
-                  </a:lnTo>
-                  <a:lnTo>
-                    <a:pt x="5658179" y="1039161"/>
-                  </a:lnTo>
-                  <a:lnTo>
-                    <a:pt x="5729802" y="997201"/>
-                  </a:lnTo>
-                  <a:lnTo>
-                    <a:pt x="5801424" y="954322"/>
-                  </a:lnTo>
-                  <a:lnTo>
-                    <a:pt x="5873047" y="910503"/>
-                  </a:lnTo>
-                  <a:lnTo>
-                    <a:pt x="5944669" y="865723"/>
-                  </a:lnTo>
-                  <a:lnTo>
-                    <a:pt x="6016292" y="819963"/>
-                  </a:lnTo>
-                  <a:lnTo>
-                    <a:pt x="6087914" y="773199"/>
-                  </a:lnTo>
-                  <a:lnTo>
-                    <a:pt x="6159537" y="725412"/>
-                  </a:lnTo>
-                  <a:lnTo>
-                    <a:pt x="6231159" y="676576"/>
-                  </a:lnTo>
-                  <a:lnTo>
-                    <a:pt x="6302782" y="626671"/>
-                  </a:lnTo>
-                  <a:lnTo>
-                    <a:pt x="6374404" y="575672"/>
-                  </a:lnTo>
-                  <a:lnTo>
-                    <a:pt x="6446027" y="523556"/>
-                  </a:lnTo>
-                  <a:lnTo>
-                    <a:pt x="6517649" y="470298"/>
-                  </a:lnTo>
-                  <a:lnTo>
-                    <a:pt x="6589272" y="415873"/>
-                  </a:lnTo>
-                  <a:lnTo>
-                    <a:pt x="6660894" y="360255"/>
-                  </a:lnTo>
-                  <a:lnTo>
-                    <a:pt x="6732517" y="303418"/>
-                  </a:lnTo>
-                  <a:lnTo>
-                    <a:pt x="6804139" y="245336"/>
-                  </a:lnTo>
-                  <a:lnTo>
-                    <a:pt x="6875762" y="185982"/>
-                  </a:lnTo>
-                  <a:lnTo>
-                    <a:pt x="6947385" y="125326"/>
-                  </a:lnTo>
-                  <a:lnTo>
-                    <a:pt x="7019007" y="63342"/>
+                    <a:pt x="71622" y="2878891"/>
+                  </a:lnTo>
+                  <a:lnTo>
+                    <a:pt x="143245" y="2871113"/>
+                  </a:lnTo>
+                  <a:lnTo>
+                    <a:pt x="214867" y="2863154"/>
+                  </a:lnTo>
+                  <a:lnTo>
+                    <a:pt x="286490" y="2855007"/>
+                  </a:lnTo>
+                  <a:lnTo>
+                    <a:pt x="358112" y="2846670"/>
+                  </a:lnTo>
+                  <a:lnTo>
+                    <a:pt x="429735" y="2838138"/>
+                  </a:lnTo>
+                  <a:lnTo>
+                    <a:pt x="501357" y="2829406"/>
+                  </a:lnTo>
+                  <a:lnTo>
+                    <a:pt x="572980" y="2820469"/>
+                  </a:lnTo>
+                  <a:lnTo>
+                    <a:pt x="644602" y="2811323"/>
+                  </a:lnTo>
+                  <a:lnTo>
+                    <a:pt x="716225" y="2801963"/>
+                  </a:lnTo>
+                  <a:lnTo>
+                    <a:pt x="787847" y="2792383"/>
+                  </a:lnTo>
+                  <a:lnTo>
+                    <a:pt x="859470" y="2782579"/>
+                  </a:lnTo>
+                  <a:lnTo>
+                    <a:pt x="931092" y="2772545"/>
+                  </a:lnTo>
+                  <a:lnTo>
+                    <a:pt x="1002715" y="2762277"/>
+                  </a:lnTo>
+                  <a:lnTo>
+                    <a:pt x="1074337" y="2751767"/>
+                  </a:lnTo>
+                  <a:lnTo>
+                    <a:pt x="1145960" y="2741012"/>
+                  </a:lnTo>
+                  <a:lnTo>
+                    <a:pt x="1217582" y="2730005"/>
+                  </a:lnTo>
+                  <a:lnTo>
+                    <a:pt x="1289205" y="2718740"/>
+                  </a:lnTo>
+                  <a:lnTo>
+                    <a:pt x="1360827" y="2707211"/>
+                  </a:lnTo>
+                  <a:lnTo>
+                    <a:pt x="1432450" y="2695412"/>
+                  </a:lnTo>
+                  <a:lnTo>
+                    <a:pt x="1504073" y="2683336"/>
+                  </a:lnTo>
+                  <a:lnTo>
+                    <a:pt x="1575695" y="2670978"/>
+                  </a:lnTo>
+                  <a:lnTo>
+                    <a:pt x="1647318" y="2658330"/>
+                  </a:lnTo>
+                  <a:lnTo>
+                    <a:pt x="1718940" y="2645386"/>
+                  </a:lnTo>
+                  <a:lnTo>
+                    <a:pt x="1790563" y="2632139"/>
+                  </a:lnTo>
+                  <a:lnTo>
+                    <a:pt x="1862185" y="2618582"/>
+                  </a:lnTo>
+                  <a:lnTo>
+                    <a:pt x="1933808" y="2604706"/>
+                  </a:lnTo>
+                  <a:lnTo>
+                    <a:pt x="2005430" y="2590506"/>
+                  </a:lnTo>
+                  <a:lnTo>
+                    <a:pt x="2077053" y="2575974"/>
+                  </a:lnTo>
+                  <a:lnTo>
+                    <a:pt x="2148675" y="2561101"/>
+                  </a:lnTo>
+                  <a:lnTo>
+                    <a:pt x="2220298" y="2545879"/>
+                  </a:lnTo>
+                  <a:lnTo>
+                    <a:pt x="2291920" y="2530301"/>
+                  </a:lnTo>
+                  <a:lnTo>
+                    <a:pt x="2363543" y="2514358"/>
+                  </a:lnTo>
+                  <a:lnTo>
+                    <a:pt x="2435165" y="2498042"/>
+                  </a:lnTo>
+                  <a:lnTo>
+                    <a:pt x="2506788" y="2481343"/>
+                  </a:lnTo>
+                  <a:lnTo>
+                    <a:pt x="2578410" y="2464253"/>
+                  </a:lnTo>
+                  <a:lnTo>
+                    <a:pt x="2650033" y="2446763"/>
+                  </a:lnTo>
+                  <a:lnTo>
+                    <a:pt x="2721655" y="2428864"/>
+                  </a:lnTo>
+                  <a:lnTo>
+                    <a:pt x="2793278" y="2410545"/>
+                  </a:lnTo>
+                  <a:lnTo>
+                    <a:pt x="2864901" y="2391796"/>
+                  </a:lnTo>
+                  <a:lnTo>
+                    <a:pt x="2936523" y="2372609"/>
+                  </a:lnTo>
+                  <a:lnTo>
+                    <a:pt x="3008146" y="2352973"/>
+                  </a:lnTo>
+                  <a:lnTo>
+                    <a:pt x="3079768" y="2332876"/>
+                  </a:lnTo>
+                  <a:lnTo>
+                    <a:pt x="3151391" y="2312308"/>
+                  </a:lnTo>
+                  <a:lnTo>
+                    <a:pt x="3223013" y="2291259"/>
+                  </a:lnTo>
+                  <a:lnTo>
+                    <a:pt x="3294636" y="2269717"/>
+                  </a:lnTo>
+                  <a:lnTo>
+                    <a:pt x="3366258" y="2247670"/>
+                  </a:lnTo>
+                  <a:lnTo>
+                    <a:pt x="3437881" y="2225107"/>
+                  </a:lnTo>
+                  <a:lnTo>
+                    <a:pt x="3509503" y="2202015"/>
+                  </a:lnTo>
+                  <a:lnTo>
+                    <a:pt x="3581126" y="2178383"/>
+                  </a:lnTo>
+                  <a:lnTo>
+                    <a:pt x="3652748" y="2154196"/>
+                  </a:lnTo>
+                  <a:lnTo>
+                    <a:pt x="3724371" y="2129444"/>
+                  </a:lnTo>
+                  <a:lnTo>
+                    <a:pt x="3795993" y="2104111"/>
+                  </a:lnTo>
+                  <a:lnTo>
+                    <a:pt x="3867616" y="2078185"/>
+                  </a:lnTo>
+                  <a:lnTo>
+                    <a:pt x="3939238" y="2051652"/>
+                  </a:lnTo>
+                  <a:lnTo>
+                    <a:pt x="4010861" y="2024497"/>
+                  </a:lnTo>
+                  <a:lnTo>
+                    <a:pt x="4082483" y="1996706"/>
+                  </a:lnTo>
+                  <a:lnTo>
+                    <a:pt x="4154106" y="1968265"/>
+                  </a:lnTo>
+                  <a:lnTo>
+                    <a:pt x="4225729" y="1939157"/>
+                  </a:lnTo>
+                  <a:lnTo>
+                    <a:pt x="4297351" y="1909367"/>
+                  </a:lnTo>
+                  <a:lnTo>
+                    <a:pt x="4368974" y="1878879"/>
+                  </a:lnTo>
+                  <a:lnTo>
+                    <a:pt x="4440596" y="1847677"/>
+                  </a:lnTo>
+                  <a:lnTo>
+                    <a:pt x="4512219" y="1815745"/>
+                  </a:lnTo>
+                  <a:lnTo>
+                    <a:pt x="4583841" y="1783064"/>
+                  </a:lnTo>
+                  <a:lnTo>
+                    <a:pt x="4655464" y="1749618"/>
+                  </a:lnTo>
+                  <a:lnTo>
+                    <a:pt x="4727086" y="1715389"/>
+                  </a:lnTo>
+                  <a:lnTo>
+                    <a:pt x="4798709" y="1680357"/>
+                  </a:lnTo>
+                  <a:lnTo>
+                    <a:pt x="4870331" y="1644505"/>
+                  </a:lnTo>
+                  <a:lnTo>
+                    <a:pt x="4941954" y="1607814"/>
+                  </a:lnTo>
+                  <a:lnTo>
+                    <a:pt x="5013576" y="1570262"/>
+                  </a:lnTo>
+                  <a:lnTo>
+                    <a:pt x="5085199" y="1531832"/>
+                  </a:lnTo>
+                  <a:lnTo>
+                    <a:pt x="5156821" y="1492501"/>
+                  </a:lnTo>
+                  <a:lnTo>
+                    <a:pt x="5228444" y="1452249"/>
+                  </a:lnTo>
+                  <a:lnTo>
+                    <a:pt x="5300066" y="1411054"/>
+                  </a:lnTo>
+                  <a:lnTo>
+                    <a:pt x="5371689" y="1368894"/>
+                  </a:lnTo>
+                  <a:lnTo>
+                    <a:pt x="5443311" y="1325746"/>
+                  </a:lnTo>
+                  <a:lnTo>
+                    <a:pt x="5514934" y="1281588"/>
+                  </a:lnTo>
+                  <a:lnTo>
+                    <a:pt x="5586557" y="1236395"/>
+                  </a:lnTo>
+                  <a:lnTo>
+                    <a:pt x="5658179" y="1190144"/>
+                  </a:lnTo>
+                  <a:lnTo>
+                    <a:pt x="5729802" y="1142809"/>
+                  </a:lnTo>
+                  <a:lnTo>
+                    <a:pt x="5801424" y="1094366"/>
+                  </a:lnTo>
+                  <a:lnTo>
+                    <a:pt x="5873047" y="1044788"/>
+                  </a:lnTo>
+                  <a:lnTo>
+                    <a:pt x="5944669" y="994049"/>
+                  </a:lnTo>
+                  <a:lnTo>
+                    <a:pt x="6016292" y="942121"/>
+                  </a:lnTo>
+                  <a:lnTo>
+                    <a:pt x="6087914" y="888977"/>
+                  </a:lnTo>
+                  <a:lnTo>
+                    <a:pt x="6159537" y="834587"/>
+                  </a:lnTo>
+                  <a:lnTo>
+                    <a:pt x="6231159" y="778924"/>
+                  </a:lnTo>
+                  <a:lnTo>
+                    <a:pt x="6302782" y="721958"/>
+                  </a:lnTo>
+                  <a:lnTo>
+                    <a:pt x="6374404" y="663656"/>
+                  </a:lnTo>
+                  <a:lnTo>
+                    <a:pt x="6446027" y="603989"/>
+                  </a:lnTo>
+                  <a:lnTo>
+                    <a:pt x="6517649" y="542925"/>
+                  </a:lnTo>
+                  <a:lnTo>
+                    <a:pt x="6589272" y="480430"/>
+                  </a:lnTo>
+                  <a:lnTo>
+                    <a:pt x="6660894" y="416471"/>
+                  </a:lnTo>
+                  <a:lnTo>
+                    <a:pt x="6732517" y="351014"/>
+                  </a:lnTo>
+                  <a:lnTo>
+                    <a:pt x="6804139" y="284024"/>
+                  </a:lnTo>
+                  <a:lnTo>
+                    <a:pt x="6875762" y="215465"/>
+                  </a:lnTo>
+                  <a:lnTo>
+                    <a:pt x="6947385" y="145299"/>
+                  </a:lnTo>
+                  <a:lnTo>
+                    <a:pt x="7019007" y="73490"/>
                   </a:lnTo>
                   <a:lnTo>
                     <a:pt x="7090630" y="0"/>

--- a/docs/plots/carbo/jx_carbo_linsubhr_dosedisc_akikdigo.pptx
+++ b/docs/plots/carbo/jx_carbo_linsubhr_dosedisc_akikdigo.pptx
@@ -3132,536 +3132,530 @@
           <p:spPr>
             <a:xfrm>
               <a:off x="1172049" y="1896563"/>
-              <a:ext cx="7090630" cy="3537115"/>
+              <a:ext cx="7090630" cy="3558663"/>
             </a:xfrm>
             <a:custGeom>
               <a:avLst/>
               <a:pathLst>
-                <a:path w="7090630" h="3537115">
+                <a:path w="7090630" h="3558663">
                   <a:moveTo>
-                    <a:pt x="0" y="2741512"/>
+                    <a:pt x="0" y="2382367"/>
                   </a:moveTo>
                   <a:lnTo>
-                    <a:pt x="71622" y="2742508"/>
-                  </a:lnTo>
-                  <a:lnTo>
-                    <a:pt x="143245" y="2743503"/>
-                  </a:lnTo>
-                  <a:lnTo>
-                    <a:pt x="214867" y="2744496"/>
-                  </a:lnTo>
-                  <a:lnTo>
-                    <a:pt x="286490" y="2745489"/>
-                  </a:lnTo>
-                  <a:lnTo>
-                    <a:pt x="358112" y="2746480"/>
-                  </a:lnTo>
-                  <a:lnTo>
-                    <a:pt x="429735" y="2747470"/>
-                  </a:lnTo>
-                  <a:lnTo>
-                    <a:pt x="501357" y="2748460"/>
-                  </a:lnTo>
-                  <a:lnTo>
-                    <a:pt x="572980" y="2749448"/>
-                  </a:lnTo>
-                  <a:lnTo>
-                    <a:pt x="644602" y="2750435"/>
-                  </a:lnTo>
-                  <a:lnTo>
-                    <a:pt x="716225" y="2751421"/>
-                  </a:lnTo>
-                  <a:lnTo>
-                    <a:pt x="787847" y="2752406"/>
-                  </a:lnTo>
-                  <a:lnTo>
-                    <a:pt x="859470" y="2753389"/>
-                  </a:lnTo>
-                  <a:lnTo>
-                    <a:pt x="931092" y="2754372"/>
-                  </a:lnTo>
-                  <a:lnTo>
-                    <a:pt x="1002715" y="2755354"/>
-                  </a:lnTo>
-                  <a:lnTo>
-                    <a:pt x="1074337" y="2756334"/>
-                  </a:lnTo>
-                  <a:lnTo>
-                    <a:pt x="1145960" y="2757314"/>
-                  </a:lnTo>
-                  <a:lnTo>
-                    <a:pt x="1217582" y="2758292"/>
-                  </a:lnTo>
-                  <a:lnTo>
-                    <a:pt x="1289205" y="2759270"/>
-                  </a:lnTo>
-                  <a:lnTo>
-                    <a:pt x="1360827" y="2760246"/>
-                  </a:lnTo>
-                  <a:lnTo>
-                    <a:pt x="1432450" y="2761221"/>
-                  </a:lnTo>
-                  <a:lnTo>
-                    <a:pt x="1504073" y="2762195"/>
-                  </a:lnTo>
-                  <a:lnTo>
-                    <a:pt x="1575695" y="2763168"/>
-                  </a:lnTo>
-                  <a:lnTo>
-                    <a:pt x="1647318" y="2764141"/>
-                  </a:lnTo>
-                  <a:lnTo>
-                    <a:pt x="1718940" y="2765111"/>
-                  </a:lnTo>
-                  <a:lnTo>
-                    <a:pt x="1790563" y="2766081"/>
-                  </a:lnTo>
-                  <a:lnTo>
-                    <a:pt x="1862185" y="2767050"/>
-                  </a:lnTo>
-                  <a:lnTo>
-                    <a:pt x="1933808" y="2768018"/>
-                  </a:lnTo>
-                  <a:lnTo>
-                    <a:pt x="2005430" y="2768985"/>
-                  </a:lnTo>
-                  <a:lnTo>
-                    <a:pt x="2077053" y="2769951"/>
-                  </a:lnTo>
-                  <a:lnTo>
-                    <a:pt x="2148675" y="2770915"/>
-                  </a:lnTo>
-                  <a:lnTo>
-                    <a:pt x="2220298" y="2771879"/>
-                  </a:lnTo>
-                  <a:lnTo>
-                    <a:pt x="2291920" y="2772841"/>
-                  </a:lnTo>
-                  <a:lnTo>
-                    <a:pt x="2363543" y="2773803"/>
-                  </a:lnTo>
-                  <a:lnTo>
-                    <a:pt x="2435165" y="2774763"/>
-                  </a:lnTo>
-                  <a:lnTo>
-                    <a:pt x="2506788" y="2775723"/>
-                  </a:lnTo>
-                  <a:lnTo>
-                    <a:pt x="2578410" y="2776681"/>
-                  </a:lnTo>
-                  <a:lnTo>
-                    <a:pt x="2650033" y="2777638"/>
-                  </a:lnTo>
-                  <a:lnTo>
-                    <a:pt x="2721655" y="2778594"/>
-                  </a:lnTo>
-                  <a:lnTo>
-                    <a:pt x="2793278" y="2779550"/>
-                  </a:lnTo>
-                  <a:lnTo>
-                    <a:pt x="2864901" y="2780504"/>
-                  </a:lnTo>
-                  <a:lnTo>
-                    <a:pt x="2936523" y="2781457"/>
-                  </a:lnTo>
-                  <a:lnTo>
-                    <a:pt x="3008146" y="2782409"/>
-                  </a:lnTo>
-                  <a:lnTo>
-                    <a:pt x="3079768" y="2765730"/>
-                  </a:lnTo>
-                  <a:lnTo>
-                    <a:pt x="3151391" y="2722677"/>
-                  </a:lnTo>
-                  <a:lnTo>
-                    <a:pt x="3223013" y="2677534"/>
-                  </a:lnTo>
-                  <a:lnTo>
-                    <a:pt x="3294636" y="2630200"/>
-                  </a:lnTo>
-                  <a:lnTo>
-                    <a:pt x="3366258" y="2580569"/>
-                  </a:lnTo>
-                  <a:lnTo>
-                    <a:pt x="3437881" y="2528528"/>
-                  </a:lnTo>
-                  <a:lnTo>
-                    <a:pt x="3509503" y="2473961"/>
-                  </a:lnTo>
-                  <a:lnTo>
-                    <a:pt x="3581126" y="2416745"/>
-                  </a:lnTo>
-                  <a:lnTo>
-                    <a:pt x="3652748" y="2356752"/>
-                  </a:lnTo>
-                  <a:lnTo>
-                    <a:pt x="3724371" y="2293846"/>
-                  </a:lnTo>
-                  <a:lnTo>
-                    <a:pt x="3795993" y="2227887"/>
-                  </a:lnTo>
-                  <a:lnTo>
-                    <a:pt x="3867616" y="2158726"/>
-                  </a:lnTo>
-                  <a:lnTo>
-                    <a:pt x="3939238" y="2086208"/>
-                  </a:lnTo>
-                  <a:lnTo>
-                    <a:pt x="4010861" y="2010170"/>
-                  </a:lnTo>
-                  <a:lnTo>
-                    <a:pt x="4082483" y="1930441"/>
-                  </a:lnTo>
-                  <a:lnTo>
-                    <a:pt x="4154106" y="1846841"/>
-                  </a:lnTo>
-                  <a:lnTo>
-                    <a:pt x="4225729" y="1759183"/>
-                  </a:lnTo>
-                  <a:lnTo>
-                    <a:pt x="4297351" y="1667271"/>
-                  </a:lnTo>
-                  <a:lnTo>
-                    <a:pt x="4368974" y="1570896"/>
-                  </a:lnTo>
-                  <a:lnTo>
-                    <a:pt x="4440596" y="1469844"/>
-                  </a:lnTo>
-                  <a:lnTo>
-                    <a:pt x="4512219" y="1363886"/>
-                  </a:lnTo>
-                  <a:lnTo>
-                    <a:pt x="4583841" y="1252784"/>
-                  </a:lnTo>
-                  <a:lnTo>
-                    <a:pt x="4655464" y="1136290"/>
-                  </a:lnTo>
-                  <a:lnTo>
-                    <a:pt x="4727086" y="1014140"/>
-                  </a:lnTo>
-                  <a:lnTo>
-                    <a:pt x="4798709" y="886062"/>
-                  </a:lnTo>
-                  <a:lnTo>
-                    <a:pt x="4870331" y="751766"/>
-                  </a:lnTo>
-                  <a:lnTo>
-                    <a:pt x="4941954" y="610950"/>
-                  </a:lnTo>
-                  <a:lnTo>
-                    <a:pt x="5013576" y="463300"/>
-                  </a:lnTo>
-                  <a:lnTo>
-                    <a:pt x="5085199" y="308482"/>
-                  </a:lnTo>
-                  <a:lnTo>
-                    <a:pt x="5156821" y="146149"/>
-                  </a:lnTo>
-                  <a:lnTo>
-                    <a:pt x="5218318" y="0"/>
+                    <a:pt x="71622" y="2393618"/>
+                  </a:lnTo>
+                  <a:lnTo>
+                    <a:pt x="143245" y="2404769"/>
+                  </a:lnTo>
+                  <a:lnTo>
+                    <a:pt x="214867" y="2415822"/>
+                  </a:lnTo>
+                  <a:lnTo>
+                    <a:pt x="286490" y="2426776"/>
+                  </a:lnTo>
+                  <a:lnTo>
+                    <a:pt x="358112" y="2437634"/>
+                  </a:lnTo>
+                  <a:lnTo>
+                    <a:pt x="429735" y="2448396"/>
+                  </a:lnTo>
+                  <a:lnTo>
+                    <a:pt x="501357" y="2459062"/>
+                  </a:lnTo>
+                  <a:lnTo>
+                    <a:pt x="572980" y="2469633"/>
+                  </a:lnTo>
+                  <a:lnTo>
+                    <a:pt x="644602" y="2480111"/>
+                  </a:lnTo>
+                  <a:lnTo>
+                    <a:pt x="716225" y="2490497"/>
+                  </a:lnTo>
+                  <a:lnTo>
+                    <a:pt x="787847" y="2500790"/>
+                  </a:lnTo>
+                  <a:lnTo>
+                    <a:pt x="859470" y="2510992"/>
+                  </a:lnTo>
+                  <a:lnTo>
+                    <a:pt x="931092" y="2521104"/>
+                  </a:lnTo>
+                  <a:lnTo>
+                    <a:pt x="1002715" y="2531126"/>
+                  </a:lnTo>
+                  <a:lnTo>
+                    <a:pt x="1074337" y="2541059"/>
+                  </a:lnTo>
+                  <a:lnTo>
+                    <a:pt x="1145960" y="2550904"/>
+                  </a:lnTo>
+                  <a:lnTo>
+                    <a:pt x="1217582" y="2560663"/>
+                  </a:lnTo>
+                  <a:lnTo>
+                    <a:pt x="1289205" y="2570334"/>
+                  </a:lnTo>
+                  <a:lnTo>
+                    <a:pt x="1360827" y="2579920"/>
+                  </a:lnTo>
+                  <a:lnTo>
+                    <a:pt x="1432450" y="2589422"/>
+                  </a:lnTo>
+                  <a:lnTo>
+                    <a:pt x="1504073" y="2598839"/>
+                  </a:lnTo>
+                  <a:lnTo>
+                    <a:pt x="1575695" y="2608172"/>
+                  </a:lnTo>
+                  <a:lnTo>
+                    <a:pt x="1647318" y="2617423"/>
+                  </a:lnTo>
+                  <a:lnTo>
+                    <a:pt x="1718940" y="2626592"/>
+                  </a:lnTo>
+                  <a:lnTo>
+                    <a:pt x="1790563" y="2635680"/>
+                  </a:lnTo>
+                  <a:lnTo>
+                    <a:pt x="1862185" y="2644687"/>
+                  </a:lnTo>
+                  <a:lnTo>
+                    <a:pt x="1933808" y="2653615"/>
+                  </a:lnTo>
+                  <a:lnTo>
+                    <a:pt x="2005430" y="2662463"/>
+                  </a:lnTo>
+                  <a:lnTo>
+                    <a:pt x="2077053" y="2671234"/>
+                  </a:lnTo>
+                  <a:lnTo>
+                    <a:pt x="2148675" y="2679926"/>
+                  </a:lnTo>
+                  <a:lnTo>
+                    <a:pt x="2220298" y="2688541"/>
+                  </a:lnTo>
+                  <a:lnTo>
+                    <a:pt x="2291920" y="2697081"/>
+                  </a:lnTo>
+                  <a:lnTo>
+                    <a:pt x="2363543" y="2705544"/>
+                  </a:lnTo>
+                  <a:lnTo>
+                    <a:pt x="2435165" y="2713933"/>
+                  </a:lnTo>
+                  <a:lnTo>
+                    <a:pt x="2506788" y="2722247"/>
+                  </a:lnTo>
+                  <a:lnTo>
+                    <a:pt x="2578410" y="2730487"/>
+                  </a:lnTo>
+                  <a:lnTo>
+                    <a:pt x="2650033" y="2738655"/>
+                  </a:lnTo>
+                  <a:lnTo>
+                    <a:pt x="2721655" y="2746750"/>
+                  </a:lnTo>
+                  <a:lnTo>
+                    <a:pt x="2793278" y="2754774"/>
+                  </a:lnTo>
+                  <a:lnTo>
+                    <a:pt x="2864901" y="2762726"/>
+                  </a:lnTo>
+                  <a:lnTo>
+                    <a:pt x="2936523" y="2770608"/>
+                  </a:lnTo>
+                  <a:lnTo>
+                    <a:pt x="3008146" y="2778421"/>
+                  </a:lnTo>
+                  <a:lnTo>
+                    <a:pt x="3079768" y="2763948"/>
+                  </a:lnTo>
+                  <a:lnTo>
+                    <a:pt x="3151391" y="2716281"/>
+                  </a:lnTo>
+                  <a:lnTo>
+                    <a:pt x="3223013" y="2666057"/>
+                  </a:lnTo>
+                  <a:lnTo>
+                    <a:pt x="3294636" y="2613140"/>
+                  </a:lnTo>
+                  <a:lnTo>
+                    <a:pt x="3366258" y="2557384"/>
+                  </a:lnTo>
+                  <a:lnTo>
+                    <a:pt x="3437881" y="2498637"/>
+                  </a:lnTo>
+                  <a:lnTo>
+                    <a:pt x="3509503" y="2436740"/>
+                  </a:lnTo>
+                  <a:lnTo>
+                    <a:pt x="3581126" y="2371522"/>
+                  </a:lnTo>
+                  <a:lnTo>
+                    <a:pt x="3652748" y="2302807"/>
+                  </a:lnTo>
+                  <a:lnTo>
+                    <a:pt x="3724371" y="2230406"/>
+                  </a:lnTo>
+                  <a:lnTo>
+                    <a:pt x="3795993" y="2154121"/>
+                  </a:lnTo>
+                  <a:lnTo>
+                    <a:pt x="3867616" y="2073745"/>
+                  </a:lnTo>
+                  <a:lnTo>
+                    <a:pt x="3939238" y="1989057"/>
+                  </a:lnTo>
+                  <a:lnTo>
+                    <a:pt x="4010861" y="1899828"/>
+                  </a:lnTo>
+                  <a:lnTo>
+                    <a:pt x="4082483" y="1805812"/>
+                  </a:lnTo>
+                  <a:lnTo>
+                    <a:pt x="4154106" y="1706753"/>
+                  </a:lnTo>
+                  <a:lnTo>
+                    <a:pt x="4225729" y="1602381"/>
+                  </a:lnTo>
+                  <a:lnTo>
+                    <a:pt x="4297351" y="1492411"/>
+                  </a:lnTo>
+                  <a:lnTo>
+                    <a:pt x="4368974" y="1376543"/>
+                  </a:lnTo>
+                  <a:lnTo>
+                    <a:pt x="4440596" y="1254460"/>
+                  </a:lnTo>
+                  <a:lnTo>
+                    <a:pt x="4512219" y="1125828"/>
+                  </a:lnTo>
+                  <a:lnTo>
+                    <a:pt x="4583841" y="990297"/>
+                  </a:lnTo>
+                  <a:lnTo>
+                    <a:pt x="4655464" y="847497"/>
+                  </a:lnTo>
+                  <a:lnTo>
+                    <a:pt x="4727086" y="697037"/>
+                  </a:lnTo>
+                  <a:lnTo>
+                    <a:pt x="4798709" y="538507"/>
+                  </a:lnTo>
+                  <a:lnTo>
+                    <a:pt x="4870331" y="371474"/>
+                  </a:lnTo>
+                  <a:lnTo>
+                    <a:pt x="4941954" y="195482"/>
+                  </a:lnTo>
+                  <a:lnTo>
+                    <a:pt x="5013576" y="10050"/>
+                  </a:lnTo>
+                  <a:lnTo>
+                    <a:pt x="5017261" y="0"/>
                   </a:lnTo>
                   <a:lnTo>
                     <a:pt x="7090630" y="0"/>
                   </a:lnTo>
                   <a:lnTo>
-                    <a:pt x="7090630" y="2834991"/>
-                  </a:lnTo>
-                  <a:lnTo>
-                    <a:pt x="7019007" y="2834096"/>
-                  </a:lnTo>
-                  <a:lnTo>
-                    <a:pt x="6947385" y="2833201"/>
-                  </a:lnTo>
-                  <a:lnTo>
-                    <a:pt x="6875762" y="2832304"/>
-                  </a:lnTo>
-                  <a:lnTo>
-                    <a:pt x="6804139" y="2831407"/>
-                  </a:lnTo>
-                  <a:lnTo>
-                    <a:pt x="6732517" y="2830508"/>
-                  </a:lnTo>
-                  <a:lnTo>
-                    <a:pt x="6660894" y="2829609"/>
-                  </a:lnTo>
-                  <a:lnTo>
-                    <a:pt x="6589272" y="2828708"/>
-                  </a:lnTo>
-                  <a:lnTo>
-                    <a:pt x="6517649" y="2827807"/>
-                  </a:lnTo>
-                  <a:lnTo>
-                    <a:pt x="6446027" y="2826905"/>
-                  </a:lnTo>
-                  <a:lnTo>
-                    <a:pt x="6374404" y="2826001"/>
-                  </a:lnTo>
-                  <a:lnTo>
-                    <a:pt x="6302782" y="2825097"/>
-                  </a:lnTo>
-                  <a:lnTo>
-                    <a:pt x="6231159" y="2824192"/>
-                  </a:lnTo>
-                  <a:lnTo>
-                    <a:pt x="6159537" y="2823285"/>
-                  </a:lnTo>
-                  <a:lnTo>
-                    <a:pt x="6087914" y="2822378"/>
-                  </a:lnTo>
-                  <a:lnTo>
-                    <a:pt x="6016292" y="2821470"/>
-                  </a:lnTo>
-                  <a:lnTo>
-                    <a:pt x="5944669" y="2820560"/>
-                  </a:lnTo>
-                  <a:lnTo>
-                    <a:pt x="5873047" y="2819650"/>
-                  </a:lnTo>
-                  <a:lnTo>
-                    <a:pt x="5801424" y="2818739"/>
-                  </a:lnTo>
-                  <a:lnTo>
-                    <a:pt x="5729802" y="2817826"/>
-                  </a:lnTo>
-                  <a:lnTo>
-                    <a:pt x="5658179" y="2816913"/>
-                  </a:lnTo>
-                  <a:lnTo>
-                    <a:pt x="5586557" y="2815999"/>
-                  </a:lnTo>
-                  <a:lnTo>
-                    <a:pt x="5514934" y="2815083"/>
-                  </a:lnTo>
-                  <a:lnTo>
-                    <a:pt x="5443311" y="2814167"/>
-                  </a:lnTo>
-                  <a:lnTo>
-                    <a:pt x="5371689" y="2813250"/>
-                  </a:lnTo>
-                  <a:lnTo>
-                    <a:pt x="5300066" y="2812331"/>
-                  </a:lnTo>
-                  <a:lnTo>
-                    <a:pt x="5228444" y="2811412"/>
-                  </a:lnTo>
-                  <a:lnTo>
-                    <a:pt x="5156821" y="2810492"/>
-                  </a:lnTo>
-                  <a:lnTo>
-                    <a:pt x="5085199" y="2809570"/>
-                  </a:lnTo>
-                  <a:lnTo>
-                    <a:pt x="5013576" y="2808648"/>
-                  </a:lnTo>
-                  <a:lnTo>
-                    <a:pt x="4941954" y="2807725"/>
-                  </a:lnTo>
-                  <a:lnTo>
-                    <a:pt x="4870331" y="2806800"/>
-                  </a:lnTo>
-                  <a:lnTo>
-                    <a:pt x="4798709" y="2805875"/>
-                  </a:lnTo>
-                  <a:lnTo>
-                    <a:pt x="4727086" y="2804949"/>
-                  </a:lnTo>
-                  <a:lnTo>
-                    <a:pt x="4655464" y="2804021"/>
-                  </a:lnTo>
-                  <a:lnTo>
-                    <a:pt x="4583841" y="2803093"/>
-                  </a:lnTo>
-                  <a:lnTo>
-                    <a:pt x="4512219" y="2802163"/>
-                  </a:lnTo>
-                  <a:lnTo>
-                    <a:pt x="4440596" y="2801233"/>
-                  </a:lnTo>
-                  <a:lnTo>
-                    <a:pt x="4368974" y="2800302"/>
-                  </a:lnTo>
-                  <a:lnTo>
-                    <a:pt x="4297351" y="2799369"/>
-                  </a:lnTo>
-                  <a:lnTo>
-                    <a:pt x="4225729" y="2798436"/>
-                  </a:lnTo>
-                  <a:lnTo>
-                    <a:pt x="4154106" y="2797501"/>
-                  </a:lnTo>
-                  <a:lnTo>
-                    <a:pt x="4082483" y="2796565"/>
-                  </a:lnTo>
-                  <a:lnTo>
-                    <a:pt x="4010861" y="2795629"/>
-                  </a:lnTo>
-                  <a:lnTo>
-                    <a:pt x="3939238" y="2794691"/>
-                  </a:lnTo>
-                  <a:lnTo>
-                    <a:pt x="3867616" y="2793753"/>
-                  </a:lnTo>
-                  <a:lnTo>
-                    <a:pt x="3795993" y="2792813"/>
-                  </a:lnTo>
-                  <a:lnTo>
-                    <a:pt x="3724371" y="2791872"/>
-                  </a:lnTo>
-                  <a:lnTo>
-                    <a:pt x="3652748" y="2790931"/>
-                  </a:lnTo>
-                  <a:lnTo>
-                    <a:pt x="3581126" y="2789988"/>
-                  </a:lnTo>
-                  <a:lnTo>
-                    <a:pt x="3509503" y="2789044"/>
-                  </a:lnTo>
-                  <a:lnTo>
-                    <a:pt x="3437881" y="2788099"/>
-                  </a:lnTo>
-                  <a:lnTo>
-                    <a:pt x="3366258" y="2787154"/>
-                  </a:lnTo>
-                  <a:lnTo>
-                    <a:pt x="3294636" y="2786207"/>
-                  </a:lnTo>
-                  <a:lnTo>
-                    <a:pt x="3223013" y="2785259"/>
-                  </a:lnTo>
-                  <a:lnTo>
-                    <a:pt x="3151391" y="2784310"/>
-                  </a:lnTo>
-                  <a:lnTo>
-                    <a:pt x="3079768" y="2783360"/>
-                  </a:lnTo>
-                  <a:lnTo>
-                    <a:pt x="3008146" y="2806789"/>
-                  </a:lnTo>
-                  <a:lnTo>
-                    <a:pt x="2936523" y="2845948"/>
-                  </a:lnTo>
-                  <a:lnTo>
-                    <a:pt x="2864901" y="2883294"/>
-                  </a:lnTo>
-                  <a:lnTo>
-                    <a:pt x="2793278" y="2918911"/>
-                  </a:lnTo>
-                  <a:lnTo>
-                    <a:pt x="2721655" y="2952879"/>
-                  </a:lnTo>
-                  <a:lnTo>
-                    <a:pt x="2650033" y="2985275"/>
-                  </a:lnTo>
-                  <a:lnTo>
-                    <a:pt x="2578410" y="3016170"/>
-                  </a:lnTo>
-                  <a:lnTo>
-                    <a:pt x="2506788" y="3045636"/>
-                  </a:lnTo>
-                  <a:lnTo>
-                    <a:pt x="2435165" y="3073737"/>
-                  </a:lnTo>
-                  <a:lnTo>
-                    <a:pt x="2363543" y="3100538"/>
-                  </a:lnTo>
-                  <a:lnTo>
-                    <a:pt x="2291920" y="3126097"/>
-                  </a:lnTo>
-                  <a:lnTo>
-                    <a:pt x="2220298" y="3150474"/>
-                  </a:lnTo>
-                  <a:lnTo>
-                    <a:pt x="2148675" y="3173722"/>
-                  </a:lnTo>
-                  <a:lnTo>
-                    <a:pt x="2077053" y="3195893"/>
-                  </a:lnTo>
-                  <a:lnTo>
-                    <a:pt x="2005430" y="3217039"/>
-                  </a:lnTo>
-                  <a:lnTo>
-                    <a:pt x="1933808" y="3237205"/>
-                  </a:lnTo>
-                  <a:lnTo>
-                    <a:pt x="1862185" y="3256438"/>
-                  </a:lnTo>
-                  <a:lnTo>
-                    <a:pt x="1790563" y="3274780"/>
-                  </a:lnTo>
-                  <a:lnTo>
-                    <a:pt x="1718940" y="3292273"/>
-                  </a:lnTo>
-                  <a:lnTo>
-                    <a:pt x="1647318" y="3308957"/>
-                  </a:lnTo>
-                  <a:lnTo>
-                    <a:pt x="1575695" y="3324867"/>
-                  </a:lnTo>
-                  <a:lnTo>
-                    <a:pt x="1504073" y="3340042"/>
-                  </a:lnTo>
-                  <a:lnTo>
-                    <a:pt x="1432450" y="3354514"/>
-                  </a:lnTo>
-                  <a:lnTo>
-                    <a:pt x="1360827" y="3368316"/>
-                  </a:lnTo>
-                  <a:lnTo>
-                    <a:pt x="1289205" y="3381479"/>
-                  </a:lnTo>
-                  <a:lnTo>
-                    <a:pt x="1217582" y="3394032"/>
-                  </a:lnTo>
-                  <a:lnTo>
-                    <a:pt x="1145960" y="3406005"/>
-                  </a:lnTo>
-                  <a:lnTo>
-                    <a:pt x="1074337" y="3417423"/>
-                  </a:lnTo>
-                  <a:lnTo>
-                    <a:pt x="1002715" y="3428312"/>
-                  </a:lnTo>
-                  <a:lnTo>
-                    <a:pt x="931092" y="3438698"/>
-                  </a:lnTo>
-                  <a:lnTo>
-                    <a:pt x="859470" y="3448602"/>
-                  </a:lnTo>
-                  <a:lnTo>
-                    <a:pt x="787847" y="3458048"/>
-                  </a:lnTo>
-                  <a:lnTo>
-                    <a:pt x="716225" y="3467057"/>
-                  </a:lnTo>
-                  <a:lnTo>
-                    <a:pt x="644602" y="3475649"/>
-                  </a:lnTo>
-                  <a:lnTo>
-                    <a:pt x="572980" y="3483843"/>
-                  </a:lnTo>
-                  <a:lnTo>
-                    <a:pt x="501357" y="3491657"/>
-                  </a:lnTo>
-                  <a:lnTo>
-                    <a:pt x="429735" y="3499110"/>
-                  </a:lnTo>
-                  <a:lnTo>
-                    <a:pt x="358112" y="3506218"/>
-                  </a:lnTo>
-                  <a:lnTo>
-                    <a:pt x="286490" y="3512997"/>
-                  </a:lnTo>
-                  <a:lnTo>
-                    <a:pt x="214867" y="3519462"/>
-                  </a:lnTo>
-                  <a:lnTo>
-                    <a:pt x="143245" y="3525627"/>
-                  </a:lnTo>
-                  <a:lnTo>
-                    <a:pt x="71622" y="3531508"/>
-                  </a:lnTo>
-                  <a:lnTo>
-                    <a:pt x="0" y="3537115"/>
+                    <a:pt x="7090630" y="3126153"/>
+                  </a:lnTo>
+                  <a:lnTo>
+                    <a:pt x="7019007" y="3121448"/>
+                  </a:lnTo>
+                  <a:lnTo>
+                    <a:pt x="6947385" y="3116702"/>
+                  </a:lnTo>
+                  <a:lnTo>
+                    <a:pt x="6875762" y="3111912"/>
+                  </a:lnTo>
+                  <a:lnTo>
+                    <a:pt x="6804139" y="3107080"/>
+                  </a:lnTo>
+                  <a:lnTo>
+                    <a:pt x="6732517" y="3102205"/>
+                  </a:lnTo>
+                  <a:lnTo>
+                    <a:pt x="6660894" y="3097286"/>
+                  </a:lnTo>
+                  <a:lnTo>
+                    <a:pt x="6589272" y="3092323"/>
+                  </a:lnTo>
+                  <a:lnTo>
+                    <a:pt x="6517649" y="3087316"/>
+                  </a:lnTo>
+                  <a:lnTo>
+                    <a:pt x="6446027" y="3082264"/>
+                  </a:lnTo>
+                  <a:lnTo>
+                    <a:pt x="6374404" y="3077167"/>
+                  </a:lnTo>
+                  <a:lnTo>
+                    <a:pt x="6302782" y="3072025"/>
+                  </a:lnTo>
+                  <a:lnTo>
+                    <a:pt x="6231159" y="3066836"/>
+                  </a:lnTo>
+                  <a:lnTo>
+                    <a:pt x="6159537" y="3061601"/>
+                  </a:lnTo>
+                  <a:lnTo>
+                    <a:pt x="6087914" y="3056319"/>
+                  </a:lnTo>
+                  <a:lnTo>
+                    <a:pt x="6016292" y="3050991"/>
+                  </a:lnTo>
+                  <a:lnTo>
+                    <a:pt x="5944669" y="3045614"/>
+                  </a:lnTo>
+                  <a:lnTo>
+                    <a:pt x="5873047" y="3040189"/>
+                  </a:lnTo>
+                  <a:lnTo>
+                    <a:pt x="5801424" y="3034716"/>
+                  </a:lnTo>
+                  <a:lnTo>
+                    <a:pt x="5729802" y="3029195"/>
+                  </a:lnTo>
+                  <a:lnTo>
+                    <a:pt x="5658179" y="3023623"/>
+                  </a:lnTo>
+                  <a:lnTo>
+                    <a:pt x="5586557" y="3018002"/>
+                  </a:lnTo>
+                  <a:lnTo>
+                    <a:pt x="5514934" y="3012331"/>
+                  </a:lnTo>
+                  <a:lnTo>
+                    <a:pt x="5443311" y="3006609"/>
+                  </a:lnTo>
+                  <a:lnTo>
+                    <a:pt x="5371689" y="3000836"/>
+                  </a:lnTo>
+                  <a:lnTo>
+                    <a:pt x="5300066" y="2995011"/>
+                  </a:lnTo>
+                  <a:lnTo>
+                    <a:pt x="5228444" y="2989134"/>
+                  </a:lnTo>
+                  <a:lnTo>
+                    <a:pt x="5156821" y="2983205"/>
+                  </a:lnTo>
+                  <a:lnTo>
+                    <a:pt x="5085199" y="2977223"/>
+                  </a:lnTo>
+                  <a:lnTo>
+                    <a:pt x="5013576" y="2971187"/>
+                  </a:lnTo>
+                  <a:lnTo>
+                    <a:pt x="4941954" y="2965097"/>
+                  </a:lnTo>
+                  <a:lnTo>
+                    <a:pt x="4870331" y="2958953"/>
+                  </a:lnTo>
+                  <a:lnTo>
+                    <a:pt x="4798709" y="2952754"/>
+                  </a:lnTo>
+                  <a:lnTo>
+                    <a:pt x="4727086" y="2946500"/>
+                  </a:lnTo>
+                  <a:lnTo>
+                    <a:pt x="4655464" y="2940190"/>
+                  </a:lnTo>
+                  <a:lnTo>
+                    <a:pt x="4583841" y="2933823"/>
+                  </a:lnTo>
+                  <a:lnTo>
+                    <a:pt x="4512219" y="2927400"/>
+                  </a:lnTo>
+                  <a:lnTo>
+                    <a:pt x="4440596" y="2920919"/>
+                  </a:lnTo>
+                  <a:lnTo>
+                    <a:pt x="4368974" y="2914380"/>
+                  </a:lnTo>
+                  <a:lnTo>
+                    <a:pt x="4297351" y="2907782"/>
+                  </a:lnTo>
+                  <a:lnTo>
+                    <a:pt x="4225729" y="2901126"/>
+                  </a:lnTo>
+                  <a:lnTo>
+                    <a:pt x="4154106" y="2894411"/>
+                  </a:lnTo>
+                  <a:lnTo>
+                    <a:pt x="4082483" y="2887635"/>
+                  </a:lnTo>
+                  <a:lnTo>
+                    <a:pt x="4010861" y="2880798"/>
+                  </a:lnTo>
+                  <a:lnTo>
+                    <a:pt x="3939238" y="2873901"/>
+                  </a:lnTo>
+                  <a:lnTo>
+                    <a:pt x="3867616" y="2866942"/>
+                  </a:lnTo>
+                  <a:lnTo>
+                    <a:pt x="3795993" y="2859921"/>
+                  </a:lnTo>
+                  <a:lnTo>
+                    <a:pt x="3724371" y="2852837"/>
+                  </a:lnTo>
+                  <a:lnTo>
+                    <a:pt x="3652748" y="2845690"/>
+                  </a:lnTo>
+                  <a:lnTo>
+                    <a:pt x="3581126" y="2838479"/>
+                  </a:lnTo>
+                  <a:lnTo>
+                    <a:pt x="3509503" y="2831203"/>
+                  </a:lnTo>
+                  <a:lnTo>
+                    <a:pt x="3437881" y="2823862"/>
+                  </a:lnTo>
+                  <a:lnTo>
+                    <a:pt x="3366258" y="2816456"/>
+                  </a:lnTo>
+                  <a:lnTo>
+                    <a:pt x="3294636" y="2808984"/>
+                  </a:lnTo>
+                  <a:lnTo>
+                    <a:pt x="3223013" y="2801445"/>
+                  </a:lnTo>
+                  <a:lnTo>
+                    <a:pt x="3151391" y="2793838"/>
+                  </a:lnTo>
+                  <a:lnTo>
+                    <a:pt x="3079768" y="2786164"/>
+                  </a:lnTo>
+                  <a:lnTo>
+                    <a:pt x="3008146" y="2809188"/>
+                  </a:lnTo>
+                  <a:lnTo>
+                    <a:pt x="2936523" y="2852126"/>
+                  </a:lnTo>
+                  <a:lnTo>
+                    <a:pt x="2864901" y="2892877"/>
+                  </a:lnTo>
+                  <a:lnTo>
+                    <a:pt x="2793278" y="2931554"/>
+                  </a:lnTo>
+                  <a:lnTo>
+                    <a:pt x="2721655" y="2968263"/>
+                  </a:lnTo>
+                  <a:lnTo>
+                    <a:pt x="2650033" y="3003102"/>
+                  </a:lnTo>
+                  <a:lnTo>
+                    <a:pt x="2578410" y="3036168"/>
+                  </a:lnTo>
+                  <a:lnTo>
+                    <a:pt x="2506788" y="3067551"/>
+                  </a:lnTo>
+                  <a:lnTo>
+                    <a:pt x="2435165" y="3097336"/>
+                  </a:lnTo>
+                  <a:lnTo>
+                    <a:pt x="2363543" y="3125604"/>
+                  </a:lnTo>
+                  <a:lnTo>
+                    <a:pt x="2291920" y="3152434"/>
+                  </a:lnTo>
+                  <a:lnTo>
+                    <a:pt x="2220298" y="3177898"/>
+                  </a:lnTo>
+                  <a:lnTo>
+                    <a:pt x="2148675" y="3202066"/>
+                  </a:lnTo>
+                  <a:lnTo>
+                    <a:pt x="2077053" y="3225003"/>
+                  </a:lnTo>
+                  <a:lnTo>
+                    <a:pt x="2005430" y="3246773"/>
+                  </a:lnTo>
+                  <a:lnTo>
+                    <a:pt x="1933808" y="3267434"/>
+                  </a:lnTo>
+                  <a:lnTo>
+                    <a:pt x="1862185" y="3287044"/>
+                  </a:lnTo>
+                  <a:lnTo>
+                    <a:pt x="1790563" y="3305655"/>
+                  </a:lnTo>
+                  <a:lnTo>
+                    <a:pt x="1718940" y="3323319"/>
+                  </a:lnTo>
+                  <a:lnTo>
+                    <a:pt x="1647318" y="3340084"/>
+                  </a:lnTo>
+                  <a:lnTo>
+                    <a:pt x="1575695" y="3355995"/>
+                  </a:lnTo>
+                  <a:lnTo>
+                    <a:pt x="1504073" y="3371097"/>
+                  </a:lnTo>
+                  <a:lnTo>
+                    <a:pt x="1432450" y="3385429"/>
+                  </a:lnTo>
+                  <a:lnTo>
+                    <a:pt x="1360827" y="3399032"/>
+                  </a:lnTo>
+                  <a:lnTo>
+                    <a:pt x="1289205" y="3411943"/>
+                  </a:lnTo>
+                  <a:lnTo>
+                    <a:pt x="1217582" y="3424196"/>
+                  </a:lnTo>
+                  <a:lnTo>
+                    <a:pt x="1145960" y="3435825"/>
+                  </a:lnTo>
+                  <a:lnTo>
+                    <a:pt x="1074337" y="3446863"/>
+                  </a:lnTo>
+                  <a:lnTo>
+                    <a:pt x="1002715" y="3457338"/>
+                  </a:lnTo>
+                  <a:lnTo>
+                    <a:pt x="931092" y="3467281"/>
+                  </a:lnTo>
+                  <a:lnTo>
+                    <a:pt x="859470" y="3476717"/>
+                  </a:lnTo>
+                  <a:lnTo>
+                    <a:pt x="787847" y="3485673"/>
+                  </a:lnTo>
+                  <a:lnTo>
+                    <a:pt x="716225" y="3494173"/>
+                  </a:lnTo>
+                  <a:lnTo>
+                    <a:pt x="644602" y="3502240"/>
+                  </a:lnTo>
+                  <a:lnTo>
+                    <a:pt x="572980" y="3509896"/>
+                  </a:lnTo>
+                  <a:lnTo>
+                    <a:pt x="501357" y="3517163"/>
+                  </a:lnTo>
+                  <a:lnTo>
+                    <a:pt x="429735" y="3524060"/>
+                  </a:lnTo>
+                  <a:lnTo>
+                    <a:pt x="358112" y="3530606"/>
+                  </a:lnTo>
+                  <a:lnTo>
+                    <a:pt x="286490" y="3536818"/>
+                  </a:lnTo>
+                  <a:lnTo>
+                    <a:pt x="214867" y="3542714"/>
+                  </a:lnTo>
+                  <a:lnTo>
+                    <a:pt x="143245" y="3548311"/>
+                  </a:lnTo>
+                  <a:lnTo>
+                    <a:pt x="71622" y="3553622"/>
+                  </a:lnTo>
+                  <a:lnTo>
+                    <a:pt x="0" y="3558663"/>
                   </a:lnTo>
                   <a:close/>
                 </a:path>
@@ -3688,233 +3682,227 @@
           <p:spPr>
             <a:xfrm>
               <a:off x="1172049" y="1896563"/>
-              <a:ext cx="5218318" cy="2782409"/>
+              <a:ext cx="5017261" cy="2778421"/>
             </a:xfrm>
             <a:custGeom>
               <a:avLst/>
               <a:pathLst>
-                <a:path w="5218318" h="2782409">
+                <a:path w="5017261" h="2778421">
                   <a:moveTo>
-                    <a:pt x="0" y="2741512"/>
+                    <a:pt x="0" y="2382367"/>
                   </a:moveTo>
                   <a:lnTo>
-                    <a:pt x="71622" y="2742508"/>
-                  </a:lnTo>
-                  <a:lnTo>
-                    <a:pt x="143245" y="2743503"/>
-                  </a:lnTo>
-                  <a:lnTo>
-                    <a:pt x="214867" y="2744496"/>
-                  </a:lnTo>
-                  <a:lnTo>
-                    <a:pt x="286490" y="2745489"/>
-                  </a:lnTo>
-                  <a:lnTo>
-                    <a:pt x="358112" y="2746480"/>
-                  </a:lnTo>
-                  <a:lnTo>
-                    <a:pt x="429735" y="2747470"/>
-                  </a:lnTo>
-                  <a:lnTo>
-                    <a:pt x="501357" y="2748460"/>
-                  </a:lnTo>
-                  <a:lnTo>
-                    <a:pt x="572980" y="2749448"/>
-                  </a:lnTo>
-                  <a:lnTo>
-                    <a:pt x="644602" y="2750435"/>
-                  </a:lnTo>
-                  <a:lnTo>
-                    <a:pt x="716225" y="2751421"/>
-                  </a:lnTo>
-                  <a:lnTo>
-                    <a:pt x="787847" y="2752406"/>
-                  </a:lnTo>
-                  <a:lnTo>
-                    <a:pt x="859470" y="2753389"/>
-                  </a:lnTo>
-                  <a:lnTo>
-                    <a:pt x="931092" y="2754372"/>
-                  </a:lnTo>
-                  <a:lnTo>
-                    <a:pt x="1002715" y="2755354"/>
-                  </a:lnTo>
-                  <a:lnTo>
-                    <a:pt x="1074337" y="2756334"/>
-                  </a:lnTo>
-                  <a:lnTo>
-                    <a:pt x="1145960" y="2757314"/>
-                  </a:lnTo>
-                  <a:lnTo>
-                    <a:pt x="1217582" y="2758292"/>
-                  </a:lnTo>
-                  <a:lnTo>
-                    <a:pt x="1289205" y="2759270"/>
-                  </a:lnTo>
-                  <a:lnTo>
-                    <a:pt x="1360827" y="2760246"/>
-                  </a:lnTo>
-                  <a:lnTo>
-                    <a:pt x="1432450" y="2761221"/>
-                  </a:lnTo>
-                  <a:lnTo>
-                    <a:pt x="1504073" y="2762195"/>
-                  </a:lnTo>
-                  <a:lnTo>
-                    <a:pt x="1575695" y="2763168"/>
-                  </a:lnTo>
-                  <a:lnTo>
-                    <a:pt x="1647318" y="2764141"/>
-                  </a:lnTo>
-                  <a:lnTo>
-                    <a:pt x="1718940" y="2765111"/>
-                  </a:lnTo>
-                  <a:lnTo>
-                    <a:pt x="1790563" y="2766081"/>
-                  </a:lnTo>
-                  <a:lnTo>
-                    <a:pt x="1862185" y="2767050"/>
-                  </a:lnTo>
-                  <a:lnTo>
-                    <a:pt x="1933808" y="2768018"/>
-                  </a:lnTo>
-                  <a:lnTo>
-                    <a:pt x="2005430" y="2768985"/>
-                  </a:lnTo>
-                  <a:lnTo>
-                    <a:pt x="2077053" y="2769951"/>
-                  </a:lnTo>
-                  <a:lnTo>
-                    <a:pt x="2148675" y="2770915"/>
-                  </a:lnTo>
-                  <a:lnTo>
-                    <a:pt x="2220298" y="2771879"/>
-                  </a:lnTo>
-                  <a:lnTo>
-                    <a:pt x="2291920" y="2772841"/>
-                  </a:lnTo>
-                  <a:lnTo>
-                    <a:pt x="2363543" y="2773803"/>
-                  </a:lnTo>
-                  <a:lnTo>
-                    <a:pt x="2435165" y="2774763"/>
-                  </a:lnTo>
-                  <a:lnTo>
-                    <a:pt x="2506788" y="2775723"/>
-                  </a:lnTo>
-                  <a:lnTo>
-                    <a:pt x="2578410" y="2776681"/>
-                  </a:lnTo>
-                  <a:lnTo>
-                    <a:pt x="2650033" y="2777638"/>
-                  </a:lnTo>
-                  <a:lnTo>
-                    <a:pt x="2721655" y="2778594"/>
-                  </a:lnTo>
-                  <a:lnTo>
-                    <a:pt x="2793278" y="2779550"/>
-                  </a:lnTo>
-                  <a:lnTo>
-                    <a:pt x="2864901" y="2780504"/>
-                  </a:lnTo>
-                  <a:lnTo>
-                    <a:pt x="2936523" y="2781457"/>
-                  </a:lnTo>
-                  <a:lnTo>
-                    <a:pt x="3008146" y="2782409"/>
-                  </a:lnTo>
-                  <a:lnTo>
-                    <a:pt x="3079768" y="2765730"/>
-                  </a:lnTo>
-                  <a:lnTo>
-                    <a:pt x="3151391" y="2722677"/>
-                  </a:lnTo>
-                  <a:lnTo>
-                    <a:pt x="3223013" y="2677534"/>
-                  </a:lnTo>
-                  <a:lnTo>
-                    <a:pt x="3294636" y="2630200"/>
-                  </a:lnTo>
-                  <a:lnTo>
-                    <a:pt x="3366258" y="2580569"/>
-                  </a:lnTo>
-                  <a:lnTo>
-                    <a:pt x="3437881" y="2528528"/>
-                  </a:lnTo>
-                  <a:lnTo>
-                    <a:pt x="3509503" y="2473961"/>
-                  </a:lnTo>
-                  <a:lnTo>
-                    <a:pt x="3581126" y="2416745"/>
-                  </a:lnTo>
-                  <a:lnTo>
-                    <a:pt x="3652748" y="2356752"/>
-                  </a:lnTo>
-                  <a:lnTo>
-                    <a:pt x="3724371" y="2293846"/>
-                  </a:lnTo>
-                  <a:lnTo>
-                    <a:pt x="3795993" y="2227887"/>
-                  </a:lnTo>
-                  <a:lnTo>
-                    <a:pt x="3867616" y="2158726"/>
-                  </a:lnTo>
-                  <a:lnTo>
-                    <a:pt x="3939238" y="2086208"/>
-                  </a:lnTo>
-                  <a:lnTo>
-                    <a:pt x="4010861" y="2010170"/>
-                  </a:lnTo>
-                  <a:lnTo>
-                    <a:pt x="4082483" y="1930441"/>
-                  </a:lnTo>
-                  <a:lnTo>
-                    <a:pt x="4154106" y="1846841"/>
-                  </a:lnTo>
-                  <a:lnTo>
-                    <a:pt x="4225729" y="1759183"/>
-                  </a:lnTo>
-                  <a:lnTo>
-                    <a:pt x="4297351" y="1667271"/>
-                  </a:lnTo>
-                  <a:lnTo>
-                    <a:pt x="4368974" y="1570896"/>
-                  </a:lnTo>
-                  <a:lnTo>
-                    <a:pt x="4440596" y="1469844"/>
-                  </a:lnTo>
-                  <a:lnTo>
-                    <a:pt x="4512219" y="1363886"/>
-                  </a:lnTo>
-                  <a:lnTo>
-                    <a:pt x="4583841" y="1252784"/>
-                  </a:lnTo>
-                  <a:lnTo>
-                    <a:pt x="4655464" y="1136290"/>
-                  </a:lnTo>
-                  <a:lnTo>
-                    <a:pt x="4727086" y="1014140"/>
-                  </a:lnTo>
-                  <a:lnTo>
-                    <a:pt x="4798709" y="886062"/>
-                  </a:lnTo>
-                  <a:lnTo>
-                    <a:pt x="4870331" y="751766"/>
-                  </a:lnTo>
-                  <a:lnTo>
-                    <a:pt x="4941954" y="610950"/>
-                  </a:lnTo>
-                  <a:lnTo>
-                    <a:pt x="5013576" y="463300"/>
-                  </a:lnTo>
-                  <a:lnTo>
-                    <a:pt x="5085199" y="308482"/>
-                  </a:lnTo>
-                  <a:lnTo>
-                    <a:pt x="5156821" y="146149"/>
-                  </a:lnTo>
-                  <a:lnTo>
-                    <a:pt x="5218318" y="0"/>
+                    <a:pt x="71622" y="2393618"/>
+                  </a:lnTo>
+                  <a:lnTo>
+                    <a:pt x="143245" y="2404769"/>
+                  </a:lnTo>
+                  <a:lnTo>
+                    <a:pt x="214867" y="2415822"/>
+                  </a:lnTo>
+                  <a:lnTo>
+                    <a:pt x="286490" y="2426776"/>
+                  </a:lnTo>
+                  <a:lnTo>
+                    <a:pt x="358112" y="2437634"/>
+                  </a:lnTo>
+                  <a:lnTo>
+                    <a:pt x="429735" y="2448396"/>
+                  </a:lnTo>
+                  <a:lnTo>
+                    <a:pt x="501357" y="2459062"/>
+                  </a:lnTo>
+                  <a:lnTo>
+                    <a:pt x="572980" y="2469633"/>
+                  </a:lnTo>
+                  <a:lnTo>
+                    <a:pt x="644602" y="2480111"/>
+                  </a:lnTo>
+                  <a:lnTo>
+                    <a:pt x="716225" y="2490497"/>
+                  </a:lnTo>
+                  <a:lnTo>
+                    <a:pt x="787847" y="2500790"/>
+                  </a:lnTo>
+                  <a:lnTo>
+                    <a:pt x="859470" y="2510992"/>
+                  </a:lnTo>
+                  <a:lnTo>
+                    <a:pt x="931092" y="2521104"/>
+                  </a:lnTo>
+                  <a:lnTo>
+                    <a:pt x="1002715" y="2531126"/>
+                  </a:lnTo>
+                  <a:lnTo>
+                    <a:pt x="1074337" y="2541059"/>
+                  </a:lnTo>
+                  <a:lnTo>
+                    <a:pt x="1145960" y="2550904"/>
+                  </a:lnTo>
+                  <a:lnTo>
+                    <a:pt x="1217582" y="2560663"/>
+                  </a:lnTo>
+                  <a:lnTo>
+                    <a:pt x="1289205" y="2570334"/>
+                  </a:lnTo>
+                  <a:lnTo>
+                    <a:pt x="1360827" y="2579920"/>
+                  </a:lnTo>
+                  <a:lnTo>
+                    <a:pt x="1432450" y="2589422"/>
+                  </a:lnTo>
+                  <a:lnTo>
+                    <a:pt x="1504073" y="2598839"/>
+                  </a:lnTo>
+                  <a:lnTo>
+                    <a:pt x="1575695" y="2608172"/>
+                  </a:lnTo>
+                  <a:lnTo>
+                    <a:pt x="1647318" y="2617423"/>
+                  </a:lnTo>
+                  <a:lnTo>
+                    <a:pt x="1718940" y="2626592"/>
+                  </a:lnTo>
+                  <a:lnTo>
+                    <a:pt x="1790563" y="2635680"/>
+                  </a:lnTo>
+                  <a:lnTo>
+                    <a:pt x="1862185" y="2644687"/>
+                  </a:lnTo>
+                  <a:lnTo>
+                    <a:pt x="1933808" y="2653615"/>
+                  </a:lnTo>
+                  <a:lnTo>
+                    <a:pt x="2005430" y="2662463"/>
+                  </a:lnTo>
+                  <a:lnTo>
+                    <a:pt x="2077053" y="2671234"/>
+                  </a:lnTo>
+                  <a:lnTo>
+                    <a:pt x="2148675" y="2679926"/>
+                  </a:lnTo>
+                  <a:lnTo>
+                    <a:pt x="2220298" y="2688541"/>
+                  </a:lnTo>
+                  <a:lnTo>
+                    <a:pt x="2291920" y="2697081"/>
+                  </a:lnTo>
+                  <a:lnTo>
+                    <a:pt x="2363543" y="2705544"/>
+                  </a:lnTo>
+                  <a:lnTo>
+                    <a:pt x="2435165" y="2713933"/>
+                  </a:lnTo>
+                  <a:lnTo>
+                    <a:pt x="2506788" y="2722247"/>
+                  </a:lnTo>
+                  <a:lnTo>
+                    <a:pt x="2578410" y="2730487"/>
+                  </a:lnTo>
+                  <a:lnTo>
+                    <a:pt x="2650033" y="2738655"/>
+                  </a:lnTo>
+                  <a:lnTo>
+                    <a:pt x="2721655" y="2746750"/>
+                  </a:lnTo>
+                  <a:lnTo>
+                    <a:pt x="2793278" y="2754774"/>
+                  </a:lnTo>
+                  <a:lnTo>
+                    <a:pt x="2864901" y="2762726"/>
+                  </a:lnTo>
+                  <a:lnTo>
+                    <a:pt x="2936523" y="2770608"/>
+                  </a:lnTo>
+                  <a:lnTo>
+                    <a:pt x="3008146" y="2778421"/>
+                  </a:lnTo>
+                  <a:lnTo>
+                    <a:pt x="3079768" y="2763948"/>
+                  </a:lnTo>
+                  <a:lnTo>
+                    <a:pt x="3151391" y="2716281"/>
+                  </a:lnTo>
+                  <a:lnTo>
+                    <a:pt x="3223013" y="2666057"/>
+                  </a:lnTo>
+                  <a:lnTo>
+                    <a:pt x="3294636" y="2613140"/>
+                  </a:lnTo>
+                  <a:lnTo>
+                    <a:pt x="3366258" y="2557384"/>
+                  </a:lnTo>
+                  <a:lnTo>
+                    <a:pt x="3437881" y="2498637"/>
+                  </a:lnTo>
+                  <a:lnTo>
+                    <a:pt x="3509503" y="2436740"/>
+                  </a:lnTo>
+                  <a:lnTo>
+                    <a:pt x="3581126" y="2371522"/>
+                  </a:lnTo>
+                  <a:lnTo>
+                    <a:pt x="3652748" y="2302807"/>
+                  </a:lnTo>
+                  <a:lnTo>
+                    <a:pt x="3724371" y="2230406"/>
+                  </a:lnTo>
+                  <a:lnTo>
+                    <a:pt x="3795993" y="2154121"/>
+                  </a:lnTo>
+                  <a:lnTo>
+                    <a:pt x="3867616" y="2073745"/>
+                  </a:lnTo>
+                  <a:lnTo>
+                    <a:pt x="3939238" y="1989057"/>
+                  </a:lnTo>
+                  <a:lnTo>
+                    <a:pt x="4010861" y="1899828"/>
+                  </a:lnTo>
+                  <a:lnTo>
+                    <a:pt x="4082483" y="1805812"/>
+                  </a:lnTo>
+                  <a:lnTo>
+                    <a:pt x="4154106" y="1706753"/>
+                  </a:lnTo>
+                  <a:lnTo>
+                    <a:pt x="4225729" y="1602381"/>
+                  </a:lnTo>
+                  <a:lnTo>
+                    <a:pt x="4297351" y="1492411"/>
+                  </a:lnTo>
+                  <a:lnTo>
+                    <a:pt x="4368974" y="1376543"/>
+                  </a:lnTo>
+                  <a:lnTo>
+                    <a:pt x="4440596" y="1254460"/>
+                  </a:lnTo>
+                  <a:lnTo>
+                    <a:pt x="4512219" y="1125828"/>
+                  </a:lnTo>
+                  <a:lnTo>
+                    <a:pt x="4583841" y="990297"/>
+                  </a:lnTo>
+                  <a:lnTo>
+                    <a:pt x="4655464" y="847497"/>
+                  </a:lnTo>
+                  <a:lnTo>
+                    <a:pt x="4727086" y="697037"/>
+                  </a:lnTo>
+                  <a:lnTo>
+                    <a:pt x="4798709" y="538507"/>
+                  </a:lnTo>
+                  <a:lnTo>
+                    <a:pt x="4870331" y="371474"/>
+                  </a:lnTo>
+                  <a:lnTo>
+                    <a:pt x="4941954" y="195482"/>
+                  </a:lnTo>
+                  <a:lnTo>
+                    <a:pt x="5013576" y="10050"/>
+                  </a:lnTo>
+                  <a:lnTo>
+                    <a:pt x="5017261" y="0"/>
                   </a:lnTo>
                 </a:path>
               </a:pathLst>
@@ -3934,312 +3922,312 @@
           </p:nvSpPr>
           <p:spPr>
             <a:xfrm>
-              <a:off x="1172049" y="4679923"/>
-              <a:ext cx="7090630" cy="753755"/>
+              <a:off x="1172049" y="4682727"/>
+              <a:ext cx="7090630" cy="772498"/>
             </a:xfrm>
             <a:custGeom>
               <a:avLst/>
               <a:pathLst>
-                <a:path w="7090630" h="753755">
+                <a:path w="7090630" h="772498">
                   <a:moveTo>
-                    <a:pt x="7090630" y="51630"/>
+                    <a:pt x="7090630" y="339989"/>
                   </a:moveTo>
                   <a:lnTo>
-                    <a:pt x="7019007" y="50736"/>
-                  </a:lnTo>
-                  <a:lnTo>
-                    <a:pt x="6947385" y="49840"/>
-                  </a:lnTo>
-                  <a:lnTo>
-                    <a:pt x="6875762" y="48944"/>
-                  </a:lnTo>
-                  <a:lnTo>
-                    <a:pt x="6804139" y="48046"/>
-                  </a:lnTo>
-                  <a:lnTo>
-                    <a:pt x="6732517" y="47148"/>
-                  </a:lnTo>
-                  <a:lnTo>
-                    <a:pt x="6660894" y="46249"/>
-                  </a:lnTo>
-                  <a:lnTo>
-                    <a:pt x="6589272" y="45348"/>
-                  </a:lnTo>
-                  <a:lnTo>
-                    <a:pt x="6517649" y="44447"/>
-                  </a:lnTo>
-                  <a:lnTo>
-                    <a:pt x="6446027" y="43544"/>
-                  </a:lnTo>
-                  <a:lnTo>
-                    <a:pt x="6374404" y="42641"/>
-                  </a:lnTo>
-                  <a:lnTo>
-                    <a:pt x="6302782" y="41737"/>
-                  </a:lnTo>
-                  <a:lnTo>
-                    <a:pt x="6231159" y="40831"/>
-                  </a:lnTo>
-                  <a:lnTo>
-                    <a:pt x="6159537" y="39925"/>
-                  </a:lnTo>
-                  <a:lnTo>
-                    <a:pt x="6087914" y="39018"/>
-                  </a:lnTo>
-                  <a:lnTo>
-                    <a:pt x="6016292" y="38109"/>
-                  </a:lnTo>
-                  <a:lnTo>
-                    <a:pt x="5944669" y="37200"/>
-                  </a:lnTo>
-                  <a:lnTo>
-                    <a:pt x="5873047" y="36290"/>
-                  </a:lnTo>
-                  <a:lnTo>
-                    <a:pt x="5801424" y="35378"/>
-                  </a:lnTo>
-                  <a:lnTo>
-                    <a:pt x="5729802" y="34466"/>
-                  </a:lnTo>
-                  <a:lnTo>
-                    <a:pt x="5658179" y="33553"/>
-                  </a:lnTo>
-                  <a:lnTo>
-                    <a:pt x="5586557" y="32638"/>
-                  </a:lnTo>
-                  <a:lnTo>
-                    <a:pt x="5514934" y="31723"/>
-                  </a:lnTo>
-                  <a:lnTo>
-                    <a:pt x="5443311" y="30807"/>
-                  </a:lnTo>
-                  <a:lnTo>
-                    <a:pt x="5371689" y="29889"/>
-                  </a:lnTo>
-                  <a:lnTo>
-                    <a:pt x="5300066" y="28971"/>
-                  </a:lnTo>
-                  <a:lnTo>
-                    <a:pt x="5228444" y="28052"/>
-                  </a:lnTo>
-                  <a:lnTo>
-                    <a:pt x="5156821" y="27131"/>
-                  </a:lnTo>
-                  <a:lnTo>
-                    <a:pt x="5085199" y="26210"/>
-                  </a:lnTo>
-                  <a:lnTo>
-                    <a:pt x="5013576" y="25288"/>
-                  </a:lnTo>
-                  <a:lnTo>
-                    <a:pt x="4941954" y="24364"/>
-                  </a:lnTo>
-                  <a:lnTo>
-                    <a:pt x="4870331" y="23440"/>
-                  </a:lnTo>
-                  <a:lnTo>
-                    <a:pt x="4798709" y="22515"/>
-                  </a:lnTo>
-                  <a:lnTo>
-                    <a:pt x="4727086" y="21588"/>
-                  </a:lnTo>
-                  <a:lnTo>
-                    <a:pt x="4655464" y="20661"/>
-                  </a:lnTo>
-                  <a:lnTo>
-                    <a:pt x="4583841" y="19733"/>
-                  </a:lnTo>
-                  <a:lnTo>
-                    <a:pt x="4512219" y="18803"/>
-                  </a:lnTo>
-                  <a:lnTo>
-                    <a:pt x="4440596" y="17873"/>
-                  </a:lnTo>
-                  <a:lnTo>
-                    <a:pt x="4368974" y="16941"/>
-                  </a:lnTo>
-                  <a:lnTo>
-                    <a:pt x="4297351" y="16009"/>
-                  </a:lnTo>
-                  <a:lnTo>
-                    <a:pt x="4225729" y="15075"/>
-                  </a:lnTo>
-                  <a:lnTo>
-                    <a:pt x="4154106" y="14141"/>
-                  </a:lnTo>
-                  <a:lnTo>
-                    <a:pt x="4082483" y="13205"/>
-                  </a:lnTo>
-                  <a:lnTo>
-                    <a:pt x="4010861" y="12269"/>
-                  </a:lnTo>
-                  <a:lnTo>
-                    <a:pt x="3939238" y="11331"/>
-                  </a:lnTo>
-                  <a:lnTo>
-                    <a:pt x="3867616" y="10392"/>
-                  </a:lnTo>
-                  <a:lnTo>
-                    <a:pt x="3795993" y="9453"/>
-                  </a:lnTo>
-                  <a:lnTo>
-                    <a:pt x="3724371" y="8512"/>
-                  </a:lnTo>
-                  <a:lnTo>
-                    <a:pt x="3652748" y="7570"/>
-                  </a:lnTo>
-                  <a:lnTo>
-                    <a:pt x="3581126" y="6628"/>
-                  </a:lnTo>
-                  <a:lnTo>
-                    <a:pt x="3509503" y="5684"/>
-                  </a:lnTo>
-                  <a:lnTo>
-                    <a:pt x="3437881" y="4739"/>
-                  </a:lnTo>
-                  <a:lnTo>
-                    <a:pt x="3366258" y="3793"/>
-                  </a:lnTo>
-                  <a:lnTo>
-                    <a:pt x="3294636" y="2846"/>
-                  </a:lnTo>
-                  <a:lnTo>
-                    <a:pt x="3223013" y="1898"/>
-                  </a:lnTo>
-                  <a:lnTo>
-                    <a:pt x="3151391" y="949"/>
+                    <a:pt x="7019007" y="335284"/>
+                  </a:lnTo>
+                  <a:lnTo>
+                    <a:pt x="6947385" y="330537"/>
+                  </a:lnTo>
+                  <a:lnTo>
+                    <a:pt x="6875762" y="325748"/>
+                  </a:lnTo>
+                  <a:lnTo>
+                    <a:pt x="6804139" y="320916"/>
+                  </a:lnTo>
+                  <a:lnTo>
+                    <a:pt x="6732517" y="316041"/>
+                  </a:lnTo>
+                  <a:lnTo>
+                    <a:pt x="6660894" y="311122"/>
+                  </a:lnTo>
+                  <a:lnTo>
+                    <a:pt x="6589272" y="306159"/>
+                  </a:lnTo>
+                  <a:lnTo>
+                    <a:pt x="6517649" y="301152"/>
+                  </a:lnTo>
+                  <a:lnTo>
+                    <a:pt x="6446027" y="296100"/>
+                  </a:lnTo>
+                  <a:lnTo>
+                    <a:pt x="6374404" y="291003"/>
+                  </a:lnTo>
+                  <a:lnTo>
+                    <a:pt x="6302782" y="285860"/>
+                  </a:lnTo>
+                  <a:lnTo>
+                    <a:pt x="6231159" y="280672"/>
+                  </a:lnTo>
+                  <a:lnTo>
+                    <a:pt x="6159537" y="275437"/>
+                  </a:lnTo>
+                  <a:lnTo>
+                    <a:pt x="6087914" y="270155"/>
+                  </a:lnTo>
+                  <a:lnTo>
+                    <a:pt x="6016292" y="264826"/>
+                  </a:lnTo>
+                  <a:lnTo>
+                    <a:pt x="5944669" y="259450"/>
+                  </a:lnTo>
+                  <a:lnTo>
+                    <a:pt x="5873047" y="254025"/>
+                  </a:lnTo>
+                  <a:lnTo>
+                    <a:pt x="5801424" y="248552"/>
+                  </a:lnTo>
+                  <a:lnTo>
+                    <a:pt x="5729802" y="243030"/>
+                  </a:lnTo>
+                  <a:lnTo>
+                    <a:pt x="5658179" y="237459"/>
+                  </a:lnTo>
+                  <a:lnTo>
+                    <a:pt x="5586557" y="231838"/>
+                  </a:lnTo>
+                  <a:lnTo>
+                    <a:pt x="5514934" y="226167"/>
+                  </a:lnTo>
+                  <a:lnTo>
+                    <a:pt x="5443311" y="220445"/>
+                  </a:lnTo>
+                  <a:lnTo>
+                    <a:pt x="5371689" y="214672"/>
+                  </a:lnTo>
+                  <a:lnTo>
+                    <a:pt x="5300066" y="208847"/>
+                  </a:lnTo>
+                  <a:lnTo>
+                    <a:pt x="5228444" y="202970"/>
+                  </a:lnTo>
+                  <a:lnTo>
+                    <a:pt x="5156821" y="197041"/>
+                  </a:lnTo>
+                  <a:lnTo>
+                    <a:pt x="5085199" y="191059"/>
+                  </a:lnTo>
+                  <a:lnTo>
+                    <a:pt x="5013576" y="185023"/>
+                  </a:lnTo>
+                  <a:lnTo>
+                    <a:pt x="4941954" y="178933"/>
+                  </a:lnTo>
+                  <a:lnTo>
+                    <a:pt x="4870331" y="172789"/>
+                  </a:lnTo>
+                  <a:lnTo>
+                    <a:pt x="4798709" y="166590"/>
+                  </a:lnTo>
+                  <a:lnTo>
+                    <a:pt x="4727086" y="160336"/>
+                  </a:lnTo>
+                  <a:lnTo>
+                    <a:pt x="4655464" y="154026"/>
+                  </a:lnTo>
+                  <a:lnTo>
+                    <a:pt x="4583841" y="147659"/>
+                  </a:lnTo>
+                  <a:lnTo>
+                    <a:pt x="4512219" y="141235"/>
+                  </a:lnTo>
+                  <a:lnTo>
+                    <a:pt x="4440596" y="134754"/>
+                  </a:lnTo>
+                  <a:lnTo>
+                    <a:pt x="4368974" y="128216"/>
+                  </a:lnTo>
+                  <a:lnTo>
+                    <a:pt x="4297351" y="121618"/>
+                  </a:lnTo>
+                  <a:lnTo>
+                    <a:pt x="4225729" y="114962"/>
+                  </a:lnTo>
+                  <a:lnTo>
+                    <a:pt x="4154106" y="108246"/>
+                  </a:lnTo>
+                  <a:lnTo>
+                    <a:pt x="4082483" y="101471"/>
+                  </a:lnTo>
+                  <a:lnTo>
+                    <a:pt x="4010861" y="94634"/>
+                  </a:lnTo>
+                  <a:lnTo>
+                    <a:pt x="3939238" y="87737"/>
+                  </a:lnTo>
+                  <a:lnTo>
+                    <a:pt x="3867616" y="80778"/>
+                  </a:lnTo>
+                  <a:lnTo>
+                    <a:pt x="3795993" y="73757"/>
+                  </a:lnTo>
+                  <a:lnTo>
+                    <a:pt x="3724371" y="66673"/>
+                  </a:lnTo>
+                  <a:lnTo>
+                    <a:pt x="3652748" y="59525"/>
+                  </a:lnTo>
+                  <a:lnTo>
+                    <a:pt x="3581126" y="52314"/>
+                  </a:lnTo>
+                  <a:lnTo>
+                    <a:pt x="3509503" y="45039"/>
+                  </a:lnTo>
+                  <a:lnTo>
+                    <a:pt x="3437881" y="37698"/>
+                  </a:lnTo>
+                  <a:lnTo>
+                    <a:pt x="3366258" y="30292"/>
+                  </a:lnTo>
+                  <a:lnTo>
+                    <a:pt x="3294636" y="22820"/>
+                  </a:lnTo>
+                  <a:lnTo>
+                    <a:pt x="3223013" y="15280"/>
+                  </a:lnTo>
+                  <a:lnTo>
+                    <a:pt x="3151391" y="7674"/>
                   </a:lnTo>
                   <a:lnTo>
                     <a:pt x="3079768" y="0"/>
                   </a:lnTo>
                   <a:lnTo>
-                    <a:pt x="3008146" y="23429"/>
-                  </a:lnTo>
-                  <a:lnTo>
-                    <a:pt x="2936523" y="62588"/>
-                  </a:lnTo>
-                  <a:lnTo>
-                    <a:pt x="2864901" y="99934"/>
-                  </a:lnTo>
-                  <a:lnTo>
-                    <a:pt x="2793278" y="135551"/>
-                  </a:lnTo>
-                  <a:lnTo>
-                    <a:pt x="2721655" y="169519"/>
-                  </a:lnTo>
-                  <a:lnTo>
-                    <a:pt x="2650033" y="201914"/>
-                  </a:lnTo>
-                  <a:lnTo>
-                    <a:pt x="2578410" y="232810"/>
-                  </a:lnTo>
-                  <a:lnTo>
-                    <a:pt x="2506788" y="262276"/>
-                  </a:lnTo>
-                  <a:lnTo>
-                    <a:pt x="2435165" y="290377"/>
-                  </a:lnTo>
-                  <a:lnTo>
-                    <a:pt x="2363543" y="317177"/>
-                  </a:lnTo>
-                  <a:lnTo>
-                    <a:pt x="2291920" y="342737"/>
-                  </a:lnTo>
-                  <a:lnTo>
-                    <a:pt x="2220298" y="367114"/>
-                  </a:lnTo>
-                  <a:lnTo>
-                    <a:pt x="2148675" y="390361"/>
-                  </a:lnTo>
-                  <a:lnTo>
-                    <a:pt x="2077053" y="412533"/>
-                  </a:lnTo>
-                  <a:lnTo>
-                    <a:pt x="2005430" y="433678"/>
-                  </a:lnTo>
-                  <a:lnTo>
-                    <a:pt x="1933808" y="453845"/>
-                  </a:lnTo>
-                  <a:lnTo>
-                    <a:pt x="1862185" y="473077"/>
-                  </a:lnTo>
-                  <a:lnTo>
-                    <a:pt x="1790563" y="491420"/>
-                  </a:lnTo>
-                  <a:lnTo>
-                    <a:pt x="1718940" y="508913"/>
-                  </a:lnTo>
-                  <a:lnTo>
-                    <a:pt x="1647318" y="525596"/>
-                  </a:lnTo>
-                  <a:lnTo>
-                    <a:pt x="1575695" y="541507"/>
-                  </a:lnTo>
-                  <a:lnTo>
-                    <a:pt x="1504073" y="556682"/>
-                  </a:lnTo>
-                  <a:lnTo>
-                    <a:pt x="1432450" y="571153"/>
-                  </a:lnTo>
-                  <a:lnTo>
-                    <a:pt x="1360827" y="584955"/>
-                  </a:lnTo>
-                  <a:lnTo>
-                    <a:pt x="1289205" y="598118"/>
-                  </a:lnTo>
-                  <a:lnTo>
-                    <a:pt x="1217582" y="610672"/>
-                  </a:lnTo>
-                  <a:lnTo>
-                    <a:pt x="1145960" y="622644"/>
-                  </a:lnTo>
-                  <a:lnTo>
-                    <a:pt x="1074337" y="634062"/>
-                  </a:lnTo>
-                  <a:lnTo>
-                    <a:pt x="1002715" y="644952"/>
-                  </a:lnTo>
-                  <a:lnTo>
-                    <a:pt x="931092" y="655337"/>
-                  </a:lnTo>
-                  <a:lnTo>
-                    <a:pt x="859470" y="665242"/>
-                  </a:lnTo>
-                  <a:lnTo>
-                    <a:pt x="787847" y="674688"/>
-                  </a:lnTo>
-                  <a:lnTo>
-                    <a:pt x="716225" y="683697"/>
-                  </a:lnTo>
-                  <a:lnTo>
-                    <a:pt x="644602" y="692288"/>
-                  </a:lnTo>
-                  <a:lnTo>
-                    <a:pt x="572980" y="700482"/>
-                  </a:lnTo>
-                  <a:lnTo>
-                    <a:pt x="501357" y="708297"/>
-                  </a:lnTo>
-                  <a:lnTo>
-                    <a:pt x="429735" y="715750"/>
-                  </a:lnTo>
-                  <a:lnTo>
-                    <a:pt x="358112" y="722858"/>
-                  </a:lnTo>
-                  <a:lnTo>
-                    <a:pt x="286490" y="729636"/>
-                  </a:lnTo>
-                  <a:lnTo>
-                    <a:pt x="214867" y="736101"/>
-                  </a:lnTo>
-                  <a:lnTo>
-                    <a:pt x="143245" y="742267"/>
-                  </a:lnTo>
-                  <a:lnTo>
-                    <a:pt x="71622" y="748147"/>
-                  </a:lnTo>
-                  <a:lnTo>
-                    <a:pt x="0" y="753755"/>
+                    <a:pt x="3008146" y="23024"/>
+                  </a:lnTo>
+                  <a:lnTo>
+                    <a:pt x="2936523" y="65962"/>
+                  </a:lnTo>
+                  <a:lnTo>
+                    <a:pt x="2864901" y="106713"/>
+                  </a:lnTo>
+                  <a:lnTo>
+                    <a:pt x="2793278" y="145390"/>
+                  </a:lnTo>
+                  <a:lnTo>
+                    <a:pt x="2721655" y="182098"/>
+                  </a:lnTo>
+                  <a:lnTo>
+                    <a:pt x="2650033" y="216938"/>
+                  </a:lnTo>
+                  <a:lnTo>
+                    <a:pt x="2578410" y="250004"/>
+                  </a:lnTo>
+                  <a:lnTo>
+                    <a:pt x="2506788" y="281386"/>
+                  </a:lnTo>
+                  <a:lnTo>
+                    <a:pt x="2435165" y="311171"/>
+                  </a:lnTo>
+                  <a:lnTo>
+                    <a:pt x="2363543" y="339440"/>
+                  </a:lnTo>
+                  <a:lnTo>
+                    <a:pt x="2291920" y="366270"/>
+                  </a:lnTo>
+                  <a:lnTo>
+                    <a:pt x="2220298" y="391734"/>
+                  </a:lnTo>
+                  <a:lnTo>
+                    <a:pt x="2148675" y="415901"/>
+                  </a:lnTo>
+                  <a:lnTo>
+                    <a:pt x="2077053" y="438839"/>
+                  </a:lnTo>
+                  <a:lnTo>
+                    <a:pt x="2005430" y="460609"/>
+                  </a:lnTo>
+                  <a:lnTo>
+                    <a:pt x="1933808" y="481270"/>
+                  </a:lnTo>
+                  <a:lnTo>
+                    <a:pt x="1862185" y="500880"/>
+                  </a:lnTo>
+                  <a:lnTo>
+                    <a:pt x="1790563" y="519491"/>
+                  </a:lnTo>
+                  <a:lnTo>
+                    <a:pt x="1718940" y="537155"/>
+                  </a:lnTo>
+                  <a:lnTo>
+                    <a:pt x="1647318" y="553920"/>
+                  </a:lnTo>
+                  <a:lnTo>
+                    <a:pt x="1575695" y="569831"/>
+                  </a:lnTo>
+                  <a:lnTo>
+                    <a:pt x="1504073" y="584932"/>
+                  </a:lnTo>
+                  <a:lnTo>
+                    <a:pt x="1432450" y="599265"/>
+                  </a:lnTo>
+                  <a:lnTo>
+                    <a:pt x="1360827" y="612868"/>
+                  </a:lnTo>
+                  <a:lnTo>
+                    <a:pt x="1289205" y="625778"/>
+                  </a:lnTo>
+                  <a:lnTo>
+                    <a:pt x="1217582" y="638032"/>
+                  </a:lnTo>
+                  <a:lnTo>
+                    <a:pt x="1145960" y="649661"/>
+                  </a:lnTo>
+                  <a:lnTo>
+                    <a:pt x="1074337" y="660699"/>
+                  </a:lnTo>
+                  <a:lnTo>
+                    <a:pt x="1002715" y="671174"/>
+                  </a:lnTo>
+                  <a:lnTo>
+                    <a:pt x="931092" y="681116"/>
+                  </a:lnTo>
+                  <a:lnTo>
+                    <a:pt x="859470" y="690553"/>
+                  </a:lnTo>
+                  <a:lnTo>
+                    <a:pt x="787847" y="699508"/>
+                  </a:lnTo>
+                  <a:lnTo>
+                    <a:pt x="716225" y="708008"/>
+                  </a:lnTo>
+                  <a:lnTo>
+                    <a:pt x="644602" y="716076"/>
+                  </a:lnTo>
+                  <a:lnTo>
+                    <a:pt x="572980" y="723732"/>
+                  </a:lnTo>
+                  <a:lnTo>
+                    <a:pt x="501357" y="730999"/>
+                  </a:lnTo>
+                  <a:lnTo>
+                    <a:pt x="429735" y="737896"/>
+                  </a:lnTo>
+                  <a:lnTo>
+                    <a:pt x="358112" y="744441"/>
+                  </a:lnTo>
+                  <a:lnTo>
+                    <a:pt x="286490" y="750654"/>
+                  </a:lnTo>
+                  <a:lnTo>
+                    <a:pt x="214867" y="756550"/>
+                  </a:lnTo>
+                  <a:lnTo>
+                    <a:pt x="143245" y="762146"/>
+                  </a:lnTo>
+                  <a:lnTo>
+                    <a:pt x="71622" y="767457"/>
+                  </a:lnTo>
+                  <a:lnTo>
+                    <a:pt x="0" y="772498"/>
                   </a:lnTo>
                 </a:path>
               </a:pathLst>
@@ -4259,309 +4247,309 @@
           </p:nvSpPr>
           <p:spPr>
             <a:xfrm>
-              <a:off x="1172049" y="2338276"/>
-              <a:ext cx="7090630" cy="2886491"/>
+              <a:off x="1172049" y="2595140"/>
+              <a:ext cx="7090630" cy="2608550"/>
             </a:xfrm>
             <a:custGeom>
               <a:avLst/>
               <a:pathLst>
-                <a:path w="7090630" h="2886491">
+                <a:path w="7090630" h="2608550">
                   <a:moveTo>
-                    <a:pt x="0" y="2886491"/>
+                    <a:pt x="0" y="2608550"/>
                   </a:moveTo>
                   <a:lnTo>
-                    <a:pt x="71622" y="2878891"/>
-                  </a:lnTo>
-                  <a:lnTo>
-                    <a:pt x="143245" y="2871113"/>
-                  </a:lnTo>
-                  <a:lnTo>
-                    <a:pt x="214867" y="2863154"/>
-                  </a:lnTo>
-                  <a:lnTo>
-                    <a:pt x="286490" y="2855007"/>
-                  </a:lnTo>
-                  <a:lnTo>
-                    <a:pt x="358112" y="2846670"/>
-                  </a:lnTo>
-                  <a:lnTo>
-                    <a:pt x="429735" y="2838138"/>
-                  </a:lnTo>
-                  <a:lnTo>
-                    <a:pt x="501357" y="2829406"/>
-                  </a:lnTo>
-                  <a:lnTo>
-                    <a:pt x="572980" y="2820469"/>
-                  </a:lnTo>
-                  <a:lnTo>
-                    <a:pt x="644602" y="2811323"/>
-                  </a:lnTo>
-                  <a:lnTo>
-                    <a:pt x="716225" y="2801963"/>
-                  </a:lnTo>
-                  <a:lnTo>
-                    <a:pt x="787847" y="2792383"/>
-                  </a:lnTo>
-                  <a:lnTo>
-                    <a:pt x="859470" y="2782579"/>
-                  </a:lnTo>
-                  <a:lnTo>
-                    <a:pt x="931092" y="2772545"/>
-                  </a:lnTo>
-                  <a:lnTo>
-                    <a:pt x="1002715" y="2762277"/>
-                  </a:lnTo>
-                  <a:lnTo>
-                    <a:pt x="1074337" y="2751767"/>
-                  </a:lnTo>
-                  <a:lnTo>
-                    <a:pt x="1145960" y="2741012"/>
-                  </a:lnTo>
-                  <a:lnTo>
-                    <a:pt x="1217582" y="2730005"/>
-                  </a:lnTo>
-                  <a:lnTo>
-                    <a:pt x="1289205" y="2718740"/>
-                  </a:lnTo>
-                  <a:lnTo>
-                    <a:pt x="1360827" y="2707211"/>
-                  </a:lnTo>
-                  <a:lnTo>
-                    <a:pt x="1432450" y="2695412"/>
-                  </a:lnTo>
-                  <a:lnTo>
-                    <a:pt x="1504073" y="2683336"/>
-                  </a:lnTo>
-                  <a:lnTo>
-                    <a:pt x="1575695" y="2670978"/>
-                  </a:lnTo>
-                  <a:lnTo>
-                    <a:pt x="1647318" y="2658330"/>
-                  </a:lnTo>
-                  <a:lnTo>
-                    <a:pt x="1718940" y="2645386"/>
-                  </a:lnTo>
-                  <a:lnTo>
-                    <a:pt x="1790563" y="2632139"/>
-                  </a:lnTo>
-                  <a:lnTo>
-                    <a:pt x="1862185" y="2618582"/>
-                  </a:lnTo>
-                  <a:lnTo>
-                    <a:pt x="1933808" y="2604706"/>
-                  </a:lnTo>
-                  <a:lnTo>
-                    <a:pt x="2005430" y="2590506"/>
-                  </a:lnTo>
-                  <a:lnTo>
-                    <a:pt x="2077053" y="2575974"/>
-                  </a:lnTo>
-                  <a:lnTo>
-                    <a:pt x="2148675" y="2561101"/>
-                  </a:lnTo>
-                  <a:lnTo>
-                    <a:pt x="2220298" y="2545879"/>
-                  </a:lnTo>
-                  <a:lnTo>
-                    <a:pt x="2291920" y="2530301"/>
-                  </a:lnTo>
-                  <a:lnTo>
-                    <a:pt x="2363543" y="2514358"/>
-                  </a:lnTo>
-                  <a:lnTo>
-                    <a:pt x="2435165" y="2498042"/>
-                  </a:lnTo>
-                  <a:lnTo>
-                    <a:pt x="2506788" y="2481343"/>
-                  </a:lnTo>
-                  <a:lnTo>
-                    <a:pt x="2578410" y="2464253"/>
-                  </a:lnTo>
-                  <a:lnTo>
-                    <a:pt x="2650033" y="2446763"/>
-                  </a:lnTo>
-                  <a:lnTo>
-                    <a:pt x="2721655" y="2428864"/>
-                  </a:lnTo>
-                  <a:lnTo>
-                    <a:pt x="2793278" y="2410545"/>
-                  </a:lnTo>
-                  <a:lnTo>
-                    <a:pt x="2864901" y="2391796"/>
-                  </a:lnTo>
-                  <a:lnTo>
-                    <a:pt x="2936523" y="2372609"/>
-                  </a:lnTo>
-                  <a:lnTo>
-                    <a:pt x="3008146" y="2352973"/>
-                  </a:lnTo>
-                  <a:lnTo>
-                    <a:pt x="3079768" y="2332876"/>
-                  </a:lnTo>
-                  <a:lnTo>
-                    <a:pt x="3151391" y="2312308"/>
-                  </a:lnTo>
-                  <a:lnTo>
-                    <a:pt x="3223013" y="2291259"/>
-                  </a:lnTo>
-                  <a:lnTo>
-                    <a:pt x="3294636" y="2269717"/>
-                  </a:lnTo>
-                  <a:lnTo>
-                    <a:pt x="3366258" y="2247670"/>
-                  </a:lnTo>
-                  <a:lnTo>
-                    <a:pt x="3437881" y="2225107"/>
-                  </a:lnTo>
-                  <a:lnTo>
-                    <a:pt x="3509503" y="2202015"/>
-                  </a:lnTo>
-                  <a:lnTo>
-                    <a:pt x="3581126" y="2178383"/>
-                  </a:lnTo>
-                  <a:lnTo>
-                    <a:pt x="3652748" y="2154196"/>
-                  </a:lnTo>
-                  <a:lnTo>
-                    <a:pt x="3724371" y="2129444"/>
-                  </a:lnTo>
-                  <a:lnTo>
-                    <a:pt x="3795993" y="2104111"/>
-                  </a:lnTo>
-                  <a:lnTo>
-                    <a:pt x="3867616" y="2078185"/>
-                  </a:lnTo>
-                  <a:lnTo>
-                    <a:pt x="3939238" y="2051652"/>
-                  </a:lnTo>
-                  <a:lnTo>
-                    <a:pt x="4010861" y="2024497"/>
-                  </a:lnTo>
-                  <a:lnTo>
-                    <a:pt x="4082483" y="1996706"/>
-                  </a:lnTo>
-                  <a:lnTo>
-                    <a:pt x="4154106" y="1968265"/>
-                  </a:lnTo>
-                  <a:lnTo>
-                    <a:pt x="4225729" y="1939157"/>
-                  </a:lnTo>
-                  <a:lnTo>
-                    <a:pt x="4297351" y="1909367"/>
-                  </a:lnTo>
-                  <a:lnTo>
-                    <a:pt x="4368974" y="1878879"/>
-                  </a:lnTo>
-                  <a:lnTo>
-                    <a:pt x="4440596" y="1847677"/>
-                  </a:lnTo>
-                  <a:lnTo>
-                    <a:pt x="4512219" y="1815745"/>
-                  </a:lnTo>
-                  <a:lnTo>
-                    <a:pt x="4583841" y="1783064"/>
-                  </a:lnTo>
-                  <a:lnTo>
-                    <a:pt x="4655464" y="1749618"/>
-                  </a:lnTo>
-                  <a:lnTo>
-                    <a:pt x="4727086" y="1715389"/>
-                  </a:lnTo>
-                  <a:lnTo>
-                    <a:pt x="4798709" y="1680357"/>
-                  </a:lnTo>
-                  <a:lnTo>
-                    <a:pt x="4870331" y="1644505"/>
-                  </a:lnTo>
-                  <a:lnTo>
-                    <a:pt x="4941954" y="1607814"/>
-                  </a:lnTo>
-                  <a:lnTo>
-                    <a:pt x="5013576" y="1570262"/>
-                  </a:lnTo>
-                  <a:lnTo>
-                    <a:pt x="5085199" y="1531832"/>
-                  </a:lnTo>
-                  <a:lnTo>
-                    <a:pt x="5156821" y="1492501"/>
-                  </a:lnTo>
-                  <a:lnTo>
-                    <a:pt x="5228444" y="1452249"/>
-                  </a:lnTo>
-                  <a:lnTo>
-                    <a:pt x="5300066" y="1411054"/>
-                  </a:lnTo>
-                  <a:lnTo>
-                    <a:pt x="5371689" y="1368894"/>
-                  </a:lnTo>
-                  <a:lnTo>
-                    <a:pt x="5443311" y="1325746"/>
-                  </a:lnTo>
-                  <a:lnTo>
-                    <a:pt x="5514934" y="1281588"/>
-                  </a:lnTo>
-                  <a:lnTo>
-                    <a:pt x="5586557" y="1236395"/>
-                  </a:lnTo>
-                  <a:lnTo>
-                    <a:pt x="5658179" y="1190144"/>
-                  </a:lnTo>
-                  <a:lnTo>
-                    <a:pt x="5729802" y="1142809"/>
-                  </a:lnTo>
-                  <a:lnTo>
-                    <a:pt x="5801424" y="1094366"/>
-                  </a:lnTo>
-                  <a:lnTo>
-                    <a:pt x="5873047" y="1044788"/>
-                  </a:lnTo>
-                  <a:lnTo>
-                    <a:pt x="5944669" y="994049"/>
-                  </a:lnTo>
-                  <a:lnTo>
-                    <a:pt x="6016292" y="942121"/>
-                  </a:lnTo>
-                  <a:lnTo>
-                    <a:pt x="6087914" y="888977"/>
-                  </a:lnTo>
-                  <a:lnTo>
-                    <a:pt x="6159537" y="834587"/>
-                  </a:lnTo>
-                  <a:lnTo>
-                    <a:pt x="6231159" y="778924"/>
-                  </a:lnTo>
-                  <a:lnTo>
-                    <a:pt x="6302782" y="721958"/>
-                  </a:lnTo>
-                  <a:lnTo>
-                    <a:pt x="6374404" y="663656"/>
-                  </a:lnTo>
-                  <a:lnTo>
-                    <a:pt x="6446027" y="603989"/>
-                  </a:lnTo>
-                  <a:lnTo>
-                    <a:pt x="6517649" y="542925"/>
-                  </a:lnTo>
-                  <a:lnTo>
-                    <a:pt x="6589272" y="480430"/>
-                  </a:lnTo>
-                  <a:lnTo>
-                    <a:pt x="6660894" y="416471"/>
-                  </a:lnTo>
-                  <a:lnTo>
-                    <a:pt x="6732517" y="351014"/>
-                  </a:lnTo>
-                  <a:lnTo>
-                    <a:pt x="6804139" y="284024"/>
-                  </a:lnTo>
-                  <a:lnTo>
-                    <a:pt x="6875762" y="215465"/>
-                  </a:lnTo>
-                  <a:lnTo>
-                    <a:pt x="6947385" y="145299"/>
-                  </a:lnTo>
-                  <a:lnTo>
-                    <a:pt x="7019007" y="73490"/>
+                    <a:pt x="71622" y="2600979"/>
+                  </a:lnTo>
+                  <a:lnTo>
+                    <a:pt x="143245" y="2593242"/>
+                  </a:lnTo>
+                  <a:lnTo>
+                    <a:pt x="214867" y="2585335"/>
+                  </a:lnTo>
+                  <a:lnTo>
+                    <a:pt x="286490" y="2577256"/>
+                  </a:lnTo>
+                  <a:lnTo>
+                    <a:pt x="358112" y="2568999"/>
+                  </a:lnTo>
+                  <a:lnTo>
+                    <a:pt x="429735" y="2560561"/>
+                  </a:lnTo>
+                  <a:lnTo>
+                    <a:pt x="501357" y="2551938"/>
+                  </a:lnTo>
+                  <a:lnTo>
+                    <a:pt x="572980" y="2543127"/>
+                  </a:lnTo>
+                  <a:lnTo>
+                    <a:pt x="644602" y="2534122"/>
+                  </a:lnTo>
+                  <a:lnTo>
+                    <a:pt x="716225" y="2524920"/>
+                  </a:lnTo>
+                  <a:lnTo>
+                    <a:pt x="787847" y="2515517"/>
+                  </a:lnTo>
+                  <a:lnTo>
+                    <a:pt x="859470" y="2505907"/>
+                  </a:lnTo>
+                  <a:lnTo>
+                    <a:pt x="931092" y="2496087"/>
+                  </a:lnTo>
+                  <a:lnTo>
+                    <a:pt x="1002715" y="2486051"/>
+                  </a:lnTo>
+                  <a:lnTo>
+                    <a:pt x="1074337" y="2475796"/>
+                  </a:lnTo>
+                  <a:lnTo>
+                    <a:pt x="1145960" y="2465316"/>
+                  </a:lnTo>
+                  <a:lnTo>
+                    <a:pt x="1217582" y="2454606"/>
+                  </a:lnTo>
+                  <a:lnTo>
+                    <a:pt x="1289205" y="2443662"/>
+                  </a:lnTo>
+                  <a:lnTo>
+                    <a:pt x="1360827" y="2432478"/>
+                  </a:lnTo>
+                  <a:lnTo>
+                    <a:pt x="1432450" y="2421049"/>
+                  </a:lnTo>
+                  <a:lnTo>
+                    <a:pt x="1504073" y="2409369"/>
+                  </a:lnTo>
+                  <a:lnTo>
+                    <a:pt x="1575695" y="2397433"/>
+                  </a:lnTo>
+                  <a:lnTo>
+                    <a:pt x="1647318" y="2385236"/>
+                  </a:lnTo>
+                  <a:lnTo>
+                    <a:pt x="1718940" y="2372772"/>
+                  </a:lnTo>
+                  <a:lnTo>
+                    <a:pt x="1790563" y="2360034"/>
+                  </a:lnTo>
+                  <a:lnTo>
+                    <a:pt x="1862185" y="2347018"/>
+                  </a:lnTo>
+                  <a:lnTo>
+                    <a:pt x="1933808" y="2333716"/>
+                  </a:lnTo>
+                  <a:lnTo>
+                    <a:pt x="2005430" y="2320122"/>
+                  </a:lnTo>
+                  <a:lnTo>
+                    <a:pt x="2077053" y="2306231"/>
+                  </a:lnTo>
+                  <a:lnTo>
+                    <a:pt x="2148675" y="2292036"/>
+                  </a:lnTo>
+                  <a:lnTo>
+                    <a:pt x="2220298" y="2277529"/>
+                  </a:lnTo>
+                  <a:lnTo>
+                    <a:pt x="2291920" y="2262704"/>
+                  </a:lnTo>
+                  <a:lnTo>
+                    <a:pt x="2363543" y="2247555"/>
+                  </a:lnTo>
+                  <a:lnTo>
+                    <a:pt x="2435165" y="2232074"/>
+                  </a:lnTo>
+                  <a:lnTo>
+                    <a:pt x="2506788" y="2216253"/>
+                  </a:lnTo>
+                  <a:lnTo>
+                    <a:pt x="2578410" y="2200086"/>
+                  </a:lnTo>
+                  <a:lnTo>
+                    <a:pt x="2650033" y="2183564"/>
+                  </a:lnTo>
+                  <a:lnTo>
+                    <a:pt x="2721655" y="2166681"/>
+                  </a:lnTo>
+                  <a:lnTo>
+                    <a:pt x="2793278" y="2149427"/>
+                  </a:lnTo>
+                  <a:lnTo>
+                    <a:pt x="2864901" y="2131796"/>
+                  </a:lnTo>
+                  <a:lnTo>
+                    <a:pt x="2936523" y="2113778"/>
+                  </a:lnTo>
+                  <a:lnTo>
+                    <a:pt x="3008146" y="2095365"/>
+                  </a:lnTo>
+                  <a:lnTo>
+                    <a:pt x="3079768" y="2076549"/>
+                  </a:lnTo>
+                  <a:lnTo>
+                    <a:pt x="3151391" y="2057321"/>
+                  </a:lnTo>
+                  <a:lnTo>
+                    <a:pt x="3223013" y="2037671"/>
+                  </a:lnTo>
+                  <a:lnTo>
+                    <a:pt x="3294636" y="2017590"/>
+                  </a:lnTo>
+                  <a:lnTo>
+                    <a:pt x="3366258" y="1997070"/>
+                  </a:lnTo>
+                  <a:lnTo>
+                    <a:pt x="3437881" y="1976100"/>
+                  </a:lnTo>
+                  <a:lnTo>
+                    <a:pt x="3509503" y="1954670"/>
+                  </a:lnTo>
+                  <a:lnTo>
+                    <a:pt x="3581126" y="1932771"/>
+                  </a:lnTo>
+                  <a:lnTo>
+                    <a:pt x="3652748" y="1910392"/>
+                  </a:lnTo>
+                  <a:lnTo>
+                    <a:pt x="3724371" y="1887523"/>
+                  </a:lnTo>
+                  <a:lnTo>
+                    <a:pt x="3795993" y="1864152"/>
+                  </a:lnTo>
+                  <a:lnTo>
+                    <a:pt x="3867616" y="1840270"/>
+                  </a:lnTo>
+                  <a:lnTo>
+                    <a:pt x="3939238" y="1815864"/>
+                  </a:lnTo>
+                  <a:lnTo>
+                    <a:pt x="4010861" y="1790923"/>
+                  </a:lnTo>
+                  <a:lnTo>
+                    <a:pt x="4082483" y="1765436"/>
+                  </a:lnTo>
+                  <a:lnTo>
+                    <a:pt x="4154106" y="1739390"/>
+                  </a:lnTo>
+                  <a:lnTo>
+                    <a:pt x="4225729" y="1712774"/>
+                  </a:lnTo>
+                  <a:lnTo>
+                    <a:pt x="4297351" y="1685574"/>
+                  </a:lnTo>
+                  <a:lnTo>
+                    <a:pt x="4368974" y="1657778"/>
+                  </a:lnTo>
+                  <a:lnTo>
+                    <a:pt x="4440596" y="1629374"/>
+                  </a:lnTo>
+                  <a:lnTo>
+                    <a:pt x="4512219" y="1600347"/>
+                  </a:lnTo>
+                  <a:lnTo>
+                    <a:pt x="4583841" y="1570683"/>
+                  </a:lnTo>
+                  <a:lnTo>
+                    <a:pt x="4655464" y="1540370"/>
+                  </a:lnTo>
+                  <a:lnTo>
+                    <a:pt x="4727086" y="1509393"/>
+                  </a:lnTo>
+                  <a:lnTo>
+                    <a:pt x="4798709" y="1477737"/>
+                  </a:lnTo>
+                  <a:lnTo>
+                    <a:pt x="4870331" y="1445387"/>
+                  </a:lnTo>
+                  <a:lnTo>
+                    <a:pt x="4941954" y="1412328"/>
+                  </a:lnTo>
+                  <a:lnTo>
+                    <a:pt x="5013576" y="1378545"/>
+                  </a:lnTo>
+                  <a:lnTo>
+                    <a:pt x="5085199" y="1344021"/>
+                  </a:lnTo>
+                  <a:lnTo>
+                    <a:pt x="5156821" y="1308742"/>
+                  </a:lnTo>
+                  <a:lnTo>
+                    <a:pt x="5228444" y="1272689"/>
+                  </a:lnTo>
+                  <a:lnTo>
+                    <a:pt x="5300066" y="1235846"/>
+                  </a:lnTo>
+                  <a:lnTo>
+                    <a:pt x="5371689" y="1198195"/>
+                  </a:lnTo>
+                  <a:lnTo>
+                    <a:pt x="5443311" y="1159720"/>
+                  </a:lnTo>
+                  <a:lnTo>
+                    <a:pt x="5514934" y="1120402"/>
+                  </a:lnTo>
+                  <a:lnTo>
+                    <a:pt x="5586557" y="1080222"/>
+                  </a:lnTo>
+                  <a:lnTo>
+                    <a:pt x="5658179" y="1039161"/>
+                  </a:lnTo>
+                  <a:lnTo>
+                    <a:pt x="5729802" y="997201"/>
+                  </a:lnTo>
+                  <a:lnTo>
+                    <a:pt x="5801424" y="954322"/>
+                  </a:lnTo>
+                  <a:lnTo>
+                    <a:pt x="5873047" y="910503"/>
+                  </a:lnTo>
+                  <a:lnTo>
+                    <a:pt x="5944669" y="865723"/>
+                  </a:lnTo>
+                  <a:lnTo>
+                    <a:pt x="6016292" y="819963"/>
+                  </a:lnTo>
+                  <a:lnTo>
+                    <a:pt x="6087914" y="773199"/>
+                  </a:lnTo>
+                  <a:lnTo>
+                    <a:pt x="6159537" y="725412"/>
+                  </a:lnTo>
+                  <a:lnTo>
+                    <a:pt x="6231159" y="676576"/>
+                  </a:lnTo>
+                  <a:lnTo>
+                    <a:pt x="6302782" y="626671"/>
+                  </a:lnTo>
+                  <a:lnTo>
+                    <a:pt x="6374404" y="575672"/>
+                  </a:lnTo>
+                  <a:lnTo>
+                    <a:pt x="6446027" y="523556"/>
+                  </a:lnTo>
+                  <a:lnTo>
+                    <a:pt x="6517649" y="470298"/>
+                  </a:lnTo>
+                  <a:lnTo>
+                    <a:pt x="6589272" y="415873"/>
+                  </a:lnTo>
+                  <a:lnTo>
+                    <a:pt x="6660894" y="360255"/>
+                  </a:lnTo>
+                  <a:lnTo>
+                    <a:pt x="6732517" y="303418"/>
+                  </a:lnTo>
+                  <a:lnTo>
+                    <a:pt x="6804139" y="245336"/>
+                  </a:lnTo>
+                  <a:lnTo>
+                    <a:pt x="6875762" y="185982"/>
+                  </a:lnTo>
+                  <a:lnTo>
+                    <a:pt x="6947385" y="125326"/>
+                  </a:lnTo>
+                  <a:lnTo>
+                    <a:pt x="7019007" y="63342"/>
                   </a:lnTo>
                   <a:lnTo>
                     <a:pt x="7090630" y="0"/>

--- a/docs/plots/carbo/jx_carbo_linsubhr_dosedisc_akikdigo.pptx
+++ b/docs/plots/carbo/jx_carbo_linsubhr_dosedisc_akikdigo.pptx
@@ -3157,7 +3157,7 @@
                     <a:pt x="358112" y="2437634"/>
                   </a:lnTo>
                   <a:lnTo>
-                    <a:pt x="429735" y="2448396"/>
+                    <a:pt x="429735" y="2448395"/>
                   </a:lnTo>
                   <a:lnTo>
                     <a:pt x="501357" y="2459062"/>
@@ -3169,7 +3169,7 @@
                     <a:pt x="644602" y="2480111"/>
                   </a:lnTo>
                   <a:lnTo>
-                    <a:pt x="716225" y="2490497"/>
+                    <a:pt x="716225" y="2490496"/>
                   </a:lnTo>
                   <a:lnTo>
                     <a:pt x="787847" y="2500790"/>
@@ -3178,7 +3178,7 @@
                     <a:pt x="859470" y="2510992"/>
                   </a:lnTo>
                   <a:lnTo>
-                    <a:pt x="931092" y="2521104"/>
+                    <a:pt x="931092" y="2521103"/>
                   </a:lnTo>
                   <a:lnTo>
                     <a:pt x="1002715" y="2531126"/>
@@ -3289,7 +3289,7 @@
                     <a:pt x="3509503" y="2436740"/>
                   </a:lnTo>
                   <a:lnTo>
-                    <a:pt x="3581126" y="2371522"/>
+                    <a:pt x="3581126" y="2371523"/>
                   </a:lnTo>
                   <a:lnTo>
                     <a:pt x="3652748" y="2302807"/>
@@ -3304,7 +3304,7 @@
                     <a:pt x="3867616" y="2073745"/>
                   </a:lnTo>
                   <a:lnTo>
-                    <a:pt x="3939238" y="1989057"/>
+                    <a:pt x="3939238" y="1989058"/>
                   </a:lnTo>
                   <a:lnTo>
                     <a:pt x="4010861" y="1899828"/>
@@ -3316,10 +3316,10 @@
                     <a:pt x="4154106" y="1706753"/>
                   </a:lnTo>
                   <a:lnTo>
-                    <a:pt x="4225729" y="1602381"/>
-                  </a:lnTo>
-                  <a:lnTo>
-                    <a:pt x="4297351" y="1492411"/>
+                    <a:pt x="4225729" y="1602382"/>
+                  </a:lnTo>
+                  <a:lnTo>
+                    <a:pt x="4297351" y="1492412"/>
                   </a:lnTo>
                   <a:lnTo>
                     <a:pt x="4368974" y="1376543"/>
@@ -3328,28 +3328,28 @@
                     <a:pt x="4440596" y="1254460"/>
                   </a:lnTo>
                   <a:lnTo>
-                    <a:pt x="4512219" y="1125828"/>
-                  </a:lnTo>
-                  <a:lnTo>
-                    <a:pt x="4583841" y="990297"/>
-                  </a:lnTo>
-                  <a:lnTo>
-                    <a:pt x="4655464" y="847497"/>
-                  </a:lnTo>
-                  <a:lnTo>
-                    <a:pt x="4727086" y="697037"/>
-                  </a:lnTo>
-                  <a:lnTo>
-                    <a:pt x="4798709" y="538507"/>
-                  </a:lnTo>
-                  <a:lnTo>
-                    <a:pt x="4870331" y="371474"/>
-                  </a:lnTo>
-                  <a:lnTo>
-                    <a:pt x="4941954" y="195482"/>
-                  </a:lnTo>
-                  <a:lnTo>
-                    <a:pt x="5013576" y="10050"/>
+                    <a:pt x="4512219" y="1125829"/>
+                  </a:lnTo>
+                  <a:lnTo>
+                    <a:pt x="4583841" y="990298"/>
+                  </a:lnTo>
+                  <a:lnTo>
+                    <a:pt x="4655464" y="847498"/>
+                  </a:lnTo>
+                  <a:lnTo>
+                    <a:pt x="4727086" y="697038"/>
+                  </a:lnTo>
+                  <a:lnTo>
+                    <a:pt x="4798709" y="538508"/>
+                  </a:lnTo>
+                  <a:lnTo>
+                    <a:pt x="4870331" y="371475"/>
+                  </a:lnTo>
+                  <a:lnTo>
+                    <a:pt x="4941954" y="195483"/>
+                  </a:lnTo>
+                  <a:lnTo>
+                    <a:pt x="5013576" y="10051"/>
                   </a:lnTo>
                   <a:lnTo>
                     <a:pt x="5017261" y="0"/>
@@ -3409,7 +3409,7 @@
                     <a:pt x="5944669" y="3045614"/>
                   </a:lnTo>
                   <a:lnTo>
-                    <a:pt x="5873047" y="3040189"/>
+                    <a:pt x="5873047" y="3040190"/>
                   </a:lnTo>
                   <a:lnTo>
                     <a:pt x="5801424" y="3034716"/>
@@ -3475,7 +3475,7 @@
                     <a:pt x="4368974" y="2914380"/>
                   </a:lnTo>
                   <a:lnTo>
-                    <a:pt x="4297351" y="2907782"/>
+                    <a:pt x="4297351" y="2907783"/>
                   </a:lnTo>
                   <a:lnTo>
                     <a:pt x="4225729" y="2901126"/>
@@ -3649,7 +3649,7 @@
                     <a:pt x="214867" y="3542714"/>
                   </a:lnTo>
                   <a:lnTo>
-                    <a:pt x="143245" y="3548311"/>
+                    <a:pt x="143245" y="3548310"/>
                   </a:lnTo>
                   <a:lnTo>
                     <a:pt x="71622" y="3553622"/>
@@ -3707,7 +3707,7 @@
                     <a:pt x="358112" y="2437634"/>
                   </a:lnTo>
                   <a:lnTo>
-                    <a:pt x="429735" y="2448396"/>
+                    <a:pt x="429735" y="2448395"/>
                   </a:lnTo>
                   <a:lnTo>
                     <a:pt x="501357" y="2459062"/>
@@ -3719,7 +3719,7 @@
                     <a:pt x="644602" y="2480111"/>
                   </a:lnTo>
                   <a:lnTo>
-                    <a:pt x="716225" y="2490497"/>
+                    <a:pt x="716225" y="2490496"/>
                   </a:lnTo>
                   <a:lnTo>
                     <a:pt x="787847" y="2500790"/>
@@ -3728,7 +3728,7 @@
                     <a:pt x="859470" y="2510992"/>
                   </a:lnTo>
                   <a:lnTo>
-                    <a:pt x="931092" y="2521104"/>
+                    <a:pt x="931092" y="2521103"/>
                   </a:lnTo>
                   <a:lnTo>
                     <a:pt x="1002715" y="2531126"/>
@@ -3839,7 +3839,7 @@
                     <a:pt x="3509503" y="2436740"/>
                   </a:lnTo>
                   <a:lnTo>
-                    <a:pt x="3581126" y="2371522"/>
+                    <a:pt x="3581126" y="2371523"/>
                   </a:lnTo>
                   <a:lnTo>
                     <a:pt x="3652748" y="2302807"/>
@@ -3854,7 +3854,7 @@
                     <a:pt x="3867616" y="2073745"/>
                   </a:lnTo>
                   <a:lnTo>
-                    <a:pt x="3939238" y="1989057"/>
+                    <a:pt x="3939238" y="1989058"/>
                   </a:lnTo>
                   <a:lnTo>
                     <a:pt x="4010861" y="1899828"/>
@@ -3866,10 +3866,10 @@
                     <a:pt x="4154106" y="1706753"/>
                   </a:lnTo>
                   <a:lnTo>
-                    <a:pt x="4225729" y="1602381"/>
-                  </a:lnTo>
-                  <a:lnTo>
-                    <a:pt x="4297351" y="1492411"/>
+                    <a:pt x="4225729" y="1602382"/>
+                  </a:lnTo>
+                  <a:lnTo>
+                    <a:pt x="4297351" y="1492412"/>
                   </a:lnTo>
                   <a:lnTo>
                     <a:pt x="4368974" y="1376543"/>
@@ -3878,28 +3878,28 @@
                     <a:pt x="4440596" y="1254460"/>
                   </a:lnTo>
                   <a:lnTo>
-                    <a:pt x="4512219" y="1125828"/>
-                  </a:lnTo>
-                  <a:lnTo>
-                    <a:pt x="4583841" y="990297"/>
-                  </a:lnTo>
-                  <a:lnTo>
-                    <a:pt x="4655464" y="847497"/>
-                  </a:lnTo>
-                  <a:lnTo>
-                    <a:pt x="4727086" y="697037"/>
-                  </a:lnTo>
-                  <a:lnTo>
-                    <a:pt x="4798709" y="538507"/>
-                  </a:lnTo>
-                  <a:lnTo>
-                    <a:pt x="4870331" y="371474"/>
-                  </a:lnTo>
-                  <a:lnTo>
-                    <a:pt x="4941954" y="195482"/>
-                  </a:lnTo>
-                  <a:lnTo>
-                    <a:pt x="5013576" y="10050"/>
+                    <a:pt x="4512219" y="1125829"/>
+                  </a:lnTo>
+                  <a:lnTo>
+                    <a:pt x="4583841" y="990298"/>
+                  </a:lnTo>
+                  <a:lnTo>
+                    <a:pt x="4655464" y="847498"/>
+                  </a:lnTo>
+                  <a:lnTo>
+                    <a:pt x="4727086" y="697038"/>
+                  </a:lnTo>
+                  <a:lnTo>
+                    <a:pt x="4798709" y="538508"/>
+                  </a:lnTo>
+                  <a:lnTo>
+                    <a:pt x="4870331" y="371475"/>
+                  </a:lnTo>
+                  <a:lnTo>
+                    <a:pt x="4941954" y="195483"/>
+                  </a:lnTo>
+                  <a:lnTo>
+                    <a:pt x="5013576" y="10051"/>
                   </a:lnTo>
                   <a:lnTo>
                     <a:pt x="5017261" y="0"/>
@@ -4104,7 +4104,7 @@
                     <a:pt x="3008146" y="23024"/>
                   </a:lnTo>
                   <a:lnTo>
-                    <a:pt x="2936523" y="65962"/>
+                    <a:pt x="2936523" y="65961"/>
                   </a:lnTo>
                   <a:lnTo>
                     <a:pt x="2864901" y="106713"/>
@@ -4143,7 +4143,7 @@
                     <a:pt x="2077053" y="438839"/>
                   </a:lnTo>
                   <a:lnTo>
-                    <a:pt x="2005430" y="460609"/>
+                    <a:pt x="2005430" y="460608"/>
                   </a:lnTo>
                   <a:lnTo>
                     <a:pt x="1933808" y="481270"/>
@@ -4200,7 +4200,7 @@
                     <a:pt x="716225" y="708008"/>
                   </a:lnTo>
                   <a:lnTo>
-                    <a:pt x="644602" y="716076"/>
+                    <a:pt x="644602" y="716075"/>
                   </a:lnTo>
                   <a:lnTo>
                     <a:pt x="572980" y="723732"/>
@@ -4247,204 +4247,204 @@
           </p:nvSpPr>
           <p:spPr>
             <a:xfrm>
-              <a:off x="1172049" y="2595140"/>
-              <a:ext cx="7090630" cy="2608550"/>
+              <a:off x="1172049" y="2595141"/>
+              <a:ext cx="7090630" cy="2608549"/>
             </a:xfrm>
             <a:custGeom>
               <a:avLst/>
               <a:pathLst>
-                <a:path w="7090630" h="2608550">
+                <a:path w="7090630" h="2608549">
                   <a:moveTo>
-                    <a:pt x="0" y="2608550"/>
+                    <a:pt x="0" y="2608549"/>
                   </a:moveTo>
                   <a:lnTo>
-                    <a:pt x="71622" y="2600979"/>
-                  </a:lnTo>
-                  <a:lnTo>
-                    <a:pt x="143245" y="2593242"/>
-                  </a:lnTo>
-                  <a:lnTo>
-                    <a:pt x="214867" y="2585335"/>
-                  </a:lnTo>
-                  <a:lnTo>
-                    <a:pt x="286490" y="2577256"/>
-                  </a:lnTo>
-                  <a:lnTo>
-                    <a:pt x="358112" y="2568999"/>
-                  </a:lnTo>
-                  <a:lnTo>
-                    <a:pt x="429735" y="2560561"/>
+                    <a:pt x="71622" y="2600978"/>
+                  </a:lnTo>
+                  <a:lnTo>
+                    <a:pt x="143245" y="2593241"/>
+                  </a:lnTo>
+                  <a:lnTo>
+                    <a:pt x="214867" y="2585334"/>
+                  </a:lnTo>
+                  <a:lnTo>
+                    <a:pt x="286490" y="2577255"/>
+                  </a:lnTo>
+                  <a:lnTo>
+                    <a:pt x="358112" y="2568998"/>
+                  </a:lnTo>
+                  <a:lnTo>
+                    <a:pt x="429735" y="2560560"/>
                   </a:lnTo>
                   <a:lnTo>
                     <a:pt x="501357" y="2551938"/>
                   </a:lnTo>
                   <a:lnTo>
-                    <a:pt x="572980" y="2543127"/>
-                  </a:lnTo>
-                  <a:lnTo>
-                    <a:pt x="644602" y="2534122"/>
-                  </a:lnTo>
-                  <a:lnTo>
-                    <a:pt x="716225" y="2524920"/>
-                  </a:lnTo>
-                  <a:lnTo>
-                    <a:pt x="787847" y="2515517"/>
-                  </a:lnTo>
-                  <a:lnTo>
-                    <a:pt x="859470" y="2505907"/>
-                  </a:lnTo>
-                  <a:lnTo>
-                    <a:pt x="931092" y="2496087"/>
-                  </a:lnTo>
-                  <a:lnTo>
-                    <a:pt x="1002715" y="2486051"/>
-                  </a:lnTo>
-                  <a:lnTo>
-                    <a:pt x="1074337" y="2475796"/>
-                  </a:lnTo>
-                  <a:lnTo>
-                    <a:pt x="1145960" y="2465316"/>
-                  </a:lnTo>
-                  <a:lnTo>
-                    <a:pt x="1217582" y="2454606"/>
-                  </a:lnTo>
-                  <a:lnTo>
-                    <a:pt x="1289205" y="2443662"/>
-                  </a:lnTo>
-                  <a:lnTo>
-                    <a:pt x="1360827" y="2432478"/>
-                  </a:lnTo>
-                  <a:lnTo>
-                    <a:pt x="1432450" y="2421049"/>
-                  </a:lnTo>
-                  <a:lnTo>
-                    <a:pt x="1504073" y="2409369"/>
-                  </a:lnTo>
-                  <a:lnTo>
-                    <a:pt x="1575695" y="2397433"/>
-                  </a:lnTo>
-                  <a:lnTo>
-                    <a:pt x="1647318" y="2385236"/>
-                  </a:lnTo>
-                  <a:lnTo>
-                    <a:pt x="1718940" y="2372772"/>
-                  </a:lnTo>
-                  <a:lnTo>
-                    <a:pt x="1790563" y="2360034"/>
-                  </a:lnTo>
-                  <a:lnTo>
-                    <a:pt x="1862185" y="2347018"/>
-                  </a:lnTo>
-                  <a:lnTo>
-                    <a:pt x="1933808" y="2333716"/>
-                  </a:lnTo>
-                  <a:lnTo>
-                    <a:pt x="2005430" y="2320122"/>
-                  </a:lnTo>
-                  <a:lnTo>
-                    <a:pt x="2077053" y="2306231"/>
-                  </a:lnTo>
-                  <a:lnTo>
-                    <a:pt x="2148675" y="2292036"/>
-                  </a:lnTo>
-                  <a:lnTo>
-                    <a:pt x="2220298" y="2277529"/>
-                  </a:lnTo>
-                  <a:lnTo>
-                    <a:pt x="2291920" y="2262704"/>
-                  </a:lnTo>
-                  <a:lnTo>
-                    <a:pt x="2363543" y="2247555"/>
-                  </a:lnTo>
-                  <a:lnTo>
-                    <a:pt x="2435165" y="2232074"/>
-                  </a:lnTo>
-                  <a:lnTo>
-                    <a:pt x="2506788" y="2216253"/>
-                  </a:lnTo>
-                  <a:lnTo>
-                    <a:pt x="2578410" y="2200086"/>
-                  </a:lnTo>
-                  <a:lnTo>
-                    <a:pt x="2650033" y="2183564"/>
-                  </a:lnTo>
-                  <a:lnTo>
-                    <a:pt x="2721655" y="2166681"/>
-                  </a:lnTo>
-                  <a:lnTo>
-                    <a:pt x="2793278" y="2149427"/>
-                  </a:lnTo>
-                  <a:lnTo>
-                    <a:pt x="2864901" y="2131796"/>
-                  </a:lnTo>
-                  <a:lnTo>
-                    <a:pt x="2936523" y="2113778"/>
-                  </a:lnTo>
-                  <a:lnTo>
-                    <a:pt x="3008146" y="2095365"/>
-                  </a:lnTo>
-                  <a:lnTo>
-                    <a:pt x="3079768" y="2076549"/>
-                  </a:lnTo>
-                  <a:lnTo>
-                    <a:pt x="3151391" y="2057321"/>
-                  </a:lnTo>
-                  <a:lnTo>
-                    <a:pt x="3223013" y="2037671"/>
+                    <a:pt x="572980" y="2543126"/>
+                  </a:lnTo>
+                  <a:lnTo>
+                    <a:pt x="644602" y="2534121"/>
+                  </a:lnTo>
+                  <a:lnTo>
+                    <a:pt x="716225" y="2524919"/>
+                  </a:lnTo>
+                  <a:lnTo>
+                    <a:pt x="787847" y="2515516"/>
+                  </a:lnTo>
+                  <a:lnTo>
+                    <a:pt x="859470" y="2505906"/>
+                  </a:lnTo>
+                  <a:lnTo>
+                    <a:pt x="931092" y="2496086"/>
+                  </a:lnTo>
+                  <a:lnTo>
+                    <a:pt x="1002715" y="2486050"/>
+                  </a:lnTo>
+                  <a:lnTo>
+                    <a:pt x="1074337" y="2475795"/>
+                  </a:lnTo>
+                  <a:lnTo>
+                    <a:pt x="1145960" y="2465315"/>
+                  </a:lnTo>
+                  <a:lnTo>
+                    <a:pt x="1217582" y="2454605"/>
+                  </a:lnTo>
+                  <a:lnTo>
+                    <a:pt x="1289205" y="2443661"/>
+                  </a:lnTo>
+                  <a:lnTo>
+                    <a:pt x="1360827" y="2432477"/>
+                  </a:lnTo>
+                  <a:lnTo>
+                    <a:pt x="1432450" y="2421048"/>
+                  </a:lnTo>
+                  <a:lnTo>
+                    <a:pt x="1504073" y="2409368"/>
+                  </a:lnTo>
+                  <a:lnTo>
+                    <a:pt x="1575695" y="2397432"/>
+                  </a:lnTo>
+                  <a:lnTo>
+                    <a:pt x="1647318" y="2385235"/>
+                  </a:lnTo>
+                  <a:lnTo>
+                    <a:pt x="1718940" y="2372771"/>
+                  </a:lnTo>
+                  <a:lnTo>
+                    <a:pt x="1790563" y="2360033"/>
+                  </a:lnTo>
+                  <a:lnTo>
+                    <a:pt x="1862185" y="2347017"/>
+                  </a:lnTo>
+                  <a:lnTo>
+                    <a:pt x="1933808" y="2333715"/>
+                  </a:lnTo>
+                  <a:lnTo>
+                    <a:pt x="2005430" y="2320121"/>
+                  </a:lnTo>
+                  <a:lnTo>
+                    <a:pt x="2077053" y="2306230"/>
+                  </a:lnTo>
+                  <a:lnTo>
+                    <a:pt x="2148675" y="2292035"/>
+                  </a:lnTo>
+                  <a:lnTo>
+                    <a:pt x="2220298" y="2277528"/>
+                  </a:lnTo>
+                  <a:lnTo>
+                    <a:pt x="2291920" y="2262703"/>
+                  </a:lnTo>
+                  <a:lnTo>
+                    <a:pt x="2363543" y="2247554"/>
+                  </a:lnTo>
+                  <a:lnTo>
+                    <a:pt x="2435165" y="2232073"/>
+                  </a:lnTo>
+                  <a:lnTo>
+                    <a:pt x="2506788" y="2216252"/>
+                  </a:lnTo>
+                  <a:lnTo>
+                    <a:pt x="2578410" y="2200085"/>
+                  </a:lnTo>
+                  <a:lnTo>
+                    <a:pt x="2650033" y="2183563"/>
+                  </a:lnTo>
+                  <a:lnTo>
+                    <a:pt x="2721655" y="2166680"/>
+                  </a:lnTo>
+                  <a:lnTo>
+                    <a:pt x="2793278" y="2149426"/>
+                  </a:lnTo>
+                  <a:lnTo>
+                    <a:pt x="2864901" y="2131795"/>
+                  </a:lnTo>
+                  <a:lnTo>
+                    <a:pt x="2936523" y="2113777"/>
+                  </a:lnTo>
+                  <a:lnTo>
+                    <a:pt x="3008146" y="2095364"/>
+                  </a:lnTo>
+                  <a:lnTo>
+                    <a:pt x="3079768" y="2076548"/>
+                  </a:lnTo>
+                  <a:lnTo>
+                    <a:pt x="3151391" y="2057320"/>
+                  </a:lnTo>
+                  <a:lnTo>
+                    <a:pt x="3223013" y="2037670"/>
                   </a:lnTo>
                   <a:lnTo>
                     <a:pt x="3294636" y="2017590"/>
                   </a:lnTo>
                   <a:lnTo>
-                    <a:pt x="3366258" y="1997070"/>
-                  </a:lnTo>
-                  <a:lnTo>
-                    <a:pt x="3437881" y="1976100"/>
+                    <a:pt x="3366258" y="1997069"/>
+                  </a:lnTo>
+                  <a:lnTo>
+                    <a:pt x="3437881" y="1976099"/>
                   </a:lnTo>
                   <a:lnTo>
                     <a:pt x="3509503" y="1954670"/>
                   </a:lnTo>
                   <a:lnTo>
-                    <a:pt x="3581126" y="1932771"/>
-                  </a:lnTo>
-                  <a:lnTo>
-                    <a:pt x="3652748" y="1910392"/>
-                  </a:lnTo>
-                  <a:lnTo>
-                    <a:pt x="3724371" y="1887523"/>
+                    <a:pt x="3581126" y="1932770"/>
+                  </a:lnTo>
+                  <a:lnTo>
+                    <a:pt x="3652748" y="1910391"/>
+                  </a:lnTo>
+                  <a:lnTo>
+                    <a:pt x="3724371" y="1887522"/>
                   </a:lnTo>
                   <a:lnTo>
                     <a:pt x="3795993" y="1864152"/>
                   </a:lnTo>
                   <a:lnTo>
-                    <a:pt x="3867616" y="1840270"/>
-                  </a:lnTo>
-                  <a:lnTo>
-                    <a:pt x="3939238" y="1815864"/>
-                  </a:lnTo>
-                  <a:lnTo>
-                    <a:pt x="4010861" y="1790923"/>
-                  </a:lnTo>
-                  <a:lnTo>
-                    <a:pt x="4082483" y="1765436"/>
-                  </a:lnTo>
-                  <a:lnTo>
-                    <a:pt x="4154106" y="1739390"/>
-                  </a:lnTo>
-                  <a:lnTo>
-                    <a:pt x="4225729" y="1712774"/>
-                  </a:lnTo>
-                  <a:lnTo>
-                    <a:pt x="4297351" y="1685574"/>
+                    <a:pt x="3867616" y="1840269"/>
+                  </a:lnTo>
+                  <a:lnTo>
+                    <a:pt x="3939238" y="1815863"/>
+                  </a:lnTo>
+                  <a:lnTo>
+                    <a:pt x="4010861" y="1790922"/>
+                  </a:lnTo>
+                  <a:lnTo>
+                    <a:pt x="4082483" y="1765435"/>
+                  </a:lnTo>
+                  <a:lnTo>
+                    <a:pt x="4154106" y="1739389"/>
+                  </a:lnTo>
+                  <a:lnTo>
+                    <a:pt x="4225729" y="1712773"/>
+                  </a:lnTo>
+                  <a:lnTo>
+                    <a:pt x="4297351" y="1685573"/>
                   </a:lnTo>
                   <a:lnTo>
                     <a:pt x="4368974" y="1657778"/>
                   </a:lnTo>
                   <a:lnTo>
-                    <a:pt x="4440596" y="1629374"/>
-                  </a:lnTo>
-                  <a:lnTo>
-                    <a:pt x="4512219" y="1600347"/>
+                    <a:pt x="4440596" y="1629373"/>
+                  </a:lnTo>
+                  <a:lnTo>
+                    <a:pt x="4512219" y="1600346"/>
                   </a:lnTo>
                   <a:lnTo>
                     <a:pt x="4583841" y="1570683"/>
@@ -4453,43 +4453,43 @@
                     <a:pt x="4655464" y="1540370"/>
                   </a:lnTo>
                   <a:lnTo>
-                    <a:pt x="4727086" y="1509393"/>
-                  </a:lnTo>
-                  <a:lnTo>
-                    <a:pt x="4798709" y="1477737"/>
-                  </a:lnTo>
-                  <a:lnTo>
-                    <a:pt x="4870331" y="1445387"/>
-                  </a:lnTo>
-                  <a:lnTo>
-                    <a:pt x="4941954" y="1412328"/>
-                  </a:lnTo>
-                  <a:lnTo>
-                    <a:pt x="5013576" y="1378545"/>
+                    <a:pt x="4727086" y="1509392"/>
+                  </a:lnTo>
+                  <a:lnTo>
+                    <a:pt x="4798709" y="1477736"/>
+                  </a:lnTo>
+                  <a:lnTo>
+                    <a:pt x="4870331" y="1445386"/>
+                  </a:lnTo>
+                  <a:lnTo>
+                    <a:pt x="4941954" y="1412327"/>
+                  </a:lnTo>
+                  <a:lnTo>
+                    <a:pt x="5013576" y="1378544"/>
                   </a:lnTo>
                   <a:lnTo>
                     <a:pt x="5085199" y="1344021"/>
                   </a:lnTo>
                   <a:lnTo>
-                    <a:pt x="5156821" y="1308742"/>
-                  </a:lnTo>
-                  <a:lnTo>
-                    <a:pt x="5228444" y="1272689"/>
-                  </a:lnTo>
-                  <a:lnTo>
-                    <a:pt x="5300066" y="1235846"/>
+                    <a:pt x="5156821" y="1308741"/>
+                  </a:lnTo>
+                  <a:lnTo>
+                    <a:pt x="5228444" y="1272688"/>
+                  </a:lnTo>
+                  <a:lnTo>
+                    <a:pt x="5300066" y="1235845"/>
                   </a:lnTo>
                   <a:lnTo>
                     <a:pt x="5371689" y="1198195"/>
                   </a:lnTo>
                   <a:lnTo>
-                    <a:pt x="5443311" y="1159720"/>
-                  </a:lnTo>
-                  <a:lnTo>
-                    <a:pt x="5514934" y="1120402"/>
-                  </a:lnTo>
-                  <a:lnTo>
-                    <a:pt x="5586557" y="1080222"/>
+                    <a:pt x="5443311" y="1159719"/>
+                  </a:lnTo>
+                  <a:lnTo>
+                    <a:pt x="5514934" y="1120401"/>
+                  </a:lnTo>
+                  <a:lnTo>
+                    <a:pt x="5586557" y="1080221"/>
                   </a:lnTo>
                   <a:lnTo>
                     <a:pt x="5658179" y="1039161"/>
@@ -4498,22 +4498,22 @@
                     <a:pt x="5729802" y="997201"/>
                   </a:lnTo>
                   <a:lnTo>
-                    <a:pt x="5801424" y="954322"/>
-                  </a:lnTo>
-                  <a:lnTo>
-                    <a:pt x="5873047" y="910503"/>
+                    <a:pt x="5801424" y="954321"/>
+                  </a:lnTo>
+                  <a:lnTo>
+                    <a:pt x="5873047" y="910502"/>
                   </a:lnTo>
                   <a:lnTo>
                     <a:pt x="5944669" y="865723"/>
                   </a:lnTo>
                   <a:lnTo>
-                    <a:pt x="6016292" y="819963"/>
+                    <a:pt x="6016292" y="819962"/>
                   </a:lnTo>
                   <a:lnTo>
                     <a:pt x="6087914" y="773199"/>
                   </a:lnTo>
                   <a:lnTo>
-                    <a:pt x="6159537" y="725412"/>
+                    <a:pt x="6159537" y="725411"/>
                   </a:lnTo>
                   <a:lnTo>
                     <a:pt x="6231159" y="676576"/>

--- a/docs/plots/carbo/jx_carbo_linsubhr_dosedisc_akikdigo.pptx
+++ b/docs/plots/carbo/jx_carbo_linsubhr_dosedisc_akikdigo.pptx
@@ -2271,7 +2271,7 @@
           </p:nvSpPr>
           <p:spPr>
             <a:xfrm>
-              <a:off x="817517" y="5114368"/>
+              <a:off x="817517" y="5142518"/>
               <a:ext cx="7799693" cy="0"/>
             </a:xfrm>
             <a:custGeom>
@@ -2314,7 +2314,7 @@
           </p:nvSpPr>
           <p:spPr>
             <a:xfrm>
-              <a:off x="817517" y="4244691"/>
+              <a:off x="817517" y="4313054"/>
               <a:ext cx="7799693" cy="0"/>
             </a:xfrm>
             <a:custGeom>
@@ -2357,7 +2357,7 @@
           </p:nvSpPr>
           <p:spPr>
             <a:xfrm>
-              <a:off x="817517" y="3375014"/>
+              <a:off x="817517" y="3483591"/>
               <a:ext cx="7799693" cy="0"/>
             </a:xfrm>
             <a:custGeom>
@@ -2400,7 +2400,7 @@
           </p:nvSpPr>
           <p:spPr>
             <a:xfrm>
-              <a:off x="817517" y="2505337"/>
+              <a:off x="817517" y="2654127"/>
               <a:ext cx="7799693" cy="0"/>
             </a:xfrm>
             <a:custGeom>
@@ -2443,15 +2443,15 @@
           </p:nvSpPr>
           <p:spPr>
             <a:xfrm>
-              <a:off x="2122745" y="1896563"/>
-              <a:ext cx="0" cy="3826579"/>
+              <a:off x="2122745" y="2073503"/>
+              <a:ext cx="0" cy="3649639"/>
             </a:xfrm>
             <a:custGeom>
               <a:avLst/>
               <a:pathLst>
-                <a:path w="0" h="3826579">
+                <a:path w="0" h="3649639">
                   <a:moveTo>
-                    <a:pt x="0" y="3826579"/>
+                    <a:pt x="0" y="3649639"/>
                   </a:moveTo>
                   <a:lnTo>
                     <a:pt x="0" y="0"/>
@@ -2486,15 +2486,15 @@
           </p:nvSpPr>
           <p:spPr>
             <a:xfrm>
-              <a:off x="3487174" y="1896563"/>
-              <a:ext cx="0" cy="3826579"/>
+              <a:off x="3487174" y="2073503"/>
+              <a:ext cx="0" cy="3649639"/>
             </a:xfrm>
             <a:custGeom>
               <a:avLst/>
               <a:pathLst>
-                <a:path w="0" h="3826579">
+                <a:path w="0" h="3649639">
                   <a:moveTo>
-                    <a:pt x="0" y="3826579"/>
+                    <a:pt x="0" y="3649639"/>
                   </a:moveTo>
                   <a:lnTo>
                     <a:pt x="0" y="0"/>
@@ -2529,15 +2529,15 @@
           </p:nvSpPr>
           <p:spPr>
             <a:xfrm>
-              <a:off x="4851604" y="1896563"/>
-              <a:ext cx="0" cy="3826579"/>
+              <a:off x="4851604" y="2073503"/>
+              <a:ext cx="0" cy="3649639"/>
             </a:xfrm>
             <a:custGeom>
               <a:avLst/>
               <a:pathLst>
-                <a:path w="0" h="3826579">
+                <a:path w="0" h="3649639">
                   <a:moveTo>
-                    <a:pt x="0" y="3826579"/>
+                    <a:pt x="0" y="3649639"/>
                   </a:moveTo>
                   <a:lnTo>
                     <a:pt x="0" y="0"/>
@@ -2572,15 +2572,15 @@
           </p:nvSpPr>
           <p:spPr>
             <a:xfrm>
-              <a:off x="6216034" y="1896563"/>
-              <a:ext cx="0" cy="3826579"/>
+              <a:off x="6216034" y="2073503"/>
+              <a:ext cx="0" cy="3649639"/>
             </a:xfrm>
             <a:custGeom>
               <a:avLst/>
               <a:pathLst>
-                <a:path w="0" h="3826579">
+                <a:path w="0" h="3649639">
                   <a:moveTo>
-                    <a:pt x="0" y="3826579"/>
+                    <a:pt x="0" y="3649639"/>
                   </a:moveTo>
                   <a:lnTo>
                     <a:pt x="0" y="0"/>
@@ -2615,15 +2615,15 @@
           </p:nvSpPr>
           <p:spPr>
             <a:xfrm>
-              <a:off x="7580464" y="1896563"/>
-              <a:ext cx="0" cy="3826579"/>
+              <a:off x="7580464" y="2073503"/>
+              <a:ext cx="0" cy="3649639"/>
             </a:xfrm>
             <a:custGeom>
               <a:avLst/>
               <a:pathLst>
-                <a:path w="0" h="3826579">
+                <a:path w="0" h="3649639">
                   <a:moveTo>
-                    <a:pt x="0" y="3826579"/>
+                    <a:pt x="0" y="3649639"/>
                   </a:moveTo>
                   <a:lnTo>
                     <a:pt x="0" y="0"/>
@@ -2658,7 +2658,7 @@
           </p:nvSpPr>
           <p:spPr>
             <a:xfrm>
-              <a:off x="817517" y="5549207"/>
+              <a:off x="817517" y="5557249"/>
               <a:ext cx="7799693" cy="0"/>
             </a:xfrm>
             <a:custGeom>
@@ -2701,7 +2701,7 @@
           </p:nvSpPr>
           <p:spPr>
             <a:xfrm>
-              <a:off x="817517" y="4679530"/>
+              <a:off x="817517" y="4727786"/>
               <a:ext cx="7799693" cy="0"/>
             </a:xfrm>
             <a:custGeom>
@@ -2744,7 +2744,7 @@
           </p:nvSpPr>
           <p:spPr>
             <a:xfrm>
-              <a:off x="817517" y="3809853"/>
+              <a:off x="817517" y="3898322"/>
               <a:ext cx="7799693" cy="0"/>
             </a:xfrm>
             <a:custGeom>
@@ -2787,7 +2787,7 @@
           </p:nvSpPr>
           <p:spPr>
             <a:xfrm>
-              <a:off x="817517" y="2940175"/>
+              <a:off x="817517" y="3068859"/>
               <a:ext cx="7799693" cy="0"/>
             </a:xfrm>
             <a:custGeom>
@@ -2830,7 +2830,7 @@
           </p:nvSpPr>
           <p:spPr>
             <a:xfrm>
-              <a:off x="817517" y="2070498"/>
+              <a:off x="817517" y="2239395"/>
               <a:ext cx="7799693" cy="0"/>
             </a:xfrm>
             <a:custGeom>
@@ -2873,15 +2873,15 @@
           </p:nvSpPr>
           <p:spPr>
             <a:xfrm>
-              <a:off x="1440530" y="1896563"/>
-              <a:ext cx="0" cy="3826579"/>
+              <a:off x="1440530" y="2073503"/>
+              <a:ext cx="0" cy="3649639"/>
             </a:xfrm>
             <a:custGeom>
               <a:avLst/>
               <a:pathLst>
-                <a:path w="0" h="3826579">
+                <a:path w="0" h="3649639">
                   <a:moveTo>
-                    <a:pt x="0" y="3826579"/>
+                    <a:pt x="0" y="3649639"/>
                   </a:moveTo>
                   <a:lnTo>
                     <a:pt x="0" y="0"/>
@@ -2916,15 +2916,15 @@
           </p:nvSpPr>
           <p:spPr>
             <a:xfrm>
-              <a:off x="2804959" y="1896563"/>
-              <a:ext cx="0" cy="3826579"/>
+              <a:off x="2804959" y="2073503"/>
+              <a:ext cx="0" cy="3649639"/>
             </a:xfrm>
             <a:custGeom>
               <a:avLst/>
               <a:pathLst>
-                <a:path w="0" h="3826579">
+                <a:path w="0" h="3649639">
                   <a:moveTo>
-                    <a:pt x="0" y="3826579"/>
+                    <a:pt x="0" y="3649639"/>
                   </a:moveTo>
                   <a:lnTo>
                     <a:pt x="0" y="0"/>
@@ -2959,15 +2959,15 @@
           </p:nvSpPr>
           <p:spPr>
             <a:xfrm>
-              <a:off x="4169389" y="1896563"/>
-              <a:ext cx="0" cy="3826579"/>
+              <a:off x="4169389" y="2073503"/>
+              <a:ext cx="0" cy="3649639"/>
             </a:xfrm>
             <a:custGeom>
               <a:avLst/>
               <a:pathLst>
-                <a:path w="0" h="3826579">
+                <a:path w="0" h="3649639">
                   <a:moveTo>
-                    <a:pt x="0" y="3826579"/>
+                    <a:pt x="0" y="3649639"/>
                   </a:moveTo>
                   <a:lnTo>
                     <a:pt x="0" y="0"/>
@@ -3002,15 +3002,15 @@
           </p:nvSpPr>
           <p:spPr>
             <a:xfrm>
-              <a:off x="5533819" y="1896563"/>
-              <a:ext cx="0" cy="3826579"/>
+              <a:off x="5533819" y="2073503"/>
+              <a:ext cx="0" cy="3649639"/>
             </a:xfrm>
             <a:custGeom>
               <a:avLst/>
               <a:pathLst>
-                <a:path w="0" h="3826579">
+                <a:path w="0" h="3649639">
                   <a:moveTo>
-                    <a:pt x="0" y="3826579"/>
+                    <a:pt x="0" y="3649639"/>
                   </a:moveTo>
                   <a:lnTo>
                     <a:pt x="0" y="0"/>
@@ -3045,15 +3045,15 @@
           </p:nvSpPr>
           <p:spPr>
             <a:xfrm>
-              <a:off x="6898249" y="1896563"/>
-              <a:ext cx="0" cy="3826579"/>
+              <a:off x="6898249" y="2073503"/>
+              <a:ext cx="0" cy="3649639"/>
             </a:xfrm>
             <a:custGeom>
               <a:avLst/>
               <a:pathLst>
-                <a:path w="0" h="3826579">
+                <a:path w="0" h="3649639">
                   <a:moveTo>
-                    <a:pt x="0" y="3826579"/>
+                    <a:pt x="0" y="3649639"/>
                   </a:moveTo>
                   <a:lnTo>
                     <a:pt x="0" y="0"/>
@@ -3088,15 +3088,15 @@
           </p:nvSpPr>
           <p:spPr>
             <a:xfrm>
-              <a:off x="8262679" y="1896563"/>
-              <a:ext cx="0" cy="3826579"/>
+              <a:off x="8262679" y="2073503"/>
+              <a:ext cx="0" cy="3649639"/>
             </a:xfrm>
             <a:custGeom>
               <a:avLst/>
               <a:pathLst>
-                <a:path w="0" h="3826579">
+                <a:path w="0" h="3649639">
                   <a:moveTo>
-                    <a:pt x="0" y="3826579"/>
+                    <a:pt x="0" y="3649639"/>
                   </a:moveTo>
                   <a:lnTo>
                     <a:pt x="0" y="0"/>
@@ -3131,225 +3131,225 @@
           </p:nvSpPr>
           <p:spPr>
             <a:xfrm>
-              <a:off x="1172049" y="1896563"/>
-              <a:ext cx="7090630" cy="3558663"/>
+              <a:off x="1172049" y="2073503"/>
+              <a:ext cx="7090630" cy="3394111"/>
             </a:xfrm>
             <a:custGeom>
               <a:avLst/>
               <a:pathLst>
-                <a:path w="7090630" h="3558663">
+                <a:path w="7090630" h="3394111">
                   <a:moveTo>
-                    <a:pt x="0" y="2382367"/>
+                    <a:pt x="0" y="2272207"/>
                   </a:moveTo>
                   <a:lnTo>
-                    <a:pt x="71622" y="2393618"/>
-                  </a:lnTo>
-                  <a:lnTo>
-                    <a:pt x="143245" y="2404769"/>
-                  </a:lnTo>
-                  <a:lnTo>
-                    <a:pt x="214867" y="2415822"/>
-                  </a:lnTo>
-                  <a:lnTo>
-                    <a:pt x="286490" y="2426776"/>
-                  </a:lnTo>
-                  <a:lnTo>
-                    <a:pt x="358112" y="2437634"/>
-                  </a:lnTo>
-                  <a:lnTo>
-                    <a:pt x="429735" y="2448395"/>
-                  </a:lnTo>
-                  <a:lnTo>
-                    <a:pt x="501357" y="2459062"/>
-                  </a:lnTo>
-                  <a:lnTo>
-                    <a:pt x="572980" y="2469633"/>
-                  </a:lnTo>
-                  <a:lnTo>
-                    <a:pt x="644602" y="2480111"/>
-                  </a:lnTo>
-                  <a:lnTo>
-                    <a:pt x="716225" y="2490496"/>
-                  </a:lnTo>
-                  <a:lnTo>
-                    <a:pt x="787847" y="2500790"/>
-                  </a:lnTo>
-                  <a:lnTo>
-                    <a:pt x="859470" y="2510992"/>
-                  </a:lnTo>
-                  <a:lnTo>
-                    <a:pt x="931092" y="2521103"/>
-                  </a:lnTo>
-                  <a:lnTo>
-                    <a:pt x="1002715" y="2531126"/>
-                  </a:lnTo>
-                  <a:lnTo>
-                    <a:pt x="1074337" y="2541059"/>
-                  </a:lnTo>
-                  <a:lnTo>
-                    <a:pt x="1145960" y="2550904"/>
-                  </a:lnTo>
-                  <a:lnTo>
-                    <a:pt x="1217582" y="2560663"/>
-                  </a:lnTo>
-                  <a:lnTo>
-                    <a:pt x="1289205" y="2570334"/>
-                  </a:lnTo>
-                  <a:lnTo>
-                    <a:pt x="1360827" y="2579920"/>
-                  </a:lnTo>
-                  <a:lnTo>
-                    <a:pt x="1432450" y="2589422"/>
-                  </a:lnTo>
-                  <a:lnTo>
-                    <a:pt x="1504073" y="2598839"/>
-                  </a:lnTo>
-                  <a:lnTo>
-                    <a:pt x="1575695" y="2608172"/>
-                  </a:lnTo>
-                  <a:lnTo>
-                    <a:pt x="1647318" y="2617423"/>
-                  </a:lnTo>
-                  <a:lnTo>
-                    <a:pt x="1718940" y="2626592"/>
-                  </a:lnTo>
-                  <a:lnTo>
-                    <a:pt x="1790563" y="2635680"/>
-                  </a:lnTo>
-                  <a:lnTo>
-                    <a:pt x="1862185" y="2644687"/>
-                  </a:lnTo>
-                  <a:lnTo>
-                    <a:pt x="1933808" y="2653615"/>
-                  </a:lnTo>
-                  <a:lnTo>
-                    <a:pt x="2005430" y="2662463"/>
-                  </a:lnTo>
-                  <a:lnTo>
-                    <a:pt x="2077053" y="2671234"/>
-                  </a:lnTo>
-                  <a:lnTo>
-                    <a:pt x="2148675" y="2679926"/>
-                  </a:lnTo>
-                  <a:lnTo>
-                    <a:pt x="2220298" y="2688541"/>
-                  </a:lnTo>
-                  <a:lnTo>
-                    <a:pt x="2291920" y="2697081"/>
-                  </a:lnTo>
-                  <a:lnTo>
-                    <a:pt x="2363543" y="2705544"/>
-                  </a:lnTo>
-                  <a:lnTo>
-                    <a:pt x="2435165" y="2713933"/>
-                  </a:lnTo>
-                  <a:lnTo>
-                    <a:pt x="2506788" y="2722247"/>
-                  </a:lnTo>
-                  <a:lnTo>
-                    <a:pt x="2578410" y="2730487"/>
-                  </a:lnTo>
-                  <a:lnTo>
-                    <a:pt x="2650033" y="2738655"/>
-                  </a:lnTo>
-                  <a:lnTo>
-                    <a:pt x="2721655" y="2746750"/>
-                  </a:lnTo>
-                  <a:lnTo>
-                    <a:pt x="2793278" y="2754774"/>
-                  </a:lnTo>
-                  <a:lnTo>
-                    <a:pt x="2864901" y="2762726"/>
-                  </a:lnTo>
-                  <a:lnTo>
-                    <a:pt x="2936523" y="2770608"/>
-                  </a:lnTo>
-                  <a:lnTo>
-                    <a:pt x="3008146" y="2778421"/>
-                  </a:lnTo>
-                  <a:lnTo>
-                    <a:pt x="3079768" y="2763948"/>
-                  </a:lnTo>
-                  <a:lnTo>
-                    <a:pt x="3151391" y="2716281"/>
-                  </a:lnTo>
-                  <a:lnTo>
-                    <a:pt x="3223013" y="2666057"/>
-                  </a:lnTo>
-                  <a:lnTo>
-                    <a:pt x="3294636" y="2613140"/>
-                  </a:lnTo>
-                  <a:lnTo>
-                    <a:pt x="3366258" y="2557384"/>
-                  </a:lnTo>
-                  <a:lnTo>
-                    <a:pt x="3437881" y="2498637"/>
-                  </a:lnTo>
-                  <a:lnTo>
-                    <a:pt x="3509503" y="2436740"/>
-                  </a:lnTo>
-                  <a:lnTo>
-                    <a:pt x="3581126" y="2371523"/>
-                  </a:lnTo>
-                  <a:lnTo>
-                    <a:pt x="3652748" y="2302807"/>
-                  </a:lnTo>
-                  <a:lnTo>
-                    <a:pt x="3724371" y="2230406"/>
-                  </a:lnTo>
-                  <a:lnTo>
-                    <a:pt x="3795993" y="2154121"/>
-                  </a:lnTo>
-                  <a:lnTo>
-                    <a:pt x="3867616" y="2073745"/>
-                  </a:lnTo>
-                  <a:lnTo>
-                    <a:pt x="3939238" y="1989058"/>
-                  </a:lnTo>
-                  <a:lnTo>
-                    <a:pt x="4010861" y="1899828"/>
-                  </a:lnTo>
-                  <a:lnTo>
-                    <a:pt x="4082483" y="1805812"/>
-                  </a:lnTo>
-                  <a:lnTo>
-                    <a:pt x="4154106" y="1706753"/>
-                  </a:lnTo>
-                  <a:lnTo>
-                    <a:pt x="4225729" y="1602382"/>
-                  </a:lnTo>
-                  <a:lnTo>
-                    <a:pt x="4297351" y="1492412"/>
-                  </a:lnTo>
-                  <a:lnTo>
-                    <a:pt x="4368974" y="1376543"/>
-                  </a:lnTo>
-                  <a:lnTo>
-                    <a:pt x="4440596" y="1254460"/>
-                  </a:lnTo>
-                  <a:lnTo>
-                    <a:pt x="4512219" y="1125829"/>
-                  </a:lnTo>
-                  <a:lnTo>
-                    <a:pt x="4583841" y="990298"/>
-                  </a:lnTo>
-                  <a:lnTo>
-                    <a:pt x="4655464" y="847498"/>
-                  </a:lnTo>
-                  <a:lnTo>
-                    <a:pt x="4727086" y="697038"/>
-                  </a:lnTo>
-                  <a:lnTo>
-                    <a:pt x="4798709" y="538508"/>
-                  </a:lnTo>
-                  <a:lnTo>
-                    <a:pt x="4870331" y="371475"/>
-                  </a:lnTo>
-                  <a:lnTo>
-                    <a:pt x="4941954" y="195483"/>
-                  </a:lnTo>
-                  <a:lnTo>
-                    <a:pt x="5013576" y="10051"/>
+                    <a:pt x="71622" y="2282938"/>
+                  </a:lnTo>
+                  <a:lnTo>
+                    <a:pt x="143245" y="2293574"/>
+                  </a:lnTo>
+                  <a:lnTo>
+                    <a:pt x="214867" y="2304115"/>
+                  </a:lnTo>
+                  <a:lnTo>
+                    <a:pt x="286490" y="2314563"/>
+                  </a:lnTo>
+                  <a:lnTo>
+                    <a:pt x="358112" y="2324919"/>
+                  </a:lnTo>
+                  <a:lnTo>
+                    <a:pt x="429735" y="2335183"/>
+                  </a:lnTo>
+                  <a:lnTo>
+                    <a:pt x="501357" y="2345355"/>
+                  </a:lnTo>
+                  <a:lnTo>
+                    <a:pt x="572980" y="2355438"/>
+                  </a:lnTo>
+                  <a:lnTo>
+                    <a:pt x="644602" y="2365432"/>
+                  </a:lnTo>
+                  <a:lnTo>
+                    <a:pt x="716225" y="2375337"/>
+                  </a:lnTo>
+                  <a:lnTo>
+                    <a:pt x="787847" y="2385154"/>
+                  </a:lnTo>
+                  <a:lnTo>
+                    <a:pt x="859470" y="2394884"/>
+                  </a:lnTo>
+                  <a:lnTo>
+                    <a:pt x="931092" y="2404529"/>
+                  </a:lnTo>
+                  <a:lnTo>
+                    <a:pt x="1002715" y="2414087"/>
+                  </a:lnTo>
+                  <a:lnTo>
+                    <a:pt x="1074337" y="2423561"/>
+                  </a:lnTo>
+                  <a:lnTo>
+                    <a:pt x="1145960" y="2432951"/>
+                  </a:lnTo>
+                  <a:lnTo>
+                    <a:pt x="1217582" y="2442258"/>
+                  </a:lnTo>
+                  <a:lnTo>
+                    <a:pt x="1289205" y="2451483"/>
+                  </a:lnTo>
+                  <a:lnTo>
+                    <a:pt x="1360827" y="2460626"/>
+                  </a:lnTo>
+                  <a:lnTo>
+                    <a:pt x="1432450" y="2469688"/>
+                  </a:lnTo>
+                  <a:lnTo>
+                    <a:pt x="1504073" y="2478669"/>
+                  </a:lnTo>
+                  <a:lnTo>
+                    <a:pt x="1575695" y="2487571"/>
+                  </a:lnTo>
+                  <a:lnTo>
+                    <a:pt x="1647318" y="2496395"/>
+                  </a:lnTo>
+                  <a:lnTo>
+                    <a:pt x="1718940" y="2505140"/>
+                  </a:lnTo>
+                  <a:lnTo>
+                    <a:pt x="1790563" y="2513807"/>
+                  </a:lnTo>
+                  <a:lnTo>
+                    <a:pt x="1862185" y="2522398"/>
+                  </a:lnTo>
+                  <a:lnTo>
+                    <a:pt x="1933808" y="2530913"/>
+                  </a:lnTo>
+                  <a:lnTo>
+                    <a:pt x="2005430" y="2539352"/>
+                  </a:lnTo>
+                  <a:lnTo>
+                    <a:pt x="2077053" y="2547717"/>
+                  </a:lnTo>
+                  <a:lnTo>
+                    <a:pt x="2148675" y="2556007"/>
+                  </a:lnTo>
+                  <a:lnTo>
+                    <a:pt x="2220298" y="2564224"/>
+                  </a:lnTo>
+                  <a:lnTo>
+                    <a:pt x="2291920" y="2572369"/>
+                  </a:lnTo>
+                  <a:lnTo>
+                    <a:pt x="2363543" y="2580441"/>
+                  </a:lnTo>
+                  <a:lnTo>
+                    <a:pt x="2435165" y="2588441"/>
+                  </a:lnTo>
+                  <a:lnTo>
+                    <a:pt x="2506788" y="2596371"/>
+                  </a:lnTo>
+                  <a:lnTo>
+                    <a:pt x="2578410" y="2604231"/>
+                  </a:lnTo>
+                  <a:lnTo>
+                    <a:pt x="2650033" y="2612021"/>
+                  </a:lnTo>
+                  <a:lnTo>
+                    <a:pt x="2721655" y="2619742"/>
+                  </a:lnTo>
+                  <a:lnTo>
+                    <a:pt x="2793278" y="2627394"/>
+                  </a:lnTo>
+                  <a:lnTo>
+                    <a:pt x="2864901" y="2634979"/>
+                  </a:lnTo>
+                  <a:lnTo>
+                    <a:pt x="2936523" y="2642497"/>
+                  </a:lnTo>
+                  <a:lnTo>
+                    <a:pt x="3008146" y="2649948"/>
+                  </a:lnTo>
+                  <a:lnTo>
+                    <a:pt x="3079768" y="2636144"/>
+                  </a:lnTo>
+                  <a:lnTo>
+                    <a:pt x="3151391" y="2590681"/>
+                  </a:lnTo>
+                  <a:lnTo>
+                    <a:pt x="3223013" y="2542780"/>
+                  </a:lnTo>
+                  <a:lnTo>
+                    <a:pt x="3294636" y="2492309"/>
+                  </a:lnTo>
+                  <a:lnTo>
+                    <a:pt x="3366258" y="2439131"/>
+                  </a:lnTo>
+                  <a:lnTo>
+                    <a:pt x="3437881" y="2383101"/>
+                  </a:lnTo>
+                  <a:lnTo>
+                    <a:pt x="3509503" y="2324066"/>
+                  </a:lnTo>
+                  <a:lnTo>
+                    <a:pt x="3581126" y="2261864"/>
+                  </a:lnTo>
+                  <a:lnTo>
+                    <a:pt x="3652748" y="2196326"/>
+                  </a:lnTo>
+                  <a:lnTo>
+                    <a:pt x="3724371" y="2127273"/>
+                  </a:lnTo>
+                  <a:lnTo>
+                    <a:pt x="3795993" y="2054515"/>
+                  </a:lnTo>
+                  <a:lnTo>
+                    <a:pt x="3867616" y="1977856"/>
+                  </a:lnTo>
+                  <a:lnTo>
+                    <a:pt x="3939238" y="1897084"/>
+                  </a:lnTo>
+                  <a:lnTo>
+                    <a:pt x="4010861" y="1811980"/>
+                  </a:lnTo>
+                  <a:lnTo>
+                    <a:pt x="4082483" y="1722312"/>
+                  </a:lnTo>
+                  <a:lnTo>
+                    <a:pt x="4154106" y="1627834"/>
+                  </a:lnTo>
+                  <a:lnTo>
+                    <a:pt x="4225729" y="1528288"/>
+                  </a:lnTo>
+                  <a:lnTo>
+                    <a:pt x="4297351" y="1423403"/>
+                  </a:lnTo>
+                  <a:lnTo>
+                    <a:pt x="4368974" y="1312892"/>
+                  </a:lnTo>
+                  <a:lnTo>
+                    <a:pt x="4440596" y="1196454"/>
+                  </a:lnTo>
+                  <a:lnTo>
+                    <a:pt x="4512219" y="1073771"/>
+                  </a:lnTo>
+                  <a:lnTo>
+                    <a:pt x="4583841" y="944507"/>
+                  </a:lnTo>
+                  <a:lnTo>
+                    <a:pt x="4655464" y="808310"/>
+                  </a:lnTo>
+                  <a:lnTo>
+                    <a:pt x="4727086" y="664807"/>
+                  </a:lnTo>
+                  <a:lnTo>
+                    <a:pt x="4798709" y="513608"/>
+                  </a:lnTo>
+                  <a:lnTo>
+                    <a:pt x="4870331" y="354298"/>
+                  </a:lnTo>
+                  <a:lnTo>
+                    <a:pt x="4941954" y="186444"/>
+                  </a:lnTo>
+                  <a:lnTo>
+                    <a:pt x="5013576" y="9586"/>
                   </a:lnTo>
                   <a:lnTo>
                     <a:pt x="5017261" y="0"/>
@@ -3358,304 +3358,304 @@
                     <a:pt x="7090630" y="0"/>
                   </a:lnTo>
                   <a:lnTo>
-                    <a:pt x="7090630" y="3126153"/>
-                  </a:lnTo>
-                  <a:lnTo>
-                    <a:pt x="7019007" y="3121448"/>
-                  </a:lnTo>
-                  <a:lnTo>
-                    <a:pt x="6947385" y="3116702"/>
-                  </a:lnTo>
-                  <a:lnTo>
-                    <a:pt x="6875762" y="3111912"/>
-                  </a:lnTo>
-                  <a:lnTo>
-                    <a:pt x="6804139" y="3107080"/>
-                  </a:lnTo>
-                  <a:lnTo>
-                    <a:pt x="6732517" y="3102205"/>
-                  </a:lnTo>
-                  <a:lnTo>
-                    <a:pt x="6660894" y="3097286"/>
-                  </a:lnTo>
-                  <a:lnTo>
-                    <a:pt x="6589272" y="3092323"/>
-                  </a:lnTo>
-                  <a:lnTo>
-                    <a:pt x="6517649" y="3087316"/>
-                  </a:lnTo>
-                  <a:lnTo>
-                    <a:pt x="6446027" y="3082264"/>
-                  </a:lnTo>
-                  <a:lnTo>
-                    <a:pt x="6374404" y="3077167"/>
-                  </a:lnTo>
-                  <a:lnTo>
-                    <a:pt x="6302782" y="3072025"/>
-                  </a:lnTo>
-                  <a:lnTo>
-                    <a:pt x="6231159" y="3066836"/>
-                  </a:lnTo>
-                  <a:lnTo>
-                    <a:pt x="6159537" y="3061601"/>
-                  </a:lnTo>
-                  <a:lnTo>
-                    <a:pt x="6087914" y="3056319"/>
-                  </a:lnTo>
-                  <a:lnTo>
-                    <a:pt x="6016292" y="3050991"/>
-                  </a:lnTo>
-                  <a:lnTo>
-                    <a:pt x="5944669" y="3045614"/>
-                  </a:lnTo>
-                  <a:lnTo>
-                    <a:pt x="5873047" y="3040190"/>
-                  </a:lnTo>
-                  <a:lnTo>
-                    <a:pt x="5801424" y="3034716"/>
-                  </a:lnTo>
-                  <a:lnTo>
-                    <a:pt x="5729802" y="3029195"/>
-                  </a:lnTo>
-                  <a:lnTo>
-                    <a:pt x="5658179" y="3023623"/>
-                  </a:lnTo>
-                  <a:lnTo>
-                    <a:pt x="5586557" y="3018002"/>
-                  </a:lnTo>
-                  <a:lnTo>
-                    <a:pt x="5514934" y="3012331"/>
-                  </a:lnTo>
-                  <a:lnTo>
-                    <a:pt x="5443311" y="3006609"/>
-                  </a:lnTo>
-                  <a:lnTo>
-                    <a:pt x="5371689" y="3000836"/>
-                  </a:lnTo>
-                  <a:lnTo>
-                    <a:pt x="5300066" y="2995011"/>
-                  </a:lnTo>
-                  <a:lnTo>
-                    <a:pt x="5228444" y="2989134"/>
-                  </a:lnTo>
-                  <a:lnTo>
-                    <a:pt x="5156821" y="2983205"/>
-                  </a:lnTo>
-                  <a:lnTo>
-                    <a:pt x="5085199" y="2977223"/>
-                  </a:lnTo>
-                  <a:lnTo>
-                    <a:pt x="5013576" y="2971187"/>
-                  </a:lnTo>
-                  <a:lnTo>
-                    <a:pt x="4941954" y="2965097"/>
-                  </a:lnTo>
-                  <a:lnTo>
-                    <a:pt x="4870331" y="2958953"/>
-                  </a:lnTo>
-                  <a:lnTo>
-                    <a:pt x="4798709" y="2952754"/>
-                  </a:lnTo>
-                  <a:lnTo>
-                    <a:pt x="4727086" y="2946500"/>
-                  </a:lnTo>
-                  <a:lnTo>
-                    <a:pt x="4655464" y="2940190"/>
-                  </a:lnTo>
-                  <a:lnTo>
-                    <a:pt x="4583841" y="2933823"/>
-                  </a:lnTo>
-                  <a:lnTo>
-                    <a:pt x="4512219" y="2927400"/>
-                  </a:lnTo>
-                  <a:lnTo>
-                    <a:pt x="4440596" y="2920919"/>
-                  </a:lnTo>
-                  <a:lnTo>
-                    <a:pt x="4368974" y="2914380"/>
-                  </a:lnTo>
-                  <a:lnTo>
-                    <a:pt x="4297351" y="2907783"/>
-                  </a:lnTo>
-                  <a:lnTo>
-                    <a:pt x="4225729" y="2901126"/>
-                  </a:lnTo>
-                  <a:lnTo>
-                    <a:pt x="4154106" y="2894411"/>
-                  </a:lnTo>
-                  <a:lnTo>
-                    <a:pt x="4082483" y="2887635"/>
-                  </a:lnTo>
-                  <a:lnTo>
-                    <a:pt x="4010861" y="2880798"/>
-                  </a:lnTo>
-                  <a:lnTo>
-                    <a:pt x="3939238" y="2873901"/>
-                  </a:lnTo>
-                  <a:lnTo>
-                    <a:pt x="3867616" y="2866942"/>
-                  </a:lnTo>
-                  <a:lnTo>
-                    <a:pt x="3795993" y="2859921"/>
-                  </a:lnTo>
-                  <a:lnTo>
-                    <a:pt x="3724371" y="2852837"/>
-                  </a:lnTo>
-                  <a:lnTo>
-                    <a:pt x="3652748" y="2845690"/>
-                  </a:lnTo>
-                  <a:lnTo>
-                    <a:pt x="3581126" y="2838479"/>
-                  </a:lnTo>
-                  <a:lnTo>
-                    <a:pt x="3509503" y="2831203"/>
-                  </a:lnTo>
-                  <a:lnTo>
-                    <a:pt x="3437881" y="2823862"/>
-                  </a:lnTo>
-                  <a:lnTo>
-                    <a:pt x="3366258" y="2816456"/>
-                  </a:lnTo>
-                  <a:lnTo>
-                    <a:pt x="3294636" y="2808984"/>
-                  </a:lnTo>
-                  <a:lnTo>
-                    <a:pt x="3223013" y="2801445"/>
-                  </a:lnTo>
-                  <a:lnTo>
-                    <a:pt x="3151391" y="2793838"/>
-                  </a:lnTo>
-                  <a:lnTo>
-                    <a:pt x="3079768" y="2786164"/>
-                  </a:lnTo>
-                  <a:lnTo>
-                    <a:pt x="3008146" y="2809188"/>
-                  </a:lnTo>
-                  <a:lnTo>
-                    <a:pt x="2936523" y="2852126"/>
-                  </a:lnTo>
-                  <a:lnTo>
-                    <a:pt x="2864901" y="2892877"/>
-                  </a:lnTo>
-                  <a:lnTo>
-                    <a:pt x="2793278" y="2931554"/>
-                  </a:lnTo>
-                  <a:lnTo>
-                    <a:pt x="2721655" y="2968263"/>
-                  </a:lnTo>
-                  <a:lnTo>
-                    <a:pt x="2650033" y="3003102"/>
-                  </a:lnTo>
-                  <a:lnTo>
-                    <a:pt x="2578410" y="3036168"/>
-                  </a:lnTo>
-                  <a:lnTo>
-                    <a:pt x="2506788" y="3067551"/>
-                  </a:lnTo>
-                  <a:lnTo>
-                    <a:pt x="2435165" y="3097336"/>
-                  </a:lnTo>
-                  <a:lnTo>
-                    <a:pt x="2363543" y="3125604"/>
-                  </a:lnTo>
-                  <a:lnTo>
-                    <a:pt x="2291920" y="3152434"/>
-                  </a:lnTo>
-                  <a:lnTo>
-                    <a:pt x="2220298" y="3177898"/>
-                  </a:lnTo>
-                  <a:lnTo>
-                    <a:pt x="2148675" y="3202066"/>
-                  </a:lnTo>
-                  <a:lnTo>
-                    <a:pt x="2077053" y="3225003"/>
-                  </a:lnTo>
-                  <a:lnTo>
-                    <a:pt x="2005430" y="3246773"/>
-                  </a:lnTo>
-                  <a:lnTo>
-                    <a:pt x="1933808" y="3267434"/>
-                  </a:lnTo>
-                  <a:lnTo>
-                    <a:pt x="1862185" y="3287044"/>
-                  </a:lnTo>
-                  <a:lnTo>
-                    <a:pt x="1790563" y="3305655"/>
-                  </a:lnTo>
-                  <a:lnTo>
-                    <a:pt x="1718940" y="3323319"/>
-                  </a:lnTo>
-                  <a:lnTo>
-                    <a:pt x="1647318" y="3340084"/>
-                  </a:lnTo>
-                  <a:lnTo>
-                    <a:pt x="1575695" y="3355995"/>
-                  </a:lnTo>
-                  <a:lnTo>
-                    <a:pt x="1504073" y="3371097"/>
-                  </a:lnTo>
-                  <a:lnTo>
-                    <a:pt x="1432450" y="3385429"/>
-                  </a:lnTo>
-                  <a:lnTo>
-                    <a:pt x="1360827" y="3399032"/>
-                  </a:lnTo>
-                  <a:lnTo>
-                    <a:pt x="1289205" y="3411943"/>
-                  </a:lnTo>
-                  <a:lnTo>
-                    <a:pt x="1217582" y="3424196"/>
-                  </a:lnTo>
-                  <a:lnTo>
-                    <a:pt x="1145960" y="3435825"/>
-                  </a:lnTo>
-                  <a:lnTo>
-                    <a:pt x="1074337" y="3446863"/>
-                  </a:lnTo>
-                  <a:lnTo>
-                    <a:pt x="1002715" y="3457338"/>
-                  </a:lnTo>
-                  <a:lnTo>
-                    <a:pt x="931092" y="3467281"/>
-                  </a:lnTo>
-                  <a:lnTo>
-                    <a:pt x="859470" y="3476717"/>
-                  </a:lnTo>
-                  <a:lnTo>
-                    <a:pt x="787847" y="3485673"/>
-                  </a:lnTo>
-                  <a:lnTo>
-                    <a:pt x="716225" y="3494173"/>
-                  </a:lnTo>
-                  <a:lnTo>
-                    <a:pt x="644602" y="3502240"/>
-                  </a:lnTo>
-                  <a:lnTo>
-                    <a:pt x="572980" y="3509896"/>
-                  </a:lnTo>
-                  <a:lnTo>
-                    <a:pt x="501357" y="3517163"/>
-                  </a:lnTo>
-                  <a:lnTo>
-                    <a:pt x="429735" y="3524060"/>
-                  </a:lnTo>
-                  <a:lnTo>
-                    <a:pt x="358112" y="3530606"/>
-                  </a:lnTo>
-                  <a:lnTo>
-                    <a:pt x="286490" y="3536818"/>
-                  </a:lnTo>
-                  <a:lnTo>
-                    <a:pt x="214867" y="3542714"/>
-                  </a:lnTo>
-                  <a:lnTo>
-                    <a:pt x="143245" y="3548310"/>
-                  </a:lnTo>
-                  <a:lnTo>
-                    <a:pt x="71622" y="3553622"/>
-                  </a:lnTo>
-                  <a:lnTo>
-                    <a:pt x="0" y="3558663"/>
+                    <a:pt x="7090630" y="2981601"/>
+                  </a:lnTo>
+                  <a:lnTo>
+                    <a:pt x="7019007" y="2977114"/>
+                  </a:lnTo>
+                  <a:lnTo>
+                    <a:pt x="6947385" y="2972586"/>
+                  </a:lnTo>
+                  <a:lnTo>
+                    <a:pt x="6875762" y="2968019"/>
+                  </a:lnTo>
+                  <a:lnTo>
+                    <a:pt x="6804139" y="2963410"/>
+                  </a:lnTo>
+                  <a:lnTo>
+                    <a:pt x="6732517" y="2958760"/>
+                  </a:lnTo>
+                  <a:lnTo>
+                    <a:pt x="6660894" y="2954069"/>
+                  </a:lnTo>
+                  <a:lnTo>
+                    <a:pt x="6589272" y="2949335"/>
+                  </a:lnTo>
+                  <a:lnTo>
+                    <a:pt x="6517649" y="2944560"/>
+                  </a:lnTo>
+                  <a:lnTo>
+                    <a:pt x="6446027" y="2939741"/>
+                  </a:lnTo>
+                  <a:lnTo>
+                    <a:pt x="6374404" y="2934880"/>
+                  </a:lnTo>
+                  <a:lnTo>
+                    <a:pt x="6302782" y="2929975"/>
+                  </a:lnTo>
+                  <a:lnTo>
+                    <a:pt x="6231159" y="2925027"/>
+                  </a:lnTo>
+                  <a:lnTo>
+                    <a:pt x="6159537" y="2920034"/>
+                  </a:lnTo>
+                  <a:lnTo>
+                    <a:pt x="6087914" y="2914996"/>
+                  </a:lnTo>
+                  <a:lnTo>
+                    <a:pt x="6016292" y="2909914"/>
+                  </a:lnTo>
+                  <a:lnTo>
+                    <a:pt x="5944669" y="2904786"/>
+                  </a:lnTo>
+                  <a:lnTo>
+                    <a:pt x="5873047" y="2899612"/>
+                  </a:lnTo>
+                  <a:lnTo>
+                    <a:pt x="5801424" y="2894392"/>
+                  </a:lnTo>
+                  <a:lnTo>
+                    <a:pt x="5729802" y="2889126"/>
+                  </a:lnTo>
+                  <a:lnTo>
+                    <a:pt x="5658179" y="2883812"/>
+                  </a:lnTo>
+                  <a:lnTo>
+                    <a:pt x="5586557" y="2878451"/>
+                  </a:lnTo>
+                  <a:lnTo>
+                    <a:pt x="5514934" y="2873042"/>
+                  </a:lnTo>
+                  <a:lnTo>
+                    <a:pt x="5443311" y="2867584"/>
+                  </a:lnTo>
+                  <a:lnTo>
+                    <a:pt x="5371689" y="2862078"/>
+                  </a:lnTo>
+                  <a:lnTo>
+                    <a:pt x="5300066" y="2856523"/>
+                  </a:lnTo>
+                  <a:lnTo>
+                    <a:pt x="5228444" y="2850918"/>
+                  </a:lnTo>
+                  <a:lnTo>
+                    <a:pt x="5156821" y="2845263"/>
+                  </a:lnTo>
+                  <a:lnTo>
+                    <a:pt x="5085199" y="2839557"/>
+                  </a:lnTo>
+                  <a:lnTo>
+                    <a:pt x="5013576" y="2833800"/>
+                  </a:lnTo>
+                  <a:lnTo>
+                    <a:pt x="4941954" y="2827992"/>
+                  </a:lnTo>
+                  <a:lnTo>
+                    <a:pt x="4870331" y="2822132"/>
+                  </a:lnTo>
+                  <a:lnTo>
+                    <a:pt x="4798709" y="2816220"/>
+                  </a:lnTo>
+                  <a:lnTo>
+                    <a:pt x="4727086" y="2810255"/>
+                  </a:lnTo>
+                  <a:lnTo>
+                    <a:pt x="4655464" y="2804236"/>
+                  </a:lnTo>
+                  <a:lnTo>
+                    <a:pt x="4583841" y="2798164"/>
+                  </a:lnTo>
+                  <a:lnTo>
+                    <a:pt x="4512219" y="2792038"/>
+                  </a:lnTo>
+                  <a:lnTo>
+                    <a:pt x="4440596" y="2785856"/>
+                  </a:lnTo>
+                  <a:lnTo>
+                    <a:pt x="4368974" y="2779620"/>
+                  </a:lnTo>
+                  <a:lnTo>
+                    <a:pt x="4297351" y="2773328"/>
+                  </a:lnTo>
+                  <a:lnTo>
+                    <a:pt x="4225729" y="2766979"/>
+                  </a:lnTo>
+                  <a:lnTo>
+                    <a:pt x="4154106" y="2760574"/>
+                  </a:lnTo>
+                  <a:lnTo>
+                    <a:pt x="4082483" y="2754112"/>
+                  </a:lnTo>
+                  <a:lnTo>
+                    <a:pt x="4010861" y="2747591"/>
+                  </a:lnTo>
+                  <a:lnTo>
+                    <a:pt x="3939238" y="2741013"/>
+                  </a:lnTo>
+                  <a:lnTo>
+                    <a:pt x="3867616" y="2734376"/>
+                  </a:lnTo>
+                  <a:lnTo>
+                    <a:pt x="3795993" y="2727679"/>
+                  </a:lnTo>
+                  <a:lnTo>
+                    <a:pt x="3724371" y="2720923"/>
+                  </a:lnTo>
+                  <a:lnTo>
+                    <a:pt x="3652748" y="2714106"/>
+                  </a:lnTo>
+                  <a:lnTo>
+                    <a:pt x="3581126" y="2707228"/>
+                  </a:lnTo>
+                  <a:lnTo>
+                    <a:pt x="3509503" y="2700289"/>
+                  </a:lnTo>
+                  <a:lnTo>
+                    <a:pt x="3437881" y="2693288"/>
+                  </a:lnTo>
+                  <a:lnTo>
+                    <a:pt x="3366258" y="2686224"/>
+                  </a:lnTo>
+                  <a:lnTo>
+                    <a:pt x="3294636" y="2679097"/>
+                  </a:lnTo>
+                  <a:lnTo>
+                    <a:pt x="3223013" y="2671907"/>
+                  </a:lnTo>
+                  <a:lnTo>
+                    <a:pt x="3151391" y="2664652"/>
+                  </a:lnTo>
+                  <a:lnTo>
+                    <a:pt x="3079768" y="2657333"/>
+                  </a:lnTo>
+                  <a:lnTo>
+                    <a:pt x="3008146" y="2679293"/>
+                  </a:lnTo>
+                  <a:lnTo>
+                    <a:pt x="2936523" y="2720244"/>
+                  </a:lnTo>
+                  <a:lnTo>
+                    <a:pt x="2864901" y="2759112"/>
+                  </a:lnTo>
+                  <a:lnTo>
+                    <a:pt x="2793278" y="2796000"/>
+                  </a:lnTo>
+                  <a:lnTo>
+                    <a:pt x="2721655" y="2831011"/>
+                  </a:lnTo>
+                  <a:lnTo>
+                    <a:pt x="2650033" y="2864240"/>
+                  </a:lnTo>
+                  <a:lnTo>
+                    <a:pt x="2578410" y="2895777"/>
+                  </a:lnTo>
+                  <a:lnTo>
+                    <a:pt x="2506788" y="2925708"/>
+                  </a:lnTo>
+                  <a:lnTo>
+                    <a:pt x="2435165" y="2954116"/>
+                  </a:lnTo>
+                  <a:lnTo>
+                    <a:pt x="2363543" y="2981078"/>
+                  </a:lnTo>
+                  <a:lnTo>
+                    <a:pt x="2291920" y="3006667"/>
+                  </a:lnTo>
+                  <a:lnTo>
+                    <a:pt x="2220298" y="3030953"/>
+                  </a:lnTo>
+                  <a:lnTo>
+                    <a:pt x="2148675" y="3054003"/>
+                  </a:lnTo>
+                  <a:lnTo>
+                    <a:pt x="2077053" y="3075880"/>
+                  </a:lnTo>
+                  <a:lnTo>
+                    <a:pt x="2005430" y="3096643"/>
+                  </a:lnTo>
+                  <a:lnTo>
+                    <a:pt x="1933808" y="3116349"/>
+                  </a:lnTo>
+                  <a:lnTo>
+                    <a:pt x="1862185" y="3135052"/>
+                  </a:lnTo>
+                  <a:lnTo>
+                    <a:pt x="1790563" y="3152803"/>
+                  </a:lnTo>
+                  <a:lnTo>
+                    <a:pt x="1718940" y="3169650"/>
+                  </a:lnTo>
+                  <a:lnTo>
+                    <a:pt x="1647318" y="3185640"/>
+                  </a:lnTo>
+                  <a:lnTo>
+                    <a:pt x="1575695" y="3200815"/>
+                  </a:lnTo>
+                  <a:lnTo>
+                    <a:pt x="1504073" y="3215218"/>
+                  </a:lnTo>
+                  <a:lnTo>
+                    <a:pt x="1432450" y="3228888"/>
+                  </a:lnTo>
+                  <a:lnTo>
+                    <a:pt x="1360827" y="3241862"/>
+                  </a:lnTo>
+                  <a:lnTo>
+                    <a:pt x="1289205" y="3254176"/>
+                  </a:lnTo>
+                  <a:lnTo>
+                    <a:pt x="1217582" y="3265862"/>
+                  </a:lnTo>
+                  <a:lnTo>
+                    <a:pt x="1145960" y="3276954"/>
+                  </a:lnTo>
+                  <a:lnTo>
+                    <a:pt x="1074337" y="3287481"/>
+                  </a:lnTo>
+                  <a:lnTo>
+                    <a:pt x="1002715" y="3297472"/>
+                  </a:lnTo>
+                  <a:lnTo>
+                    <a:pt x="931092" y="3306955"/>
+                  </a:lnTo>
+                  <a:lnTo>
+                    <a:pt x="859470" y="3315955"/>
+                  </a:lnTo>
+                  <a:lnTo>
+                    <a:pt x="787847" y="3324496"/>
+                  </a:lnTo>
+                  <a:lnTo>
+                    <a:pt x="716225" y="3332603"/>
+                  </a:lnTo>
+                  <a:lnTo>
+                    <a:pt x="644602" y="3340297"/>
+                  </a:lnTo>
+                  <a:lnTo>
+                    <a:pt x="572980" y="3347600"/>
+                  </a:lnTo>
+                  <a:lnTo>
+                    <a:pt x="501357" y="3354531"/>
+                  </a:lnTo>
+                  <a:lnTo>
+                    <a:pt x="429735" y="3361109"/>
+                  </a:lnTo>
+                  <a:lnTo>
+                    <a:pt x="358112" y="3367352"/>
+                  </a:lnTo>
+                  <a:lnTo>
+                    <a:pt x="286490" y="3373277"/>
+                  </a:lnTo>
+                  <a:lnTo>
+                    <a:pt x="214867" y="3378901"/>
+                  </a:lnTo>
+                  <a:lnTo>
+                    <a:pt x="143245" y="3384238"/>
+                  </a:lnTo>
+                  <a:lnTo>
+                    <a:pt x="71622" y="3389304"/>
+                  </a:lnTo>
+                  <a:lnTo>
+                    <a:pt x="0" y="3394111"/>
                   </a:lnTo>
                   <a:close/>
                 </a:path>
@@ -3681,225 +3681,225 @@
           </p:nvSpPr>
           <p:spPr>
             <a:xfrm>
-              <a:off x="1172049" y="1896563"/>
-              <a:ext cx="5017261" cy="2778421"/>
+              <a:off x="1172049" y="2073503"/>
+              <a:ext cx="5017261" cy="2649948"/>
             </a:xfrm>
             <a:custGeom>
               <a:avLst/>
               <a:pathLst>
-                <a:path w="5017261" h="2778421">
+                <a:path w="5017261" h="2649948">
                   <a:moveTo>
-                    <a:pt x="0" y="2382367"/>
+                    <a:pt x="0" y="2272207"/>
                   </a:moveTo>
                   <a:lnTo>
-                    <a:pt x="71622" y="2393618"/>
-                  </a:lnTo>
-                  <a:lnTo>
-                    <a:pt x="143245" y="2404769"/>
-                  </a:lnTo>
-                  <a:lnTo>
-                    <a:pt x="214867" y="2415822"/>
-                  </a:lnTo>
-                  <a:lnTo>
-                    <a:pt x="286490" y="2426776"/>
-                  </a:lnTo>
-                  <a:lnTo>
-                    <a:pt x="358112" y="2437634"/>
-                  </a:lnTo>
-                  <a:lnTo>
-                    <a:pt x="429735" y="2448395"/>
-                  </a:lnTo>
-                  <a:lnTo>
-                    <a:pt x="501357" y="2459062"/>
-                  </a:lnTo>
-                  <a:lnTo>
-                    <a:pt x="572980" y="2469633"/>
-                  </a:lnTo>
-                  <a:lnTo>
-                    <a:pt x="644602" y="2480111"/>
-                  </a:lnTo>
-                  <a:lnTo>
-                    <a:pt x="716225" y="2490496"/>
-                  </a:lnTo>
-                  <a:lnTo>
-                    <a:pt x="787847" y="2500790"/>
-                  </a:lnTo>
-                  <a:lnTo>
-                    <a:pt x="859470" y="2510992"/>
-                  </a:lnTo>
-                  <a:lnTo>
-                    <a:pt x="931092" y="2521103"/>
-                  </a:lnTo>
-                  <a:lnTo>
-                    <a:pt x="1002715" y="2531126"/>
-                  </a:lnTo>
-                  <a:lnTo>
-                    <a:pt x="1074337" y="2541059"/>
-                  </a:lnTo>
-                  <a:lnTo>
-                    <a:pt x="1145960" y="2550904"/>
-                  </a:lnTo>
-                  <a:lnTo>
-                    <a:pt x="1217582" y="2560663"/>
-                  </a:lnTo>
-                  <a:lnTo>
-                    <a:pt x="1289205" y="2570334"/>
-                  </a:lnTo>
-                  <a:lnTo>
-                    <a:pt x="1360827" y="2579920"/>
-                  </a:lnTo>
-                  <a:lnTo>
-                    <a:pt x="1432450" y="2589422"/>
-                  </a:lnTo>
-                  <a:lnTo>
-                    <a:pt x="1504073" y="2598839"/>
-                  </a:lnTo>
-                  <a:lnTo>
-                    <a:pt x="1575695" y="2608172"/>
-                  </a:lnTo>
-                  <a:lnTo>
-                    <a:pt x="1647318" y="2617423"/>
-                  </a:lnTo>
-                  <a:lnTo>
-                    <a:pt x="1718940" y="2626592"/>
-                  </a:lnTo>
-                  <a:lnTo>
-                    <a:pt x="1790563" y="2635680"/>
-                  </a:lnTo>
-                  <a:lnTo>
-                    <a:pt x="1862185" y="2644687"/>
-                  </a:lnTo>
-                  <a:lnTo>
-                    <a:pt x="1933808" y="2653615"/>
-                  </a:lnTo>
-                  <a:lnTo>
-                    <a:pt x="2005430" y="2662463"/>
-                  </a:lnTo>
-                  <a:lnTo>
-                    <a:pt x="2077053" y="2671234"/>
-                  </a:lnTo>
-                  <a:lnTo>
-                    <a:pt x="2148675" y="2679926"/>
-                  </a:lnTo>
-                  <a:lnTo>
-                    <a:pt x="2220298" y="2688541"/>
-                  </a:lnTo>
-                  <a:lnTo>
-                    <a:pt x="2291920" y="2697081"/>
-                  </a:lnTo>
-                  <a:lnTo>
-                    <a:pt x="2363543" y="2705544"/>
-                  </a:lnTo>
-                  <a:lnTo>
-                    <a:pt x="2435165" y="2713933"/>
-                  </a:lnTo>
-                  <a:lnTo>
-                    <a:pt x="2506788" y="2722247"/>
-                  </a:lnTo>
-                  <a:lnTo>
-                    <a:pt x="2578410" y="2730487"/>
-                  </a:lnTo>
-                  <a:lnTo>
-                    <a:pt x="2650033" y="2738655"/>
-                  </a:lnTo>
-                  <a:lnTo>
-                    <a:pt x="2721655" y="2746750"/>
-                  </a:lnTo>
-                  <a:lnTo>
-                    <a:pt x="2793278" y="2754774"/>
-                  </a:lnTo>
-                  <a:lnTo>
-                    <a:pt x="2864901" y="2762726"/>
-                  </a:lnTo>
-                  <a:lnTo>
-                    <a:pt x="2936523" y="2770608"/>
-                  </a:lnTo>
-                  <a:lnTo>
-                    <a:pt x="3008146" y="2778421"/>
-                  </a:lnTo>
-                  <a:lnTo>
-                    <a:pt x="3079768" y="2763948"/>
-                  </a:lnTo>
-                  <a:lnTo>
-                    <a:pt x="3151391" y="2716281"/>
-                  </a:lnTo>
-                  <a:lnTo>
-                    <a:pt x="3223013" y="2666057"/>
-                  </a:lnTo>
-                  <a:lnTo>
-                    <a:pt x="3294636" y="2613140"/>
-                  </a:lnTo>
-                  <a:lnTo>
-                    <a:pt x="3366258" y="2557384"/>
-                  </a:lnTo>
-                  <a:lnTo>
-                    <a:pt x="3437881" y="2498637"/>
-                  </a:lnTo>
-                  <a:lnTo>
-                    <a:pt x="3509503" y="2436740"/>
-                  </a:lnTo>
-                  <a:lnTo>
-                    <a:pt x="3581126" y="2371523"/>
-                  </a:lnTo>
-                  <a:lnTo>
-                    <a:pt x="3652748" y="2302807"/>
-                  </a:lnTo>
-                  <a:lnTo>
-                    <a:pt x="3724371" y="2230406"/>
-                  </a:lnTo>
-                  <a:lnTo>
-                    <a:pt x="3795993" y="2154121"/>
-                  </a:lnTo>
-                  <a:lnTo>
-                    <a:pt x="3867616" y="2073745"/>
-                  </a:lnTo>
-                  <a:lnTo>
-                    <a:pt x="3939238" y="1989058"/>
-                  </a:lnTo>
-                  <a:lnTo>
-                    <a:pt x="4010861" y="1899828"/>
-                  </a:lnTo>
-                  <a:lnTo>
-                    <a:pt x="4082483" y="1805812"/>
-                  </a:lnTo>
-                  <a:lnTo>
-                    <a:pt x="4154106" y="1706753"/>
-                  </a:lnTo>
-                  <a:lnTo>
-                    <a:pt x="4225729" y="1602382"/>
-                  </a:lnTo>
-                  <a:lnTo>
-                    <a:pt x="4297351" y="1492412"/>
-                  </a:lnTo>
-                  <a:lnTo>
-                    <a:pt x="4368974" y="1376543"/>
-                  </a:lnTo>
-                  <a:lnTo>
-                    <a:pt x="4440596" y="1254460"/>
-                  </a:lnTo>
-                  <a:lnTo>
-                    <a:pt x="4512219" y="1125829"/>
-                  </a:lnTo>
-                  <a:lnTo>
-                    <a:pt x="4583841" y="990298"/>
-                  </a:lnTo>
-                  <a:lnTo>
-                    <a:pt x="4655464" y="847498"/>
-                  </a:lnTo>
-                  <a:lnTo>
-                    <a:pt x="4727086" y="697038"/>
-                  </a:lnTo>
-                  <a:lnTo>
-                    <a:pt x="4798709" y="538508"/>
-                  </a:lnTo>
-                  <a:lnTo>
-                    <a:pt x="4870331" y="371475"/>
-                  </a:lnTo>
-                  <a:lnTo>
-                    <a:pt x="4941954" y="195483"/>
-                  </a:lnTo>
-                  <a:lnTo>
-                    <a:pt x="5013576" y="10051"/>
+                    <a:pt x="71622" y="2282938"/>
+                  </a:lnTo>
+                  <a:lnTo>
+                    <a:pt x="143245" y="2293574"/>
+                  </a:lnTo>
+                  <a:lnTo>
+                    <a:pt x="214867" y="2304115"/>
+                  </a:lnTo>
+                  <a:lnTo>
+                    <a:pt x="286490" y="2314563"/>
+                  </a:lnTo>
+                  <a:lnTo>
+                    <a:pt x="358112" y="2324919"/>
+                  </a:lnTo>
+                  <a:lnTo>
+                    <a:pt x="429735" y="2335183"/>
+                  </a:lnTo>
+                  <a:lnTo>
+                    <a:pt x="501357" y="2345355"/>
+                  </a:lnTo>
+                  <a:lnTo>
+                    <a:pt x="572980" y="2355438"/>
+                  </a:lnTo>
+                  <a:lnTo>
+                    <a:pt x="644602" y="2365432"/>
+                  </a:lnTo>
+                  <a:lnTo>
+                    <a:pt x="716225" y="2375337"/>
+                  </a:lnTo>
+                  <a:lnTo>
+                    <a:pt x="787847" y="2385154"/>
+                  </a:lnTo>
+                  <a:lnTo>
+                    <a:pt x="859470" y="2394884"/>
+                  </a:lnTo>
+                  <a:lnTo>
+                    <a:pt x="931092" y="2404529"/>
+                  </a:lnTo>
+                  <a:lnTo>
+                    <a:pt x="1002715" y="2414087"/>
+                  </a:lnTo>
+                  <a:lnTo>
+                    <a:pt x="1074337" y="2423561"/>
+                  </a:lnTo>
+                  <a:lnTo>
+                    <a:pt x="1145960" y="2432951"/>
+                  </a:lnTo>
+                  <a:lnTo>
+                    <a:pt x="1217582" y="2442258"/>
+                  </a:lnTo>
+                  <a:lnTo>
+                    <a:pt x="1289205" y="2451483"/>
+                  </a:lnTo>
+                  <a:lnTo>
+                    <a:pt x="1360827" y="2460626"/>
+                  </a:lnTo>
+                  <a:lnTo>
+                    <a:pt x="1432450" y="2469688"/>
+                  </a:lnTo>
+                  <a:lnTo>
+                    <a:pt x="1504073" y="2478669"/>
+                  </a:lnTo>
+                  <a:lnTo>
+                    <a:pt x="1575695" y="2487571"/>
+                  </a:lnTo>
+                  <a:lnTo>
+                    <a:pt x="1647318" y="2496395"/>
+                  </a:lnTo>
+                  <a:lnTo>
+                    <a:pt x="1718940" y="2505140"/>
+                  </a:lnTo>
+                  <a:lnTo>
+                    <a:pt x="1790563" y="2513807"/>
+                  </a:lnTo>
+                  <a:lnTo>
+                    <a:pt x="1862185" y="2522398"/>
+                  </a:lnTo>
+                  <a:lnTo>
+                    <a:pt x="1933808" y="2530913"/>
+                  </a:lnTo>
+                  <a:lnTo>
+                    <a:pt x="2005430" y="2539352"/>
+                  </a:lnTo>
+                  <a:lnTo>
+                    <a:pt x="2077053" y="2547717"/>
+                  </a:lnTo>
+                  <a:lnTo>
+                    <a:pt x="2148675" y="2556007"/>
+                  </a:lnTo>
+                  <a:lnTo>
+                    <a:pt x="2220298" y="2564224"/>
+                  </a:lnTo>
+                  <a:lnTo>
+                    <a:pt x="2291920" y="2572369"/>
+                  </a:lnTo>
+                  <a:lnTo>
+                    <a:pt x="2363543" y="2580441"/>
+                  </a:lnTo>
+                  <a:lnTo>
+                    <a:pt x="2435165" y="2588441"/>
+                  </a:lnTo>
+                  <a:lnTo>
+                    <a:pt x="2506788" y="2596371"/>
+                  </a:lnTo>
+                  <a:lnTo>
+                    <a:pt x="2578410" y="2604231"/>
+                  </a:lnTo>
+                  <a:lnTo>
+                    <a:pt x="2650033" y="2612021"/>
+                  </a:lnTo>
+                  <a:lnTo>
+                    <a:pt x="2721655" y="2619742"/>
+                  </a:lnTo>
+                  <a:lnTo>
+                    <a:pt x="2793278" y="2627394"/>
+                  </a:lnTo>
+                  <a:lnTo>
+                    <a:pt x="2864901" y="2634979"/>
+                  </a:lnTo>
+                  <a:lnTo>
+                    <a:pt x="2936523" y="2642497"/>
+                  </a:lnTo>
+                  <a:lnTo>
+                    <a:pt x="3008146" y="2649948"/>
+                  </a:lnTo>
+                  <a:lnTo>
+                    <a:pt x="3079768" y="2636144"/>
+                  </a:lnTo>
+                  <a:lnTo>
+                    <a:pt x="3151391" y="2590681"/>
+                  </a:lnTo>
+                  <a:lnTo>
+                    <a:pt x="3223013" y="2542780"/>
+                  </a:lnTo>
+                  <a:lnTo>
+                    <a:pt x="3294636" y="2492309"/>
+                  </a:lnTo>
+                  <a:lnTo>
+                    <a:pt x="3366258" y="2439131"/>
+                  </a:lnTo>
+                  <a:lnTo>
+                    <a:pt x="3437881" y="2383101"/>
+                  </a:lnTo>
+                  <a:lnTo>
+                    <a:pt x="3509503" y="2324066"/>
+                  </a:lnTo>
+                  <a:lnTo>
+                    <a:pt x="3581126" y="2261864"/>
+                  </a:lnTo>
+                  <a:lnTo>
+                    <a:pt x="3652748" y="2196326"/>
+                  </a:lnTo>
+                  <a:lnTo>
+                    <a:pt x="3724371" y="2127273"/>
+                  </a:lnTo>
+                  <a:lnTo>
+                    <a:pt x="3795993" y="2054515"/>
+                  </a:lnTo>
+                  <a:lnTo>
+                    <a:pt x="3867616" y="1977856"/>
+                  </a:lnTo>
+                  <a:lnTo>
+                    <a:pt x="3939238" y="1897084"/>
+                  </a:lnTo>
+                  <a:lnTo>
+                    <a:pt x="4010861" y="1811980"/>
+                  </a:lnTo>
+                  <a:lnTo>
+                    <a:pt x="4082483" y="1722312"/>
+                  </a:lnTo>
+                  <a:lnTo>
+                    <a:pt x="4154106" y="1627834"/>
+                  </a:lnTo>
+                  <a:lnTo>
+                    <a:pt x="4225729" y="1528288"/>
+                  </a:lnTo>
+                  <a:lnTo>
+                    <a:pt x="4297351" y="1423403"/>
+                  </a:lnTo>
+                  <a:lnTo>
+                    <a:pt x="4368974" y="1312892"/>
+                  </a:lnTo>
+                  <a:lnTo>
+                    <a:pt x="4440596" y="1196454"/>
+                  </a:lnTo>
+                  <a:lnTo>
+                    <a:pt x="4512219" y="1073771"/>
+                  </a:lnTo>
+                  <a:lnTo>
+                    <a:pt x="4583841" y="944507"/>
+                  </a:lnTo>
+                  <a:lnTo>
+                    <a:pt x="4655464" y="808310"/>
+                  </a:lnTo>
+                  <a:lnTo>
+                    <a:pt x="4727086" y="664807"/>
+                  </a:lnTo>
+                  <a:lnTo>
+                    <a:pt x="4798709" y="513608"/>
+                  </a:lnTo>
+                  <a:lnTo>
+                    <a:pt x="4870331" y="354298"/>
+                  </a:lnTo>
+                  <a:lnTo>
+                    <a:pt x="4941954" y="186444"/>
+                  </a:lnTo>
+                  <a:lnTo>
+                    <a:pt x="5013576" y="9586"/>
                   </a:lnTo>
                   <a:lnTo>
                     <a:pt x="5017261" y="0"/>
@@ -3922,312 +3922,312 @@
           </p:nvSpPr>
           <p:spPr>
             <a:xfrm>
-              <a:off x="1172049" y="4682727"/>
-              <a:ext cx="7090630" cy="772498"/>
+              <a:off x="1172049" y="4730836"/>
+              <a:ext cx="7090630" cy="736778"/>
             </a:xfrm>
             <a:custGeom>
               <a:avLst/>
               <a:pathLst>
-                <a:path w="7090630" h="772498">
+                <a:path w="7090630" h="736778">
                   <a:moveTo>
-                    <a:pt x="7090630" y="339989"/>
+                    <a:pt x="7090630" y="324268"/>
                   </a:moveTo>
                   <a:lnTo>
-                    <a:pt x="7019007" y="335284"/>
-                  </a:lnTo>
-                  <a:lnTo>
-                    <a:pt x="6947385" y="330537"/>
-                  </a:lnTo>
-                  <a:lnTo>
-                    <a:pt x="6875762" y="325748"/>
-                  </a:lnTo>
-                  <a:lnTo>
-                    <a:pt x="6804139" y="320916"/>
-                  </a:lnTo>
-                  <a:lnTo>
-                    <a:pt x="6732517" y="316041"/>
-                  </a:lnTo>
-                  <a:lnTo>
-                    <a:pt x="6660894" y="311122"/>
-                  </a:lnTo>
-                  <a:lnTo>
-                    <a:pt x="6589272" y="306159"/>
-                  </a:lnTo>
-                  <a:lnTo>
-                    <a:pt x="6517649" y="301152"/>
-                  </a:lnTo>
-                  <a:lnTo>
-                    <a:pt x="6446027" y="296100"/>
-                  </a:lnTo>
-                  <a:lnTo>
-                    <a:pt x="6374404" y="291003"/>
-                  </a:lnTo>
-                  <a:lnTo>
-                    <a:pt x="6302782" y="285860"/>
-                  </a:lnTo>
-                  <a:lnTo>
-                    <a:pt x="6231159" y="280672"/>
-                  </a:lnTo>
-                  <a:lnTo>
-                    <a:pt x="6159537" y="275437"/>
-                  </a:lnTo>
-                  <a:lnTo>
-                    <a:pt x="6087914" y="270155"/>
-                  </a:lnTo>
-                  <a:lnTo>
-                    <a:pt x="6016292" y="264826"/>
-                  </a:lnTo>
-                  <a:lnTo>
-                    <a:pt x="5944669" y="259450"/>
-                  </a:lnTo>
-                  <a:lnTo>
-                    <a:pt x="5873047" y="254025"/>
-                  </a:lnTo>
-                  <a:lnTo>
-                    <a:pt x="5801424" y="248552"/>
-                  </a:lnTo>
-                  <a:lnTo>
-                    <a:pt x="5729802" y="243030"/>
-                  </a:lnTo>
-                  <a:lnTo>
-                    <a:pt x="5658179" y="237459"/>
-                  </a:lnTo>
-                  <a:lnTo>
-                    <a:pt x="5586557" y="231838"/>
-                  </a:lnTo>
-                  <a:lnTo>
-                    <a:pt x="5514934" y="226167"/>
-                  </a:lnTo>
-                  <a:lnTo>
-                    <a:pt x="5443311" y="220445"/>
-                  </a:lnTo>
-                  <a:lnTo>
-                    <a:pt x="5371689" y="214672"/>
-                  </a:lnTo>
-                  <a:lnTo>
-                    <a:pt x="5300066" y="208847"/>
-                  </a:lnTo>
-                  <a:lnTo>
-                    <a:pt x="5228444" y="202970"/>
-                  </a:lnTo>
-                  <a:lnTo>
-                    <a:pt x="5156821" y="197041"/>
-                  </a:lnTo>
-                  <a:lnTo>
-                    <a:pt x="5085199" y="191059"/>
-                  </a:lnTo>
-                  <a:lnTo>
-                    <a:pt x="5013576" y="185023"/>
-                  </a:lnTo>
-                  <a:lnTo>
-                    <a:pt x="4941954" y="178933"/>
-                  </a:lnTo>
-                  <a:lnTo>
-                    <a:pt x="4870331" y="172789"/>
-                  </a:lnTo>
-                  <a:lnTo>
-                    <a:pt x="4798709" y="166590"/>
-                  </a:lnTo>
-                  <a:lnTo>
-                    <a:pt x="4727086" y="160336"/>
-                  </a:lnTo>
-                  <a:lnTo>
-                    <a:pt x="4655464" y="154026"/>
-                  </a:lnTo>
-                  <a:lnTo>
-                    <a:pt x="4583841" y="147659"/>
-                  </a:lnTo>
-                  <a:lnTo>
-                    <a:pt x="4512219" y="141235"/>
-                  </a:lnTo>
-                  <a:lnTo>
-                    <a:pt x="4440596" y="134754"/>
-                  </a:lnTo>
-                  <a:lnTo>
-                    <a:pt x="4368974" y="128216"/>
-                  </a:lnTo>
-                  <a:lnTo>
-                    <a:pt x="4297351" y="121618"/>
-                  </a:lnTo>
-                  <a:lnTo>
-                    <a:pt x="4225729" y="114962"/>
-                  </a:lnTo>
-                  <a:lnTo>
-                    <a:pt x="4154106" y="108246"/>
-                  </a:lnTo>
-                  <a:lnTo>
-                    <a:pt x="4082483" y="101471"/>
-                  </a:lnTo>
-                  <a:lnTo>
-                    <a:pt x="4010861" y="94634"/>
-                  </a:lnTo>
-                  <a:lnTo>
-                    <a:pt x="3939238" y="87737"/>
-                  </a:lnTo>
-                  <a:lnTo>
-                    <a:pt x="3867616" y="80778"/>
-                  </a:lnTo>
-                  <a:lnTo>
-                    <a:pt x="3795993" y="73757"/>
-                  </a:lnTo>
-                  <a:lnTo>
-                    <a:pt x="3724371" y="66673"/>
-                  </a:lnTo>
-                  <a:lnTo>
-                    <a:pt x="3652748" y="59525"/>
-                  </a:lnTo>
-                  <a:lnTo>
-                    <a:pt x="3581126" y="52314"/>
-                  </a:lnTo>
-                  <a:lnTo>
-                    <a:pt x="3509503" y="45039"/>
-                  </a:lnTo>
-                  <a:lnTo>
-                    <a:pt x="3437881" y="37698"/>
-                  </a:lnTo>
-                  <a:lnTo>
-                    <a:pt x="3366258" y="30292"/>
-                  </a:lnTo>
-                  <a:lnTo>
-                    <a:pt x="3294636" y="22820"/>
-                  </a:lnTo>
-                  <a:lnTo>
-                    <a:pt x="3223013" y="15280"/>
-                  </a:lnTo>
-                  <a:lnTo>
-                    <a:pt x="3151391" y="7674"/>
+                    <a:pt x="7019007" y="319781"/>
+                  </a:lnTo>
+                  <a:lnTo>
+                    <a:pt x="6947385" y="315253"/>
+                  </a:lnTo>
+                  <a:lnTo>
+                    <a:pt x="6875762" y="310686"/>
+                  </a:lnTo>
+                  <a:lnTo>
+                    <a:pt x="6804139" y="306077"/>
+                  </a:lnTo>
+                  <a:lnTo>
+                    <a:pt x="6732517" y="301427"/>
+                  </a:lnTo>
+                  <a:lnTo>
+                    <a:pt x="6660894" y="296736"/>
+                  </a:lnTo>
+                  <a:lnTo>
+                    <a:pt x="6589272" y="292002"/>
+                  </a:lnTo>
+                  <a:lnTo>
+                    <a:pt x="6517649" y="287227"/>
+                  </a:lnTo>
+                  <a:lnTo>
+                    <a:pt x="6446027" y="282408"/>
+                  </a:lnTo>
+                  <a:lnTo>
+                    <a:pt x="6374404" y="277547"/>
+                  </a:lnTo>
+                  <a:lnTo>
+                    <a:pt x="6302782" y="272642"/>
+                  </a:lnTo>
+                  <a:lnTo>
+                    <a:pt x="6231159" y="267694"/>
+                  </a:lnTo>
+                  <a:lnTo>
+                    <a:pt x="6159537" y="262701"/>
+                  </a:lnTo>
+                  <a:lnTo>
+                    <a:pt x="6087914" y="257663"/>
+                  </a:lnTo>
+                  <a:lnTo>
+                    <a:pt x="6016292" y="252581"/>
+                  </a:lnTo>
+                  <a:lnTo>
+                    <a:pt x="5944669" y="247453"/>
+                  </a:lnTo>
+                  <a:lnTo>
+                    <a:pt x="5873047" y="242279"/>
+                  </a:lnTo>
+                  <a:lnTo>
+                    <a:pt x="5801424" y="237059"/>
+                  </a:lnTo>
+                  <a:lnTo>
+                    <a:pt x="5729802" y="231793"/>
+                  </a:lnTo>
+                  <a:lnTo>
+                    <a:pt x="5658179" y="226479"/>
+                  </a:lnTo>
+                  <a:lnTo>
+                    <a:pt x="5586557" y="221118"/>
+                  </a:lnTo>
+                  <a:lnTo>
+                    <a:pt x="5514934" y="215709"/>
+                  </a:lnTo>
+                  <a:lnTo>
+                    <a:pt x="5443311" y="210251"/>
+                  </a:lnTo>
+                  <a:lnTo>
+                    <a:pt x="5371689" y="204745"/>
+                  </a:lnTo>
+                  <a:lnTo>
+                    <a:pt x="5300066" y="199190"/>
+                  </a:lnTo>
+                  <a:lnTo>
+                    <a:pt x="5228444" y="193585"/>
+                  </a:lnTo>
+                  <a:lnTo>
+                    <a:pt x="5156821" y="187930"/>
+                  </a:lnTo>
+                  <a:lnTo>
+                    <a:pt x="5085199" y="182224"/>
+                  </a:lnTo>
+                  <a:lnTo>
+                    <a:pt x="5013576" y="176467"/>
+                  </a:lnTo>
+                  <a:lnTo>
+                    <a:pt x="4941954" y="170659"/>
+                  </a:lnTo>
+                  <a:lnTo>
+                    <a:pt x="4870331" y="164799"/>
+                  </a:lnTo>
+                  <a:lnTo>
+                    <a:pt x="4798709" y="158887"/>
+                  </a:lnTo>
+                  <a:lnTo>
+                    <a:pt x="4727086" y="152922"/>
+                  </a:lnTo>
+                  <a:lnTo>
+                    <a:pt x="4655464" y="146903"/>
+                  </a:lnTo>
+                  <a:lnTo>
+                    <a:pt x="4583841" y="140831"/>
+                  </a:lnTo>
+                  <a:lnTo>
+                    <a:pt x="4512219" y="134705"/>
+                  </a:lnTo>
+                  <a:lnTo>
+                    <a:pt x="4440596" y="128523"/>
+                  </a:lnTo>
+                  <a:lnTo>
+                    <a:pt x="4368974" y="122287"/>
+                  </a:lnTo>
+                  <a:lnTo>
+                    <a:pt x="4297351" y="115995"/>
+                  </a:lnTo>
+                  <a:lnTo>
+                    <a:pt x="4225729" y="109646"/>
+                  </a:lnTo>
+                  <a:lnTo>
+                    <a:pt x="4154106" y="103241"/>
+                  </a:lnTo>
+                  <a:lnTo>
+                    <a:pt x="4082483" y="96779"/>
+                  </a:lnTo>
+                  <a:lnTo>
+                    <a:pt x="4010861" y="90258"/>
+                  </a:lnTo>
+                  <a:lnTo>
+                    <a:pt x="3939238" y="83680"/>
+                  </a:lnTo>
+                  <a:lnTo>
+                    <a:pt x="3867616" y="77043"/>
+                  </a:lnTo>
+                  <a:lnTo>
+                    <a:pt x="3795993" y="70346"/>
+                  </a:lnTo>
+                  <a:lnTo>
+                    <a:pt x="3724371" y="63590"/>
+                  </a:lnTo>
+                  <a:lnTo>
+                    <a:pt x="3652748" y="56773"/>
+                  </a:lnTo>
+                  <a:lnTo>
+                    <a:pt x="3581126" y="49895"/>
+                  </a:lnTo>
+                  <a:lnTo>
+                    <a:pt x="3509503" y="42956"/>
+                  </a:lnTo>
+                  <a:lnTo>
+                    <a:pt x="3437881" y="35955"/>
+                  </a:lnTo>
+                  <a:lnTo>
+                    <a:pt x="3366258" y="28891"/>
+                  </a:lnTo>
+                  <a:lnTo>
+                    <a:pt x="3294636" y="21764"/>
+                  </a:lnTo>
+                  <a:lnTo>
+                    <a:pt x="3223013" y="14574"/>
+                  </a:lnTo>
+                  <a:lnTo>
+                    <a:pt x="3151391" y="7319"/>
                   </a:lnTo>
                   <a:lnTo>
                     <a:pt x="3079768" y="0"/>
                   </a:lnTo>
                   <a:lnTo>
-                    <a:pt x="3008146" y="23024"/>
-                  </a:lnTo>
-                  <a:lnTo>
-                    <a:pt x="2936523" y="65961"/>
-                  </a:lnTo>
-                  <a:lnTo>
-                    <a:pt x="2864901" y="106713"/>
-                  </a:lnTo>
-                  <a:lnTo>
-                    <a:pt x="2793278" y="145390"/>
-                  </a:lnTo>
-                  <a:lnTo>
-                    <a:pt x="2721655" y="182098"/>
-                  </a:lnTo>
-                  <a:lnTo>
-                    <a:pt x="2650033" y="216938"/>
-                  </a:lnTo>
-                  <a:lnTo>
-                    <a:pt x="2578410" y="250004"/>
-                  </a:lnTo>
-                  <a:lnTo>
-                    <a:pt x="2506788" y="281386"/>
-                  </a:lnTo>
-                  <a:lnTo>
-                    <a:pt x="2435165" y="311171"/>
-                  </a:lnTo>
-                  <a:lnTo>
-                    <a:pt x="2363543" y="339440"/>
-                  </a:lnTo>
-                  <a:lnTo>
-                    <a:pt x="2291920" y="366270"/>
-                  </a:lnTo>
-                  <a:lnTo>
-                    <a:pt x="2220298" y="391734"/>
-                  </a:lnTo>
-                  <a:lnTo>
-                    <a:pt x="2148675" y="415901"/>
-                  </a:lnTo>
-                  <a:lnTo>
-                    <a:pt x="2077053" y="438839"/>
-                  </a:lnTo>
-                  <a:lnTo>
-                    <a:pt x="2005430" y="460608"/>
-                  </a:lnTo>
-                  <a:lnTo>
-                    <a:pt x="1933808" y="481270"/>
-                  </a:lnTo>
-                  <a:lnTo>
-                    <a:pt x="1862185" y="500880"/>
-                  </a:lnTo>
-                  <a:lnTo>
-                    <a:pt x="1790563" y="519491"/>
-                  </a:lnTo>
-                  <a:lnTo>
-                    <a:pt x="1718940" y="537155"/>
-                  </a:lnTo>
-                  <a:lnTo>
-                    <a:pt x="1647318" y="553920"/>
-                  </a:lnTo>
-                  <a:lnTo>
-                    <a:pt x="1575695" y="569831"/>
-                  </a:lnTo>
-                  <a:lnTo>
-                    <a:pt x="1504073" y="584932"/>
-                  </a:lnTo>
-                  <a:lnTo>
-                    <a:pt x="1432450" y="599265"/>
-                  </a:lnTo>
-                  <a:lnTo>
-                    <a:pt x="1360827" y="612868"/>
-                  </a:lnTo>
-                  <a:lnTo>
-                    <a:pt x="1289205" y="625778"/>
-                  </a:lnTo>
-                  <a:lnTo>
-                    <a:pt x="1217582" y="638032"/>
-                  </a:lnTo>
-                  <a:lnTo>
-                    <a:pt x="1145960" y="649661"/>
-                  </a:lnTo>
-                  <a:lnTo>
-                    <a:pt x="1074337" y="660699"/>
-                  </a:lnTo>
-                  <a:lnTo>
-                    <a:pt x="1002715" y="671174"/>
-                  </a:lnTo>
-                  <a:lnTo>
-                    <a:pt x="931092" y="681116"/>
-                  </a:lnTo>
-                  <a:lnTo>
-                    <a:pt x="859470" y="690553"/>
-                  </a:lnTo>
-                  <a:lnTo>
-                    <a:pt x="787847" y="699508"/>
-                  </a:lnTo>
-                  <a:lnTo>
-                    <a:pt x="716225" y="708008"/>
-                  </a:lnTo>
-                  <a:lnTo>
-                    <a:pt x="644602" y="716075"/>
-                  </a:lnTo>
-                  <a:lnTo>
-                    <a:pt x="572980" y="723732"/>
-                  </a:lnTo>
-                  <a:lnTo>
-                    <a:pt x="501357" y="730999"/>
-                  </a:lnTo>
-                  <a:lnTo>
-                    <a:pt x="429735" y="737896"/>
-                  </a:lnTo>
-                  <a:lnTo>
-                    <a:pt x="358112" y="744441"/>
-                  </a:lnTo>
-                  <a:lnTo>
-                    <a:pt x="286490" y="750654"/>
-                  </a:lnTo>
-                  <a:lnTo>
-                    <a:pt x="214867" y="756550"/>
-                  </a:lnTo>
-                  <a:lnTo>
-                    <a:pt x="143245" y="762146"/>
-                  </a:lnTo>
-                  <a:lnTo>
-                    <a:pt x="71622" y="767457"/>
-                  </a:lnTo>
-                  <a:lnTo>
-                    <a:pt x="0" y="772498"/>
+                    <a:pt x="3008146" y="21959"/>
+                  </a:lnTo>
+                  <a:lnTo>
+                    <a:pt x="2936523" y="62911"/>
+                  </a:lnTo>
+                  <a:lnTo>
+                    <a:pt x="2864901" y="101779"/>
+                  </a:lnTo>
+                  <a:lnTo>
+                    <a:pt x="2793278" y="138667"/>
+                  </a:lnTo>
+                  <a:lnTo>
+                    <a:pt x="2721655" y="173678"/>
+                  </a:lnTo>
+                  <a:lnTo>
+                    <a:pt x="2650033" y="206907"/>
+                  </a:lnTo>
+                  <a:lnTo>
+                    <a:pt x="2578410" y="238444"/>
+                  </a:lnTo>
+                  <a:lnTo>
+                    <a:pt x="2506788" y="268375"/>
+                  </a:lnTo>
+                  <a:lnTo>
+                    <a:pt x="2435165" y="296783"/>
+                  </a:lnTo>
+                  <a:lnTo>
+                    <a:pt x="2363543" y="323745"/>
+                  </a:lnTo>
+                  <a:lnTo>
+                    <a:pt x="2291920" y="349334"/>
+                  </a:lnTo>
+                  <a:lnTo>
+                    <a:pt x="2220298" y="373620"/>
+                  </a:lnTo>
+                  <a:lnTo>
+                    <a:pt x="2148675" y="396670"/>
+                  </a:lnTo>
+                  <a:lnTo>
+                    <a:pt x="2077053" y="418547"/>
+                  </a:lnTo>
+                  <a:lnTo>
+                    <a:pt x="2005430" y="439310"/>
+                  </a:lnTo>
+                  <a:lnTo>
+                    <a:pt x="1933808" y="459016"/>
+                  </a:lnTo>
+                  <a:lnTo>
+                    <a:pt x="1862185" y="477719"/>
+                  </a:lnTo>
+                  <a:lnTo>
+                    <a:pt x="1790563" y="495470"/>
+                  </a:lnTo>
+                  <a:lnTo>
+                    <a:pt x="1718940" y="512317"/>
+                  </a:lnTo>
+                  <a:lnTo>
+                    <a:pt x="1647318" y="528307"/>
+                  </a:lnTo>
+                  <a:lnTo>
+                    <a:pt x="1575695" y="543482"/>
+                  </a:lnTo>
+                  <a:lnTo>
+                    <a:pt x="1504073" y="557885"/>
+                  </a:lnTo>
+                  <a:lnTo>
+                    <a:pt x="1432450" y="571555"/>
+                  </a:lnTo>
+                  <a:lnTo>
+                    <a:pt x="1360827" y="584529"/>
+                  </a:lnTo>
+                  <a:lnTo>
+                    <a:pt x="1289205" y="596843"/>
+                  </a:lnTo>
+                  <a:lnTo>
+                    <a:pt x="1217582" y="608529"/>
+                  </a:lnTo>
+                  <a:lnTo>
+                    <a:pt x="1145960" y="619621"/>
+                  </a:lnTo>
+                  <a:lnTo>
+                    <a:pt x="1074337" y="630148"/>
+                  </a:lnTo>
+                  <a:lnTo>
+                    <a:pt x="1002715" y="640139"/>
+                  </a:lnTo>
+                  <a:lnTo>
+                    <a:pt x="931092" y="649622"/>
+                  </a:lnTo>
+                  <a:lnTo>
+                    <a:pt x="859470" y="658622"/>
+                  </a:lnTo>
+                  <a:lnTo>
+                    <a:pt x="787847" y="667163"/>
+                  </a:lnTo>
+                  <a:lnTo>
+                    <a:pt x="716225" y="675270"/>
+                  </a:lnTo>
+                  <a:lnTo>
+                    <a:pt x="644602" y="682964"/>
+                  </a:lnTo>
+                  <a:lnTo>
+                    <a:pt x="572980" y="690267"/>
+                  </a:lnTo>
+                  <a:lnTo>
+                    <a:pt x="501357" y="697198"/>
+                  </a:lnTo>
+                  <a:lnTo>
+                    <a:pt x="429735" y="703776"/>
+                  </a:lnTo>
+                  <a:lnTo>
+                    <a:pt x="358112" y="710019"/>
+                  </a:lnTo>
+                  <a:lnTo>
+                    <a:pt x="286490" y="715944"/>
+                  </a:lnTo>
+                  <a:lnTo>
+                    <a:pt x="214867" y="721568"/>
+                  </a:lnTo>
+                  <a:lnTo>
+                    <a:pt x="143245" y="726905"/>
+                  </a:lnTo>
+                  <a:lnTo>
+                    <a:pt x="71622" y="731970"/>
+                  </a:lnTo>
+                  <a:lnTo>
+                    <a:pt x="0" y="736778"/>
                   </a:lnTo>
                 </a:path>
               </a:pathLst>
@@ -4247,309 +4247,309 @@
           </p:nvSpPr>
           <p:spPr>
             <a:xfrm>
-              <a:off x="1172049" y="2595141"/>
-              <a:ext cx="7090630" cy="2608549"/>
+              <a:off x="1172049" y="2739779"/>
+              <a:ext cx="7090630" cy="2487931"/>
             </a:xfrm>
             <a:custGeom>
               <a:avLst/>
               <a:pathLst>
-                <a:path w="7090630" h="2608549">
+                <a:path w="7090630" h="2487931">
                   <a:moveTo>
-                    <a:pt x="0" y="2608549"/>
+                    <a:pt x="0" y="2487931"/>
                   </a:moveTo>
                   <a:lnTo>
-                    <a:pt x="71622" y="2600978"/>
-                  </a:lnTo>
-                  <a:lnTo>
-                    <a:pt x="143245" y="2593241"/>
-                  </a:lnTo>
-                  <a:lnTo>
-                    <a:pt x="214867" y="2585334"/>
-                  </a:lnTo>
-                  <a:lnTo>
-                    <a:pt x="286490" y="2577255"/>
-                  </a:lnTo>
-                  <a:lnTo>
-                    <a:pt x="358112" y="2568998"/>
-                  </a:lnTo>
-                  <a:lnTo>
-                    <a:pt x="429735" y="2560560"/>
-                  </a:lnTo>
-                  <a:lnTo>
-                    <a:pt x="501357" y="2551938"/>
-                  </a:lnTo>
-                  <a:lnTo>
-                    <a:pt x="572980" y="2543126"/>
-                  </a:lnTo>
-                  <a:lnTo>
-                    <a:pt x="644602" y="2534121"/>
-                  </a:lnTo>
-                  <a:lnTo>
-                    <a:pt x="716225" y="2524919"/>
-                  </a:lnTo>
-                  <a:lnTo>
-                    <a:pt x="787847" y="2515516"/>
-                  </a:lnTo>
-                  <a:lnTo>
-                    <a:pt x="859470" y="2505906"/>
-                  </a:lnTo>
-                  <a:lnTo>
-                    <a:pt x="931092" y="2496086"/>
-                  </a:lnTo>
-                  <a:lnTo>
-                    <a:pt x="1002715" y="2486050"/>
-                  </a:lnTo>
-                  <a:lnTo>
-                    <a:pt x="1074337" y="2475795"/>
-                  </a:lnTo>
-                  <a:lnTo>
-                    <a:pt x="1145960" y="2465315"/>
-                  </a:lnTo>
-                  <a:lnTo>
-                    <a:pt x="1217582" y="2454605"/>
-                  </a:lnTo>
-                  <a:lnTo>
-                    <a:pt x="1289205" y="2443661"/>
-                  </a:lnTo>
-                  <a:lnTo>
-                    <a:pt x="1360827" y="2432477"/>
-                  </a:lnTo>
-                  <a:lnTo>
-                    <a:pt x="1432450" y="2421048"/>
-                  </a:lnTo>
-                  <a:lnTo>
-                    <a:pt x="1504073" y="2409368"/>
-                  </a:lnTo>
-                  <a:lnTo>
-                    <a:pt x="1575695" y="2397432"/>
-                  </a:lnTo>
-                  <a:lnTo>
-                    <a:pt x="1647318" y="2385235"/>
-                  </a:lnTo>
-                  <a:lnTo>
-                    <a:pt x="1718940" y="2372771"/>
-                  </a:lnTo>
-                  <a:lnTo>
-                    <a:pt x="1790563" y="2360033"/>
-                  </a:lnTo>
-                  <a:lnTo>
-                    <a:pt x="1862185" y="2347017"/>
-                  </a:lnTo>
-                  <a:lnTo>
-                    <a:pt x="1933808" y="2333715"/>
-                  </a:lnTo>
-                  <a:lnTo>
-                    <a:pt x="2005430" y="2320121"/>
-                  </a:lnTo>
-                  <a:lnTo>
-                    <a:pt x="2077053" y="2306230"/>
-                  </a:lnTo>
-                  <a:lnTo>
-                    <a:pt x="2148675" y="2292035"/>
-                  </a:lnTo>
-                  <a:lnTo>
-                    <a:pt x="2220298" y="2277528"/>
-                  </a:lnTo>
-                  <a:lnTo>
-                    <a:pt x="2291920" y="2262703"/>
-                  </a:lnTo>
-                  <a:lnTo>
-                    <a:pt x="2363543" y="2247554"/>
-                  </a:lnTo>
-                  <a:lnTo>
-                    <a:pt x="2435165" y="2232073"/>
-                  </a:lnTo>
-                  <a:lnTo>
-                    <a:pt x="2506788" y="2216252"/>
-                  </a:lnTo>
-                  <a:lnTo>
-                    <a:pt x="2578410" y="2200085"/>
-                  </a:lnTo>
-                  <a:lnTo>
-                    <a:pt x="2650033" y="2183563"/>
-                  </a:lnTo>
-                  <a:lnTo>
-                    <a:pt x="2721655" y="2166680"/>
-                  </a:lnTo>
-                  <a:lnTo>
-                    <a:pt x="2793278" y="2149426"/>
-                  </a:lnTo>
-                  <a:lnTo>
-                    <a:pt x="2864901" y="2131795"/>
-                  </a:lnTo>
-                  <a:lnTo>
-                    <a:pt x="2936523" y="2113777"/>
-                  </a:lnTo>
-                  <a:lnTo>
-                    <a:pt x="3008146" y="2095364"/>
-                  </a:lnTo>
-                  <a:lnTo>
-                    <a:pt x="3079768" y="2076548"/>
-                  </a:lnTo>
-                  <a:lnTo>
-                    <a:pt x="3151391" y="2057320"/>
-                  </a:lnTo>
-                  <a:lnTo>
-                    <a:pt x="3223013" y="2037670"/>
-                  </a:lnTo>
-                  <a:lnTo>
-                    <a:pt x="3294636" y="2017590"/>
-                  </a:lnTo>
-                  <a:lnTo>
-                    <a:pt x="3366258" y="1997069"/>
-                  </a:lnTo>
-                  <a:lnTo>
-                    <a:pt x="3437881" y="1976099"/>
-                  </a:lnTo>
-                  <a:lnTo>
-                    <a:pt x="3509503" y="1954670"/>
-                  </a:lnTo>
-                  <a:lnTo>
-                    <a:pt x="3581126" y="1932770"/>
-                  </a:lnTo>
-                  <a:lnTo>
-                    <a:pt x="3652748" y="1910391"/>
-                  </a:lnTo>
-                  <a:lnTo>
-                    <a:pt x="3724371" y="1887522"/>
-                  </a:lnTo>
-                  <a:lnTo>
-                    <a:pt x="3795993" y="1864152"/>
-                  </a:lnTo>
-                  <a:lnTo>
-                    <a:pt x="3867616" y="1840269"/>
-                  </a:lnTo>
-                  <a:lnTo>
-                    <a:pt x="3939238" y="1815863"/>
-                  </a:lnTo>
-                  <a:lnTo>
-                    <a:pt x="4010861" y="1790922"/>
-                  </a:lnTo>
-                  <a:lnTo>
-                    <a:pt x="4082483" y="1765435"/>
-                  </a:lnTo>
-                  <a:lnTo>
-                    <a:pt x="4154106" y="1739389"/>
-                  </a:lnTo>
-                  <a:lnTo>
-                    <a:pt x="4225729" y="1712773"/>
-                  </a:lnTo>
-                  <a:lnTo>
-                    <a:pt x="4297351" y="1685573"/>
-                  </a:lnTo>
-                  <a:lnTo>
-                    <a:pt x="4368974" y="1657778"/>
-                  </a:lnTo>
-                  <a:lnTo>
-                    <a:pt x="4440596" y="1629373"/>
-                  </a:lnTo>
-                  <a:lnTo>
-                    <a:pt x="4512219" y="1600346"/>
-                  </a:lnTo>
-                  <a:lnTo>
-                    <a:pt x="4583841" y="1570683"/>
-                  </a:lnTo>
-                  <a:lnTo>
-                    <a:pt x="4655464" y="1540370"/>
-                  </a:lnTo>
-                  <a:lnTo>
-                    <a:pt x="4727086" y="1509392"/>
-                  </a:lnTo>
-                  <a:lnTo>
-                    <a:pt x="4798709" y="1477736"/>
-                  </a:lnTo>
-                  <a:lnTo>
-                    <a:pt x="4870331" y="1445386"/>
-                  </a:lnTo>
-                  <a:lnTo>
-                    <a:pt x="4941954" y="1412327"/>
-                  </a:lnTo>
-                  <a:lnTo>
-                    <a:pt x="5013576" y="1378544"/>
-                  </a:lnTo>
-                  <a:lnTo>
-                    <a:pt x="5085199" y="1344021"/>
-                  </a:lnTo>
-                  <a:lnTo>
-                    <a:pt x="5156821" y="1308741"/>
-                  </a:lnTo>
-                  <a:lnTo>
-                    <a:pt x="5228444" y="1272688"/>
-                  </a:lnTo>
-                  <a:lnTo>
-                    <a:pt x="5300066" y="1235845"/>
-                  </a:lnTo>
-                  <a:lnTo>
-                    <a:pt x="5371689" y="1198195"/>
-                  </a:lnTo>
-                  <a:lnTo>
-                    <a:pt x="5443311" y="1159719"/>
-                  </a:lnTo>
-                  <a:lnTo>
-                    <a:pt x="5514934" y="1120401"/>
-                  </a:lnTo>
-                  <a:lnTo>
-                    <a:pt x="5586557" y="1080221"/>
-                  </a:lnTo>
-                  <a:lnTo>
-                    <a:pt x="5658179" y="1039161"/>
-                  </a:lnTo>
-                  <a:lnTo>
-                    <a:pt x="5729802" y="997201"/>
-                  </a:lnTo>
-                  <a:lnTo>
-                    <a:pt x="5801424" y="954321"/>
-                  </a:lnTo>
-                  <a:lnTo>
-                    <a:pt x="5873047" y="910502"/>
-                  </a:lnTo>
-                  <a:lnTo>
-                    <a:pt x="5944669" y="865723"/>
-                  </a:lnTo>
-                  <a:lnTo>
-                    <a:pt x="6016292" y="819962"/>
-                  </a:lnTo>
-                  <a:lnTo>
-                    <a:pt x="6087914" y="773199"/>
-                  </a:lnTo>
-                  <a:lnTo>
-                    <a:pt x="6159537" y="725411"/>
-                  </a:lnTo>
-                  <a:lnTo>
-                    <a:pt x="6231159" y="676576"/>
-                  </a:lnTo>
-                  <a:lnTo>
-                    <a:pt x="6302782" y="626671"/>
-                  </a:lnTo>
-                  <a:lnTo>
-                    <a:pt x="6374404" y="575672"/>
-                  </a:lnTo>
-                  <a:lnTo>
-                    <a:pt x="6446027" y="523556"/>
-                  </a:lnTo>
-                  <a:lnTo>
-                    <a:pt x="6517649" y="470298"/>
-                  </a:lnTo>
-                  <a:lnTo>
-                    <a:pt x="6589272" y="415873"/>
-                  </a:lnTo>
-                  <a:lnTo>
-                    <a:pt x="6660894" y="360255"/>
-                  </a:lnTo>
-                  <a:lnTo>
-                    <a:pt x="6732517" y="303418"/>
-                  </a:lnTo>
-                  <a:lnTo>
-                    <a:pt x="6804139" y="245336"/>
-                  </a:lnTo>
-                  <a:lnTo>
-                    <a:pt x="6875762" y="185982"/>
-                  </a:lnTo>
-                  <a:lnTo>
-                    <a:pt x="6947385" y="125326"/>
-                  </a:lnTo>
-                  <a:lnTo>
-                    <a:pt x="7019007" y="63342"/>
+                    <a:pt x="71622" y="2480710"/>
+                  </a:lnTo>
+                  <a:lnTo>
+                    <a:pt x="143245" y="2473330"/>
+                  </a:lnTo>
+                  <a:lnTo>
+                    <a:pt x="214867" y="2465790"/>
+                  </a:lnTo>
+                  <a:lnTo>
+                    <a:pt x="286490" y="2458083"/>
+                  </a:lnTo>
+                  <a:lnTo>
+                    <a:pt x="358112" y="2450208"/>
+                  </a:lnTo>
+                  <a:lnTo>
+                    <a:pt x="429735" y="2442161"/>
+                  </a:lnTo>
+                  <a:lnTo>
+                    <a:pt x="501357" y="2433937"/>
+                  </a:lnTo>
+                  <a:lnTo>
+                    <a:pt x="572980" y="2425533"/>
+                  </a:lnTo>
+                  <a:lnTo>
+                    <a:pt x="644602" y="2416944"/>
+                  </a:lnTo>
+                  <a:lnTo>
+                    <a:pt x="716225" y="2408168"/>
+                  </a:lnTo>
+                  <a:lnTo>
+                    <a:pt x="787847" y="2399199"/>
+                  </a:lnTo>
+                  <a:lnTo>
+                    <a:pt x="859470" y="2390034"/>
+                  </a:lnTo>
+                  <a:lnTo>
+                    <a:pt x="931092" y="2380668"/>
+                  </a:lnTo>
+                  <a:lnTo>
+                    <a:pt x="1002715" y="2371096"/>
+                  </a:lnTo>
+                  <a:lnTo>
+                    <a:pt x="1074337" y="2361315"/>
+                  </a:lnTo>
+                  <a:lnTo>
+                    <a:pt x="1145960" y="2351320"/>
+                  </a:lnTo>
+                  <a:lnTo>
+                    <a:pt x="1217582" y="2341105"/>
+                  </a:lnTo>
+                  <a:lnTo>
+                    <a:pt x="1289205" y="2330667"/>
+                  </a:lnTo>
+                  <a:lnTo>
+                    <a:pt x="1360827" y="2320000"/>
+                  </a:lnTo>
+                  <a:lnTo>
+                    <a:pt x="1432450" y="2309099"/>
+                  </a:lnTo>
+                  <a:lnTo>
+                    <a:pt x="1504073" y="2297960"/>
+                  </a:lnTo>
+                  <a:lnTo>
+                    <a:pt x="1575695" y="2286576"/>
+                  </a:lnTo>
+                  <a:lnTo>
+                    <a:pt x="1647318" y="2274943"/>
+                  </a:lnTo>
+                  <a:lnTo>
+                    <a:pt x="1718940" y="2263055"/>
+                  </a:lnTo>
+                  <a:lnTo>
+                    <a:pt x="1790563" y="2250906"/>
+                  </a:lnTo>
+                  <a:lnTo>
+                    <a:pt x="1862185" y="2238491"/>
+                  </a:lnTo>
+                  <a:lnTo>
+                    <a:pt x="1933808" y="2225805"/>
+                  </a:lnTo>
+                  <a:lnTo>
+                    <a:pt x="2005430" y="2212840"/>
+                  </a:lnTo>
+                  <a:lnTo>
+                    <a:pt x="2077053" y="2199591"/>
+                  </a:lnTo>
+                  <a:lnTo>
+                    <a:pt x="2148675" y="2186052"/>
+                  </a:lnTo>
+                  <a:lnTo>
+                    <a:pt x="2220298" y="2172216"/>
+                  </a:lnTo>
+                  <a:lnTo>
+                    <a:pt x="2291920" y="2158077"/>
+                  </a:lnTo>
+                  <a:lnTo>
+                    <a:pt x="2363543" y="2143628"/>
+                  </a:lnTo>
+                  <a:lnTo>
+                    <a:pt x="2435165" y="2128863"/>
+                  </a:lnTo>
+                  <a:lnTo>
+                    <a:pt x="2506788" y="2113774"/>
+                  </a:lnTo>
+                  <a:lnTo>
+                    <a:pt x="2578410" y="2098354"/>
+                  </a:lnTo>
+                  <a:lnTo>
+                    <a:pt x="2650033" y="2082596"/>
+                  </a:lnTo>
+                  <a:lnTo>
+                    <a:pt x="2721655" y="2066493"/>
+                  </a:lnTo>
+                  <a:lnTo>
+                    <a:pt x="2793278" y="2050038"/>
+                  </a:lnTo>
+                  <a:lnTo>
+                    <a:pt x="2864901" y="2033222"/>
+                  </a:lnTo>
+                  <a:lnTo>
+                    <a:pt x="2936523" y="2016037"/>
+                  </a:lnTo>
+                  <a:lnTo>
+                    <a:pt x="3008146" y="1998475"/>
+                  </a:lnTo>
+                  <a:lnTo>
+                    <a:pt x="3079768" y="1980529"/>
+                  </a:lnTo>
+                  <a:lnTo>
+                    <a:pt x="3151391" y="1962190"/>
+                  </a:lnTo>
+                  <a:lnTo>
+                    <a:pt x="3223013" y="1943449"/>
+                  </a:lnTo>
+                  <a:lnTo>
+                    <a:pt x="3294636" y="1924297"/>
+                  </a:lnTo>
+                  <a:lnTo>
+                    <a:pt x="3366258" y="1904725"/>
+                  </a:lnTo>
+                  <a:lnTo>
+                    <a:pt x="3437881" y="1884725"/>
+                  </a:lnTo>
+                  <a:lnTo>
+                    <a:pt x="3509503" y="1864286"/>
+                  </a:lnTo>
+                  <a:lnTo>
+                    <a:pt x="3581126" y="1843400"/>
+                  </a:lnTo>
+                  <a:lnTo>
+                    <a:pt x="3652748" y="1822056"/>
+                  </a:lnTo>
+                  <a:lnTo>
+                    <a:pt x="3724371" y="1800244"/>
+                  </a:lnTo>
+                  <a:lnTo>
+                    <a:pt x="3795993" y="1777954"/>
+                  </a:lnTo>
+                  <a:lnTo>
+                    <a:pt x="3867616" y="1755176"/>
+                  </a:lnTo>
+                  <a:lnTo>
+                    <a:pt x="3939238" y="1731898"/>
+                  </a:lnTo>
+                  <a:lnTo>
+                    <a:pt x="4010861" y="1708111"/>
+                  </a:lnTo>
+                  <a:lnTo>
+                    <a:pt x="4082483" y="1683802"/>
+                  </a:lnTo>
+                  <a:lnTo>
+                    <a:pt x="4154106" y="1658961"/>
+                  </a:lnTo>
+                  <a:lnTo>
+                    <a:pt x="4225729" y="1633575"/>
+                  </a:lnTo>
+                  <a:lnTo>
+                    <a:pt x="4297351" y="1607633"/>
+                  </a:lnTo>
+                  <a:lnTo>
+                    <a:pt x="4368974" y="1581123"/>
+                  </a:lnTo>
+                  <a:lnTo>
+                    <a:pt x="4440596" y="1554031"/>
+                  </a:lnTo>
+                  <a:lnTo>
+                    <a:pt x="4512219" y="1526346"/>
+                  </a:lnTo>
+                  <a:lnTo>
+                    <a:pt x="4583841" y="1498055"/>
+                  </a:lnTo>
+                  <a:lnTo>
+                    <a:pt x="4655464" y="1469143"/>
+                  </a:lnTo>
+                  <a:lnTo>
+                    <a:pt x="4727086" y="1439598"/>
+                  </a:lnTo>
+                  <a:lnTo>
+                    <a:pt x="4798709" y="1409406"/>
+                  </a:lnTo>
+                  <a:lnTo>
+                    <a:pt x="4870331" y="1378552"/>
+                  </a:lnTo>
+                  <a:lnTo>
+                    <a:pt x="4941954" y="1347022"/>
+                  </a:lnTo>
+                  <a:lnTo>
+                    <a:pt x="5013576" y="1314801"/>
+                  </a:lnTo>
+                  <a:lnTo>
+                    <a:pt x="5085199" y="1281874"/>
+                  </a:lnTo>
+                  <a:lnTo>
+                    <a:pt x="5156821" y="1248225"/>
+                  </a:lnTo>
+                  <a:lnTo>
+                    <a:pt x="5228444" y="1213839"/>
+                  </a:lnTo>
+                  <a:lnTo>
+                    <a:pt x="5300066" y="1178700"/>
+                  </a:lnTo>
+                  <a:lnTo>
+                    <a:pt x="5371689" y="1142791"/>
+                  </a:lnTo>
+                  <a:lnTo>
+                    <a:pt x="5443311" y="1106094"/>
+                  </a:lnTo>
+                  <a:lnTo>
+                    <a:pt x="5514934" y="1068594"/>
+                  </a:lnTo>
+                  <a:lnTo>
+                    <a:pt x="5586557" y="1030272"/>
+                  </a:lnTo>
+                  <a:lnTo>
+                    <a:pt x="5658179" y="991110"/>
+                  </a:lnTo>
+                  <a:lnTo>
+                    <a:pt x="5729802" y="951091"/>
+                  </a:lnTo>
+                  <a:lnTo>
+                    <a:pt x="5801424" y="910194"/>
+                  </a:lnTo>
+                  <a:lnTo>
+                    <a:pt x="5873047" y="868401"/>
+                  </a:lnTo>
+                  <a:lnTo>
+                    <a:pt x="5944669" y="825692"/>
+                  </a:lnTo>
+                  <a:lnTo>
+                    <a:pt x="6016292" y="782048"/>
+                  </a:lnTo>
+                  <a:lnTo>
+                    <a:pt x="6087914" y="737447"/>
+                  </a:lnTo>
+                  <a:lnTo>
+                    <a:pt x="6159537" y="691868"/>
+                  </a:lnTo>
+                  <a:lnTo>
+                    <a:pt x="6231159" y="645291"/>
+                  </a:lnTo>
+                  <a:lnTo>
+                    <a:pt x="6302782" y="597694"/>
+                  </a:lnTo>
+                  <a:lnTo>
+                    <a:pt x="6374404" y="549053"/>
+                  </a:lnTo>
+                  <a:lnTo>
+                    <a:pt x="6446027" y="499347"/>
+                  </a:lnTo>
+                  <a:lnTo>
+                    <a:pt x="6517649" y="448551"/>
+                  </a:lnTo>
+                  <a:lnTo>
+                    <a:pt x="6589272" y="396643"/>
+                  </a:lnTo>
+                  <a:lnTo>
+                    <a:pt x="6660894" y="343597"/>
+                  </a:lnTo>
+                  <a:lnTo>
+                    <a:pt x="6732517" y="289388"/>
+                  </a:lnTo>
+                  <a:lnTo>
+                    <a:pt x="6804139" y="233992"/>
+                  </a:lnTo>
+                  <a:lnTo>
+                    <a:pt x="6875762" y="177382"/>
+                  </a:lnTo>
+                  <a:lnTo>
+                    <a:pt x="6947385" y="119531"/>
+                  </a:lnTo>
+                  <a:lnTo>
+                    <a:pt x="7019007" y="60413"/>
                   </a:lnTo>
                   <a:lnTo>
                     <a:pt x="7090630" y="0"/>
@@ -4581,7 +4581,7 @@
           </p:nvSpPr>
           <p:spPr>
             <a:xfrm>
-              <a:off x="817517" y="4679530"/>
+              <a:off x="817517" y="4727786"/>
               <a:ext cx="7799693" cy="0"/>
             </a:xfrm>
             <a:custGeom>
@@ -4624,15 +4624,15 @@
           </p:nvSpPr>
           <p:spPr>
             <a:xfrm>
-              <a:off x="4222163" y="1896563"/>
-              <a:ext cx="0" cy="3826579"/>
+              <a:off x="4222163" y="2073503"/>
+              <a:ext cx="0" cy="3649639"/>
             </a:xfrm>
             <a:custGeom>
               <a:avLst/>
               <a:pathLst>
-                <a:path w="0" h="3826579">
+                <a:path w="0" h="3649639">
                   <a:moveTo>
-                    <a:pt x="0" y="3826579"/>
+                    <a:pt x="0" y="3649639"/>
                   </a:moveTo>
                   <a:lnTo>
                     <a:pt x="0" y="0"/>
@@ -4667,7 +4667,7 @@
           </p:nvSpPr>
           <p:spPr>
             <a:xfrm>
-              <a:off x="692708" y="5509156"/>
+              <a:off x="692708" y="5517199"/>
               <a:ext cx="62179" cy="80101"/>
             </a:xfrm>
             <a:prstGeom prst="rect">
@@ -4713,7 +4713,7 @@
           </p:nvSpPr>
           <p:spPr>
             <a:xfrm>
-              <a:off x="692708" y="4639479"/>
+              <a:off x="692708" y="4687735"/>
               <a:ext cx="62179" cy="80101"/>
             </a:xfrm>
             <a:prstGeom prst="rect">
@@ -4759,7 +4759,7 @@
           </p:nvSpPr>
           <p:spPr>
             <a:xfrm>
-              <a:off x="692708" y="3769802"/>
+              <a:off x="692708" y="3858272"/>
               <a:ext cx="62179" cy="80101"/>
             </a:xfrm>
             <a:prstGeom prst="rect">
@@ -4805,7 +4805,7 @@
           </p:nvSpPr>
           <p:spPr>
             <a:xfrm>
-              <a:off x="692708" y="2900125"/>
+              <a:off x="692708" y="3028808"/>
               <a:ext cx="62179" cy="80101"/>
             </a:xfrm>
             <a:prstGeom prst="rect">
@@ -4851,7 +4851,7 @@
           </p:nvSpPr>
           <p:spPr>
             <a:xfrm>
-              <a:off x="692708" y="2030448"/>
+              <a:off x="692708" y="2199345"/>
               <a:ext cx="62179" cy="80101"/>
             </a:xfrm>
             <a:prstGeom prst="rect">
@@ -5219,7 +5219,7 @@
           </p:nvSpPr>
           <p:spPr>
             <a:xfrm rot="-5400000">
-              <a:off x="68446" y="3759743"/>
+              <a:off x="68446" y="3848213"/>
               <a:ext cx="1016904" cy="100218"/>
             </a:xfrm>
             <a:prstGeom prst="rect">
@@ -5260,6 +5260,52 @@
         <p:sp>
           <p:nvSpPr>
             <p:cNvPr id="43" name="tx43"/>
+            <p:cNvSpPr/>
+            <p:nvPr/>
+          </p:nvSpPr>
+          <p:spPr>
+            <a:xfrm>
+              <a:off x="817517" y="1896563"/>
+              <a:ext cx="4433376" cy="82021"/>
+            </a:xfrm>
+            <a:prstGeom prst="rect">
+              <a:avLst/>
+            </a:prstGeom>
+            <a:noFill/>
+          </p:spPr>
+          <p:txBody>
+            <a:bodyPr lIns="0" rIns="0" tIns="0" bIns="0" anchorCtr="1" anchor="ctr" wrap="none"/>
+            <a:lstStyle/>
+            <a:p>
+              <a:pPr algn="l" marL="0" marR="0" indent="0">
+                <a:lnSpc>
+                  <a:spcPts val="900"/>
+                </a:lnSpc>
+                <a:spcBef>
+                  <a:spcPts val="0"/>
+                </a:spcBef>
+                <a:spcAft>
+                  <a:spcPts val="0"/>
+                </a:spcAft>
+              </a:pPr>
+              <a:r>
+                <a:rPr sz="900">
+                  <a:solidFill>
+                    <a:srgbClr val="404040">
+                      <a:alpha val="100000"/>
+                    </a:srgbClr>
+                  </a:solidFill>
+                  <a:latin typeface="Helvetica"/>
+                  <a:cs typeface="Helvetica"/>
+                </a:rPr>
+                <a:t>subHR = 1.23 (95% CI 0.92-1.64), p = 0.165   (per 25 mg increase in dose discrepancy)</a:t>
+              </a:r>
+            </a:p>
+          </p:txBody>
+        </p:sp>
+        <p:sp>
+          <p:nvSpPr>
+            <p:cNvPr id="44" name="tx44"/>
             <p:cNvSpPr/>
             <p:nvPr/>
           </p:nvSpPr>

--- a/docs/plots/carbo/jx_carbo_linsubhr_dosedisc_akikdigo.pptx
+++ b/docs/plots/carbo/jx_carbo_linsubhr_dosedisc_akikdigo.pptx
@@ -2271,26 +2271,26 @@
           </p:nvSpPr>
           <p:spPr>
             <a:xfrm>
-              <a:off x="817517" y="5142518"/>
-              <a:ext cx="7799693" cy="0"/>
+              <a:off x="915645" y="5071743"/>
+              <a:ext cx="7682587" cy="0"/>
             </a:xfrm>
             <a:custGeom>
               <a:avLst/>
               <a:pathLst>
-                <a:path w="7799693" h="0">
+                <a:path w="7682587" h="0">
                   <a:moveTo>
                     <a:pt x="0" y="0"/>
                   </a:moveTo>
                   <a:lnTo>
-                    <a:pt x="7799693" y="0"/>
-                  </a:lnTo>
-                  <a:lnTo>
-                    <a:pt x="7799693" y="0"/>
+                    <a:pt x="7682587" y="0"/>
+                  </a:lnTo>
+                  <a:lnTo>
+                    <a:pt x="7682587" y="0"/>
                   </a:lnTo>
                 </a:path>
               </a:pathLst>
             </a:custGeom>
-            <a:ln w="6775" cap="flat">
+            <a:ln w="8623" cap="flat">
               <a:solidFill>
                 <a:srgbClr val="EBEBEB">
                   <a:alpha val="100000"/>
@@ -2314,26 +2314,26 @@
           </p:nvSpPr>
           <p:spPr>
             <a:xfrm>
-              <a:off x="817517" y="4313054"/>
-              <a:ext cx="7799693" cy="0"/>
+              <a:off x="915645" y="4298074"/>
+              <a:ext cx="7682587" cy="0"/>
             </a:xfrm>
             <a:custGeom>
               <a:avLst/>
               <a:pathLst>
-                <a:path w="7799693" h="0">
+                <a:path w="7682587" h="0">
                   <a:moveTo>
                     <a:pt x="0" y="0"/>
                   </a:moveTo>
                   <a:lnTo>
-                    <a:pt x="7799693" y="0"/>
-                  </a:lnTo>
-                  <a:lnTo>
-                    <a:pt x="7799693" y="0"/>
+                    <a:pt x="7682587" y="0"/>
+                  </a:lnTo>
+                  <a:lnTo>
+                    <a:pt x="7682587" y="0"/>
                   </a:lnTo>
                 </a:path>
               </a:pathLst>
             </a:custGeom>
-            <a:ln w="6775" cap="flat">
+            <a:ln w="8623" cap="flat">
               <a:solidFill>
                 <a:srgbClr val="EBEBEB">
                   <a:alpha val="100000"/>
@@ -2357,26 +2357,26 @@
           </p:nvSpPr>
           <p:spPr>
             <a:xfrm>
-              <a:off x="817517" y="3483591"/>
-              <a:ext cx="7799693" cy="0"/>
+              <a:off x="915645" y="3524405"/>
+              <a:ext cx="7682587" cy="0"/>
             </a:xfrm>
             <a:custGeom>
               <a:avLst/>
               <a:pathLst>
-                <a:path w="7799693" h="0">
+                <a:path w="7682587" h="0">
                   <a:moveTo>
                     <a:pt x="0" y="0"/>
                   </a:moveTo>
                   <a:lnTo>
-                    <a:pt x="7799693" y="0"/>
-                  </a:lnTo>
-                  <a:lnTo>
-                    <a:pt x="7799693" y="0"/>
+                    <a:pt x="7682587" y="0"/>
+                  </a:lnTo>
+                  <a:lnTo>
+                    <a:pt x="7682587" y="0"/>
                   </a:lnTo>
                 </a:path>
               </a:pathLst>
             </a:custGeom>
-            <a:ln w="6775" cap="flat">
+            <a:ln w="8623" cap="flat">
               <a:solidFill>
                 <a:srgbClr val="EBEBEB">
                   <a:alpha val="100000"/>
@@ -2400,26 +2400,26 @@
           </p:nvSpPr>
           <p:spPr>
             <a:xfrm>
-              <a:off x="817517" y="2654127"/>
-              <a:ext cx="7799693" cy="0"/>
+              <a:off x="915645" y="2750737"/>
+              <a:ext cx="7682587" cy="0"/>
             </a:xfrm>
             <a:custGeom>
               <a:avLst/>
               <a:pathLst>
-                <a:path w="7799693" h="0">
+                <a:path w="7682587" h="0">
                   <a:moveTo>
                     <a:pt x="0" y="0"/>
                   </a:moveTo>
                   <a:lnTo>
-                    <a:pt x="7799693" y="0"/>
-                  </a:lnTo>
-                  <a:lnTo>
-                    <a:pt x="7799693" y="0"/>
+                    <a:pt x="7682587" y="0"/>
+                  </a:lnTo>
+                  <a:lnTo>
+                    <a:pt x="7682587" y="0"/>
                   </a:lnTo>
                 </a:path>
               </a:pathLst>
             </a:custGeom>
-            <a:ln w="6775" cap="flat">
+            <a:ln w="8623" cap="flat">
               <a:solidFill>
                 <a:srgbClr val="EBEBEB">
                   <a:alpha val="100000"/>
@@ -2443,15 +2443,15 @@
           </p:nvSpPr>
           <p:spPr>
             <a:xfrm>
-              <a:off x="2122745" y="2073503"/>
-              <a:ext cx="0" cy="3649639"/>
+              <a:off x="2201275" y="2209169"/>
+              <a:ext cx="0" cy="3404141"/>
             </a:xfrm>
             <a:custGeom>
               <a:avLst/>
               <a:pathLst>
-                <a:path w="0" h="3649639">
+                <a:path w="0" h="3404141">
                   <a:moveTo>
-                    <a:pt x="0" y="3649639"/>
+                    <a:pt x="0" y="3404141"/>
                   </a:moveTo>
                   <a:lnTo>
                     <a:pt x="0" y="0"/>
@@ -2462,7 +2462,7 @@
                 </a:path>
               </a:pathLst>
             </a:custGeom>
-            <a:ln w="6775" cap="flat">
+            <a:ln w="8623" cap="flat">
               <a:solidFill>
                 <a:srgbClr val="EBEBEB">
                   <a:alpha val="100000"/>
@@ -2486,15 +2486,15 @@
           </p:nvSpPr>
           <p:spPr>
             <a:xfrm>
-              <a:off x="3487174" y="2073503"/>
-              <a:ext cx="0" cy="3649639"/>
+              <a:off x="3545219" y="2209169"/>
+              <a:ext cx="0" cy="3404141"/>
             </a:xfrm>
             <a:custGeom>
               <a:avLst/>
               <a:pathLst>
-                <a:path w="0" h="3649639">
+                <a:path w="0" h="3404141">
                   <a:moveTo>
-                    <a:pt x="0" y="3649639"/>
+                    <a:pt x="0" y="3404141"/>
                   </a:moveTo>
                   <a:lnTo>
                     <a:pt x="0" y="0"/>
@@ -2505,7 +2505,7 @@
                 </a:path>
               </a:pathLst>
             </a:custGeom>
-            <a:ln w="6775" cap="flat">
+            <a:ln w="8623" cap="flat">
               <a:solidFill>
                 <a:srgbClr val="EBEBEB">
                   <a:alpha val="100000"/>
@@ -2529,15 +2529,15 @@
           </p:nvSpPr>
           <p:spPr>
             <a:xfrm>
-              <a:off x="4851604" y="2073503"/>
-              <a:ext cx="0" cy="3649639"/>
+              <a:off x="4889163" y="2209169"/>
+              <a:ext cx="0" cy="3404141"/>
             </a:xfrm>
             <a:custGeom>
               <a:avLst/>
               <a:pathLst>
-                <a:path w="0" h="3649639">
+                <a:path w="0" h="3404141">
                   <a:moveTo>
-                    <a:pt x="0" y="3649639"/>
+                    <a:pt x="0" y="3404141"/>
                   </a:moveTo>
                   <a:lnTo>
                     <a:pt x="0" y="0"/>
@@ -2548,7 +2548,7 @@
                 </a:path>
               </a:pathLst>
             </a:custGeom>
-            <a:ln w="6775" cap="flat">
+            <a:ln w="8623" cap="flat">
               <a:solidFill>
                 <a:srgbClr val="EBEBEB">
                   <a:alpha val="100000"/>
@@ -2572,15 +2572,15 @@
           </p:nvSpPr>
           <p:spPr>
             <a:xfrm>
-              <a:off x="6216034" y="2073503"/>
-              <a:ext cx="0" cy="3649639"/>
+              <a:off x="6233107" y="2209169"/>
+              <a:ext cx="0" cy="3404141"/>
             </a:xfrm>
             <a:custGeom>
               <a:avLst/>
               <a:pathLst>
-                <a:path w="0" h="3649639">
+                <a:path w="0" h="3404141">
                   <a:moveTo>
-                    <a:pt x="0" y="3649639"/>
+                    <a:pt x="0" y="3404141"/>
                   </a:moveTo>
                   <a:lnTo>
                     <a:pt x="0" y="0"/>
@@ -2591,7 +2591,7 @@
                 </a:path>
               </a:pathLst>
             </a:custGeom>
-            <a:ln w="6775" cap="flat">
+            <a:ln w="8623" cap="flat">
               <a:solidFill>
                 <a:srgbClr val="EBEBEB">
                   <a:alpha val="100000"/>
@@ -2615,15 +2615,15 @@
           </p:nvSpPr>
           <p:spPr>
             <a:xfrm>
-              <a:off x="7580464" y="2073503"/>
-              <a:ext cx="0" cy="3649639"/>
+              <a:off x="7577051" y="2209169"/>
+              <a:ext cx="0" cy="3404141"/>
             </a:xfrm>
             <a:custGeom>
               <a:avLst/>
               <a:pathLst>
-                <a:path w="0" h="3649639">
+                <a:path w="0" h="3404141">
                   <a:moveTo>
-                    <a:pt x="0" y="3649639"/>
+                    <a:pt x="0" y="3404141"/>
                   </a:moveTo>
                   <a:lnTo>
                     <a:pt x="0" y="0"/>
@@ -2634,7 +2634,7 @@
                 </a:path>
               </a:pathLst>
             </a:custGeom>
-            <a:ln w="6775" cap="flat">
+            <a:ln w="8623" cap="flat">
               <a:solidFill>
                 <a:srgbClr val="EBEBEB">
                   <a:alpha val="100000"/>
@@ -2658,26 +2658,26 @@
           </p:nvSpPr>
           <p:spPr>
             <a:xfrm>
-              <a:off x="817517" y="5557249"/>
-              <a:ext cx="7799693" cy="0"/>
+              <a:off x="915645" y="5458577"/>
+              <a:ext cx="7682587" cy="0"/>
             </a:xfrm>
             <a:custGeom>
               <a:avLst/>
               <a:pathLst>
-                <a:path w="7799693" h="0">
+                <a:path w="7682587" h="0">
                   <a:moveTo>
                     <a:pt x="0" y="0"/>
                   </a:moveTo>
                   <a:lnTo>
-                    <a:pt x="7799693" y="0"/>
-                  </a:lnTo>
-                  <a:lnTo>
-                    <a:pt x="7799693" y="0"/>
+                    <a:pt x="7682587" y="0"/>
+                  </a:lnTo>
+                  <a:lnTo>
+                    <a:pt x="7682587" y="0"/>
                   </a:lnTo>
                 </a:path>
               </a:pathLst>
             </a:custGeom>
-            <a:ln w="13550" cap="flat">
+            <a:ln w="17246" cap="flat">
               <a:solidFill>
                 <a:srgbClr val="EBEBEB">
                   <a:alpha val="100000"/>
@@ -2701,26 +2701,26 @@
           </p:nvSpPr>
           <p:spPr>
             <a:xfrm>
-              <a:off x="817517" y="4727786"/>
-              <a:ext cx="7799693" cy="0"/>
+              <a:off x="915645" y="4684908"/>
+              <a:ext cx="7682587" cy="0"/>
             </a:xfrm>
             <a:custGeom>
               <a:avLst/>
               <a:pathLst>
-                <a:path w="7799693" h="0">
+                <a:path w="7682587" h="0">
                   <a:moveTo>
                     <a:pt x="0" y="0"/>
                   </a:moveTo>
                   <a:lnTo>
-                    <a:pt x="7799693" y="0"/>
-                  </a:lnTo>
-                  <a:lnTo>
-                    <a:pt x="7799693" y="0"/>
+                    <a:pt x="7682587" y="0"/>
+                  </a:lnTo>
+                  <a:lnTo>
+                    <a:pt x="7682587" y="0"/>
                   </a:lnTo>
                 </a:path>
               </a:pathLst>
             </a:custGeom>
-            <a:ln w="13550" cap="flat">
+            <a:ln w="17246" cap="flat">
               <a:solidFill>
                 <a:srgbClr val="EBEBEB">
                   <a:alpha val="100000"/>
@@ -2744,26 +2744,26 @@
           </p:nvSpPr>
           <p:spPr>
             <a:xfrm>
-              <a:off x="817517" y="3898322"/>
-              <a:ext cx="7799693" cy="0"/>
+              <a:off x="915645" y="3911240"/>
+              <a:ext cx="7682587" cy="0"/>
             </a:xfrm>
             <a:custGeom>
               <a:avLst/>
               <a:pathLst>
-                <a:path w="7799693" h="0">
+                <a:path w="7682587" h="0">
                   <a:moveTo>
                     <a:pt x="0" y="0"/>
                   </a:moveTo>
                   <a:lnTo>
-                    <a:pt x="7799693" y="0"/>
-                  </a:lnTo>
-                  <a:lnTo>
-                    <a:pt x="7799693" y="0"/>
+                    <a:pt x="7682587" y="0"/>
+                  </a:lnTo>
+                  <a:lnTo>
+                    <a:pt x="7682587" y="0"/>
                   </a:lnTo>
                 </a:path>
               </a:pathLst>
             </a:custGeom>
-            <a:ln w="13550" cap="flat">
+            <a:ln w="17246" cap="flat">
               <a:solidFill>
                 <a:srgbClr val="EBEBEB">
                   <a:alpha val="100000"/>
@@ -2787,26 +2787,26 @@
           </p:nvSpPr>
           <p:spPr>
             <a:xfrm>
-              <a:off x="817517" y="3068859"/>
-              <a:ext cx="7799693" cy="0"/>
+              <a:off x="915645" y="3137571"/>
+              <a:ext cx="7682587" cy="0"/>
             </a:xfrm>
             <a:custGeom>
               <a:avLst/>
               <a:pathLst>
-                <a:path w="7799693" h="0">
+                <a:path w="7682587" h="0">
                   <a:moveTo>
                     <a:pt x="0" y="0"/>
                   </a:moveTo>
                   <a:lnTo>
-                    <a:pt x="7799693" y="0"/>
-                  </a:lnTo>
-                  <a:lnTo>
-                    <a:pt x="7799693" y="0"/>
+                    <a:pt x="7682587" y="0"/>
+                  </a:lnTo>
+                  <a:lnTo>
+                    <a:pt x="7682587" y="0"/>
                   </a:lnTo>
                 </a:path>
               </a:pathLst>
             </a:custGeom>
-            <a:ln w="13550" cap="flat">
+            <a:ln w="17246" cap="flat">
               <a:solidFill>
                 <a:srgbClr val="EBEBEB">
                   <a:alpha val="100000"/>
@@ -2830,26 +2830,26 @@
           </p:nvSpPr>
           <p:spPr>
             <a:xfrm>
-              <a:off x="817517" y="2239395"/>
-              <a:ext cx="7799693" cy="0"/>
+              <a:off x="915645" y="2363903"/>
+              <a:ext cx="7682587" cy="0"/>
             </a:xfrm>
             <a:custGeom>
               <a:avLst/>
               <a:pathLst>
-                <a:path w="7799693" h="0">
+                <a:path w="7682587" h="0">
                   <a:moveTo>
                     <a:pt x="0" y="0"/>
                   </a:moveTo>
                   <a:lnTo>
-                    <a:pt x="7799693" y="0"/>
-                  </a:lnTo>
-                  <a:lnTo>
-                    <a:pt x="7799693" y="0"/>
+                    <a:pt x="7682587" y="0"/>
+                  </a:lnTo>
+                  <a:lnTo>
+                    <a:pt x="7682587" y="0"/>
                   </a:lnTo>
                 </a:path>
               </a:pathLst>
             </a:custGeom>
-            <a:ln w="13550" cap="flat">
+            <a:ln w="17246" cap="flat">
               <a:solidFill>
                 <a:srgbClr val="EBEBEB">
                   <a:alpha val="100000"/>
@@ -2873,15 +2873,15 @@
           </p:nvSpPr>
           <p:spPr>
             <a:xfrm>
-              <a:off x="1440530" y="2073503"/>
-              <a:ext cx="0" cy="3649639"/>
+              <a:off x="1529303" y="2209169"/>
+              <a:ext cx="0" cy="3404141"/>
             </a:xfrm>
             <a:custGeom>
               <a:avLst/>
               <a:pathLst>
-                <a:path w="0" h="3649639">
+                <a:path w="0" h="3404141">
                   <a:moveTo>
-                    <a:pt x="0" y="3649639"/>
+                    <a:pt x="0" y="3404141"/>
                   </a:moveTo>
                   <a:lnTo>
                     <a:pt x="0" y="0"/>
@@ -2892,7 +2892,7 @@
                 </a:path>
               </a:pathLst>
             </a:custGeom>
-            <a:ln w="13550" cap="flat">
+            <a:ln w="17246" cap="flat">
               <a:solidFill>
                 <a:srgbClr val="EBEBEB">
                   <a:alpha val="100000"/>
@@ -2916,15 +2916,15 @@
           </p:nvSpPr>
           <p:spPr>
             <a:xfrm>
-              <a:off x="2804959" y="2073503"/>
-              <a:ext cx="0" cy="3649639"/>
+              <a:off x="2873247" y="2209169"/>
+              <a:ext cx="0" cy="3404141"/>
             </a:xfrm>
             <a:custGeom>
               <a:avLst/>
               <a:pathLst>
-                <a:path w="0" h="3649639">
+                <a:path w="0" h="3404141">
                   <a:moveTo>
-                    <a:pt x="0" y="3649639"/>
+                    <a:pt x="0" y="3404141"/>
                   </a:moveTo>
                   <a:lnTo>
                     <a:pt x="0" y="0"/>
@@ -2935,7 +2935,7 @@
                 </a:path>
               </a:pathLst>
             </a:custGeom>
-            <a:ln w="13550" cap="flat">
+            <a:ln w="17246" cap="flat">
               <a:solidFill>
                 <a:srgbClr val="EBEBEB">
                   <a:alpha val="100000"/>
@@ -2959,15 +2959,15 @@
           </p:nvSpPr>
           <p:spPr>
             <a:xfrm>
-              <a:off x="4169389" y="2073503"/>
-              <a:ext cx="0" cy="3649639"/>
+              <a:off x="4217191" y="2209169"/>
+              <a:ext cx="0" cy="3404141"/>
             </a:xfrm>
             <a:custGeom>
               <a:avLst/>
               <a:pathLst>
-                <a:path w="0" h="3649639">
+                <a:path w="0" h="3404141">
                   <a:moveTo>
-                    <a:pt x="0" y="3649639"/>
+                    <a:pt x="0" y="3404141"/>
                   </a:moveTo>
                   <a:lnTo>
                     <a:pt x="0" y="0"/>
@@ -2978,7 +2978,7 @@
                 </a:path>
               </a:pathLst>
             </a:custGeom>
-            <a:ln w="13550" cap="flat">
+            <a:ln w="17246" cap="flat">
               <a:solidFill>
                 <a:srgbClr val="EBEBEB">
                   <a:alpha val="100000"/>
@@ -3002,15 +3002,15 @@
           </p:nvSpPr>
           <p:spPr>
             <a:xfrm>
-              <a:off x="5533819" y="2073503"/>
-              <a:ext cx="0" cy="3649639"/>
+              <a:off x="5561135" y="2209169"/>
+              <a:ext cx="0" cy="3404141"/>
             </a:xfrm>
             <a:custGeom>
               <a:avLst/>
               <a:pathLst>
-                <a:path w="0" h="3649639">
+                <a:path w="0" h="3404141">
                   <a:moveTo>
-                    <a:pt x="0" y="3649639"/>
+                    <a:pt x="0" y="3404141"/>
                   </a:moveTo>
                   <a:lnTo>
                     <a:pt x="0" y="0"/>
@@ -3021,7 +3021,7 @@
                 </a:path>
               </a:pathLst>
             </a:custGeom>
-            <a:ln w="13550" cap="flat">
+            <a:ln w="17246" cap="flat">
               <a:solidFill>
                 <a:srgbClr val="EBEBEB">
                   <a:alpha val="100000"/>
@@ -3045,15 +3045,15 @@
           </p:nvSpPr>
           <p:spPr>
             <a:xfrm>
-              <a:off x="6898249" y="2073503"/>
-              <a:ext cx="0" cy="3649639"/>
+              <a:off x="6905079" y="2209169"/>
+              <a:ext cx="0" cy="3404141"/>
             </a:xfrm>
             <a:custGeom>
               <a:avLst/>
               <a:pathLst>
-                <a:path w="0" h="3649639">
+                <a:path w="0" h="3404141">
                   <a:moveTo>
-                    <a:pt x="0" y="3649639"/>
+                    <a:pt x="0" y="3404141"/>
                   </a:moveTo>
                   <a:lnTo>
                     <a:pt x="0" y="0"/>
@@ -3064,7 +3064,7 @@
                 </a:path>
               </a:pathLst>
             </a:custGeom>
-            <a:ln w="13550" cap="flat">
+            <a:ln w="17246" cap="flat">
               <a:solidFill>
                 <a:srgbClr val="EBEBEB">
                   <a:alpha val="100000"/>
@@ -3088,15 +3088,15 @@
           </p:nvSpPr>
           <p:spPr>
             <a:xfrm>
-              <a:off x="8262679" y="2073503"/>
-              <a:ext cx="0" cy="3649639"/>
+              <a:off x="8249023" y="2209169"/>
+              <a:ext cx="0" cy="3404141"/>
             </a:xfrm>
             <a:custGeom>
               <a:avLst/>
               <a:pathLst>
-                <a:path w="0" h="3649639">
+                <a:path w="0" h="3404141">
                   <a:moveTo>
-                    <a:pt x="0" y="3649639"/>
+                    <a:pt x="0" y="3404141"/>
                   </a:moveTo>
                   <a:lnTo>
                     <a:pt x="0" y="0"/>
@@ -3107,7 +3107,7 @@
                 </a:path>
               </a:pathLst>
             </a:custGeom>
-            <a:ln w="13550" cap="flat">
+            <a:ln w="17246" cap="flat">
               <a:solidFill>
                 <a:srgbClr val="EBEBEB">
                   <a:alpha val="100000"/>
@@ -3131,531 +3131,531 @@
           </p:nvSpPr>
           <p:spPr>
             <a:xfrm>
-              <a:off x="1172049" y="2073503"/>
-              <a:ext cx="7090630" cy="3394111"/>
+              <a:off x="1264853" y="2209169"/>
+              <a:ext cx="6984170" cy="3165802"/>
             </a:xfrm>
             <a:custGeom>
               <a:avLst/>
               <a:pathLst>
-                <a:path w="7090630" h="3394111">
+                <a:path w="6984170" h="3165802">
                   <a:moveTo>
-                    <a:pt x="0" y="2272207"/>
+                    <a:pt x="0" y="2119364"/>
                   </a:moveTo>
                   <a:lnTo>
-                    <a:pt x="71622" y="2282938"/>
-                  </a:lnTo>
-                  <a:lnTo>
-                    <a:pt x="143245" y="2293574"/>
-                  </a:lnTo>
-                  <a:lnTo>
-                    <a:pt x="214867" y="2304115"/>
-                  </a:lnTo>
-                  <a:lnTo>
-                    <a:pt x="286490" y="2314563"/>
-                  </a:lnTo>
-                  <a:lnTo>
-                    <a:pt x="358112" y="2324919"/>
-                  </a:lnTo>
-                  <a:lnTo>
-                    <a:pt x="429735" y="2335183"/>
-                  </a:lnTo>
-                  <a:lnTo>
-                    <a:pt x="501357" y="2345355"/>
-                  </a:lnTo>
-                  <a:lnTo>
-                    <a:pt x="572980" y="2355438"/>
-                  </a:lnTo>
-                  <a:lnTo>
-                    <a:pt x="644602" y="2365432"/>
-                  </a:lnTo>
-                  <a:lnTo>
-                    <a:pt x="716225" y="2375337"/>
-                  </a:lnTo>
-                  <a:lnTo>
-                    <a:pt x="787847" y="2385154"/>
-                  </a:lnTo>
-                  <a:lnTo>
-                    <a:pt x="859470" y="2394884"/>
-                  </a:lnTo>
-                  <a:lnTo>
-                    <a:pt x="931092" y="2404529"/>
-                  </a:lnTo>
-                  <a:lnTo>
-                    <a:pt x="1002715" y="2414087"/>
-                  </a:lnTo>
-                  <a:lnTo>
-                    <a:pt x="1074337" y="2423561"/>
-                  </a:lnTo>
-                  <a:lnTo>
-                    <a:pt x="1145960" y="2432951"/>
-                  </a:lnTo>
-                  <a:lnTo>
-                    <a:pt x="1217582" y="2442258"/>
-                  </a:lnTo>
-                  <a:lnTo>
-                    <a:pt x="1289205" y="2451483"/>
-                  </a:lnTo>
-                  <a:lnTo>
-                    <a:pt x="1360827" y="2460626"/>
-                  </a:lnTo>
-                  <a:lnTo>
-                    <a:pt x="1432450" y="2469688"/>
-                  </a:lnTo>
-                  <a:lnTo>
-                    <a:pt x="1504073" y="2478669"/>
-                  </a:lnTo>
-                  <a:lnTo>
-                    <a:pt x="1575695" y="2487571"/>
-                  </a:lnTo>
-                  <a:lnTo>
-                    <a:pt x="1647318" y="2496395"/>
-                  </a:lnTo>
-                  <a:lnTo>
-                    <a:pt x="1718940" y="2505140"/>
-                  </a:lnTo>
-                  <a:lnTo>
-                    <a:pt x="1790563" y="2513807"/>
-                  </a:lnTo>
-                  <a:lnTo>
-                    <a:pt x="1862185" y="2522398"/>
-                  </a:lnTo>
-                  <a:lnTo>
-                    <a:pt x="1933808" y="2530913"/>
-                  </a:lnTo>
-                  <a:lnTo>
-                    <a:pt x="2005430" y="2539352"/>
-                  </a:lnTo>
-                  <a:lnTo>
-                    <a:pt x="2077053" y="2547717"/>
-                  </a:lnTo>
-                  <a:lnTo>
-                    <a:pt x="2148675" y="2556007"/>
-                  </a:lnTo>
-                  <a:lnTo>
-                    <a:pt x="2220298" y="2564224"/>
-                  </a:lnTo>
-                  <a:lnTo>
-                    <a:pt x="2291920" y="2572369"/>
-                  </a:lnTo>
-                  <a:lnTo>
-                    <a:pt x="2363543" y="2580441"/>
-                  </a:lnTo>
-                  <a:lnTo>
-                    <a:pt x="2435165" y="2588441"/>
-                  </a:lnTo>
-                  <a:lnTo>
-                    <a:pt x="2506788" y="2596371"/>
-                  </a:lnTo>
-                  <a:lnTo>
-                    <a:pt x="2578410" y="2604231"/>
-                  </a:lnTo>
-                  <a:lnTo>
-                    <a:pt x="2650033" y="2612021"/>
-                  </a:lnTo>
-                  <a:lnTo>
-                    <a:pt x="2721655" y="2619742"/>
-                  </a:lnTo>
-                  <a:lnTo>
-                    <a:pt x="2793278" y="2627394"/>
-                  </a:lnTo>
-                  <a:lnTo>
-                    <a:pt x="2864901" y="2634979"/>
-                  </a:lnTo>
-                  <a:lnTo>
-                    <a:pt x="2936523" y="2642497"/>
-                  </a:lnTo>
-                  <a:lnTo>
-                    <a:pt x="3008146" y="2649948"/>
-                  </a:lnTo>
-                  <a:lnTo>
-                    <a:pt x="3079768" y="2636144"/>
-                  </a:lnTo>
-                  <a:lnTo>
-                    <a:pt x="3151391" y="2590681"/>
-                  </a:lnTo>
-                  <a:lnTo>
-                    <a:pt x="3223013" y="2542780"/>
-                  </a:lnTo>
-                  <a:lnTo>
-                    <a:pt x="3294636" y="2492309"/>
-                  </a:lnTo>
-                  <a:lnTo>
-                    <a:pt x="3366258" y="2439131"/>
-                  </a:lnTo>
-                  <a:lnTo>
-                    <a:pt x="3437881" y="2383101"/>
-                  </a:lnTo>
-                  <a:lnTo>
-                    <a:pt x="3509503" y="2324066"/>
-                  </a:lnTo>
-                  <a:lnTo>
-                    <a:pt x="3581126" y="2261864"/>
-                  </a:lnTo>
-                  <a:lnTo>
-                    <a:pt x="3652748" y="2196326"/>
-                  </a:lnTo>
-                  <a:lnTo>
-                    <a:pt x="3724371" y="2127273"/>
-                  </a:lnTo>
-                  <a:lnTo>
-                    <a:pt x="3795993" y="2054515"/>
-                  </a:lnTo>
-                  <a:lnTo>
-                    <a:pt x="3867616" y="1977856"/>
-                  </a:lnTo>
-                  <a:lnTo>
-                    <a:pt x="3939238" y="1897084"/>
-                  </a:lnTo>
-                  <a:lnTo>
-                    <a:pt x="4010861" y="1811980"/>
-                  </a:lnTo>
-                  <a:lnTo>
-                    <a:pt x="4082483" y="1722312"/>
-                  </a:lnTo>
-                  <a:lnTo>
-                    <a:pt x="4154106" y="1627834"/>
-                  </a:lnTo>
-                  <a:lnTo>
-                    <a:pt x="4225729" y="1528288"/>
-                  </a:lnTo>
-                  <a:lnTo>
-                    <a:pt x="4297351" y="1423403"/>
-                  </a:lnTo>
-                  <a:lnTo>
-                    <a:pt x="4368974" y="1312892"/>
-                  </a:lnTo>
-                  <a:lnTo>
-                    <a:pt x="4440596" y="1196454"/>
-                  </a:lnTo>
-                  <a:lnTo>
-                    <a:pt x="4512219" y="1073771"/>
-                  </a:lnTo>
-                  <a:lnTo>
-                    <a:pt x="4583841" y="944507"/>
-                  </a:lnTo>
-                  <a:lnTo>
-                    <a:pt x="4655464" y="808310"/>
-                  </a:lnTo>
-                  <a:lnTo>
-                    <a:pt x="4727086" y="664807"/>
-                  </a:lnTo>
-                  <a:lnTo>
-                    <a:pt x="4798709" y="513608"/>
-                  </a:lnTo>
-                  <a:lnTo>
-                    <a:pt x="4870331" y="354298"/>
-                  </a:lnTo>
-                  <a:lnTo>
-                    <a:pt x="4941954" y="186444"/>
-                  </a:lnTo>
-                  <a:lnTo>
-                    <a:pt x="5013576" y="9586"/>
-                  </a:lnTo>
-                  <a:lnTo>
-                    <a:pt x="5017261" y="0"/>
-                  </a:lnTo>
-                  <a:lnTo>
-                    <a:pt x="7090630" y="0"/>
-                  </a:lnTo>
-                  <a:lnTo>
-                    <a:pt x="7090630" y="2981601"/>
-                  </a:lnTo>
-                  <a:lnTo>
-                    <a:pt x="7019007" y="2977114"/>
-                  </a:lnTo>
-                  <a:lnTo>
-                    <a:pt x="6947385" y="2972586"/>
-                  </a:lnTo>
-                  <a:lnTo>
-                    <a:pt x="6875762" y="2968019"/>
-                  </a:lnTo>
-                  <a:lnTo>
-                    <a:pt x="6804139" y="2963410"/>
-                  </a:lnTo>
-                  <a:lnTo>
-                    <a:pt x="6732517" y="2958760"/>
-                  </a:lnTo>
-                  <a:lnTo>
-                    <a:pt x="6660894" y="2954069"/>
-                  </a:lnTo>
-                  <a:lnTo>
-                    <a:pt x="6589272" y="2949335"/>
-                  </a:lnTo>
-                  <a:lnTo>
-                    <a:pt x="6517649" y="2944560"/>
-                  </a:lnTo>
-                  <a:lnTo>
-                    <a:pt x="6446027" y="2939741"/>
-                  </a:lnTo>
-                  <a:lnTo>
-                    <a:pt x="6374404" y="2934880"/>
-                  </a:lnTo>
-                  <a:lnTo>
-                    <a:pt x="6302782" y="2929975"/>
-                  </a:lnTo>
-                  <a:lnTo>
-                    <a:pt x="6231159" y="2925027"/>
-                  </a:lnTo>
-                  <a:lnTo>
-                    <a:pt x="6159537" y="2920034"/>
-                  </a:lnTo>
-                  <a:lnTo>
-                    <a:pt x="6087914" y="2914996"/>
-                  </a:lnTo>
-                  <a:lnTo>
-                    <a:pt x="6016292" y="2909914"/>
-                  </a:lnTo>
-                  <a:lnTo>
-                    <a:pt x="5944669" y="2904786"/>
-                  </a:lnTo>
-                  <a:lnTo>
-                    <a:pt x="5873047" y="2899612"/>
-                  </a:lnTo>
-                  <a:lnTo>
-                    <a:pt x="5801424" y="2894392"/>
-                  </a:lnTo>
-                  <a:lnTo>
-                    <a:pt x="5729802" y="2889126"/>
-                  </a:lnTo>
-                  <a:lnTo>
-                    <a:pt x="5658179" y="2883812"/>
-                  </a:lnTo>
-                  <a:lnTo>
-                    <a:pt x="5586557" y="2878451"/>
-                  </a:lnTo>
-                  <a:lnTo>
-                    <a:pt x="5514934" y="2873042"/>
-                  </a:lnTo>
-                  <a:lnTo>
-                    <a:pt x="5443311" y="2867584"/>
-                  </a:lnTo>
-                  <a:lnTo>
-                    <a:pt x="5371689" y="2862078"/>
-                  </a:lnTo>
-                  <a:lnTo>
-                    <a:pt x="5300066" y="2856523"/>
-                  </a:lnTo>
-                  <a:lnTo>
-                    <a:pt x="5228444" y="2850918"/>
-                  </a:lnTo>
-                  <a:lnTo>
-                    <a:pt x="5156821" y="2845263"/>
-                  </a:lnTo>
-                  <a:lnTo>
-                    <a:pt x="5085199" y="2839557"/>
-                  </a:lnTo>
-                  <a:lnTo>
-                    <a:pt x="5013576" y="2833800"/>
-                  </a:lnTo>
-                  <a:lnTo>
-                    <a:pt x="4941954" y="2827992"/>
-                  </a:lnTo>
-                  <a:lnTo>
-                    <a:pt x="4870331" y="2822132"/>
-                  </a:lnTo>
-                  <a:lnTo>
-                    <a:pt x="4798709" y="2816220"/>
-                  </a:lnTo>
-                  <a:lnTo>
-                    <a:pt x="4727086" y="2810255"/>
-                  </a:lnTo>
-                  <a:lnTo>
-                    <a:pt x="4655464" y="2804236"/>
-                  </a:lnTo>
-                  <a:lnTo>
-                    <a:pt x="4583841" y="2798164"/>
-                  </a:lnTo>
-                  <a:lnTo>
-                    <a:pt x="4512219" y="2792038"/>
-                  </a:lnTo>
-                  <a:lnTo>
-                    <a:pt x="4440596" y="2785856"/>
-                  </a:lnTo>
-                  <a:lnTo>
-                    <a:pt x="4368974" y="2779620"/>
-                  </a:lnTo>
-                  <a:lnTo>
-                    <a:pt x="4297351" y="2773328"/>
-                  </a:lnTo>
-                  <a:lnTo>
-                    <a:pt x="4225729" y="2766979"/>
-                  </a:lnTo>
-                  <a:lnTo>
-                    <a:pt x="4154106" y="2760574"/>
-                  </a:lnTo>
-                  <a:lnTo>
-                    <a:pt x="4082483" y="2754112"/>
-                  </a:lnTo>
-                  <a:lnTo>
-                    <a:pt x="4010861" y="2747591"/>
-                  </a:lnTo>
-                  <a:lnTo>
-                    <a:pt x="3939238" y="2741013"/>
-                  </a:lnTo>
-                  <a:lnTo>
-                    <a:pt x="3867616" y="2734376"/>
-                  </a:lnTo>
-                  <a:lnTo>
-                    <a:pt x="3795993" y="2727679"/>
-                  </a:lnTo>
-                  <a:lnTo>
-                    <a:pt x="3724371" y="2720923"/>
-                  </a:lnTo>
-                  <a:lnTo>
-                    <a:pt x="3652748" y="2714106"/>
-                  </a:lnTo>
-                  <a:lnTo>
-                    <a:pt x="3581126" y="2707228"/>
-                  </a:lnTo>
-                  <a:lnTo>
-                    <a:pt x="3509503" y="2700289"/>
-                  </a:lnTo>
-                  <a:lnTo>
-                    <a:pt x="3437881" y="2693288"/>
-                  </a:lnTo>
-                  <a:lnTo>
-                    <a:pt x="3366258" y="2686224"/>
-                  </a:lnTo>
-                  <a:lnTo>
-                    <a:pt x="3294636" y="2679097"/>
-                  </a:lnTo>
-                  <a:lnTo>
-                    <a:pt x="3223013" y="2671907"/>
-                  </a:lnTo>
-                  <a:lnTo>
-                    <a:pt x="3151391" y="2664652"/>
-                  </a:lnTo>
-                  <a:lnTo>
-                    <a:pt x="3079768" y="2657333"/>
-                  </a:lnTo>
-                  <a:lnTo>
-                    <a:pt x="3008146" y="2679293"/>
-                  </a:lnTo>
-                  <a:lnTo>
-                    <a:pt x="2936523" y="2720244"/>
-                  </a:lnTo>
-                  <a:lnTo>
-                    <a:pt x="2864901" y="2759112"/>
-                  </a:lnTo>
-                  <a:lnTo>
-                    <a:pt x="2793278" y="2796000"/>
-                  </a:lnTo>
-                  <a:lnTo>
-                    <a:pt x="2721655" y="2831011"/>
-                  </a:lnTo>
-                  <a:lnTo>
-                    <a:pt x="2650033" y="2864240"/>
-                  </a:lnTo>
-                  <a:lnTo>
-                    <a:pt x="2578410" y="2895777"/>
-                  </a:lnTo>
-                  <a:lnTo>
-                    <a:pt x="2506788" y="2925708"/>
-                  </a:lnTo>
-                  <a:lnTo>
-                    <a:pt x="2435165" y="2954116"/>
-                  </a:lnTo>
-                  <a:lnTo>
-                    <a:pt x="2363543" y="2981078"/>
-                  </a:lnTo>
-                  <a:lnTo>
-                    <a:pt x="2291920" y="3006667"/>
-                  </a:lnTo>
-                  <a:lnTo>
-                    <a:pt x="2220298" y="3030953"/>
-                  </a:lnTo>
-                  <a:lnTo>
-                    <a:pt x="2148675" y="3054003"/>
-                  </a:lnTo>
-                  <a:lnTo>
-                    <a:pt x="2077053" y="3075880"/>
-                  </a:lnTo>
-                  <a:lnTo>
-                    <a:pt x="2005430" y="3096643"/>
-                  </a:lnTo>
-                  <a:lnTo>
-                    <a:pt x="1933808" y="3116349"/>
-                  </a:lnTo>
-                  <a:lnTo>
-                    <a:pt x="1862185" y="3135052"/>
-                  </a:lnTo>
-                  <a:lnTo>
-                    <a:pt x="1790563" y="3152803"/>
-                  </a:lnTo>
-                  <a:lnTo>
-                    <a:pt x="1718940" y="3169650"/>
-                  </a:lnTo>
-                  <a:lnTo>
-                    <a:pt x="1647318" y="3185640"/>
-                  </a:lnTo>
-                  <a:lnTo>
-                    <a:pt x="1575695" y="3200815"/>
-                  </a:lnTo>
-                  <a:lnTo>
-                    <a:pt x="1504073" y="3215218"/>
-                  </a:lnTo>
-                  <a:lnTo>
-                    <a:pt x="1432450" y="3228888"/>
-                  </a:lnTo>
-                  <a:lnTo>
-                    <a:pt x="1360827" y="3241862"/>
-                  </a:lnTo>
-                  <a:lnTo>
-                    <a:pt x="1289205" y="3254176"/>
-                  </a:lnTo>
-                  <a:lnTo>
-                    <a:pt x="1217582" y="3265862"/>
-                  </a:lnTo>
-                  <a:lnTo>
-                    <a:pt x="1145960" y="3276954"/>
-                  </a:lnTo>
-                  <a:lnTo>
-                    <a:pt x="1074337" y="3287481"/>
-                  </a:lnTo>
-                  <a:lnTo>
-                    <a:pt x="1002715" y="3297472"/>
-                  </a:lnTo>
-                  <a:lnTo>
-                    <a:pt x="931092" y="3306955"/>
-                  </a:lnTo>
-                  <a:lnTo>
-                    <a:pt x="859470" y="3315955"/>
-                  </a:lnTo>
-                  <a:lnTo>
-                    <a:pt x="787847" y="3324496"/>
-                  </a:lnTo>
-                  <a:lnTo>
-                    <a:pt x="716225" y="3332603"/>
-                  </a:lnTo>
-                  <a:lnTo>
-                    <a:pt x="644602" y="3340297"/>
-                  </a:lnTo>
-                  <a:lnTo>
-                    <a:pt x="572980" y="3347600"/>
-                  </a:lnTo>
-                  <a:lnTo>
-                    <a:pt x="501357" y="3354531"/>
-                  </a:lnTo>
-                  <a:lnTo>
-                    <a:pt x="429735" y="3361109"/>
-                  </a:lnTo>
-                  <a:lnTo>
-                    <a:pt x="358112" y="3367352"/>
-                  </a:lnTo>
-                  <a:lnTo>
-                    <a:pt x="286490" y="3373277"/>
-                  </a:lnTo>
-                  <a:lnTo>
-                    <a:pt x="214867" y="3378901"/>
-                  </a:lnTo>
-                  <a:lnTo>
-                    <a:pt x="143245" y="3384238"/>
-                  </a:lnTo>
-                  <a:lnTo>
-                    <a:pt x="71622" y="3389304"/>
-                  </a:lnTo>
-                  <a:lnTo>
-                    <a:pt x="0" y="3394111"/>
+                    <a:pt x="70547" y="2129373"/>
+                  </a:lnTo>
+                  <a:lnTo>
+                    <a:pt x="141094" y="2139293"/>
+                  </a:lnTo>
+                  <a:lnTo>
+                    <a:pt x="211641" y="2149126"/>
+                  </a:lnTo>
+                  <a:lnTo>
+                    <a:pt x="282188" y="2158871"/>
+                  </a:lnTo>
+                  <a:lnTo>
+                    <a:pt x="352735" y="2168530"/>
+                  </a:lnTo>
+                  <a:lnTo>
+                    <a:pt x="423283" y="2178103"/>
+                  </a:lnTo>
+                  <a:lnTo>
+                    <a:pt x="493830" y="2187592"/>
+                  </a:lnTo>
+                  <a:lnTo>
+                    <a:pt x="564377" y="2196997"/>
+                  </a:lnTo>
+                  <a:lnTo>
+                    <a:pt x="634924" y="2206318"/>
+                  </a:lnTo>
+                  <a:lnTo>
+                    <a:pt x="705471" y="2215557"/>
+                  </a:lnTo>
+                  <a:lnTo>
+                    <a:pt x="776018" y="2224714"/>
+                  </a:lnTo>
+                  <a:lnTo>
+                    <a:pt x="846566" y="2233789"/>
+                  </a:lnTo>
+                  <a:lnTo>
+                    <a:pt x="917113" y="2242785"/>
+                  </a:lnTo>
+                  <a:lnTo>
+                    <a:pt x="987660" y="2251700"/>
+                  </a:lnTo>
+                  <a:lnTo>
+                    <a:pt x="1058207" y="2260537"/>
+                  </a:lnTo>
+                  <a:lnTo>
+                    <a:pt x="1128754" y="2269296"/>
+                  </a:lnTo>
+                  <a:lnTo>
+                    <a:pt x="1199301" y="2277977"/>
+                  </a:lnTo>
+                  <a:lnTo>
+                    <a:pt x="1269849" y="2286581"/>
+                  </a:lnTo>
+                  <a:lnTo>
+                    <a:pt x="1340396" y="2295109"/>
+                  </a:lnTo>
+                  <a:lnTo>
+                    <a:pt x="1410943" y="2303561"/>
+                  </a:lnTo>
+                  <a:lnTo>
+                    <a:pt x="1481490" y="2311938"/>
+                  </a:lnTo>
+                  <a:lnTo>
+                    <a:pt x="1552037" y="2320242"/>
+                  </a:lnTo>
+                  <a:lnTo>
+                    <a:pt x="1622584" y="2328471"/>
+                  </a:lnTo>
+                  <a:lnTo>
+                    <a:pt x="1693132" y="2336628"/>
+                  </a:lnTo>
+                  <a:lnTo>
+                    <a:pt x="1763679" y="2344713"/>
+                  </a:lnTo>
+                  <a:lnTo>
+                    <a:pt x="1834226" y="2352726"/>
+                  </a:lnTo>
+                  <a:lnTo>
+                    <a:pt x="1904773" y="2360668"/>
+                  </a:lnTo>
+                  <a:lnTo>
+                    <a:pt x="1975320" y="2368539"/>
+                  </a:lnTo>
+                  <a:lnTo>
+                    <a:pt x="2045868" y="2376341"/>
+                  </a:lnTo>
+                  <a:lnTo>
+                    <a:pt x="2116415" y="2384074"/>
+                  </a:lnTo>
+                  <a:lnTo>
+                    <a:pt x="2186962" y="2391738"/>
+                  </a:lnTo>
+                  <a:lnTo>
+                    <a:pt x="2257509" y="2399335"/>
+                  </a:lnTo>
+                  <a:lnTo>
+                    <a:pt x="2328056" y="2406864"/>
+                  </a:lnTo>
+                  <a:lnTo>
+                    <a:pt x="2398603" y="2414326"/>
+                  </a:lnTo>
+                  <a:lnTo>
+                    <a:pt x="2469151" y="2421723"/>
+                  </a:lnTo>
+                  <a:lnTo>
+                    <a:pt x="2539698" y="2429054"/>
+                  </a:lnTo>
+                  <a:lnTo>
+                    <a:pt x="2610245" y="2436320"/>
+                  </a:lnTo>
+                  <a:lnTo>
+                    <a:pt x="2680792" y="2443521"/>
+                  </a:lnTo>
+                  <a:lnTo>
+                    <a:pt x="2751339" y="2450659"/>
+                  </a:lnTo>
+                  <a:lnTo>
+                    <a:pt x="2821886" y="2457734"/>
+                  </a:lnTo>
+                  <a:lnTo>
+                    <a:pt x="2892434" y="2464745"/>
+                  </a:lnTo>
+                  <a:lnTo>
+                    <a:pt x="2962981" y="2471695"/>
+                  </a:lnTo>
+                  <a:lnTo>
+                    <a:pt x="3033528" y="2458820"/>
+                  </a:lnTo>
+                  <a:lnTo>
+                    <a:pt x="3104075" y="2416416"/>
+                  </a:lnTo>
+                  <a:lnTo>
+                    <a:pt x="3174622" y="2371736"/>
+                  </a:lnTo>
+                  <a:lnTo>
+                    <a:pt x="3245169" y="2324661"/>
+                  </a:lnTo>
+                  <a:lnTo>
+                    <a:pt x="3315717" y="2275060"/>
+                  </a:lnTo>
+                  <a:lnTo>
+                    <a:pt x="3386264" y="2222799"/>
+                  </a:lnTo>
+                  <a:lnTo>
+                    <a:pt x="3456811" y="2167735"/>
+                  </a:lnTo>
+                  <a:lnTo>
+                    <a:pt x="3527358" y="2109717"/>
+                  </a:lnTo>
+                  <a:lnTo>
+                    <a:pt x="3597905" y="2048587"/>
+                  </a:lnTo>
+                  <a:lnTo>
+                    <a:pt x="3668452" y="1984179"/>
+                  </a:lnTo>
+                  <a:lnTo>
+                    <a:pt x="3739000" y="1916316"/>
+                  </a:lnTo>
+                  <a:lnTo>
+                    <a:pt x="3809547" y="1844813"/>
+                  </a:lnTo>
+                  <a:lnTo>
+                    <a:pt x="3880094" y="1769474"/>
+                  </a:lnTo>
+                  <a:lnTo>
+                    <a:pt x="3950641" y="1690095"/>
+                  </a:lnTo>
+                  <a:lnTo>
+                    <a:pt x="4021188" y="1606458"/>
+                  </a:lnTo>
+                  <a:lnTo>
+                    <a:pt x="4091736" y="1518335"/>
+                  </a:lnTo>
+                  <a:lnTo>
+                    <a:pt x="4162283" y="1425486"/>
+                  </a:lnTo>
+                  <a:lnTo>
+                    <a:pt x="4232830" y="1327656"/>
+                  </a:lnTo>
+                  <a:lnTo>
+                    <a:pt x="4303377" y="1224579"/>
+                  </a:lnTo>
+                  <a:lnTo>
+                    <a:pt x="4373924" y="1115973"/>
+                  </a:lnTo>
+                  <a:lnTo>
+                    <a:pt x="4444471" y="1001542"/>
+                  </a:lnTo>
+                  <a:lnTo>
+                    <a:pt x="4515019" y="880973"/>
+                  </a:lnTo>
+                  <a:lnTo>
+                    <a:pt x="4585566" y="753938"/>
+                  </a:lnTo>
+                  <a:lnTo>
+                    <a:pt x="4656113" y="620088"/>
+                  </a:lnTo>
+                  <a:lnTo>
+                    <a:pt x="4726660" y="479059"/>
+                  </a:lnTo>
+                  <a:lnTo>
+                    <a:pt x="4797207" y="330466"/>
+                  </a:lnTo>
+                  <a:lnTo>
+                    <a:pt x="4867754" y="173902"/>
+                  </a:lnTo>
+                  <a:lnTo>
+                    <a:pt x="4938302" y="8942"/>
+                  </a:lnTo>
+                  <a:lnTo>
+                    <a:pt x="4941931" y="0"/>
+                  </a:lnTo>
+                  <a:lnTo>
+                    <a:pt x="6984170" y="0"/>
+                  </a:lnTo>
+                  <a:lnTo>
+                    <a:pt x="6984170" y="2781040"/>
+                  </a:lnTo>
+                  <a:lnTo>
+                    <a:pt x="6913622" y="2776854"/>
+                  </a:lnTo>
+                  <a:lnTo>
+                    <a:pt x="6843075" y="2772631"/>
+                  </a:lnTo>
+                  <a:lnTo>
+                    <a:pt x="6772528" y="2768371"/>
+                  </a:lnTo>
+                  <a:lnTo>
+                    <a:pt x="6701981" y="2764072"/>
+                  </a:lnTo>
+                  <a:lnTo>
+                    <a:pt x="6631434" y="2759735"/>
+                  </a:lnTo>
+                  <a:lnTo>
+                    <a:pt x="6560887" y="2755359"/>
+                  </a:lnTo>
+                  <a:lnTo>
+                    <a:pt x="6490339" y="2750944"/>
+                  </a:lnTo>
+                  <a:lnTo>
+                    <a:pt x="6419792" y="2746490"/>
+                  </a:lnTo>
+                  <a:lnTo>
+                    <a:pt x="6349245" y="2741996"/>
+                  </a:lnTo>
+                  <a:lnTo>
+                    <a:pt x="6278698" y="2737461"/>
+                  </a:lnTo>
+                  <a:lnTo>
+                    <a:pt x="6208151" y="2732887"/>
+                  </a:lnTo>
+                  <a:lnTo>
+                    <a:pt x="6137604" y="2728271"/>
+                  </a:lnTo>
+                  <a:lnTo>
+                    <a:pt x="6067056" y="2723614"/>
+                  </a:lnTo>
+                  <a:lnTo>
+                    <a:pt x="5996509" y="2718915"/>
+                  </a:lnTo>
+                  <a:lnTo>
+                    <a:pt x="5925962" y="2714175"/>
+                  </a:lnTo>
+                  <a:lnTo>
+                    <a:pt x="5855415" y="2709392"/>
+                  </a:lnTo>
+                  <a:lnTo>
+                    <a:pt x="5784868" y="2704566"/>
+                  </a:lnTo>
+                  <a:lnTo>
+                    <a:pt x="5714320" y="2699697"/>
+                  </a:lnTo>
+                  <a:lnTo>
+                    <a:pt x="5643773" y="2694785"/>
+                  </a:lnTo>
+                  <a:lnTo>
+                    <a:pt x="5573226" y="2689829"/>
+                  </a:lnTo>
+                  <a:lnTo>
+                    <a:pt x="5502679" y="2684828"/>
+                  </a:lnTo>
+                  <a:lnTo>
+                    <a:pt x="5432132" y="2679783"/>
+                  </a:lnTo>
+                  <a:lnTo>
+                    <a:pt x="5361585" y="2674693"/>
+                  </a:lnTo>
+                  <a:lnTo>
+                    <a:pt x="5291037" y="2669557"/>
+                  </a:lnTo>
+                  <a:lnTo>
+                    <a:pt x="5220490" y="2664375"/>
+                  </a:lnTo>
+                  <a:lnTo>
+                    <a:pt x="5149943" y="2659147"/>
+                  </a:lnTo>
+                  <a:lnTo>
+                    <a:pt x="5079396" y="2653872"/>
+                  </a:lnTo>
+                  <a:lnTo>
+                    <a:pt x="5008849" y="2648551"/>
+                  </a:lnTo>
+                  <a:lnTo>
+                    <a:pt x="4938302" y="2643181"/>
+                  </a:lnTo>
+                  <a:lnTo>
+                    <a:pt x="4867754" y="2637764"/>
+                  </a:lnTo>
+                  <a:lnTo>
+                    <a:pt x="4797207" y="2632298"/>
+                  </a:lnTo>
+                  <a:lnTo>
+                    <a:pt x="4726660" y="2626783"/>
+                  </a:lnTo>
+                  <a:lnTo>
+                    <a:pt x="4656113" y="2621219"/>
+                  </a:lnTo>
+                  <a:lnTo>
+                    <a:pt x="4585566" y="2615606"/>
+                  </a:lnTo>
+                  <a:lnTo>
+                    <a:pt x="4515019" y="2609942"/>
+                  </a:lnTo>
+                  <a:lnTo>
+                    <a:pt x="4444471" y="2604228"/>
+                  </a:lnTo>
+                  <a:lnTo>
+                    <a:pt x="4373924" y="2598462"/>
+                  </a:lnTo>
+                  <a:lnTo>
+                    <a:pt x="4303377" y="2592645"/>
+                  </a:lnTo>
+                  <a:lnTo>
+                    <a:pt x="4232830" y="2586776"/>
+                  </a:lnTo>
+                  <a:lnTo>
+                    <a:pt x="4162283" y="2580855"/>
+                  </a:lnTo>
+                  <a:lnTo>
+                    <a:pt x="4091736" y="2574880"/>
+                  </a:lnTo>
+                  <a:lnTo>
+                    <a:pt x="4021188" y="2568853"/>
+                  </a:lnTo>
+                  <a:lnTo>
+                    <a:pt x="3950641" y="2562771"/>
+                  </a:lnTo>
+                  <a:lnTo>
+                    <a:pt x="3880094" y="2556635"/>
+                  </a:lnTo>
+                  <a:lnTo>
+                    <a:pt x="3809547" y="2550444"/>
+                  </a:lnTo>
+                  <a:lnTo>
+                    <a:pt x="3739000" y="2544198"/>
+                  </a:lnTo>
+                  <a:lnTo>
+                    <a:pt x="3668452" y="2537896"/>
+                  </a:lnTo>
+                  <a:lnTo>
+                    <a:pt x="3597905" y="2531538"/>
+                  </a:lnTo>
+                  <a:lnTo>
+                    <a:pt x="3527358" y="2525123"/>
+                  </a:lnTo>
+                  <a:lnTo>
+                    <a:pt x="3456811" y="2518651"/>
+                  </a:lnTo>
+                  <a:lnTo>
+                    <a:pt x="3386264" y="2512120"/>
+                  </a:lnTo>
+                  <a:lnTo>
+                    <a:pt x="3315717" y="2505532"/>
+                  </a:lnTo>
+                  <a:lnTo>
+                    <a:pt x="3245169" y="2498884"/>
+                  </a:lnTo>
+                  <a:lnTo>
+                    <a:pt x="3174622" y="2492178"/>
+                  </a:lnTo>
+                  <a:lnTo>
+                    <a:pt x="3104075" y="2485411"/>
+                  </a:lnTo>
+                  <a:lnTo>
+                    <a:pt x="3033528" y="2478584"/>
+                  </a:lnTo>
+                  <a:lnTo>
+                    <a:pt x="2962981" y="2499066"/>
+                  </a:lnTo>
+                  <a:lnTo>
+                    <a:pt x="2892434" y="2537264"/>
+                  </a:lnTo>
+                  <a:lnTo>
+                    <a:pt x="2821886" y="2573516"/>
+                  </a:lnTo>
+                  <a:lnTo>
+                    <a:pt x="2751339" y="2607924"/>
+                  </a:lnTo>
+                  <a:lnTo>
+                    <a:pt x="2680792" y="2640579"/>
+                  </a:lnTo>
+                  <a:lnTo>
+                    <a:pt x="2610245" y="2671573"/>
+                  </a:lnTo>
+                  <a:lnTo>
+                    <a:pt x="2539698" y="2700988"/>
+                  </a:lnTo>
+                  <a:lnTo>
+                    <a:pt x="2469151" y="2728906"/>
+                  </a:lnTo>
+                  <a:lnTo>
+                    <a:pt x="2398603" y="2755403"/>
+                  </a:lnTo>
+                  <a:lnTo>
+                    <a:pt x="2328056" y="2780551"/>
+                  </a:lnTo>
+                  <a:lnTo>
+                    <a:pt x="2257509" y="2804419"/>
+                  </a:lnTo>
+                  <a:lnTo>
+                    <a:pt x="2186962" y="2827072"/>
+                  </a:lnTo>
+                  <a:lnTo>
+                    <a:pt x="2116415" y="2848572"/>
+                  </a:lnTo>
+                  <a:lnTo>
+                    <a:pt x="2045868" y="2868977"/>
+                  </a:lnTo>
+                  <a:lnTo>
+                    <a:pt x="1975320" y="2888343"/>
+                  </a:lnTo>
+                  <a:lnTo>
+                    <a:pt x="1904773" y="2906724"/>
+                  </a:lnTo>
+                  <a:lnTo>
+                    <a:pt x="1834226" y="2924169"/>
+                  </a:lnTo>
+                  <a:lnTo>
+                    <a:pt x="1763679" y="2940725"/>
+                  </a:lnTo>
+                  <a:lnTo>
+                    <a:pt x="1693132" y="2956439"/>
+                  </a:lnTo>
+                  <a:lnTo>
+                    <a:pt x="1622584" y="2971353"/>
+                  </a:lnTo>
+                  <a:lnTo>
+                    <a:pt x="1552037" y="2985508"/>
+                  </a:lnTo>
+                  <a:lnTo>
+                    <a:pt x="1481490" y="2998942"/>
+                  </a:lnTo>
+                  <a:lnTo>
+                    <a:pt x="1410943" y="3011693"/>
+                  </a:lnTo>
+                  <a:lnTo>
+                    <a:pt x="1340396" y="3023794"/>
+                  </a:lnTo>
+                  <a:lnTo>
+                    <a:pt x="1269849" y="3035279"/>
+                  </a:lnTo>
+                  <a:lnTo>
+                    <a:pt x="1199301" y="3046180"/>
+                  </a:lnTo>
+                  <a:lnTo>
+                    <a:pt x="1128754" y="3056525"/>
+                  </a:lnTo>
+                  <a:lnTo>
+                    <a:pt x="1058207" y="3066344"/>
+                  </a:lnTo>
+                  <a:lnTo>
+                    <a:pt x="987660" y="3075663"/>
+                  </a:lnTo>
+                  <a:lnTo>
+                    <a:pt x="917113" y="3084508"/>
+                  </a:lnTo>
+                  <a:lnTo>
+                    <a:pt x="846566" y="3092903"/>
+                  </a:lnTo>
+                  <a:lnTo>
+                    <a:pt x="776018" y="3100870"/>
+                  </a:lnTo>
+                  <a:lnTo>
+                    <a:pt x="705471" y="3108431"/>
+                  </a:lnTo>
+                  <a:lnTo>
+                    <a:pt x="634924" y="3115608"/>
+                  </a:lnTo>
+                  <a:lnTo>
+                    <a:pt x="564377" y="3122419"/>
+                  </a:lnTo>
+                  <a:lnTo>
+                    <a:pt x="493830" y="3128884"/>
+                  </a:lnTo>
+                  <a:lnTo>
+                    <a:pt x="423283" y="3135019"/>
+                  </a:lnTo>
+                  <a:lnTo>
+                    <a:pt x="352735" y="3140842"/>
+                  </a:lnTo>
+                  <a:lnTo>
+                    <a:pt x="282188" y="3146369"/>
+                  </a:lnTo>
+                  <a:lnTo>
+                    <a:pt x="211641" y="3151614"/>
+                  </a:lnTo>
+                  <a:lnTo>
+                    <a:pt x="141094" y="3156593"/>
+                  </a:lnTo>
+                  <a:lnTo>
+                    <a:pt x="70547" y="3161318"/>
+                  </a:lnTo>
+                  <a:lnTo>
+                    <a:pt x="0" y="3165802"/>
                   </a:lnTo>
                   <a:close/>
                 </a:path>
@@ -3681,228 +3681,228 @@
           </p:nvSpPr>
           <p:spPr>
             <a:xfrm>
-              <a:off x="1172049" y="2073503"/>
-              <a:ext cx="5017261" cy="2649948"/>
+              <a:off x="1264853" y="2209169"/>
+              <a:ext cx="4941931" cy="2471695"/>
             </a:xfrm>
             <a:custGeom>
               <a:avLst/>
               <a:pathLst>
-                <a:path w="5017261" h="2649948">
+                <a:path w="4941931" h="2471695">
                   <a:moveTo>
-                    <a:pt x="0" y="2272207"/>
+                    <a:pt x="0" y="2119364"/>
                   </a:moveTo>
                   <a:lnTo>
-                    <a:pt x="71622" y="2282938"/>
-                  </a:lnTo>
-                  <a:lnTo>
-                    <a:pt x="143245" y="2293574"/>
-                  </a:lnTo>
-                  <a:lnTo>
-                    <a:pt x="214867" y="2304115"/>
-                  </a:lnTo>
-                  <a:lnTo>
-                    <a:pt x="286490" y="2314563"/>
-                  </a:lnTo>
-                  <a:lnTo>
-                    <a:pt x="358112" y="2324919"/>
-                  </a:lnTo>
-                  <a:lnTo>
-                    <a:pt x="429735" y="2335183"/>
-                  </a:lnTo>
-                  <a:lnTo>
-                    <a:pt x="501357" y="2345355"/>
-                  </a:lnTo>
-                  <a:lnTo>
-                    <a:pt x="572980" y="2355438"/>
-                  </a:lnTo>
-                  <a:lnTo>
-                    <a:pt x="644602" y="2365432"/>
-                  </a:lnTo>
-                  <a:lnTo>
-                    <a:pt x="716225" y="2375337"/>
-                  </a:lnTo>
-                  <a:lnTo>
-                    <a:pt x="787847" y="2385154"/>
-                  </a:lnTo>
-                  <a:lnTo>
-                    <a:pt x="859470" y="2394884"/>
-                  </a:lnTo>
-                  <a:lnTo>
-                    <a:pt x="931092" y="2404529"/>
-                  </a:lnTo>
-                  <a:lnTo>
-                    <a:pt x="1002715" y="2414087"/>
-                  </a:lnTo>
-                  <a:lnTo>
-                    <a:pt x="1074337" y="2423561"/>
-                  </a:lnTo>
-                  <a:lnTo>
-                    <a:pt x="1145960" y="2432951"/>
-                  </a:lnTo>
-                  <a:lnTo>
-                    <a:pt x="1217582" y="2442258"/>
-                  </a:lnTo>
-                  <a:lnTo>
-                    <a:pt x="1289205" y="2451483"/>
-                  </a:lnTo>
-                  <a:lnTo>
-                    <a:pt x="1360827" y="2460626"/>
-                  </a:lnTo>
-                  <a:lnTo>
-                    <a:pt x="1432450" y="2469688"/>
-                  </a:lnTo>
-                  <a:lnTo>
-                    <a:pt x="1504073" y="2478669"/>
-                  </a:lnTo>
-                  <a:lnTo>
-                    <a:pt x="1575695" y="2487571"/>
-                  </a:lnTo>
-                  <a:lnTo>
-                    <a:pt x="1647318" y="2496395"/>
-                  </a:lnTo>
-                  <a:lnTo>
-                    <a:pt x="1718940" y="2505140"/>
-                  </a:lnTo>
-                  <a:lnTo>
-                    <a:pt x="1790563" y="2513807"/>
-                  </a:lnTo>
-                  <a:lnTo>
-                    <a:pt x="1862185" y="2522398"/>
-                  </a:lnTo>
-                  <a:lnTo>
-                    <a:pt x="1933808" y="2530913"/>
-                  </a:lnTo>
-                  <a:lnTo>
-                    <a:pt x="2005430" y="2539352"/>
-                  </a:lnTo>
-                  <a:lnTo>
-                    <a:pt x="2077053" y="2547717"/>
-                  </a:lnTo>
-                  <a:lnTo>
-                    <a:pt x="2148675" y="2556007"/>
-                  </a:lnTo>
-                  <a:lnTo>
-                    <a:pt x="2220298" y="2564224"/>
-                  </a:lnTo>
-                  <a:lnTo>
-                    <a:pt x="2291920" y="2572369"/>
-                  </a:lnTo>
-                  <a:lnTo>
-                    <a:pt x="2363543" y="2580441"/>
-                  </a:lnTo>
-                  <a:lnTo>
-                    <a:pt x="2435165" y="2588441"/>
-                  </a:lnTo>
-                  <a:lnTo>
-                    <a:pt x="2506788" y="2596371"/>
-                  </a:lnTo>
-                  <a:lnTo>
-                    <a:pt x="2578410" y="2604231"/>
-                  </a:lnTo>
-                  <a:lnTo>
-                    <a:pt x="2650033" y="2612021"/>
-                  </a:lnTo>
-                  <a:lnTo>
-                    <a:pt x="2721655" y="2619742"/>
-                  </a:lnTo>
-                  <a:lnTo>
-                    <a:pt x="2793278" y="2627394"/>
-                  </a:lnTo>
-                  <a:lnTo>
-                    <a:pt x="2864901" y="2634979"/>
-                  </a:lnTo>
-                  <a:lnTo>
-                    <a:pt x="2936523" y="2642497"/>
-                  </a:lnTo>
-                  <a:lnTo>
-                    <a:pt x="3008146" y="2649948"/>
-                  </a:lnTo>
-                  <a:lnTo>
-                    <a:pt x="3079768" y="2636144"/>
-                  </a:lnTo>
-                  <a:lnTo>
-                    <a:pt x="3151391" y="2590681"/>
-                  </a:lnTo>
-                  <a:lnTo>
-                    <a:pt x="3223013" y="2542780"/>
-                  </a:lnTo>
-                  <a:lnTo>
-                    <a:pt x="3294636" y="2492309"/>
-                  </a:lnTo>
-                  <a:lnTo>
-                    <a:pt x="3366258" y="2439131"/>
-                  </a:lnTo>
-                  <a:lnTo>
-                    <a:pt x="3437881" y="2383101"/>
-                  </a:lnTo>
-                  <a:lnTo>
-                    <a:pt x="3509503" y="2324066"/>
-                  </a:lnTo>
-                  <a:lnTo>
-                    <a:pt x="3581126" y="2261864"/>
-                  </a:lnTo>
-                  <a:lnTo>
-                    <a:pt x="3652748" y="2196326"/>
-                  </a:lnTo>
-                  <a:lnTo>
-                    <a:pt x="3724371" y="2127273"/>
-                  </a:lnTo>
-                  <a:lnTo>
-                    <a:pt x="3795993" y="2054515"/>
-                  </a:lnTo>
-                  <a:lnTo>
-                    <a:pt x="3867616" y="1977856"/>
-                  </a:lnTo>
-                  <a:lnTo>
-                    <a:pt x="3939238" y="1897084"/>
-                  </a:lnTo>
-                  <a:lnTo>
-                    <a:pt x="4010861" y="1811980"/>
-                  </a:lnTo>
-                  <a:lnTo>
-                    <a:pt x="4082483" y="1722312"/>
-                  </a:lnTo>
-                  <a:lnTo>
-                    <a:pt x="4154106" y="1627834"/>
-                  </a:lnTo>
-                  <a:lnTo>
-                    <a:pt x="4225729" y="1528288"/>
-                  </a:lnTo>
-                  <a:lnTo>
-                    <a:pt x="4297351" y="1423403"/>
-                  </a:lnTo>
-                  <a:lnTo>
-                    <a:pt x="4368974" y="1312892"/>
-                  </a:lnTo>
-                  <a:lnTo>
-                    <a:pt x="4440596" y="1196454"/>
-                  </a:lnTo>
-                  <a:lnTo>
-                    <a:pt x="4512219" y="1073771"/>
-                  </a:lnTo>
-                  <a:lnTo>
-                    <a:pt x="4583841" y="944507"/>
-                  </a:lnTo>
-                  <a:lnTo>
-                    <a:pt x="4655464" y="808310"/>
-                  </a:lnTo>
-                  <a:lnTo>
-                    <a:pt x="4727086" y="664807"/>
-                  </a:lnTo>
-                  <a:lnTo>
-                    <a:pt x="4798709" y="513608"/>
-                  </a:lnTo>
-                  <a:lnTo>
-                    <a:pt x="4870331" y="354298"/>
-                  </a:lnTo>
-                  <a:lnTo>
-                    <a:pt x="4941954" y="186444"/>
-                  </a:lnTo>
-                  <a:lnTo>
-                    <a:pt x="5013576" y="9586"/>
-                  </a:lnTo>
-                  <a:lnTo>
-                    <a:pt x="5017261" y="0"/>
+                    <a:pt x="70547" y="2129373"/>
+                  </a:lnTo>
+                  <a:lnTo>
+                    <a:pt x="141094" y="2139293"/>
+                  </a:lnTo>
+                  <a:lnTo>
+                    <a:pt x="211641" y="2149126"/>
+                  </a:lnTo>
+                  <a:lnTo>
+                    <a:pt x="282188" y="2158871"/>
+                  </a:lnTo>
+                  <a:lnTo>
+                    <a:pt x="352735" y="2168530"/>
+                  </a:lnTo>
+                  <a:lnTo>
+                    <a:pt x="423283" y="2178103"/>
+                  </a:lnTo>
+                  <a:lnTo>
+                    <a:pt x="493830" y="2187592"/>
+                  </a:lnTo>
+                  <a:lnTo>
+                    <a:pt x="564377" y="2196997"/>
+                  </a:lnTo>
+                  <a:lnTo>
+                    <a:pt x="634924" y="2206318"/>
+                  </a:lnTo>
+                  <a:lnTo>
+                    <a:pt x="705471" y="2215557"/>
+                  </a:lnTo>
+                  <a:lnTo>
+                    <a:pt x="776018" y="2224714"/>
+                  </a:lnTo>
+                  <a:lnTo>
+                    <a:pt x="846566" y="2233789"/>
+                  </a:lnTo>
+                  <a:lnTo>
+                    <a:pt x="917113" y="2242785"/>
+                  </a:lnTo>
+                  <a:lnTo>
+                    <a:pt x="987660" y="2251700"/>
+                  </a:lnTo>
+                  <a:lnTo>
+                    <a:pt x="1058207" y="2260537"/>
+                  </a:lnTo>
+                  <a:lnTo>
+                    <a:pt x="1128754" y="2269296"/>
+                  </a:lnTo>
+                  <a:lnTo>
+                    <a:pt x="1199301" y="2277977"/>
+                  </a:lnTo>
+                  <a:lnTo>
+                    <a:pt x="1269849" y="2286581"/>
+                  </a:lnTo>
+                  <a:lnTo>
+                    <a:pt x="1340396" y="2295109"/>
+                  </a:lnTo>
+                  <a:lnTo>
+                    <a:pt x="1410943" y="2303561"/>
+                  </a:lnTo>
+                  <a:lnTo>
+                    <a:pt x="1481490" y="2311938"/>
+                  </a:lnTo>
+                  <a:lnTo>
+                    <a:pt x="1552037" y="2320242"/>
+                  </a:lnTo>
+                  <a:lnTo>
+                    <a:pt x="1622584" y="2328471"/>
+                  </a:lnTo>
+                  <a:lnTo>
+                    <a:pt x="1693132" y="2336628"/>
+                  </a:lnTo>
+                  <a:lnTo>
+                    <a:pt x="1763679" y="2344713"/>
+                  </a:lnTo>
+                  <a:lnTo>
+                    <a:pt x="1834226" y="2352726"/>
+                  </a:lnTo>
+                  <a:lnTo>
+                    <a:pt x="1904773" y="2360668"/>
+                  </a:lnTo>
+                  <a:lnTo>
+                    <a:pt x="1975320" y="2368539"/>
+                  </a:lnTo>
+                  <a:lnTo>
+                    <a:pt x="2045868" y="2376341"/>
+                  </a:lnTo>
+                  <a:lnTo>
+                    <a:pt x="2116415" y="2384074"/>
+                  </a:lnTo>
+                  <a:lnTo>
+                    <a:pt x="2186962" y="2391738"/>
+                  </a:lnTo>
+                  <a:lnTo>
+                    <a:pt x="2257509" y="2399335"/>
+                  </a:lnTo>
+                  <a:lnTo>
+                    <a:pt x="2328056" y="2406864"/>
+                  </a:lnTo>
+                  <a:lnTo>
+                    <a:pt x="2398603" y="2414326"/>
+                  </a:lnTo>
+                  <a:lnTo>
+                    <a:pt x="2469151" y="2421723"/>
+                  </a:lnTo>
+                  <a:lnTo>
+                    <a:pt x="2539698" y="2429054"/>
+                  </a:lnTo>
+                  <a:lnTo>
+                    <a:pt x="2610245" y="2436320"/>
+                  </a:lnTo>
+                  <a:lnTo>
+                    <a:pt x="2680792" y="2443521"/>
+                  </a:lnTo>
+                  <a:lnTo>
+                    <a:pt x="2751339" y="2450659"/>
+                  </a:lnTo>
+                  <a:lnTo>
+                    <a:pt x="2821886" y="2457734"/>
+                  </a:lnTo>
+                  <a:lnTo>
+                    <a:pt x="2892434" y="2464745"/>
+                  </a:lnTo>
+                  <a:lnTo>
+                    <a:pt x="2962981" y="2471695"/>
+                  </a:lnTo>
+                  <a:lnTo>
+                    <a:pt x="3033528" y="2458820"/>
+                  </a:lnTo>
+                  <a:lnTo>
+                    <a:pt x="3104075" y="2416416"/>
+                  </a:lnTo>
+                  <a:lnTo>
+                    <a:pt x="3174622" y="2371736"/>
+                  </a:lnTo>
+                  <a:lnTo>
+                    <a:pt x="3245169" y="2324661"/>
+                  </a:lnTo>
+                  <a:lnTo>
+                    <a:pt x="3315717" y="2275060"/>
+                  </a:lnTo>
+                  <a:lnTo>
+                    <a:pt x="3386264" y="2222799"/>
+                  </a:lnTo>
+                  <a:lnTo>
+                    <a:pt x="3456811" y="2167735"/>
+                  </a:lnTo>
+                  <a:lnTo>
+                    <a:pt x="3527358" y="2109717"/>
+                  </a:lnTo>
+                  <a:lnTo>
+                    <a:pt x="3597905" y="2048587"/>
+                  </a:lnTo>
+                  <a:lnTo>
+                    <a:pt x="3668452" y="1984179"/>
+                  </a:lnTo>
+                  <a:lnTo>
+                    <a:pt x="3739000" y="1916316"/>
+                  </a:lnTo>
+                  <a:lnTo>
+                    <a:pt x="3809547" y="1844813"/>
+                  </a:lnTo>
+                  <a:lnTo>
+                    <a:pt x="3880094" y="1769474"/>
+                  </a:lnTo>
+                  <a:lnTo>
+                    <a:pt x="3950641" y="1690095"/>
+                  </a:lnTo>
+                  <a:lnTo>
+                    <a:pt x="4021188" y="1606458"/>
+                  </a:lnTo>
+                  <a:lnTo>
+                    <a:pt x="4091736" y="1518335"/>
+                  </a:lnTo>
+                  <a:lnTo>
+                    <a:pt x="4162283" y="1425486"/>
+                  </a:lnTo>
+                  <a:lnTo>
+                    <a:pt x="4232830" y="1327656"/>
+                  </a:lnTo>
+                  <a:lnTo>
+                    <a:pt x="4303377" y="1224579"/>
+                  </a:lnTo>
+                  <a:lnTo>
+                    <a:pt x="4373924" y="1115973"/>
+                  </a:lnTo>
+                  <a:lnTo>
+                    <a:pt x="4444471" y="1001542"/>
+                  </a:lnTo>
+                  <a:lnTo>
+                    <a:pt x="4515019" y="880973"/>
+                  </a:lnTo>
+                  <a:lnTo>
+                    <a:pt x="4585566" y="753938"/>
+                  </a:lnTo>
+                  <a:lnTo>
+                    <a:pt x="4656113" y="620088"/>
+                  </a:lnTo>
+                  <a:lnTo>
+                    <a:pt x="4726660" y="479059"/>
+                  </a:lnTo>
+                  <a:lnTo>
+                    <a:pt x="4797207" y="330466"/>
+                  </a:lnTo>
+                  <a:lnTo>
+                    <a:pt x="4867754" y="173902"/>
+                  </a:lnTo>
+                  <a:lnTo>
+                    <a:pt x="4938302" y="8942"/>
+                  </a:lnTo>
+                  <a:lnTo>
+                    <a:pt x="4941931" y="0"/>
                   </a:lnTo>
                 </a:path>
               </a:pathLst>
@@ -3922,312 +3922,312 @@
           </p:nvSpPr>
           <p:spPr>
             <a:xfrm>
-              <a:off x="1172049" y="4730836"/>
-              <a:ext cx="7090630" cy="736778"/>
+              <a:off x="1264853" y="4687753"/>
+              <a:ext cx="6984170" cy="687218"/>
             </a:xfrm>
             <a:custGeom>
               <a:avLst/>
               <a:pathLst>
-                <a:path w="7090630" h="736778">
+                <a:path w="6984170" h="687218">
                   <a:moveTo>
-                    <a:pt x="7090630" y="324268"/>
+                    <a:pt x="6984170" y="302456"/>
                   </a:moveTo>
                   <a:lnTo>
-                    <a:pt x="7019007" y="319781"/>
-                  </a:lnTo>
-                  <a:lnTo>
-                    <a:pt x="6947385" y="315253"/>
-                  </a:lnTo>
-                  <a:lnTo>
-                    <a:pt x="6875762" y="310686"/>
-                  </a:lnTo>
-                  <a:lnTo>
-                    <a:pt x="6804139" y="306077"/>
-                  </a:lnTo>
-                  <a:lnTo>
-                    <a:pt x="6732517" y="301427"/>
-                  </a:lnTo>
-                  <a:lnTo>
-                    <a:pt x="6660894" y="296736"/>
-                  </a:lnTo>
-                  <a:lnTo>
-                    <a:pt x="6589272" y="292002"/>
-                  </a:lnTo>
-                  <a:lnTo>
-                    <a:pt x="6517649" y="287227"/>
-                  </a:lnTo>
-                  <a:lnTo>
-                    <a:pt x="6446027" y="282408"/>
-                  </a:lnTo>
-                  <a:lnTo>
-                    <a:pt x="6374404" y="277547"/>
-                  </a:lnTo>
-                  <a:lnTo>
-                    <a:pt x="6302782" y="272642"/>
-                  </a:lnTo>
-                  <a:lnTo>
-                    <a:pt x="6231159" y="267694"/>
-                  </a:lnTo>
-                  <a:lnTo>
-                    <a:pt x="6159537" y="262701"/>
-                  </a:lnTo>
-                  <a:lnTo>
-                    <a:pt x="6087914" y="257663"/>
-                  </a:lnTo>
-                  <a:lnTo>
-                    <a:pt x="6016292" y="252581"/>
-                  </a:lnTo>
-                  <a:lnTo>
-                    <a:pt x="5944669" y="247453"/>
-                  </a:lnTo>
-                  <a:lnTo>
-                    <a:pt x="5873047" y="242279"/>
-                  </a:lnTo>
-                  <a:lnTo>
-                    <a:pt x="5801424" y="237059"/>
-                  </a:lnTo>
-                  <a:lnTo>
-                    <a:pt x="5729802" y="231793"/>
-                  </a:lnTo>
-                  <a:lnTo>
-                    <a:pt x="5658179" y="226479"/>
-                  </a:lnTo>
-                  <a:lnTo>
-                    <a:pt x="5586557" y="221118"/>
-                  </a:lnTo>
-                  <a:lnTo>
-                    <a:pt x="5514934" y="215709"/>
-                  </a:lnTo>
-                  <a:lnTo>
-                    <a:pt x="5443311" y="210251"/>
-                  </a:lnTo>
-                  <a:lnTo>
-                    <a:pt x="5371689" y="204745"/>
-                  </a:lnTo>
-                  <a:lnTo>
-                    <a:pt x="5300066" y="199190"/>
-                  </a:lnTo>
-                  <a:lnTo>
-                    <a:pt x="5228444" y="193585"/>
-                  </a:lnTo>
-                  <a:lnTo>
-                    <a:pt x="5156821" y="187930"/>
-                  </a:lnTo>
-                  <a:lnTo>
-                    <a:pt x="5085199" y="182224"/>
-                  </a:lnTo>
-                  <a:lnTo>
-                    <a:pt x="5013576" y="176467"/>
-                  </a:lnTo>
-                  <a:lnTo>
-                    <a:pt x="4941954" y="170659"/>
-                  </a:lnTo>
-                  <a:lnTo>
-                    <a:pt x="4870331" y="164799"/>
-                  </a:lnTo>
-                  <a:lnTo>
-                    <a:pt x="4798709" y="158887"/>
-                  </a:lnTo>
-                  <a:lnTo>
-                    <a:pt x="4727086" y="152922"/>
-                  </a:lnTo>
-                  <a:lnTo>
-                    <a:pt x="4655464" y="146903"/>
-                  </a:lnTo>
-                  <a:lnTo>
-                    <a:pt x="4583841" y="140831"/>
-                  </a:lnTo>
-                  <a:lnTo>
-                    <a:pt x="4512219" y="134705"/>
-                  </a:lnTo>
-                  <a:lnTo>
-                    <a:pt x="4440596" y="128523"/>
-                  </a:lnTo>
-                  <a:lnTo>
-                    <a:pt x="4368974" y="122287"/>
-                  </a:lnTo>
-                  <a:lnTo>
-                    <a:pt x="4297351" y="115995"/>
-                  </a:lnTo>
-                  <a:lnTo>
-                    <a:pt x="4225729" y="109646"/>
-                  </a:lnTo>
-                  <a:lnTo>
-                    <a:pt x="4154106" y="103241"/>
-                  </a:lnTo>
-                  <a:lnTo>
-                    <a:pt x="4082483" y="96779"/>
-                  </a:lnTo>
-                  <a:lnTo>
-                    <a:pt x="4010861" y="90258"/>
-                  </a:lnTo>
-                  <a:lnTo>
-                    <a:pt x="3939238" y="83680"/>
-                  </a:lnTo>
-                  <a:lnTo>
-                    <a:pt x="3867616" y="77043"/>
-                  </a:lnTo>
-                  <a:lnTo>
-                    <a:pt x="3795993" y="70346"/>
-                  </a:lnTo>
-                  <a:lnTo>
-                    <a:pt x="3724371" y="63590"/>
-                  </a:lnTo>
-                  <a:lnTo>
-                    <a:pt x="3652748" y="56773"/>
-                  </a:lnTo>
-                  <a:lnTo>
-                    <a:pt x="3581126" y="49895"/>
-                  </a:lnTo>
-                  <a:lnTo>
-                    <a:pt x="3509503" y="42956"/>
-                  </a:lnTo>
-                  <a:lnTo>
-                    <a:pt x="3437881" y="35955"/>
-                  </a:lnTo>
-                  <a:lnTo>
-                    <a:pt x="3366258" y="28891"/>
-                  </a:lnTo>
-                  <a:lnTo>
-                    <a:pt x="3294636" y="21764"/>
-                  </a:lnTo>
-                  <a:lnTo>
-                    <a:pt x="3223013" y="14574"/>
-                  </a:lnTo>
-                  <a:lnTo>
-                    <a:pt x="3151391" y="7319"/>
-                  </a:lnTo>
-                  <a:lnTo>
-                    <a:pt x="3079768" y="0"/>
-                  </a:lnTo>
-                  <a:lnTo>
-                    <a:pt x="3008146" y="21959"/>
-                  </a:lnTo>
-                  <a:lnTo>
-                    <a:pt x="2936523" y="62911"/>
-                  </a:lnTo>
-                  <a:lnTo>
-                    <a:pt x="2864901" y="101779"/>
-                  </a:lnTo>
-                  <a:lnTo>
-                    <a:pt x="2793278" y="138667"/>
-                  </a:lnTo>
-                  <a:lnTo>
-                    <a:pt x="2721655" y="173678"/>
-                  </a:lnTo>
-                  <a:lnTo>
-                    <a:pt x="2650033" y="206907"/>
-                  </a:lnTo>
-                  <a:lnTo>
-                    <a:pt x="2578410" y="238444"/>
-                  </a:lnTo>
-                  <a:lnTo>
-                    <a:pt x="2506788" y="268375"/>
-                  </a:lnTo>
-                  <a:lnTo>
-                    <a:pt x="2435165" y="296783"/>
-                  </a:lnTo>
-                  <a:lnTo>
-                    <a:pt x="2363543" y="323745"/>
-                  </a:lnTo>
-                  <a:lnTo>
-                    <a:pt x="2291920" y="349334"/>
-                  </a:lnTo>
-                  <a:lnTo>
-                    <a:pt x="2220298" y="373620"/>
-                  </a:lnTo>
-                  <a:lnTo>
-                    <a:pt x="2148675" y="396670"/>
-                  </a:lnTo>
-                  <a:lnTo>
-                    <a:pt x="2077053" y="418547"/>
-                  </a:lnTo>
-                  <a:lnTo>
-                    <a:pt x="2005430" y="439310"/>
-                  </a:lnTo>
-                  <a:lnTo>
-                    <a:pt x="1933808" y="459016"/>
-                  </a:lnTo>
-                  <a:lnTo>
-                    <a:pt x="1862185" y="477719"/>
-                  </a:lnTo>
-                  <a:lnTo>
-                    <a:pt x="1790563" y="495470"/>
-                  </a:lnTo>
-                  <a:lnTo>
-                    <a:pt x="1718940" y="512317"/>
-                  </a:lnTo>
-                  <a:lnTo>
-                    <a:pt x="1647318" y="528307"/>
-                  </a:lnTo>
-                  <a:lnTo>
-                    <a:pt x="1575695" y="543482"/>
-                  </a:lnTo>
-                  <a:lnTo>
-                    <a:pt x="1504073" y="557885"/>
-                  </a:lnTo>
-                  <a:lnTo>
-                    <a:pt x="1432450" y="571555"/>
-                  </a:lnTo>
-                  <a:lnTo>
-                    <a:pt x="1360827" y="584529"/>
-                  </a:lnTo>
-                  <a:lnTo>
-                    <a:pt x="1289205" y="596843"/>
-                  </a:lnTo>
-                  <a:lnTo>
-                    <a:pt x="1217582" y="608529"/>
-                  </a:lnTo>
-                  <a:lnTo>
-                    <a:pt x="1145960" y="619621"/>
-                  </a:lnTo>
-                  <a:lnTo>
-                    <a:pt x="1074337" y="630148"/>
-                  </a:lnTo>
-                  <a:lnTo>
-                    <a:pt x="1002715" y="640139"/>
-                  </a:lnTo>
-                  <a:lnTo>
-                    <a:pt x="931092" y="649622"/>
-                  </a:lnTo>
-                  <a:lnTo>
-                    <a:pt x="859470" y="658622"/>
-                  </a:lnTo>
-                  <a:lnTo>
-                    <a:pt x="787847" y="667163"/>
-                  </a:lnTo>
-                  <a:lnTo>
-                    <a:pt x="716225" y="675270"/>
-                  </a:lnTo>
-                  <a:lnTo>
-                    <a:pt x="644602" y="682964"/>
-                  </a:lnTo>
-                  <a:lnTo>
-                    <a:pt x="572980" y="690267"/>
-                  </a:lnTo>
-                  <a:lnTo>
-                    <a:pt x="501357" y="697198"/>
-                  </a:lnTo>
-                  <a:lnTo>
-                    <a:pt x="429735" y="703776"/>
-                  </a:lnTo>
-                  <a:lnTo>
-                    <a:pt x="358112" y="710019"/>
-                  </a:lnTo>
-                  <a:lnTo>
-                    <a:pt x="286490" y="715944"/>
-                  </a:lnTo>
-                  <a:lnTo>
-                    <a:pt x="214867" y="721568"/>
-                  </a:lnTo>
-                  <a:lnTo>
-                    <a:pt x="143245" y="726905"/>
-                  </a:lnTo>
-                  <a:lnTo>
-                    <a:pt x="71622" y="731970"/>
-                  </a:lnTo>
-                  <a:lnTo>
-                    <a:pt x="0" y="736778"/>
+                    <a:pt x="6913622" y="298270"/>
+                  </a:lnTo>
+                  <a:lnTo>
+                    <a:pt x="6843075" y="294047"/>
+                  </a:lnTo>
+                  <a:lnTo>
+                    <a:pt x="6772528" y="289787"/>
+                  </a:lnTo>
+                  <a:lnTo>
+                    <a:pt x="6701981" y="285488"/>
+                  </a:lnTo>
+                  <a:lnTo>
+                    <a:pt x="6631434" y="281151"/>
+                  </a:lnTo>
+                  <a:lnTo>
+                    <a:pt x="6560887" y="276775"/>
+                  </a:lnTo>
+                  <a:lnTo>
+                    <a:pt x="6490339" y="272360"/>
+                  </a:lnTo>
+                  <a:lnTo>
+                    <a:pt x="6419792" y="267906"/>
+                  </a:lnTo>
+                  <a:lnTo>
+                    <a:pt x="6349245" y="263412"/>
+                  </a:lnTo>
+                  <a:lnTo>
+                    <a:pt x="6278698" y="258877"/>
+                  </a:lnTo>
+                  <a:lnTo>
+                    <a:pt x="6208151" y="254303"/>
+                  </a:lnTo>
+                  <a:lnTo>
+                    <a:pt x="6137604" y="249687"/>
+                  </a:lnTo>
+                  <a:lnTo>
+                    <a:pt x="6067056" y="245030"/>
+                  </a:lnTo>
+                  <a:lnTo>
+                    <a:pt x="5996509" y="240331"/>
+                  </a:lnTo>
+                  <a:lnTo>
+                    <a:pt x="5925962" y="235591"/>
+                  </a:lnTo>
+                  <a:lnTo>
+                    <a:pt x="5855415" y="230808"/>
+                  </a:lnTo>
+                  <a:lnTo>
+                    <a:pt x="5784868" y="225982"/>
+                  </a:lnTo>
+                  <a:lnTo>
+                    <a:pt x="5714320" y="221113"/>
+                  </a:lnTo>
+                  <a:lnTo>
+                    <a:pt x="5643773" y="216201"/>
+                  </a:lnTo>
+                  <a:lnTo>
+                    <a:pt x="5573226" y="211245"/>
+                  </a:lnTo>
+                  <a:lnTo>
+                    <a:pt x="5502679" y="206244"/>
+                  </a:lnTo>
+                  <a:lnTo>
+                    <a:pt x="5432132" y="201199"/>
+                  </a:lnTo>
+                  <a:lnTo>
+                    <a:pt x="5361585" y="196108"/>
+                  </a:lnTo>
+                  <a:lnTo>
+                    <a:pt x="5291037" y="190973"/>
+                  </a:lnTo>
+                  <a:lnTo>
+                    <a:pt x="5220490" y="185791"/>
+                  </a:lnTo>
+                  <a:lnTo>
+                    <a:pt x="5149943" y="180563"/>
+                  </a:lnTo>
+                  <a:lnTo>
+                    <a:pt x="5079396" y="175288"/>
+                  </a:lnTo>
+                  <a:lnTo>
+                    <a:pt x="5008849" y="169966"/>
+                  </a:lnTo>
+                  <a:lnTo>
+                    <a:pt x="4938302" y="164597"/>
+                  </a:lnTo>
+                  <a:lnTo>
+                    <a:pt x="4867754" y="159180"/>
+                  </a:lnTo>
+                  <a:lnTo>
+                    <a:pt x="4797207" y="153714"/>
+                  </a:lnTo>
+                  <a:lnTo>
+                    <a:pt x="4726660" y="148199"/>
+                  </a:lnTo>
+                  <a:lnTo>
+                    <a:pt x="4656113" y="142635"/>
+                  </a:lnTo>
+                  <a:lnTo>
+                    <a:pt x="4585566" y="137022"/>
+                  </a:lnTo>
+                  <a:lnTo>
+                    <a:pt x="4515019" y="131358"/>
+                  </a:lnTo>
+                  <a:lnTo>
+                    <a:pt x="4444471" y="125644"/>
+                  </a:lnTo>
+                  <a:lnTo>
+                    <a:pt x="4373924" y="119878"/>
+                  </a:lnTo>
+                  <a:lnTo>
+                    <a:pt x="4303377" y="114061"/>
+                  </a:lnTo>
+                  <a:lnTo>
+                    <a:pt x="4232830" y="108192"/>
+                  </a:lnTo>
+                  <a:lnTo>
+                    <a:pt x="4162283" y="102271"/>
+                  </a:lnTo>
+                  <a:lnTo>
+                    <a:pt x="4091736" y="96296"/>
+                  </a:lnTo>
+                  <a:lnTo>
+                    <a:pt x="4021188" y="90269"/>
+                  </a:lnTo>
+                  <a:lnTo>
+                    <a:pt x="3950641" y="84187"/>
+                  </a:lnTo>
+                  <a:lnTo>
+                    <a:pt x="3880094" y="78051"/>
+                  </a:lnTo>
+                  <a:lnTo>
+                    <a:pt x="3809547" y="71860"/>
+                  </a:lnTo>
+                  <a:lnTo>
+                    <a:pt x="3739000" y="65614"/>
+                  </a:lnTo>
+                  <a:lnTo>
+                    <a:pt x="3668452" y="59312"/>
+                  </a:lnTo>
+                  <a:lnTo>
+                    <a:pt x="3597905" y="52954"/>
+                  </a:lnTo>
+                  <a:lnTo>
+                    <a:pt x="3527358" y="46539"/>
+                  </a:lnTo>
+                  <a:lnTo>
+                    <a:pt x="3456811" y="40067"/>
+                  </a:lnTo>
+                  <a:lnTo>
+                    <a:pt x="3386264" y="33536"/>
+                  </a:lnTo>
+                  <a:lnTo>
+                    <a:pt x="3315717" y="26948"/>
+                  </a:lnTo>
+                  <a:lnTo>
+                    <a:pt x="3245169" y="20300"/>
+                  </a:lnTo>
+                  <a:lnTo>
+                    <a:pt x="3174622" y="13594"/>
+                  </a:lnTo>
+                  <a:lnTo>
+                    <a:pt x="3104075" y="6827"/>
+                  </a:lnTo>
+                  <a:lnTo>
+                    <a:pt x="3033528" y="0"/>
+                  </a:lnTo>
+                  <a:lnTo>
+                    <a:pt x="2962981" y="20482"/>
+                  </a:lnTo>
+                  <a:lnTo>
+                    <a:pt x="2892434" y="58680"/>
+                  </a:lnTo>
+                  <a:lnTo>
+                    <a:pt x="2821886" y="94932"/>
+                  </a:lnTo>
+                  <a:lnTo>
+                    <a:pt x="2751339" y="129340"/>
+                  </a:lnTo>
+                  <a:lnTo>
+                    <a:pt x="2680792" y="161995"/>
+                  </a:lnTo>
+                  <a:lnTo>
+                    <a:pt x="2610245" y="192989"/>
+                  </a:lnTo>
+                  <a:lnTo>
+                    <a:pt x="2539698" y="222404"/>
+                  </a:lnTo>
+                  <a:lnTo>
+                    <a:pt x="2469151" y="250322"/>
+                  </a:lnTo>
+                  <a:lnTo>
+                    <a:pt x="2398603" y="276819"/>
+                  </a:lnTo>
+                  <a:lnTo>
+                    <a:pt x="2328056" y="301967"/>
+                  </a:lnTo>
+                  <a:lnTo>
+                    <a:pt x="2257509" y="325835"/>
+                  </a:lnTo>
+                  <a:lnTo>
+                    <a:pt x="2186962" y="348488"/>
+                  </a:lnTo>
+                  <a:lnTo>
+                    <a:pt x="2116415" y="369988"/>
+                  </a:lnTo>
+                  <a:lnTo>
+                    <a:pt x="2045868" y="390393"/>
+                  </a:lnTo>
+                  <a:lnTo>
+                    <a:pt x="1975320" y="409759"/>
+                  </a:lnTo>
+                  <a:lnTo>
+                    <a:pt x="1904773" y="428140"/>
+                  </a:lnTo>
+                  <a:lnTo>
+                    <a:pt x="1834226" y="445585"/>
+                  </a:lnTo>
+                  <a:lnTo>
+                    <a:pt x="1763679" y="462141"/>
+                  </a:lnTo>
+                  <a:lnTo>
+                    <a:pt x="1693132" y="477855"/>
+                  </a:lnTo>
+                  <a:lnTo>
+                    <a:pt x="1622584" y="492769"/>
+                  </a:lnTo>
+                  <a:lnTo>
+                    <a:pt x="1552037" y="506924"/>
+                  </a:lnTo>
+                  <a:lnTo>
+                    <a:pt x="1481490" y="520358"/>
+                  </a:lnTo>
+                  <a:lnTo>
+                    <a:pt x="1410943" y="533109"/>
+                  </a:lnTo>
+                  <a:lnTo>
+                    <a:pt x="1340396" y="545210"/>
+                  </a:lnTo>
+                  <a:lnTo>
+                    <a:pt x="1269849" y="556695"/>
+                  </a:lnTo>
+                  <a:lnTo>
+                    <a:pt x="1199301" y="567596"/>
+                  </a:lnTo>
+                  <a:lnTo>
+                    <a:pt x="1128754" y="577941"/>
+                  </a:lnTo>
+                  <a:lnTo>
+                    <a:pt x="1058207" y="587760"/>
+                  </a:lnTo>
+                  <a:lnTo>
+                    <a:pt x="987660" y="597079"/>
+                  </a:lnTo>
+                  <a:lnTo>
+                    <a:pt x="917113" y="605924"/>
+                  </a:lnTo>
+                  <a:lnTo>
+                    <a:pt x="846566" y="614319"/>
+                  </a:lnTo>
+                  <a:lnTo>
+                    <a:pt x="776018" y="622286"/>
+                  </a:lnTo>
+                  <a:lnTo>
+                    <a:pt x="705471" y="629847"/>
+                  </a:lnTo>
+                  <a:lnTo>
+                    <a:pt x="634924" y="637024"/>
+                  </a:lnTo>
+                  <a:lnTo>
+                    <a:pt x="564377" y="643835"/>
+                  </a:lnTo>
+                  <a:lnTo>
+                    <a:pt x="493830" y="650300"/>
+                  </a:lnTo>
+                  <a:lnTo>
+                    <a:pt x="423283" y="656435"/>
+                  </a:lnTo>
+                  <a:lnTo>
+                    <a:pt x="352735" y="662258"/>
+                  </a:lnTo>
+                  <a:lnTo>
+                    <a:pt x="282188" y="667785"/>
+                  </a:lnTo>
+                  <a:lnTo>
+                    <a:pt x="211641" y="673030"/>
+                  </a:lnTo>
+                  <a:lnTo>
+                    <a:pt x="141094" y="678009"/>
+                  </a:lnTo>
+                  <a:lnTo>
+                    <a:pt x="70547" y="682733"/>
+                  </a:lnTo>
+                  <a:lnTo>
+                    <a:pt x="0" y="687218"/>
                   </a:lnTo>
                 </a:path>
               </a:pathLst>
@@ -4247,312 +4247,312 @@
           </p:nvSpPr>
           <p:spPr>
             <a:xfrm>
-              <a:off x="1172049" y="2739779"/>
-              <a:ext cx="7090630" cy="2487931"/>
+              <a:off x="1264853" y="2830627"/>
+              <a:ext cx="6984170" cy="2320577"/>
             </a:xfrm>
             <a:custGeom>
               <a:avLst/>
               <a:pathLst>
-                <a:path w="7090630" h="2487931">
+                <a:path w="6984170" h="2320577">
                   <a:moveTo>
-                    <a:pt x="0" y="2487931"/>
+                    <a:pt x="0" y="2320577"/>
                   </a:moveTo>
                   <a:lnTo>
-                    <a:pt x="71622" y="2480710"/>
-                  </a:lnTo>
-                  <a:lnTo>
-                    <a:pt x="143245" y="2473330"/>
-                  </a:lnTo>
-                  <a:lnTo>
-                    <a:pt x="214867" y="2465790"/>
-                  </a:lnTo>
-                  <a:lnTo>
-                    <a:pt x="286490" y="2458083"/>
-                  </a:lnTo>
-                  <a:lnTo>
-                    <a:pt x="358112" y="2450208"/>
-                  </a:lnTo>
-                  <a:lnTo>
-                    <a:pt x="429735" y="2442161"/>
-                  </a:lnTo>
-                  <a:lnTo>
-                    <a:pt x="501357" y="2433937"/>
-                  </a:lnTo>
-                  <a:lnTo>
-                    <a:pt x="572980" y="2425533"/>
-                  </a:lnTo>
-                  <a:lnTo>
-                    <a:pt x="644602" y="2416944"/>
-                  </a:lnTo>
-                  <a:lnTo>
-                    <a:pt x="716225" y="2408168"/>
-                  </a:lnTo>
-                  <a:lnTo>
-                    <a:pt x="787847" y="2399199"/>
-                  </a:lnTo>
-                  <a:lnTo>
-                    <a:pt x="859470" y="2390034"/>
-                  </a:lnTo>
-                  <a:lnTo>
-                    <a:pt x="931092" y="2380668"/>
-                  </a:lnTo>
-                  <a:lnTo>
-                    <a:pt x="1002715" y="2371096"/>
-                  </a:lnTo>
-                  <a:lnTo>
-                    <a:pt x="1074337" y="2361315"/>
-                  </a:lnTo>
-                  <a:lnTo>
-                    <a:pt x="1145960" y="2351320"/>
-                  </a:lnTo>
-                  <a:lnTo>
-                    <a:pt x="1217582" y="2341105"/>
-                  </a:lnTo>
-                  <a:lnTo>
-                    <a:pt x="1289205" y="2330667"/>
-                  </a:lnTo>
-                  <a:lnTo>
-                    <a:pt x="1360827" y="2320000"/>
-                  </a:lnTo>
-                  <a:lnTo>
-                    <a:pt x="1432450" y="2309099"/>
-                  </a:lnTo>
-                  <a:lnTo>
-                    <a:pt x="1504073" y="2297960"/>
-                  </a:lnTo>
-                  <a:lnTo>
-                    <a:pt x="1575695" y="2286576"/>
-                  </a:lnTo>
-                  <a:lnTo>
-                    <a:pt x="1647318" y="2274943"/>
-                  </a:lnTo>
-                  <a:lnTo>
-                    <a:pt x="1718940" y="2263055"/>
-                  </a:lnTo>
-                  <a:lnTo>
-                    <a:pt x="1790563" y="2250906"/>
-                  </a:lnTo>
-                  <a:lnTo>
-                    <a:pt x="1862185" y="2238491"/>
-                  </a:lnTo>
-                  <a:lnTo>
-                    <a:pt x="1933808" y="2225805"/>
-                  </a:lnTo>
-                  <a:lnTo>
-                    <a:pt x="2005430" y="2212840"/>
-                  </a:lnTo>
-                  <a:lnTo>
-                    <a:pt x="2077053" y="2199591"/>
-                  </a:lnTo>
-                  <a:lnTo>
-                    <a:pt x="2148675" y="2186052"/>
-                  </a:lnTo>
-                  <a:lnTo>
-                    <a:pt x="2220298" y="2172216"/>
-                  </a:lnTo>
-                  <a:lnTo>
-                    <a:pt x="2291920" y="2158077"/>
-                  </a:lnTo>
-                  <a:lnTo>
-                    <a:pt x="2363543" y="2143628"/>
-                  </a:lnTo>
-                  <a:lnTo>
-                    <a:pt x="2435165" y="2128863"/>
-                  </a:lnTo>
-                  <a:lnTo>
-                    <a:pt x="2506788" y="2113774"/>
-                  </a:lnTo>
-                  <a:lnTo>
-                    <a:pt x="2578410" y="2098354"/>
-                  </a:lnTo>
-                  <a:lnTo>
-                    <a:pt x="2650033" y="2082596"/>
-                  </a:lnTo>
-                  <a:lnTo>
-                    <a:pt x="2721655" y="2066493"/>
-                  </a:lnTo>
-                  <a:lnTo>
-                    <a:pt x="2793278" y="2050038"/>
-                  </a:lnTo>
-                  <a:lnTo>
-                    <a:pt x="2864901" y="2033222"/>
-                  </a:lnTo>
-                  <a:lnTo>
-                    <a:pt x="2936523" y="2016037"/>
-                  </a:lnTo>
-                  <a:lnTo>
-                    <a:pt x="3008146" y="1998475"/>
-                  </a:lnTo>
-                  <a:lnTo>
-                    <a:pt x="3079768" y="1980529"/>
-                  </a:lnTo>
-                  <a:lnTo>
-                    <a:pt x="3151391" y="1962190"/>
-                  </a:lnTo>
-                  <a:lnTo>
-                    <a:pt x="3223013" y="1943449"/>
-                  </a:lnTo>
-                  <a:lnTo>
-                    <a:pt x="3294636" y="1924297"/>
-                  </a:lnTo>
-                  <a:lnTo>
-                    <a:pt x="3366258" y="1904725"/>
-                  </a:lnTo>
-                  <a:lnTo>
-                    <a:pt x="3437881" y="1884725"/>
-                  </a:lnTo>
-                  <a:lnTo>
-                    <a:pt x="3509503" y="1864286"/>
-                  </a:lnTo>
-                  <a:lnTo>
-                    <a:pt x="3581126" y="1843400"/>
-                  </a:lnTo>
-                  <a:lnTo>
-                    <a:pt x="3652748" y="1822056"/>
-                  </a:lnTo>
-                  <a:lnTo>
-                    <a:pt x="3724371" y="1800244"/>
-                  </a:lnTo>
-                  <a:lnTo>
-                    <a:pt x="3795993" y="1777954"/>
-                  </a:lnTo>
-                  <a:lnTo>
-                    <a:pt x="3867616" y="1755176"/>
-                  </a:lnTo>
-                  <a:lnTo>
-                    <a:pt x="3939238" y="1731898"/>
-                  </a:lnTo>
-                  <a:lnTo>
-                    <a:pt x="4010861" y="1708111"/>
-                  </a:lnTo>
-                  <a:lnTo>
-                    <a:pt x="4082483" y="1683802"/>
-                  </a:lnTo>
-                  <a:lnTo>
-                    <a:pt x="4154106" y="1658961"/>
-                  </a:lnTo>
-                  <a:lnTo>
-                    <a:pt x="4225729" y="1633575"/>
-                  </a:lnTo>
-                  <a:lnTo>
-                    <a:pt x="4297351" y="1607633"/>
-                  </a:lnTo>
-                  <a:lnTo>
-                    <a:pt x="4368974" y="1581123"/>
-                  </a:lnTo>
-                  <a:lnTo>
-                    <a:pt x="4440596" y="1554031"/>
-                  </a:lnTo>
-                  <a:lnTo>
-                    <a:pt x="4512219" y="1526346"/>
-                  </a:lnTo>
-                  <a:lnTo>
-                    <a:pt x="4583841" y="1498055"/>
-                  </a:lnTo>
-                  <a:lnTo>
-                    <a:pt x="4655464" y="1469143"/>
-                  </a:lnTo>
-                  <a:lnTo>
-                    <a:pt x="4727086" y="1439598"/>
-                  </a:lnTo>
-                  <a:lnTo>
-                    <a:pt x="4798709" y="1409406"/>
-                  </a:lnTo>
-                  <a:lnTo>
-                    <a:pt x="4870331" y="1378552"/>
-                  </a:lnTo>
-                  <a:lnTo>
-                    <a:pt x="4941954" y="1347022"/>
-                  </a:lnTo>
-                  <a:lnTo>
-                    <a:pt x="5013576" y="1314801"/>
-                  </a:lnTo>
-                  <a:lnTo>
-                    <a:pt x="5085199" y="1281874"/>
-                  </a:lnTo>
-                  <a:lnTo>
-                    <a:pt x="5156821" y="1248225"/>
-                  </a:lnTo>
-                  <a:lnTo>
-                    <a:pt x="5228444" y="1213839"/>
-                  </a:lnTo>
-                  <a:lnTo>
-                    <a:pt x="5300066" y="1178700"/>
-                  </a:lnTo>
-                  <a:lnTo>
-                    <a:pt x="5371689" y="1142791"/>
-                  </a:lnTo>
-                  <a:lnTo>
-                    <a:pt x="5443311" y="1106094"/>
-                  </a:lnTo>
-                  <a:lnTo>
-                    <a:pt x="5514934" y="1068594"/>
-                  </a:lnTo>
-                  <a:lnTo>
-                    <a:pt x="5586557" y="1030272"/>
-                  </a:lnTo>
-                  <a:lnTo>
-                    <a:pt x="5658179" y="991110"/>
-                  </a:lnTo>
-                  <a:lnTo>
-                    <a:pt x="5729802" y="951091"/>
-                  </a:lnTo>
-                  <a:lnTo>
-                    <a:pt x="5801424" y="910194"/>
-                  </a:lnTo>
-                  <a:lnTo>
-                    <a:pt x="5873047" y="868401"/>
-                  </a:lnTo>
-                  <a:lnTo>
-                    <a:pt x="5944669" y="825692"/>
-                  </a:lnTo>
-                  <a:lnTo>
-                    <a:pt x="6016292" y="782048"/>
-                  </a:lnTo>
-                  <a:lnTo>
-                    <a:pt x="6087914" y="737447"/>
-                  </a:lnTo>
-                  <a:lnTo>
-                    <a:pt x="6159537" y="691868"/>
-                  </a:lnTo>
-                  <a:lnTo>
-                    <a:pt x="6231159" y="645291"/>
-                  </a:lnTo>
-                  <a:lnTo>
-                    <a:pt x="6302782" y="597694"/>
-                  </a:lnTo>
-                  <a:lnTo>
-                    <a:pt x="6374404" y="549053"/>
-                  </a:lnTo>
-                  <a:lnTo>
-                    <a:pt x="6446027" y="499347"/>
-                  </a:lnTo>
-                  <a:lnTo>
-                    <a:pt x="6517649" y="448551"/>
-                  </a:lnTo>
-                  <a:lnTo>
-                    <a:pt x="6589272" y="396643"/>
-                  </a:lnTo>
-                  <a:lnTo>
-                    <a:pt x="6660894" y="343597"/>
-                  </a:lnTo>
-                  <a:lnTo>
-                    <a:pt x="6732517" y="289388"/>
-                  </a:lnTo>
-                  <a:lnTo>
-                    <a:pt x="6804139" y="233992"/>
-                  </a:lnTo>
-                  <a:lnTo>
-                    <a:pt x="6875762" y="177382"/>
-                  </a:lnTo>
-                  <a:lnTo>
-                    <a:pt x="6947385" y="119531"/>
-                  </a:lnTo>
-                  <a:lnTo>
-                    <a:pt x="7019007" y="60413"/>
-                  </a:lnTo>
-                  <a:lnTo>
-                    <a:pt x="7090630" y="0"/>
+                    <a:pt x="70547" y="2313841"/>
+                  </a:lnTo>
+                  <a:lnTo>
+                    <a:pt x="141094" y="2306959"/>
+                  </a:lnTo>
+                  <a:lnTo>
+                    <a:pt x="211641" y="2299925"/>
+                  </a:lnTo>
+                  <a:lnTo>
+                    <a:pt x="282188" y="2292737"/>
+                  </a:lnTo>
+                  <a:lnTo>
+                    <a:pt x="352735" y="2285392"/>
+                  </a:lnTo>
+                  <a:lnTo>
+                    <a:pt x="423283" y="2277886"/>
+                  </a:lnTo>
+                  <a:lnTo>
+                    <a:pt x="493830" y="2270215"/>
+                  </a:lnTo>
+                  <a:lnTo>
+                    <a:pt x="564377" y="2262376"/>
+                  </a:lnTo>
+                  <a:lnTo>
+                    <a:pt x="634924" y="2254365"/>
+                  </a:lnTo>
+                  <a:lnTo>
+                    <a:pt x="705471" y="2246179"/>
+                  </a:lnTo>
+                  <a:lnTo>
+                    <a:pt x="776018" y="2237814"/>
+                  </a:lnTo>
+                  <a:lnTo>
+                    <a:pt x="846566" y="2229265"/>
+                  </a:lnTo>
+                  <a:lnTo>
+                    <a:pt x="917113" y="2220529"/>
+                  </a:lnTo>
+                  <a:lnTo>
+                    <a:pt x="987660" y="2211601"/>
+                  </a:lnTo>
+                  <a:lnTo>
+                    <a:pt x="1058207" y="2202478"/>
+                  </a:lnTo>
+                  <a:lnTo>
+                    <a:pt x="1128754" y="2193155"/>
+                  </a:lnTo>
+                  <a:lnTo>
+                    <a:pt x="1199301" y="2183628"/>
+                  </a:lnTo>
+                  <a:lnTo>
+                    <a:pt x="1269849" y="2173892"/>
+                  </a:lnTo>
+                  <a:lnTo>
+                    <a:pt x="1340396" y="2163942"/>
+                  </a:lnTo>
+                  <a:lnTo>
+                    <a:pt x="1410943" y="2153775"/>
+                  </a:lnTo>
+                  <a:lnTo>
+                    <a:pt x="1481490" y="2143384"/>
+                  </a:lnTo>
+                  <a:lnTo>
+                    <a:pt x="1552037" y="2132766"/>
+                  </a:lnTo>
+                  <a:lnTo>
+                    <a:pt x="1622584" y="2121916"/>
+                  </a:lnTo>
+                  <a:lnTo>
+                    <a:pt x="1693132" y="2110827"/>
+                  </a:lnTo>
+                  <a:lnTo>
+                    <a:pt x="1763679" y="2099496"/>
+                  </a:lnTo>
+                  <a:lnTo>
+                    <a:pt x="1834226" y="2087916"/>
+                  </a:lnTo>
+                  <a:lnTo>
+                    <a:pt x="1904773" y="2076083"/>
+                  </a:lnTo>
+                  <a:lnTo>
+                    <a:pt x="1975320" y="2063990"/>
+                  </a:lnTo>
+                  <a:lnTo>
+                    <a:pt x="2045868" y="2051633"/>
+                  </a:lnTo>
+                  <a:lnTo>
+                    <a:pt x="2116415" y="2039004"/>
+                  </a:lnTo>
+                  <a:lnTo>
+                    <a:pt x="2186962" y="2026099"/>
+                  </a:lnTo>
+                  <a:lnTo>
+                    <a:pt x="2257509" y="2012911"/>
+                  </a:lnTo>
+                  <a:lnTo>
+                    <a:pt x="2328056" y="1999434"/>
+                  </a:lnTo>
+                  <a:lnTo>
+                    <a:pt x="2398603" y="1985662"/>
+                  </a:lnTo>
+                  <a:lnTo>
+                    <a:pt x="2469151" y="1971588"/>
+                  </a:lnTo>
+                  <a:lnTo>
+                    <a:pt x="2539698" y="1957205"/>
+                  </a:lnTo>
+                  <a:lnTo>
+                    <a:pt x="2610245" y="1942508"/>
+                  </a:lnTo>
+                  <a:lnTo>
+                    <a:pt x="2680792" y="1927488"/>
+                  </a:lnTo>
+                  <a:lnTo>
+                    <a:pt x="2751339" y="1912139"/>
+                  </a:lnTo>
+                  <a:lnTo>
+                    <a:pt x="2821886" y="1896454"/>
+                  </a:lnTo>
+                  <a:lnTo>
+                    <a:pt x="2892434" y="1880425"/>
+                  </a:lnTo>
+                  <a:lnTo>
+                    <a:pt x="2962981" y="1864045"/>
+                  </a:lnTo>
+                  <a:lnTo>
+                    <a:pt x="3033528" y="1847306"/>
+                  </a:lnTo>
+                  <a:lnTo>
+                    <a:pt x="3104075" y="1830201"/>
+                  </a:lnTo>
+                  <a:lnTo>
+                    <a:pt x="3174622" y="1812720"/>
+                  </a:lnTo>
+                  <a:lnTo>
+                    <a:pt x="3245169" y="1794857"/>
+                  </a:lnTo>
+                  <a:lnTo>
+                    <a:pt x="3315717" y="1776601"/>
+                  </a:lnTo>
+                  <a:lnTo>
+                    <a:pt x="3386264" y="1757946"/>
+                  </a:lnTo>
+                  <a:lnTo>
+                    <a:pt x="3456811" y="1738883"/>
+                  </a:lnTo>
+                  <a:lnTo>
+                    <a:pt x="3527358" y="1719401"/>
+                  </a:lnTo>
+                  <a:lnTo>
+                    <a:pt x="3597905" y="1699493"/>
+                  </a:lnTo>
+                  <a:lnTo>
+                    <a:pt x="3668452" y="1679148"/>
+                  </a:lnTo>
+                  <a:lnTo>
+                    <a:pt x="3739000" y="1658357"/>
+                  </a:lnTo>
+                  <a:lnTo>
+                    <a:pt x="3809547" y="1637111"/>
+                  </a:lnTo>
+                  <a:lnTo>
+                    <a:pt x="3880094" y="1615400"/>
+                  </a:lnTo>
+                  <a:lnTo>
+                    <a:pt x="3950641" y="1593212"/>
+                  </a:lnTo>
+                  <a:lnTo>
+                    <a:pt x="4021188" y="1570539"/>
+                  </a:lnTo>
+                  <a:lnTo>
+                    <a:pt x="4091736" y="1547369"/>
+                  </a:lnTo>
+                  <a:lnTo>
+                    <a:pt x="4162283" y="1523690"/>
+                  </a:lnTo>
+                  <a:lnTo>
+                    <a:pt x="4232830" y="1499494"/>
+                  </a:lnTo>
+                  <a:lnTo>
+                    <a:pt x="4303377" y="1474766"/>
+                  </a:lnTo>
+                  <a:lnTo>
+                    <a:pt x="4373924" y="1449497"/>
+                  </a:lnTo>
+                  <a:lnTo>
+                    <a:pt x="4444471" y="1423675"/>
+                  </a:lnTo>
+                  <a:lnTo>
+                    <a:pt x="4515019" y="1397286"/>
+                  </a:lnTo>
+                  <a:lnTo>
+                    <a:pt x="4585566" y="1370319"/>
+                  </a:lnTo>
+                  <a:lnTo>
+                    <a:pt x="4656113" y="1342762"/>
+                  </a:lnTo>
+                  <a:lnTo>
+                    <a:pt x="4726660" y="1314600"/>
+                  </a:lnTo>
+                  <a:lnTo>
+                    <a:pt x="4797207" y="1285822"/>
+                  </a:lnTo>
+                  <a:lnTo>
+                    <a:pt x="4867754" y="1256413"/>
+                  </a:lnTo>
+                  <a:lnTo>
+                    <a:pt x="4938302" y="1226359"/>
+                  </a:lnTo>
+                  <a:lnTo>
+                    <a:pt x="5008849" y="1195647"/>
+                  </a:lnTo>
+                  <a:lnTo>
+                    <a:pt x="5079396" y="1164262"/>
+                  </a:lnTo>
+                  <a:lnTo>
+                    <a:pt x="5149943" y="1132189"/>
+                  </a:lnTo>
+                  <a:lnTo>
+                    <a:pt x="5220490" y="1099413"/>
+                  </a:lnTo>
+                  <a:lnTo>
+                    <a:pt x="5291037" y="1065919"/>
+                  </a:lnTo>
+                  <a:lnTo>
+                    <a:pt x="5361585" y="1031692"/>
+                  </a:lnTo>
+                  <a:lnTo>
+                    <a:pt x="5432132" y="996714"/>
+                  </a:lnTo>
+                  <a:lnTo>
+                    <a:pt x="5502679" y="960970"/>
+                  </a:lnTo>
+                  <a:lnTo>
+                    <a:pt x="5573226" y="924442"/>
+                  </a:lnTo>
+                  <a:lnTo>
+                    <a:pt x="5643773" y="887114"/>
+                  </a:lnTo>
+                  <a:lnTo>
+                    <a:pt x="5714320" y="848968"/>
+                  </a:lnTo>
+                  <a:lnTo>
+                    <a:pt x="5784868" y="809987"/>
+                  </a:lnTo>
+                  <a:lnTo>
+                    <a:pt x="5855415" y="770151"/>
+                  </a:lnTo>
+                  <a:lnTo>
+                    <a:pt x="5925962" y="729442"/>
+                  </a:lnTo>
+                  <a:lnTo>
+                    <a:pt x="5996509" y="687841"/>
+                  </a:lnTo>
+                  <a:lnTo>
+                    <a:pt x="6067056" y="645329"/>
+                  </a:lnTo>
+                  <a:lnTo>
+                    <a:pt x="6137604" y="601885"/>
+                  </a:lnTo>
+                  <a:lnTo>
+                    <a:pt x="6208151" y="557489"/>
+                  </a:lnTo>
+                  <a:lnTo>
+                    <a:pt x="6278698" y="512120"/>
+                  </a:lnTo>
+                  <a:lnTo>
+                    <a:pt x="6349245" y="465758"/>
+                  </a:lnTo>
+                  <a:lnTo>
+                    <a:pt x="6419792" y="418379"/>
+                  </a:lnTo>
+                  <a:lnTo>
+                    <a:pt x="6490339" y="369962"/>
+                  </a:lnTo>
+                  <a:lnTo>
+                    <a:pt x="6560887" y="320484"/>
+                  </a:lnTo>
+                  <a:lnTo>
+                    <a:pt x="6631434" y="269922"/>
+                  </a:lnTo>
+                  <a:lnTo>
+                    <a:pt x="6701981" y="218252"/>
+                  </a:lnTo>
+                  <a:lnTo>
+                    <a:pt x="6772528" y="165450"/>
+                  </a:lnTo>
+                  <a:lnTo>
+                    <a:pt x="6843075" y="111491"/>
+                  </a:lnTo>
+                  <a:lnTo>
+                    <a:pt x="6913622" y="56349"/>
+                  </a:lnTo>
+                  <a:lnTo>
+                    <a:pt x="6984170" y="0"/>
                   </a:lnTo>
                 </a:path>
               </a:pathLst>
@@ -4581,21 +4581,21 @@
           </p:nvSpPr>
           <p:spPr>
             <a:xfrm>
-              <a:off x="817517" y="4727786"/>
-              <a:ext cx="7799693" cy="0"/>
+              <a:off x="915645" y="4684908"/>
+              <a:ext cx="7682587" cy="0"/>
             </a:xfrm>
             <a:custGeom>
               <a:avLst/>
               <a:pathLst>
-                <a:path w="7799693" h="0">
+                <a:path w="7682587" h="0">
                   <a:moveTo>
                     <a:pt x="0" y="0"/>
                   </a:moveTo>
                   <a:lnTo>
-                    <a:pt x="7799693" y="0"/>
-                  </a:lnTo>
-                  <a:lnTo>
-                    <a:pt x="7799693" y="0"/>
+                    <a:pt x="7682587" y="0"/>
+                  </a:lnTo>
+                  <a:lnTo>
+                    <a:pt x="7682587" y="0"/>
                   </a:lnTo>
                 </a:path>
               </a:pathLst>
@@ -4624,15 +4624,15 @@
           </p:nvSpPr>
           <p:spPr>
             <a:xfrm>
-              <a:off x="4222163" y="2073503"/>
-              <a:ext cx="0" cy="3649639"/>
+              <a:off x="4269172" y="2209169"/>
+              <a:ext cx="0" cy="3404141"/>
             </a:xfrm>
             <a:custGeom>
               <a:avLst/>
               <a:pathLst>
-                <a:path w="0" h="3649639">
+                <a:path w="0" h="3404141">
                   <a:moveTo>
-                    <a:pt x="0" y="3649639"/>
+                    <a:pt x="0" y="3404141"/>
                   </a:moveTo>
                   <a:lnTo>
                     <a:pt x="0" y="0"/>
@@ -4667,8 +4667,8 @@
           </p:nvSpPr>
           <p:spPr>
             <a:xfrm>
-              <a:off x="692708" y="5517199"/>
-              <a:ext cx="62179" cy="80101"/>
+              <a:off x="756929" y="5407599"/>
+              <a:ext cx="79004" cy="101955"/>
             </a:xfrm>
             <a:prstGeom prst="rect">
               <a:avLst/>
@@ -4681,7 +4681,7 @@
             <a:p>
               <a:pPr algn="l" marL="0" marR="0" indent="0">
                 <a:lnSpc>
-                  <a:spcPts val="880"/>
+                  <a:spcPts val="1120"/>
                 </a:lnSpc>
                 <a:spcBef>
                   <a:spcPts val="0"/>
@@ -4691,7 +4691,7 @@
                 </a:spcAft>
               </a:pPr>
               <a:r>
-                <a:rPr sz="880">
+                <a:rPr sz="1120">
                   <a:solidFill>
                     <a:srgbClr val="4D4D4D">
                       <a:alpha val="100000"/>
@@ -4713,8 +4713,8 @@
           </p:nvSpPr>
           <p:spPr>
             <a:xfrm>
-              <a:off x="692708" y="4687735"/>
-              <a:ext cx="62179" cy="80101"/>
+              <a:off x="756929" y="4633931"/>
+              <a:ext cx="79004" cy="101955"/>
             </a:xfrm>
             <a:prstGeom prst="rect">
               <a:avLst/>
@@ -4727,7 +4727,7 @@
             <a:p>
               <a:pPr algn="l" marL="0" marR="0" indent="0">
                 <a:lnSpc>
-                  <a:spcPts val="880"/>
+                  <a:spcPts val="1120"/>
                 </a:lnSpc>
                 <a:spcBef>
                   <a:spcPts val="0"/>
@@ -4737,7 +4737,7 @@
                 </a:spcAft>
               </a:pPr>
               <a:r>
-                <a:rPr sz="880">
+                <a:rPr sz="1120">
                   <a:solidFill>
                     <a:srgbClr val="4D4D4D">
                       <a:alpha val="100000"/>
@@ -4759,8 +4759,8 @@
           </p:nvSpPr>
           <p:spPr>
             <a:xfrm>
-              <a:off x="692708" y="3858272"/>
-              <a:ext cx="62179" cy="80101"/>
+              <a:off x="756929" y="3860262"/>
+              <a:ext cx="79004" cy="101955"/>
             </a:xfrm>
             <a:prstGeom prst="rect">
               <a:avLst/>
@@ -4773,7 +4773,7 @@
             <a:p>
               <a:pPr algn="l" marL="0" marR="0" indent="0">
                 <a:lnSpc>
-                  <a:spcPts val="880"/>
+                  <a:spcPts val="1120"/>
                 </a:lnSpc>
                 <a:spcBef>
                   <a:spcPts val="0"/>
@@ -4783,7 +4783,7 @@
                 </a:spcAft>
               </a:pPr>
               <a:r>
-                <a:rPr sz="880">
+                <a:rPr sz="1120">
                   <a:solidFill>
                     <a:srgbClr val="4D4D4D">
                       <a:alpha val="100000"/>
@@ -4805,8 +4805,8 @@
           </p:nvSpPr>
           <p:spPr>
             <a:xfrm>
-              <a:off x="692708" y="3028808"/>
-              <a:ext cx="62179" cy="80101"/>
+              <a:off x="756929" y="3086593"/>
+              <a:ext cx="79004" cy="101955"/>
             </a:xfrm>
             <a:prstGeom prst="rect">
               <a:avLst/>
@@ -4819,7 +4819,7 @@
             <a:p>
               <a:pPr algn="l" marL="0" marR="0" indent="0">
                 <a:lnSpc>
-                  <a:spcPts val="880"/>
+                  <a:spcPts val="1120"/>
                 </a:lnSpc>
                 <a:spcBef>
                   <a:spcPts val="0"/>
@@ -4829,7 +4829,7 @@
                 </a:spcAft>
               </a:pPr>
               <a:r>
-                <a:rPr sz="880">
+                <a:rPr sz="1120">
                   <a:solidFill>
                     <a:srgbClr val="4D4D4D">
                       <a:alpha val="100000"/>
@@ -4851,8 +4851,8 @@
           </p:nvSpPr>
           <p:spPr>
             <a:xfrm>
-              <a:off x="692708" y="2199345"/>
-              <a:ext cx="62179" cy="80101"/>
+              <a:off x="756929" y="2312925"/>
+              <a:ext cx="79004" cy="101955"/>
             </a:xfrm>
             <a:prstGeom prst="rect">
               <a:avLst/>
@@ -4865,7 +4865,7 @@
             <a:p>
               <a:pPr algn="l" marL="0" marR="0" indent="0">
                 <a:lnSpc>
-                  <a:spcPts val="880"/>
+                  <a:spcPts val="1120"/>
                 </a:lnSpc>
                 <a:spcBef>
                   <a:spcPts val="0"/>
@@ -4875,7 +4875,7 @@
                 </a:spcAft>
               </a:pPr>
               <a:r>
-                <a:rPr sz="880">
+                <a:rPr sz="1120">
                   <a:solidFill>
                     <a:srgbClr val="4D4D4D">
                       <a:alpha val="100000"/>
@@ -4897,8 +4897,8 @@
           </p:nvSpPr>
           <p:spPr>
             <a:xfrm>
-              <a:off x="1328653" y="5785772"/>
-              <a:ext cx="223753" cy="80101"/>
+              <a:off x="1387159" y="5693022"/>
+              <a:ext cx="284286" cy="101955"/>
             </a:xfrm>
             <a:prstGeom prst="rect">
               <a:avLst/>
@@ -4911,7 +4911,7 @@
             <a:p>
               <a:pPr algn="l" marL="0" marR="0" indent="0">
                 <a:lnSpc>
-                  <a:spcPts val="880"/>
+                  <a:spcPts val="1120"/>
                 </a:lnSpc>
                 <a:spcBef>
                   <a:spcPts val="0"/>
@@ -4921,7 +4921,7 @@
                 </a:spcAft>
               </a:pPr>
               <a:r>
-                <a:rPr sz="880">
+                <a:rPr sz="1120">
                   <a:solidFill>
                     <a:srgbClr val="4D4D4D">
                       <a:alpha val="100000"/>
@@ -4943,8 +4943,8 @@
           </p:nvSpPr>
           <p:spPr>
             <a:xfrm>
-              <a:off x="2724172" y="5785772"/>
-              <a:ext cx="161574" cy="80101"/>
+              <a:off x="2770605" y="5693022"/>
+              <a:ext cx="205282" cy="101955"/>
             </a:xfrm>
             <a:prstGeom prst="rect">
               <a:avLst/>
@@ -4957,7 +4957,7 @@
             <a:p>
               <a:pPr algn="l" marL="0" marR="0" indent="0">
                 <a:lnSpc>
-                  <a:spcPts val="880"/>
+                  <a:spcPts val="1120"/>
                 </a:lnSpc>
                 <a:spcBef>
                   <a:spcPts val="0"/>
@@ -4967,7 +4967,7 @@
                 </a:spcAft>
               </a:pPr>
               <a:r>
-                <a:rPr sz="880">
+                <a:rPr sz="1120">
                   <a:solidFill>
                     <a:srgbClr val="4D4D4D">
                       <a:alpha val="100000"/>
@@ -4989,8 +4989,8 @@
           </p:nvSpPr>
           <p:spPr>
             <a:xfrm>
-              <a:off x="4138300" y="5785772"/>
-              <a:ext cx="62179" cy="80101"/>
+              <a:off x="4177689" y="5693022"/>
+              <a:ext cx="79004" cy="101955"/>
             </a:xfrm>
             <a:prstGeom prst="rect">
               <a:avLst/>
@@ -5003,7 +5003,7 @@
             <a:p>
               <a:pPr algn="l" marL="0" marR="0" indent="0">
                 <a:lnSpc>
-                  <a:spcPts val="880"/>
+                  <a:spcPts val="1120"/>
                 </a:lnSpc>
                 <a:spcBef>
                   <a:spcPts val="0"/>
@@ -5013,7 +5013,7 @@
                 </a:spcAft>
               </a:pPr>
               <a:r>
-                <a:rPr sz="880">
+                <a:rPr sz="1120">
                   <a:solidFill>
                     <a:srgbClr val="4D4D4D">
                       <a:alpha val="100000"/>
@@ -5035,8 +5035,8 @@
           </p:nvSpPr>
           <p:spPr>
             <a:xfrm>
-              <a:off x="5471640" y="5785772"/>
-              <a:ext cx="124358" cy="80101"/>
+              <a:off x="5482131" y="5693022"/>
+              <a:ext cx="158008" cy="101955"/>
             </a:xfrm>
             <a:prstGeom prst="rect">
               <a:avLst/>
@@ -5049,7 +5049,7 @@
             <a:p>
               <a:pPr algn="l" marL="0" marR="0" indent="0">
                 <a:lnSpc>
-                  <a:spcPts val="880"/>
+                  <a:spcPts val="1120"/>
                 </a:lnSpc>
                 <a:spcBef>
                   <a:spcPts val="0"/>
@@ -5059,7 +5059,7 @@
                 </a:spcAft>
               </a:pPr>
               <a:r>
-                <a:rPr sz="880">
+                <a:rPr sz="1120">
                   <a:solidFill>
                     <a:srgbClr val="4D4D4D">
                       <a:alpha val="100000"/>
@@ -5081,8 +5081,8 @@
           </p:nvSpPr>
           <p:spPr>
             <a:xfrm>
-              <a:off x="6804980" y="5785772"/>
-              <a:ext cx="186537" cy="80101"/>
+              <a:off x="6786573" y="5693022"/>
+              <a:ext cx="237012" cy="101955"/>
             </a:xfrm>
             <a:prstGeom prst="rect">
               <a:avLst/>
@@ -5095,7 +5095,7 @@
             <a:p>
               <a:pPr algn="l" marL="0" marR="0" indent="0">
                 <a:lnSpc>
-                  <a:spcPts val="880"/>
+                  <a:spcPts val="1120"/>
                 </a:lnSpc>
                 <a:spcBef>
                   <a:spcPts val="0"/>
@@ -5105,7 +5105,7 @@
                 </a:spcAft>
               </a:pPr>
               <a:r>
-                <a:rPr sz="880">
+                <a:rPr sz="1120">
                   <a:solidFill>
                     <a:srgbClr val="4D4D4D">
                       <a:alpha val="100000"/>
@@ -5127,8 +5127,8 @@
           </p:nvSpPr>
           <p:spPr>
             <a:xfrm>
-              <a:off x="8169410" y="5785772"/>
-              <a:ext cx="186537" cy="80101"/>
+              <a:off x="8130517" y="5693022"/>
+              <a:ext cx="237012" cy="101955"/>
             </a:xfrm>
             <a:prstGeom prst="rect">
               <a:avLst/>
@@ -5141,7 +5141,7 @@
             <a:p>
               <a:pPr algn="l" marL="0" marR="0" indent="0">
                 <a:lnSpc>
-                  <a:spcPts val="880"/>
+                  <a:spcPts val="1120"/>
                 </a:lnSpc>
                 <a:spcBef>
                   <a:spcPts val="0"/>
@@ -5151,7 +5151,7 @@
                 </a:spcAft>
               </a:pPr>
               <a:r>
-                <a:rPr sz="880">
+                <a:rPr sz="1120">
                   <a:solidFill>
                     <a:srgbClr val="4D4D4D">
                       <a:alpha val="100000"/>
@@ -5173,8 +5173,8 @@
           </p:nvSpPr>
           <p:spPr>
             <a:xfrm>
-              <a:off x="3987536" y="5925448"/>
-              <a:ext cx="1459656" cy="100218"/>
+              <a:off x="3828319" y="5870717"/>
+              <a:ext cx="1857237" cy="127558"/>
             </a:xfrm>
             <a:prstGeom prst="rect">
               <a:avLst/>
@@ -5187,7 +5187,7 @@
             <a:p>
               <a:pPr algn="l" marL="0" marR="0" indent="0">
                 <a:lnSpc>
-                  <a:spcPts val="1100"/>
+                  <a:spcPts val="1400"/>
                 </a:lnSpc>
                 <a:spcBef>
                   <a:spcPts val="0"/>
@@ -5197,7 +5197,7 @@
                 </a:spcAft>
               </a:pPr>
               <a:r>
-                <a:rPr sz="1100">
+                <a:rPr sz="1400">
                   <a:solidFill>
                     <a:srgbClr val="000000">
                       <a:alpha val="100000"/>
@@ -5219,8 +5219,8 @@
           </p:nvSpPr>
           <p:spPr>
             <a:xfrm rot="-5400000">
-              <a:off x="68446" y="3848213"/>
-              <a:ext cx="1016904" cy="100218"/>
+              <a:off x="-37527" y="3847460"/>
+              <a:ext cx="1294150" cy="127558"/>
             </a:xfrm>
             <a:prstGeom prst="rect">
               <a:avLst/>
@@ -5233,7 +5233,7 @@
             <a:p>
               <a:pPr algn="l" marL="0" marR="0" indent="0">
                 <a:lnSpc>
-                  <a:spcPts val="1100"/>
+                  <a:spcPts val="1400"/>
                 </a:lnSpc>
                 <a:spcBef>
                   <a:spcPts val="0"/>
@@ -5243,7 +5243,7 @@
                 </a:spcAft>
               </a:pPr>
               <a:r>
-                <a:rPr sz="1100">
+                <a:rPr sz="1400">
                   <a:solidFill>
                     <a:srgbClr val="000000">
                       <a:alpha val="100000"/>
@@ -5265,8 +5265,8 @@
           </p:nvSpPr>
           <p:spPr>
             <a:xfrm>
-              <a:off x="817517" y="1896563"/>
-              <a:ext cx="4433376" cy="82021"/>
+              <a:off x="915645" y="1977589"/>
+              <a:ext cx="5912784" cy="109362"/>
             </a:xfrm>
             <a:prstGeom prst="rect">
               <a:avLst/>
@@ -5279,7 +5279,7 @@
             <a:p>
               <a:pPr algn="l" marL="0" marR="0" indent="0">
                 <a:lnSpc>
-                  <a:spcPts val="900"/>
+                  <a:spcPts val="1200"/>
                 </a:lnSpc>
                 <a:spcBef>
                   <a:spcPts val="0"/>
@@ -5289,7 +5289,7 @@
                 </a:spcAft>
               </a:pPr>
               <a:r>
-                <a:rPr sz="900">
+                <a:rPr sz="1200">
                   <a:solidFill>
                     <a:srgbClr val="404040">
                       <a:alpha val="100000"/>
@@ -5311,8 +5311,8 @@
           </p:nvSpPr>
           <p:spPr>
             <a:xfrm>
-              <a:off x="817517" y="1669789"/>
-              <a:ext cx="1982876" cy="120152"/>
+              <a:off x="915645" y="1688767"/>
+              <a:ext cx="2524749" cy="153070"/>
             </a:xfrm>
             <a:prstGeom prst="rect">
               <a:avLst/>
@@ -5325,7 +5325,7 @@
             <a:p>
               <a:pPr algn="l" marL="0" marR="0" indent="0">
                 <a:lnSpc>
-                  <a:spcPts val="1320"/>
+                  <a:spcPts val="1680"/>
                 </a:lnSpc>
                 <a:spcBef>
                   <a:spcPts val="0"/>
@@ -5335,7 +5335,7 @@
                 </a:spcAft>
               </a:pPr>
               <a:r>
-                <a:rPr sz="1320">
+                <a:rPr sz="1680">
                   <a:solidFill>
                     <a:srgbClr val="000000">
                       <a:alpha val="100000"/>
